--- a/public/Egy_Nutri_Business_Review_Deck.pptx
+++ b/public/Egy_Nutri_Business_Review_Deck.pptx
@@ -1674,7 +1674,7 @@
             <c:size val="6"/>
             <c:spPr>
               <a:solidFill>
-                <a:srgbClr val="10B981"/>
+                <a:srgbClr val="F59E0B"/>
               </a:solidFill>
               <a:ln w="9525" cap="flat">
                 <a:solidFill>

--- a/public/Egy_Nutri_Business_Review_Deck.pptx
+++ b/public/Egy_Nutri_Business_Review_Deck.pptx
@@ -1554,7 +1554,7 @@
             <c:size val="6"/>
             <c:spPr>
               <a:solidFill>
-                <a:srgbClr val="10B981"/>
+                <a:srgbClr val="F59E0B"/>
               </a:solidFill>
               <a:ln w="9525" cap="flat">
                 <a:solidFill>
@@ -1674,7 +1674,7 @@
             <c:size val="6"/>
             <c:spPr>
               <a:solidFill>
-                <a:srgbClr val="F59E0B"/>
+                <a:srgbClr val="10B981"/>
               </a:solidFill>
               <a:ln w="9525" cap="flat">
                 <a:solidFill>

--- a/public/Egy_Nutri_Business_Review_Deck.pptx
+++ b/public/Egy_Nutri_Business_Review_Deck.pptx
@@ -1554,7 +1554,7 @@
             <c:size val="6"/>
             <c:spPr>
               <a:solidFill>
-                <a:srgbClr val="F59E0B"/>
+                <a:srgbClr val="10B981"/>
               </a:solidFill>
               <a:ln w="9525" cap="flat">
                 <a:solidFill>
@@ -1674,7 +1674,7 @@
             <c:size val="6"/>
             <c:spPr>
               <a:solidFill>
-                <a:srgbClr val="10B981"/>
+                <a:srgbClr val="F59E0B"/>
               </a:solidFill>
               <a:ln w="9525" cap="flat">
                 <a:solidFill>

--- a/public/Egy_Nutri_Business_Review_Deck.pptx
+++ b/public/Egy_Nutri_Business_Review_Deck.pptx
@@ -15,9 +15,10 @@
     <p:sldId id="263" r:id="rId9"/>
     <p:sldId id="264" r:id="rId10"/>
     <p:sldId id="265" r:id="rId11"/>
+    <p:sldId id="266" r:id="rId12"/>
   </p:sldIdLst>
   <p:notesMasterIdLst>
-    <p:notesMasterId r:id="rId12"/>
+    <p:notesMasterId r:id="rId13"/>
   </p:notesMasterIdLst>
   <p:sldSz cx="12192000" cy="6858000"/>
   <p:notesSz cx="6858000" cy="12192000"/>
@@ -235,7 +236,7 @@
                   <c:v>14.37</c:v>
                 </c:pt>
                 <c:pt idx="1">
-                  <c:v>16.13</c:v>
+                  <c:v>16.24</c:v>
                 </c:pt>
                 <c:pt idx="2">
                   <c:v>15.61</c:v>
@@ -475,16 +476,16 @@
                 <c:formatCode>General</c:formatCode>
                 <c:ptCount val="4"/>
                 <c:pt idx="0">
-                  <c:v>1952</c:v>
+                  <c:v>2182</c:v>
                 </c:pt>
                 <c:pt idx="1">
-                  <c:v>3392</c:v>
+                  <c:v>3873</c:v>
                 </c:pt>
                 <c:pt idx="2">
-                  <c:v>4794</c:v>
+                  <c:v>4469</c:v>
                 </c:pt>
                 <c:pt idx="3">
-                  <c:v>7416</c:v>
+                  <c:v>7890</c:v>
                 </c:pt>
               </c:numCache>
             </c:numRef>
@@ -653,16 +654,16 @@
                 <c:formatCode>General</c:formatCode>
                 <c:ptCount val="4"/>
                 <c:pt idx="0">
-                  <c:v>1804</c:v>
+                  <c:v>1774</c:v>
                 </c:pt>
                 <c:pt idx="1">
-                  <c:v>2698</c:v>
+                  <c:v>3019</c:v>
                 </c:pt>
                 <c:pt idx="2">
-                  <c:v>2713</c:v>
+                  <c:v>2767</c:v>
                 </c:pt>
                 <c:pt idx="3">
-                  <c:v>4336</c:v>
+                  <c:v>4551</c:v>
                 </c:pt>
               </c:numCache>
             </c:numRef>
@@ -906,19 +907,19 @@
                 <c:formatCode>General</c:formatCode>
                 <c:ptCount val="5"/>
                 <c:pt idx="0">
-                  <c:v>91</c:v>
+                  <c:v>97</c:v>
                 </c:pt>
                 <c:pt idx="1">
-                  <c:v>1110</c:v>
+                  <c:v>1517</c:v>
                 </c:pt>
                 <c:pt idx="2">
-                  <c:v>684</c:v>
+                  <c:v>834</c:v>
                 </c:pt>
                 <c:pt idx="3">
-                  <c:v>770</c:v>
+                  <c:v>1017</c:v>
                 </c:pt>
                 <c:pt idx="4">
-                  <c:v>485</c:v>
+                  <c:v>435</c:v>
                 </c:pt>
               </c:numCache>
             </c:numRef>
@@ -1096,19 +1097,19 @@
                 <c:formatCode>General</c:formatCode>
                 <c:ptCount val="5"/>
                 <c:pt idx="0">
-                  <c:v>80</c:v>
+                  <c:v>75</c:v>
                 </c:pt>
                 <c:pt idx="1">
-                  <c:v>835</c:v>
+                  <c:v>1119</c:v>
                 </c:pt>
                 <c:pt idx="2">
-                  <c:v>520</c:v>
+                  <c:v>568</c:v>
                 </c:pt>
                 <c:pt idx="3">
-                  <c:v>655</c:v>
+                  <c:v>879</c:v>
                 </c:pt>
                 <c:pt idx="4">
-                  <c:v>482</c:v>
+                  <c:v>407</c:v>
                 </c:pt>
               </c:numCache>
             </c:numRef>
@@ -1447,19 +1448,19 @@
                 <c:formatCode>General</c:formatCode>
                 <c:ptCount val="5"/>
                 <c:pt idx="0">
-                  <c:v>7416</c:v>
+                  <c:v>7890</c:v>
                 </c:pt>
                 <c:pt idx="1">
-                  <c:v>4794</c:v>
+                  <c:v>4469</c:v>
                 </c:pt>
                 <c:pt idx="2">
-                  <c:v>3392</c:v>
+                  <c:v>3873</c:v>
                 </c:pt>
                 <c:pt idx="3">
-                  <c:v>1952</c:v>
+                  <c:v>2182</c:v>
                 </c:pt>
                 <c:pt idx="4">
-                  <c:v>3744</c:v>
+                  <c:v>4413</c:v>
                 </c:pt>
               </c:numCache>
             </c:numRef>
@@ -1598,19 +1599,19 @@
                 <c:formatCode>General</c:formatCode>
                 <c:ptCount val="5"/>
                 <c:pt idx="0">
-                  <c:v>52.05</c:v>
+                  <c:v>61.76</c:v>
                 </c:pt>
                 <c:pt idx="1">
-                  <c:v>143.72</c:v>
+                  <c:v>127.23</c:v>
                 </c:pt>
                 <c:pt idx="2">
-                  <c:v>-5.47</c:v>
+                  <c:v>7.93</c:v>
                 </c:pt>
                 <c:pt idx="3">
-                  <c:v>19.95</c:v>
+                  <c:v>34.1</c:v>
                 </c:pt>
                 <c:pt idx="4">
-                  <c:v>55.35</c:v>
+                  <c:v>83.25</c:v>
                 </c:pt>
               </c:numCache>
             </c:numRef>
@@ -1674,7 +1675,7 @@
             <c:size val="6"/>
             <c:spPr>
               <a:solidFill>
-                <a:srgbClr val="F59E0B"/>
+                <a:srgbClr val="10B981"/>
               </a:solidFill>
               <a:ln w="9525" cap="flat">
                 <a:solidFill>
@@ -1718,19 +1719,19 @@
                 <c:formatCode>General</c:formatCode>
                 <c:ptCount val="5"/>
                 <c:pt idx="0">
-                  <c:v>39.92</c:v>
+                  <c:v>46.86</c:v>
                 </c:pt>
                 <c:pt idx="1">
-                  <c:v>65.26</c:v>
+                  <c:v>68.54</c:v>
                 </c:pt>
                 <c:pt idx="2">
-                  <c:v>-2.06</c:v>
+                  <c:v>9.6</c:v>
                 </c:pt>
                 <c:pt idx="3">
-                  <c:v>39.86</c:v>
+                  <c:v>37.58</c:v>
                 </c:pt>
                 <c:pt idx="4">
-                  <c:v>10.45</c:v>
+                  <c:v>43.5</c:v>
                 </c:pt>
               </c:numCache>
             </c:numRef>
@@ -2100,7 +2101,7 @@
             <c:bubble3D val="0"/>
             <c:spPr>
               <a:solidFill>
-                <a:srgbClr val="DC3545"/>
+                <a:srgbClr val="28A745"/>
               </a:solidFill>
               <a:effectLst/>
             </c:spPr>
@@ -2111,7 +2112,7 @@
             <c:bubble3D val="0"/>
             <c:spPr>
               <a:solidFill>
-                <a:srgbClr val="DC3545"/>
+                <a:srgbClr val="28A745"/>
               </a:solidFill>
               <a:effectLst/>
             </c:spPr>
@@ -2167,31 +2168,31 @@
                 <c:ptCount val="10"/>
                 <c:lvl>
                   <c:pt idx="0">
+                    <c:v>Behera &amp; Dakahlia (Ahmed)</c:v>
+                  </c:pt>
+                  <c:pt idx="1">
+                    <c:v>DELTA I (Shimaa)</c:v>
+                  </c:pt>
+                  <c:pt idx="2">
                     <c:v>KFR EL.SHK (Karim)</c:v>
                   </c:pt>
-                  <c:pt idx="1">
-                    <c:v>Behera &amp; Dakahlia (Ahmed)</c:v>
+                  <c:pt idx="3">
+                    <c:v>Guiza (Youstina)</c:v>
                   </c:pt>
-                  <c:pt idx="2">
+                  <c:pt idx="4">
+                    <c:v>Alx (Ahmed)</c:v>
+                  </c:pt>
+                  <c:pt idx="5">
+                    <c:v>Delta II (Mohamed)</c:v>
+                  </c:pt>
+                  <c:pt idx="6">
+                    <c:v>Upper Egypt I (UE)</c:v>
+                  </c:pt>
+                  <c:pt idx="7">
                     <c:v>Cairo (NOHER)</c:v>
                   </c:pt>
-                  <c:pt idx="3">
-                    <c:v>Upper Egypt I (UE)</c:v>
-                  </c:pt>
-                  <c:pt idx="4">
-                    <c:v>Guiza (Youstina)</c:v>
-                  </c:pt>
-                  <c:pt idx="5">
-                    <c:v>DELTA I (Shimaa)</c:v>
-                  </c:pt>
-                  <c:pt idx="6">
-                    <c:v>Alx (Ahmed)</c:v>
-                  </c:pt>
-                  <c:pt idx="7">
+                  <c:pt idx="8">
                     <c:v>Upper Egypt II (Beshoy)</c:v>
-                  </c:pt>
-                  <c:pt idx="8">
-                    <c:v>Delta II (Mohamed)</c:v>
                   </c:pt>
                   <c:pt idx="9">
                     <c:v>COMP: EGYPT TOTAL</c:v>
@@ -2207,34 +2208,34 @@
                 <c:formatCode>General</c:formatCode>
                 <c:ptCount val="10"/>
                 <c:pt idx="0">
-                  <c:v>12</c:v>
+                  <c:v>25</c:v>
                 </c:pt>
                 <c:pt idx="1">
-                  <c:v>14.9</c:v>
+                  <c:v>28.9</c:v>
                 </c:pt>
                 <c:pt idx="2">
-                  <c:v>22.5</c:v>
+                  <c:v>29.9</c:v>
                 </c:pt>
                 <c:pt idx="3">
-                  <c:v>27.8</c:v>
+                  <c:v>32.8</c:v>
                 </c:pt>
                 <c:pt idx="4">
-                  <c:v>29.6</c:v>
+                  <c:v>40.1</c:v>
                 </c:pt>
                 <c:pt idx="5">
-                  <c:v>32.2</c:v>
+                  <c:v>46</c:v>
                 </c:pt>
                 <c:pt idx="6">
-                  <c:v>39.6</c:v>
+                  <c:v>46.2</c:v>
                 </c:pt>
                 <c:pt idx="7">
-                  <c:v>50.1</c:v>
+                  <c:v>46.4</c:v>
                 </c:pt>
                 <c:pt idx="8">
-                  <c:v>60.2</c:v>
+                  <c:v>57.7</c:v>
                 </c:pt>
                 <c:pt idx="9">
-                  <c:v>33.8</c:v>
+                  <c:v>39.5</c:v>
                 </c:pt>
               </c:numCache>
             </c:numRef>
@@ -2559,28 +2560,28 @@
                 <c:ptCount val="10"/>
                 <c:lvl>
                   <c:pt idx="0">
-                    <c:v>Upper Egypt I (UE)</c:v>
+                    <c:v>Behera &amp; Dakahlia (Ahmed)</c:v>
                   </c:pt>
                   <c:pt idx="1">
-                    <c:v>Behera &amp; Dakahlia (Ahmed)</c:v>
+                    <c:v>DELTA I (Shimaa)</c:v>
                   </c:pt>
                   <c:pt idx="2">
-                    <c:v>Cairo (NOHER)</c:v>
+                    <c:v>Upper Egypt I (UE)</c:v>
                   </c:pt>
                   <c:pt idx="3">
                     <c:v>Guiza (Youstina)</c:v>
                   </c:pt>
                   <c:pt idx="4">
-                    <c:v>DELTA I (Shimaa)</c:v>
+                    <c:v>KFR EL.SHK (Karim)</c:v>
                   </c:pt>
                   <c:pt idx="5">
-                    <c:v>KFR EL.SHK (Karim)</c:v>
+                    <c:v>Delta II (Mohamed)</c:v>
                   </c:pt>
                   <c:pt idx="6">
-                    <c:v>Upper Egypt II (Beshoy)</c:v>
+                    <c:v>Cairo (NOHER)</c:v>
                   </c:pt>
                   <c:pt idx="7">
-                    <c:v>Delta II (Mohamed)</c:v>
+                    <c:v>Upper Egypt II (Beshoy)</c:v>
                   </c:pt>
                   <c:pt idx="8">
                     <c:v>Alx (Ahmed)</c:v>
@@ -2599,34 +2600,34 @@
                 <c:formatCode>General</c:formatCode>
                 <c:ptCount val="10"/>
                 <c:pt idx="0">
-                  <c:v>15.8</c:v>
+                  <c:v>27.9</c:v>
                 </c:pt>
                 <c:pt idx="1">
-                  <c:v>18.1</c:v>
+                  <c:v>35.6</c:v>
                 </c:pt>
                 <c:pt idx="2">
-                  <c:v>30.8</c:v>
+                  <c:v>38.6</c:v>
                 </c:pt>
                 <c:pt idx="3">
-                  <c:v>31.1</c:v>
+                  <c:v>39.4</c:v>
                 </c:pt>
                 <c:pt idx="4">
-                  <c:v>36.2</c:v>
+                  <c:v>43.6</c:v>
                 </c:pt>
                 <c:pt idx="5">
-                  <c:v>39.1</c:v>
+                  <c:v>46</c:v>
                 </c:pt>
                 <c:pt idx="6">
-                  <c:v>52</c:v>
+                  <c:v>56.7</c:v>
                 </c:pt>
                 <c:pt idx="7">
-                  <c:v>60.3</c:v>
+                  <c:v>61.8</c:v>
                 </c:pt>
                 <c:pt idx="8">
-                  <c:v>89.2</c:v>
+                  <c:v>91.4</c:v>
                 </c:pt>
                 <c:pt idx="9">
-                  <c:v>39.9</c:v>
+                  <c:v>46.9</c:v>
                 </c:pt>
               </c:numCache>
             </c:numRef>
@@ -2895,7 +2896,7 @@
             <c:bubble3D val="0"/>
             <c:spPr>
               <a:solidFill>
-                <a:srgbClr val="DC3545"/>
+                <a:srgbClr val="28A745"/>
               </a:solidFill>
               <a:effectLst/>
             </c:spPr>
@@ -2960,19 +2961,19 @@
                     <c:v>Behera &amp; Dakahlia (Ahmed)</c:v>
                   </c:pt>
                   <c:pt idx="3">
+                    <c:v>DELTA I (Shimaa)</c:v>
+                  </c:pt>
+                  <c:pt idx="4">
+                    <c:v>Delta II (Mohamed)</c:v>
+                  </c:pt>
+                  <c:pt idx="5">
                     <c:v>Upper Egypt I (UE)</c:v>
                   </c:pt>
-                  <c:pt idx="4">
+                  <c:pt idx="6">
                     <c:v>Cairo (NOHER)</c:v>
                   </c:pt>
-                  <c:pt idx="5">
-                    <c:v>DELTA I (Shimaa)</c:v>
-                  </c:pt>
-                  <c:pt idx="6">
+                  <c:pt idx="7">
                     <c:v>Alx (Ahmed)</c:v>
-                  </c:pt>
-                  <c:pt idx="7">
-                    <c:v>Delta II (Mohamed)</c:v>
                   </c:pt>
                   <c:pt idx="8">
                     <c:v>Upper Egypt II (Beshoy)</c:v>
@@ -2991,34 +2992,34 @@
                 <c:formatCode>General</c:formatCode>
                 <c:ptCount val="10"/>
                 <c:pt idx="0">
-                  <c:v>27.4</c:v>
+                  <c:v>28.7</c:v>
                 </c:pt>
                 <c:pt idx="1">
-                  <c:v>29.4</c:v>
+                  <c:v>55</c:v>
                 </c:pt>
                 <c:pt idx="2">
-                  <c:v>34.8</c:v>
+                  <c:v>55.7</c:v>
                 </c:pt>
                 <c:pt idx="3">
-                  <c:v>46.3</c:v>
+                  <c:v>53.6</c:v>
                 </c:pt>
                 <c:pt idx="4">
-                  <c:v>52.7</c:v>
+                  <c:v>65.7</c:v>
                 </c:pt>
                 <c:pt idx="5">
-                  <c:v>59.1</c:v>
+                  <c:v>73.3</c:v>
                 </c:pt>
                 <c:pt idx="6">
-                  <c:v>81.4</c:v>
+                  <c:v>71.9</c:v>
                 </c:pt>
                 <c:pt idx="7">
-                  <c:v>87.9</c:v>
+                  <c:v>86.3</c:v>
                 </c:pt>
                 <c:pt idx="8">
-                  <c:v>143.7</c:v>
+                  <c:v>127.2</c:v>
                 </c:pt>
                 <c:pt idx="9">
-                  <c:v>65.3</c:v>
+                  <c:v>68.5</c:v>
                 </c:pt>
               </c:numCache>
             </c:numRef>
@@ -3287,7 +3288,7 @@
             <c:bubble3D val="0"/>
             <c:spPr>
               <a:solidFill>
-                <a:srgbClr val="28A745"/>
+                <a:srgbClr val="DC3545"/>
               </a:solidFill>
               <a:effectLst/>
             </c:spPr>
@@ -3349,19 +3350,19 @@
                     <c:v>Alx (Ahmed)</c:v>
                   </c:pt>
                   <c:pt idx="2">
+                    <c:v>Delta II (Mohamed)</c:v>
+                  </c:pt>
+                  <c:pt idx="3">
+                    <c:v>DELTA I (Shimaa)</c:v>
+                  </c:pt>
+                  <c:pt idx="4">
                     <c:v>KFR EL.SHK (Karim)</c:v>
                   </c:pt>
-                  <c:pt idx="3">
-                    <c:v>Cairo (NOHER)</c:v>
-                  </c:pt>
-                  <c:pt idx="4">
+                  <c:pt idx="5">
                     <c:v>Upper Egypt II (Beshoy)</c:v>
                   </c:pt>
-                  <c:pt idx="5">
-                    <c:v>DELTA I (Shimaa)</c:v>
-                  </c:pt>
                   <c:pt idx="6">
-                    <c:v>Delta II (Mohamed)</c:v>
+                    <c:v>Cairo (NOHER)</c:v>
                   </c:pt>
                   <c:pt idx="7">
                     <c:v>Guiza (Youstina)</c:v>
@@ -3383,34 +3384,34 @@
                 <c:formatCode>General</c:formatCode>
                 <c:ptCount val="10"/>
                 <c:pt idx="0">
-                  <c:v>-19</c:v>
+                  <c:v>3</c:v>
                 </c:pt>
                 <c:pt idx="1">
-                  <c:v>-13.5</c:v>
+                  <c:v>-7.9</c:v>
                 </c:pt>
                 <c:pt idx="2">
-                  <c:v>-10.8</c:v>
+                  <c:v>-4.1</c:v>
                 </c:pt>
                 <c:pt idx="3">
-                  <c:v>-9.3</c:v>
+                  <c:v>-2.9</c:v>
                 </c:pt>
                 <c:pt idx="4">
-                  <c:v>-5.5</c:v>
+                  <c:v>3.2</c:v>
                 </c:pt>
                 <c:pt idx="5">
-                  <c:v>-0.6</c:v>
+                  <c:v>7.9</c:v>
                 </c:pt>
                 <c:pt idx="6">
-                  <c:v>6.2</c:v>
+                  <c:v>32.5</c:v>
                 </c:pt>
                 <c:pt idx="7">
-                  <c:v>17.4</c:v>
+                  <c:v>31.7</c:v>
                 </c:pt>
                 <c:pt idx="8">
-                  <c:v>17.6</c:v>
+                  <c:v>43.9</c:v>
                 </c:pt>
                 <c:pt idx="9">
-                  <c:v>-2.1</c:v>
+                  <c:v>9.6</c:v>
                 </c:pt>
               </c:numCache>
             </c:numRef>
@@ -3679,7 +3680,7 @@
             <c:bubble3D val="0"/>
             <c:spPr>
               <a:solidFill>
-                <a:srgbClr val="28A745"/>
+                <a:srgbClr val="DC3545"/>
               </a:solidFill>
               <a:effectLst/>
             </c:spPr>
@@ -3744,19 +3745,19 @@
                     <c:v>Alx (Ahmed)</c:v>
                   </c:pt>
                   <c:pt idx="3">
+                    <c:v>DELTA I (Shimaa)</c:v>
+                  </c:pt>
+                  <c:pt idx="4">
+                    <c:v>Behera &amp; Dakahlia (Ahmed)</c:v>
+                  </c:pt>
+                  <c:pt idx="5">
                     <c:v>Upper Egypt II (Beshoy)</c:v>
                   </c:pt>
-                  <c:pt idx="4">
-                    <c:v>DELTA I (Shimaa)</c:v>
-                  </c:pt>
-                  <c:pt idx="5">
-                    <c:v>Behera &amp; Dakahlia (Ahmed)</c:v>
-                  </c:pt>
                   <c:pt idx="6">
-                    <c:v>Upper Egypt I (UE)</c:v>
+                    <c:v>Guiza (Youstina)</c:v>
                   </c:pt>
                   <c:pt idx="7">
-                    <c:v>Guiza (Youstina)</c:v>
+                    <c:v>Upper Egypt I (UE)</c:v>
                   </c:pt>
                   <c:pt idx="8">
                     <c:v>Delta II (Mohamed)</c:v>
@@ -3775,34 +3776,34 @@
                 <c:formatCode>General</c:formatCode>
                 <c:ptCount val="10"/>
                 <c:pt idx="0">
-                  <c:v>-20.2</c:v>
+                  <c:v>5.1</c:v>
                 </c:pt>
                 <c:pt idx="1">
-                  <c:v>-6.3</c:v>
+                  <c:v>14.9</c:v>
                 </c:pt>
                 <c:pt idx="2">
-                  <c:v>15.5</c:v>
+                  <c:v>10.6</c:v>
                 </c:pt>
                 <c:pt idx="3">
-                  <c:v>19.9</c:v>
+                  <c:v>28.2</c:v>
                 </c:pt>
                 <c:pt idx="4">
-                  <c:v>37.1</c:v>
+                  <c:v>29.4</c:v>
                 </c:pt>
                 <c:pt idx="5">
-                  <c:v>41.5</c:v>
+                  <c:v>34.1</c:v>
                 </c:pt>
                 <c:pt idx="6">
-                  <c:v>59</c:v>
+                  <c:v>55.7</c:v>
                 </c:pt>
                 <c:pt idx="7">
-                  <c:v>78.2</c:v>
+                  <c:v>67</c:v>
                 </c:pt>
                 <c:pt idx="8">
-                  <c:v>102.3</c:v>
+                  <c:v>67.4</c:v>
                 </c:pt>
                 <c:pt idx="9">
-                  <c:v>39.9</c:v>
+                  <c:v>37.6</c:v>
                 </c:pt>
               </c:numCache>
             </c:numRef>
@@ -4460,6 +4461,94 @@
             <a:fld id="{F7021451-1387-4CA6-816F-3879F97B5CBC}" type="slidenum">
               <a:rPr lang="en-US"/>
               <a:t>10</a:t>
+            </a:fld>
+            <a:endParaRPr lang="en-US"/>
+          </a:p>
+        </p:txBody>
+      </p:sp>
+    </p:spTree>
+    <p:extLst>
+      <p:ext uri="{BB962C8B-B14F-4D97-AF65-F5344CB8AC3E}">
+        <p14:creationId xmlns:p14="http://schemas.microsoft.com/office/powerpoint/2010/main" val="1024086991"/>
+      </p:ext>
+    </p:extLst>
+  </p:cSld>
+  <p:clrMapOvr>
+    <a:masterClrMapping/>
+  </p:clrMapOvr>
+</p:notes>
+</file>
+
+<file path=ppt/notesSlides/notesSlide11.xml><?xml version="1.0" encoding="utf-8"?>
+<p:notes xmlns:a="http://schemas.openxmlformats.org/drawingml/2006/main" xmlns:r="http://schemas.openxmlformats.org/officeDocument/2006/relationships" xmlns:p="http://schemas.openxmlformats.org/presentationml/2006/main">
+  <p:cSld>
+    <p:spTree>
+      <p:nvGrpSpPr>
+        <p:cNvPr id="1" name=""/>
+        <p:cNvGrpSpPr/>
+        <p:nvPr/>
+      </p:nvGrpSpPr>
+      <p:grpSpPr>
+        <a:xfrm>
+          <a:off x="0" y="0"/>
+          <a:ext cx="0" cy="0"/>
+          <a:chOff x="0" y="0"/>
+          <a:chExt cx="0" cy="0"/>
+        </a:xfrm>
+      </p:grpSpPr>
+      <p:sp>
+        <p:nvSpPr>
+          <p:cNvPr id="2" name="Slide Image Placeholder 1"/>
+          <p:cNvSpPr>
+            <a:spLocks noGrp="1" noRot="1" noChangeAspect="1"/>
+          </p:cNvSpPr>
+          <p:nvPr>
+            <p:ph type="sldImg"/>
+          </p:nvPr>
+        </p:nvSpPr>
+        <p:spPr/>
+      </p:sp>
+      <p:sp>
+        <p:nvSpPr>
+          <p:cNvPr id="3" name="Notes Placeholder 2"/>
+          <p:cNvSpPr>
+            <a:spLocks noGrp="1"/>
+          </p:cNvSpPr>
+          <p:nvPr>
+            <p:ph type="body" idx="1"/>
+          </p:nvPr>
+        </p:nvSpPr>
+        <p:spPr/>
+        <p:txBody>
+          <a:bodyPr/>
+          <a:lstStyle/>
+          <a:p>
+            <a:r>
+              <a:rPr lang="en-US" dirty="0"/>
+              <a:t/>
+            </a:r>
+            <a:endParaRPr lang="en-US" dirty="0"/>
+          </a:p>
+        </p:txBody>
+      </p:sp>
+      <p:sp>
+        <p:nvSpPr>
+          <p:cNvPr id="4" name="Slide Number Placeholder 3"/>
+          <p:cNvSpPr>
+            <a:spLocks noGrp="1"/>
+          </p:cNvSpPr>
+          <p:nvPr>
+            <p:ph type="sldNum" sz="quarter" idx="10"/>
+          </p:nvPr>
+        </p:nvSpPr>
+        <p:spPr/>
+        <p:txBody>
+          <a:bodyPr/>
+          <a:lstStyle/>
+          <a:p>
+            <a:fld id="{F7021451-1387-4CA6-816F-3879F97B5CBC}" type="slidenum">
+              <a:rPr lang="en-US"/>
+              <a:t>11</a:t>
             </a:fld>
             <a:endParaRPr lang="en-US"/>
           </a:p>
@@ -5590,7 +5679,7 @@
               <a:buNone/>
             </a:pPr>
             <a:r>
-              <a:rPr lang="en-US" sz="1700" b="1" dirty="0">
+              <a:rPr lang="en-US" sz="1650" b="1" dirty="0">
                 <a:solidFill>
                   <a:srgbClr val="FFFFFF"/>
                 </a:solidFill>
@@ -5600,7 +5689,7 @@
               </a:rPr>
               <a:t>TERRITORIAL CONTRIBUTION &amp; GEO SHARE (SELECTED ADM)</a:t>
             </a:r>
-            <a:endParaRPr lang="en-US" sz="1700" dirty="0"/>
+            <a:endParaRPr lang="en-US" sz="1650" dirty="0"/>
           </a:p>
         </p:txBody>
       </p:sp>
@@ -5629,7 +5718,7 @@
               <a:buNone/>
             </a:pPr>
             <a:r>
-              <a:rPr lang="en-US" sz="1050" i="1" dirty="0">
+              <a:rPr lang="en-US" sz="1000" i="1" dirty="0">
                 <a:solidFill>
                   <a:srgbClr val="D9E2EC"/>
                 </a:solidFill>
@@ -5639,7 +5728,7 @@
               </a:rPr>
               <a:t>Horizontal 3-Bar Share Analysis for Selected ADM (Beshoy Youhanna) with values plotted directly on the bars</a:t>
             </a:r>
-            <a:endParaRPr lang="en-US" sz="1050" dirty="0"/>
+            <a:endParaRPr lang="en-US" sz="1000" dirty="0"/>
           </a:p>
         </p:txBody>
       </p:sp>
@@ -5715,7 +5804,7 @@
                 <a:ea typeface="Calibri" pitchFamily="34" charset="-122"/>
                 <a:cs typeface="Calibri" pitchFamily="34" charset="-120"/>
               </a:rPr>
-              <a:t>YTD M06-2026 vs 2025</a:t>
+              <a:t>YTD M09-2026 vs 2025</a:t>
             </a:r>
             <a:endParaRPr lang="en-US" sz="900" dirty="0"/>
           </a:p>
@@ -5828,7 +5917,7 @@
                   <a:srgbClr val="155724"/>
                 </a:solidFill>
               </a:rPr>
-              <a:t>• 2026 Current Contribution: 16.13% (Highest volume share in Egypt)</a:t>
+              <a:t>• 2026 Current Contribution: 16.24% (National volume leader, 210,911 cans YTD)</a:t>
             </a:r>
             <a:endParaRPr lang="en-US" sz="950" dirty="0"/>
           </a:p>
@@ -5842,7 +5931,7 @@
                   <a:srgbClr val="155724"/>
                 </a:solidFill>
               </a:rPr>
-              <a:t>• GEO Market Potential: 15.61% | Variance vs. Potential: +0.52% (Exceeding territory potential)</a:t>
+              <a:t>• GEO Market Potential: 15.61% | Variance vs. Potential: +0.63% (Exceeding territory potential)</a:t>
             </a:r>
             <a:endParaRPr lang="en-US" sz="950" dirty="0"/>
           </a:p>
@@ -5856,7 +5945,7 @@
                   <a:srgbClr val="155724"/>
                 </a:solidFill>
               </a:rPr>
-              <a:t>• Year-over-Year Gain: +1.76% expansion vs Full-Year 2025 contribution (14.37%)</a:t>
+              <a:t>• Year-over-Year Gain: +1.87% expansion vs Full-Year 2025 contribution (14.37%)</a:t>
             </a:r>
             <a:endParaRPr lang="en-US" sz="950" dirty="0"/>
           </a:p>
@@ -6335,7 +6424,7 @@
                             <a:srgbClr val="000000"/>
                           </a:solidFill>
                         </a:rPr>
-                        <a:t>7.4%</a:t>
+                        <a:t>7.1%</a:t>
                       </a:r>
                       <a:endParaRPr lang="en-US" sz="850" dirty="0"/>
                     </a:p>
@@ -6457,7 +6546,7 @@
                             <a:srgbClr val="DC3545"/>
                           </a:solidFill>
                         </a:rPr>
-                        <a:t>-2.72%</a:t>
+                        <a:t>-3.00%</a:t>
                       </a:r>
                       <a:endParaRPr lang="en-US" sz="850" dirty="0"/>
                     </a:p>
@@ -6642,7 +6731,7 @@
                             <a:srgbClr val="000000"/>
                           </a:solidFill>
                         </a:rPr>
-                        <a:t>10.3%</a:t>
+                        <a:t>10.8%</a:t>
                       </a:r>
                       <a:endParaRPr lang="en-US" sz="850" dirty="0"/>
                     </a:p>
@@ -6764,7 +6853,7 @@
                             <a:srgbClr val="28A745"/>
                           </a:solidFill>
                         </a:rPr>
-                        <a:t>+0.59%</a:t>
+                        <a:t>+1.02%</a:t>
                       </a:r>
                       <a:endParaRPr lang="en-US" sz="850" dirty="0"/>
                     </a:p>
@@ -6949,7 +7038,7 @@
                             <a:srgbClr val="000000"/>
                           </a:solidFill>
                         </a:rPr>
-                        <a:t>6.3%</a:t>
+                        <a:t>7.3%</a:t>
                       </a:r>
                       <a:endParaRPr lang="en-US" sz="850" dirty="0"/>
                     </a:p>
@@ -7071,7 +7160,7 @@
                             <a:srgbClr val="DC3545"/>
                           </a:solidFill>
                         </a:rPr>
-                        <a:t>-8.29%</a:t>
+                        <a:t>-7.36%</a:t>
                       </a:r>
                       <a:endParaRPr lang="en-US" sz="850" dirty="0"/>
                     </a:p>
@@ -7256,7 +7345,7 @@
                             <a:srgbClr val="000000"/>
                           </a:solidFill>
                         </a:rPr>
-                        <a:t>9.3%</a:t>
+                        <a:t>9.2%</a:t>
                       </a:r>
                       <a:endParaRPr lang="en-US" sz="850" dirty="0"/>
                     </a:p>
@@ -7378,7 +7467,7 @@
                             <a:srgbClr val="DC3545"/>
                           </a:solidFill>
                         </a:rPr>
-                        <a:t>-5.20%</a:t>
+                        <a:t>-5.36%</a:t>
                       </a:r>
                       <a:endParaRPr lang="en-US" sz="850" dirty="0"/>
                     </a:p>
@@ -7563,7 +7652,7 @@
                             <a:srgbClr val="000000"/>
                           </a:solidFill>
                         </a:rPr>
-                        <a:t>14.6%</a:t>
+                        <a:t>13.6%</a:t>
                       </a:r>
                       <a:endParaRPr lang="en-US" sz="850" dirty="0"/>
                     </a:p>
@@ -7685,7 +7774,7 @@
                             <a:srgbClr val="28A745"/>
                           </a:solidFill>
                         </a:rPr>
-                        <a:t>+7.25%</a:t>
+                        <a:t>+6.29%</a:t>
                       </a:r>
                       <a:endParaRPr lang="en-US" sz="850" dirty="0"/>
                     </a:p>
@@ -7870,7 +7959,7 @@
                             <a:srgbClr val="000000"/>
                           </a:solidFill>
                         </a:rPr>
-                        <a:t>16.5%</a:t>
+                        <a:t>14.4%</a:t>
                       </a:r>
                       <a:endParaRPr lang="en-US" sz="850" dirty="0"/>
                     </a:p>
@@ -7992,7 +8081,7 @@
                             <a:srgbClr val="28A745"/>
                           </a:solidFill>
                         </a:rPr>
-                        <a:t>+4.20%</a:t>
+                        <a:t>+2.12%</a:t>
                       </a:r>
                       <a:endParaRPr lang="en-US" sz="850" dirty="0"/>
                     </a:p>
@@ -8177,7 +8266,7 @@
                             <a:srgbClr val="000000"/>
                           </a:solidFill>
                         </a:rPr>
-                        <a:t>11.9%</a:t>
+                        <a:t>13.1%</a:t>
                       </a:r>
                       <a:endParaRPr lang="en-US" sz="850" dirty="0"/>
                     </a:p>
@@ -8299,7 +8388,7 @@
                             <a:srgbClr val="DC3545"/>
                           </a:solidFill>
                         </a:rPr>
-                        <a:t>-2.14%</a:t>
+                        <a:t>-0.99%</a:t>
                       </a:r>
                       <a:endParaRPr lang="en-US" sz="850" dirty="0"/>
                     </a:p>
@@ -8484,7 +8573,7 @@
                             <a:srgbClr val="000000"/>
                           </a:solidFill>
                         </a:rPr>
-                        <a:t>16.1%</a:t>
+                        <a:t>16.2%</a:t>
                       </a:r>
                       <a:endParaRPr lang="en-US" sz="850" dirty="0"/>
                     </a:p>
@@ -8606,7 +8695,7 @@
                             <a:srgbClr val="28A745"/>
                           </a:solidFill>
                         </a:rPr>
-                        <a:t>+0.52%</a:t>
+                        <a:t>+0.63%</a:t>
                       </a:r>
                       <a:endParaRPr lang="en-US" sz="850" dirty="0"/>
                     </a:p>
@@ -8791,7 +8880,7 @@
                             <a:srgbClr val="000000"/>
                           </a:solidFill>
                         </a:rPr>
-                        <a:t>7.6%</a:t>
+                        <a:t>8.4%</a:t>
                       </a:r>
                       <a:endParaRPr lang="en-US" sz="850" dirty="0"/>
                     </a:p>
@@ -8913,7 +9002,7 @@
                             <a:srgbClr val="28A745"/>
                           </a:solidFill>
                         </a:rPr>
-                        <a:t>+5.80%</a:t>
+                        <a:t>+6.65%</a:t>
                       </a:r>
                       <a:endParaRPr lang="en-US" sz="850" dirty="0"/>
                     </a:p>
@@ -9074,7 +9163,7 @@
               <a:buNone/>
             </a:pPr>
             <a:r>
-              <a:rPr lang="en-US" sz="1700" b="1" dirty="0">
+              <a:rPr lang="en-US" sz="1650" b="1" dirty="0">
                 <a:solidFill>
                   <a:srgbClr val="FFFFFF"/>
                 </a:solidFill>
@@ -9084,7 +9173,7 @@
               </a:rPr>
               <a:t>STRATEGIC PERFORMANCE QUADRANT MATRIX</a:t>
             </a:r>
-            <a:endParaRPr lang="en-US" sz="1700" dirty="0"/>
+            <a:endParaRPr lang="en-US" sz="1650" dirty="0"/>
           </a:p>
         </p:txBody>
       </p:sp>
@@ -9113,7 +9202,7 @@
               <a:buNone/>
             </a:pPr>
             <a:r>
-              <a:rPr lang="en-US" sz="1050" i="1" dirty="0">
+              <a:rPr lang="en-US" sz="1000" i="1" dirty="0">
                 <a:solidFill>
                   <a:srgbClr val="D9E2EC"/>
                 </a:solidFill>
@@ -9121,9 +9210,9 @@
                 <a:ea typeface="Calibri" pitchFamily="34" charset="-122"/>
                 <a:cs typeface="Calibri" pitchFamily="34" charset="-120"/>
               </a:rPr>
-              <a:t>Horizontal Intercept at Company Total PPG (+33.79%) | Vertical Intercept at 0.00% | Selected ADM Highlighted</a:t>
+              <a:t>Horizontal Intercept at Company PPG (+39.5%) | Vertical Intercept at 0.00% | Selected ADM Highlighted</a:t>
             </a:r>
-            <a:endParaRPr lang="en-US" sz="1050" dirty="0"/>
+            <a:endParaRPr lang="en-US" sz="1000" dirty="0"/>
           </a:p>
         </p:txBody>
       </p:sp>
@@ -9199,7 +9288,7 @@
                 <a:ea typeface="Calibri" pitchFamily="34" charset="-122"/>
                 <a:cs typeface="Calibri" pitchFamily="34" charset="-120"/>
               </a:rPr>
-              <a:t>YTD M06-2026 vs 2025</a:t>
+              <a:t>YTD M09-2026 vs 2025</a:t>
             </a:r>
             <a:endParaRPr lang="en-US" sz="900" dirty="0"/>
           </a:p>
@@ -9296,7 +9385,7 @@
                   <a:srgbClr val="3B0764"/>
                 </a:solidFill>
               </a:rPr>
-              <a:t>• Performance Coordinates: X (Contribution Diff vs GEO) = +0.52% | Y (Total PPG Growth) = +50.11% (vs Company +33.79%)</a:t>
+              <a:t>• Performance Coordinates: X (Contribution Diff vs GEO) = +0.63% | Y (Total PPG Growth) = +57.71% (vs Company +39.5%)</a:t>
             </a:r>
             <a:endParaRPr lang="en-US" sz="950" dirty="0"/>
           </a:p>
@@ -9310,7 +9399,7 @@
                   <a:srgbClr val="3B0764"/>
                 </a:solidFill>
               </a:rPr>
-              <a:t>• Portfolio Share: Delivers 16.13% of Egypt Total Sales (133,831 cans YTD). Exceeds geographic potential and leads the nation in volume.</a:t>
+              <a:t>• Portfolio Share: Delivers 16.24% of Egypt Total Sales (210,911 cans YTD). Exceeds geographic potential and leads the nation in volume.</a:t>
             </a:r>
             <a:endParaRPr lang="en-US" sz="950" dirty="0"/>
           </a:p>
@@ -9399,7 +9488,7 @@
                   <a:srgbClr val="155724"/>
                 </a:solidFill>
               </a:rPr>
-              <a:t>(High Growth &gt; +33.8% PPG &amp; Positive Contr. Diff &gt; 0%)</a:t>
+              <a:t>(High Growth &gt; +39.5% PPG &amp; Positive Contr. Diff &gt; 0%)</a:t>
             </a:r>
             <a:endParaRPr lang="en-US" sz="1000" dirty="0"/>
           </a:p>
@@ -9435,7 +9524,7 @@
                   <a:srgbClr val="155724"/>
                 </a:solidFill>
               </a:rPr>
-              <a:t>• Delta II (Mohamed Yousef): +60.2% PPG, +4.20% Diff, 136.7k units</a:t>
+              <a:t>• Upper Egypt II (Beshoy Youhanna): +57.7% PPG, +0.63% Diff, 210.9k units [HIGHLIGHTED]</a:t>
             </a:r>
             <a:endParaRPr lang="en-US" sz="850" dirty="0"/>
           </a:p>
@@ -9449,7 +9538,7 @@
                   <a:srgbClr val="155724"/>
                 </a:solidFill>
               </a:rPr>
-              <a:t>• Upper Egypt II (Beshoy Youhanna): +50.1% PPG, +0.52% Diff, 133.8k units [HIGHLIGHTED]</a:t>
+              <a:t>• Delta II (Mohamed Yousef): +46.0% PPG, +2.12% Diff, 186.9k units</a:t>
             </a:r>
             <a:endParaRPr lang="en-US" sz="850" dirty="0"/>
           </a:p>
@@ -9463,7 +9552,7 @@
                   <a:srgbClr val="155724"/>
                 </a:solidFill>
               </a:rPr>
-              <a:t>Strategic Action: Maintain national volume engine, protect prescription share.</a:t>
+              <a:t>Strategic Action: Maintain national volume engine, protect prescription share in clinics.</a:t>
             </a:r>
             <a:endParaRPr lang="en-US" sz="850" dirty="0"/>
           </a:p>
@@ -9538,7 +9627,7 @@
                   <a:srgbClr val="1A5276"/>
                 </a:solidFill>
               </a:rPr>
-              <a:t>(High Growth &gt; +33.8% PPG &amp; Negative Contr. Diff &lt; 0%)</a:t>
+              <a:t>(High Growth &gt; +39.5% PPG &amp; Negative Contr. Diff &lt; 0%)</a:t>
             </a:r>
             <a:endParaRPr lang="en-US" sz="1000" dirty="0"/>
           </a:p>
@@ -9574,7 +9663,7 @@
                   <a:srgbClr val="1A5276"/>
                 </a:solidFill>
               </a:rPr>
-              <a:t>• Alx (Ahmed Hassan): +39.6% PPG, -2.72% Diff, 61.2k units</a:t>
+              <a:t>• Cairo (Noher Adel): +46.4% PPG, -7.36% Diff, 94.2k units (Major turnaround!)</a:t>
             </a:r>
             <a:endParaRPr lang="en-US" sz="850" dirty="0"/>
           </a:p>
@@ -9588,7 +9677,35 @@
                   <a:srgbClr val="1A5276"/>
                 </a:solidFill>
               </a:rPr>
-              <a:t>Strategic Action: Rapidly closing gap to 10.1% GEO potential. Accelerate key accounts and pharmacy stocking.</a:t>
+              <a:t>• Upper Egypt I (UE North): +46.2% PPG, -0.99% Diff, 169.4k units</a:t>
+            </a:r>
+            <a:endParaRPr lang="en-US" sz="850" dirty="0"/>
+          </a:p>
+          <a:p>
+            <a:pPr indent="0" marL="0">
+              <a:buNone/>
+            </a:pPr>
+            <a:r>
+              <a:rPr lang="en-US" sz="850" dirty="0">
+                <a:solidFill>
+                  <a:srgbClr val="1A5276"/>
+                </a:solidFill>
+              </a:rPr>
+              <a:t>• Alx (Ahmed Hassan): +40.1% PPG, -3.00% Diff, 92.2k units</a:t>
+            </a:r>
+            <a:endParaRPr lang="en-US" sz="850" dirty="0"/>
+          </a:p>
+          <a:p>
+            <a:pPr indent="0" marL="0">
+              <a:buNone/>
+            </a:pPr>
+            <a:r>
+              <a:rPr lang="en-US" sz="850" dirty="0">
+                <a:solidFill>
+                  <a:srgbClr val="1A5276"/>
+                </a:solidFill>
+              </a:rPr>
+              <a:t>Strategic Action: Closing the geographic share gap rapidly. Expand key pharmacy accounts.</a:t>
             </a:r>
             <a:endParaRPr lang="en-US" sz="850" dirty="0"/>
           </a:p>
@@ -9663,7 +9780,7 @@
                   <a:srgbClr val="721C24"/>
                 </a:solidFill>
               </a:rPr>
-              <a:t>(Low Growth &lt; +33.8% PPG &amp; Negative Contr. Diff &lt; 0%)</a:t>
+              <a:t>(Low Growth &lt; +39.5% PPG &amp; Negative Contr. Diff &lt; 0%)</a:t>
             </a:r>
             <a:endParaRPr lang="en-US" sz="1000" dirty="0"/>
           </a:p>
@@ -9699,7 +9816,7 @@
                   <a:srgbClr val="721C24"/>
                 </a:solidFill>
               </a:rPr>
-              <a:t>• Cairo (Noher Adel): +22.5% PPG, -8.29% Diff (6.3% contr vs 14.6% geo!)</a:t>
+              <a:t>• Guiza (Youstina Farag): +32.8% PPG, -5.36% Diff, 118.9k units</a:t>
             </a:r>
             <a:endParaRPr lang="en-US" sz="850" dirty="0"/>
           </a:p>
@@ -9713,21 +9830,7 @@
                   <a:srgbClr val="721C24"/>
                 </a:solidFill>
               </a:rPr>
-              <a:t>• Guiza (Youstina Farag): +29.6% PPG, -5.20% Diff | Upper Egypt I: +27.8% PPG</a:t>
-            </a:r>
-            <a:endParaRPr lang="en-US" sz="850" dirty="0"/>
-          </a:p>
-          <a:p>
-            <a:pPr indent="0" marL="0">
-              <a:buNone/>
-            </a:pPr>
-            <a:r>
-              <a:rPr lang="en-US" sz="850" dirty="0">
-                <a:solidFill>
-                  <a:srgbClr val="721C24"/>
-                </a:solidFill>
-              </a:rPr>
-              <a:t>Strategic Action: Immediate management review. Re-allocate detailing reps, audit pharmacy distribution.</a:t>
+              <a:t>Strategic Action: High potential territory (14.5% GEO) lagging behind national pace. Re-evaluate medical rep detailing frequency and key pharmacy availability.</a:t>
             </a:r>
             <a:endParaRPr lang="en-US" sz="850" dirty="0"/>
           </a:p>
@@ -9802,7 +9905,7 @@
                   <a:srgbClr val="7D6608"/>
                 </a:solidFill>
               </a:rPr>
-              <a:t>(Moderate Growth &lt; +33.8% PPG &amp; Positive Contr. Diff &gt; 0%)</a:t>
+              <a:t>(Moderate Growth &lt; +39.5% PPG &amp; Positive Contr. Diff &gt; 0%)</a:t>
             </a:r>
             <a:endParaRPr lang="en-US" sz="1000" dirty="0"/>
           </a:p>
@@ -9838,7 +9941,7 @@
                   <a:srgbClr val="7D6608"/>
                 </a:solidFill>
               </a:rPr>
-              <a:t>• DELTA I (Shimaa Tarek): +32.2% PPG, +7.25% Diff, 120.9k units</a:t>
+              <a:t>• KFR EL.SHK (Karim Shehab): +29.9% PPG, +6.65% Diff, 109.2k units</a:t>
             </a:r>
             <a:endParaRPr lang="en-US" sz="850" dirty="0"/>
           </a:p>
@@ -9852,7 +9955,7 @@
                   <a:srgbClr val="7D6608"/>
                 </a:solidFill>
               </a:rPr>
-              <a:t>• KFR EL.SHK (Karim Shehab): +12.0% PPG, +5.80% Diff | Behera: +15.0% PPG</a:t>
+              <a:t>• DELTA I (Shimaa Tarek): +28.9% PPG, +6.29% Diff, 176.7k units</a:t>
             </a:r>
             <a:endParaRPr lang="en-US" sz="850" dirty="0"/>
           </a:p>
@@ -9866,9 +9969,6519 @@
                   <a:srgbClr val="7D6608"/>
                 </a:solidFill>
               </a:rPr>
-              <a:t>Strategic Action: Strong contribution defenders. Drive specialty formulas to lift growth above +33.8%.</a:t>
+              <a:t>• Behera &amp; Dakahlia (Ahmed Sakr): +25.0% PPG, +1.02% Diff, 139.9k units</a:t>
             </a:r>
             <a:endParaRPr lang="en-US" sz="850" dirty="0"/>
+          </a:p>
+          <a:p>
+            <a:pPr indent="0" marL="0">
+              <a:buNone/>
+            </a:pPr>
+            <a:r>
+              <a:rPr lang="en-US" sz="850" dirty="0">
+                <a:solidFill>
+                  <a:srgbClr val="7D6608"/>
+                </a:solidFill>
+              </a:rPr>
+              <a:t>Strategic Action: Strong contribution defenders. Drive specialty formulas to lift growth above +39.5%.</a:t>
+            </a:r>
+            <a:endParaRPr lang="en-US" sz="850" dirty="0"/>
+          </a:p>
+        </p:txBody>
+      </p:sp>
+    </p:spTree>
+  </p:cSld>
+  <p:clrMapOvr>
+    <a:masterClrMapping/>
+  </p:clrMapOvr>
+</p:sld>
+</file>
+
+<file path=ppt/slides/slide11.xml><?xml version="1.0" encoding="utf-8"?>
+<p:sld xmlns:a="http://schemas.openxmlformats.org/drawingml/2006/main" xmlns:r="http://schemas.openxmlformats.org/officeDocument/2006/relationships" xmlns:p="http://schemas.openxmlformats.org/presentationml/2006/main">
+  <p:cSld name="Slide 11">
+    <p:spTree>
+      <p:nvGrpSpPr>
+        <p:cNvPr id="1" name=""/>
+        <p:cNvGrpSpPr/>
+        <p:nvPr/>
+      </p:nvGrpSpPr>
+      <p:grpSpPr>
+        <a:xfrm>
+          <a:off x="0" y="0"/>
+          <a:ext cx="0" cy="0"/>
+          <a:chOff x="0" y="0"/>
+          <a:chExt cx="0" cy="0"/>
+        </a:xfrm>
+      </p:grpSpPr>
+      <p:sp>
+        <p:nvSpPr>
+          <p:cNvPr id="2" name="Shape 0"/>
+          <p:cNvSpPr/>
+          <p:nvPr/>
+        </p:nvSpPr>
+        <p:spPr>
+          <a:xfrm>
+            <a:off x="0" y="0"/>
+            <a:ext cx="12192000" cy="1005840"/>
+          </a:xfrm>
+          <a:prstGeom prst="rect">
+            <a:avLst/>
+          </a:prstGeom>
+          <a:solidFill>
+            <a:srgbClr val="1B365D"/>
+          </a:solidFill>
+          <a:ln/>
+        </p:spPr>
+      </p:sp>
+      <p:sp>
+        <p:nvSpPr>
+          <p:cNvPr id="3" name="Text 1"/>
+          <p:cNvSpPr/>
+          <p:nvPr/>
+        </p:nvSpPr>
+        <p:spPr>
+          <a:xfrm>
+            <a:off x="457200" y="137160"/>
+            <a:ext cx="2286000" cy="274320"/>
+          </a:xfrm>
+          <a:prstGeom prst="rect">
+            <a:avLst/>
+          </a:prstGeom>
+          <a:noFill/>
+          <a:ln/>
+        </p:spPr>
+        <p:txBody>
+          <a:bodyPr wrap="square" rtlCol="0" anchor="ctr"/>
+          <a:lstStyle/>
+          <a:p>
+            <a:pPr indent="0" marL="0">
+              <a:buNone/>
+            </a:pPr>
+            <a:r>
+              <a:rPr lang="en-US" sz="1000" b="1" dirty="0">
+                <a:solidFill>
+                  <a:srgbClr val="A0C4E2"/>
+                </a:solidFill>
+                <a:latin typeface="Calibri" pitchFamily="34" charset="0"/>
+                <a:ea typeface="Calibri" pitchFamily="34" charset="-122"/>
+                <a:cs typeface="Calibri" pitchFamily="34" charset="-120"/>
+              </a:rPr>
+              <a:t>SLIDE 11</a:t>
+            </a:r>
+            <a:endParaRPr lang="en-US" sz="1000" dirty="0"/>
+          </a:p>
+        </p:txBody>
+      </p:sp>
+      <p:sp>
+        <p:nvSpPr>
+          <p:cNvPr id="4" name="Text 2"/>
+          <p:cNvSpPr/>
+          <p:nvPr/>
+        </p:nvSpPr>
+        <p:spPr>
+          <a:xfrm>
+            <a:off x="457200" y="347472"/>
+            <a:ext cx="9601200" cy="411480"/>
+          </a:xfrm>
+          <a:prstGeom prst="rect">
+            <a:avLst/>
+          </a:prstGeom>
+          <a:noFill/>
+          <a:ln/>
+        </p:spPr>
+        <p:txBody>
+          <a:bodyPr wrap="square" rtlCol="0" anchor="ctr"/>
+          <a:lstStyle/>
+          <a:p>
+            <a:pPr indent="0" marL="0">
+              <a:buNone/>
+            </a:pPr>
+            <a:r>
+              <a:rPr lang="en-US" sz="1650" b="1" dirty="0">
+                <a:solidFill>
+                  <a:srgbClr val="FFFFFF"/>
+                </a:solidFill>
+                <a:latin typeface="Calibri" pitchFamily="34" charset="0"/>
+                <a:ea typeface="Calibri" pitchFamily="34" charset="-122"/>
+                <a:cs typeface="Calibri" pitchFamily="34" charset="-120"/>
+              </a:rPr>
+              <a:t>MEDICAL REP / ADM QUARTERLY VELOCITY: Q3 2026 vs H1 2026 BASELINE</a:t>
+            </a:r>
+            <a:endParaRPr lang="en-US" sz="1650" dirty="0"/>
+          </a:p>
+        </p:txBody>
+      </p:sp>
+      <p:sp>
+        <p:nvSpPr>
+          <p:cNvPr id="5" name="Text 3"/>
+          <p:cNvSpPr/>
+          <p:nvPr/>
+        </p:nvSpPr>
+        <p:spPr>
+          <a:xfrm>
+            <a:off x="457200" y="749808"/>
+            <a:ext cx="9601200" cy="228600"/>
+          </a:xfrm>
+          <a:prstGeom prst="rect">
+            <a:avLst/>
+          </a:prstGeom>
+          <a:noFill/>
+          <a:ln/>
+        </p:spPr>
+        <p:txBody>
+          <a:bodyPr wrap="square" rtlCol="0" anchor="ctr"/>
+          <a:lstStyle/>
+          <a:p>
+            <a:pPr indent="0" marL="0">
+              <a:buNone/>
+            </a:pPr>
+            <a:r>
+              <a:rPr lang="en-US" sz="1000" i="1" dirty="0">
+                <a:solidFill>
+                  <a:srgbClr val="D9E2EC"/>
+                </a:solidFill>
+                <a:latin typeface="Calibri" pitchFamily="34" charset="0"/>
+                <a:ea typeface="Calibri" pitchFamily="34" charset="-122"/>
+                <a:cs typeface="Calibri" pitchFamily="34" charset="-120"/>
+              </a:rPr>
+              <a:t>Evaluating Run-Rate Acceleration: National Monthly Average grew from 138,315 to 156,126 cans/mo (+12.9%)</a:t>
+            </a:r>
+            <a:endParaRPr lang="en-US" sz="1000" dirty="0"/>
+          </a:p>
+        </p:txBody>
+      </p:sp>
+      <p:sp>
+        <p:nvSpPr>
+          <p:cNvPr id="6" name="Text 4"/>
+          <p:cNvSpPr/>
+          <p:nvPr/>
+        </p:nvSpPr>
+        <p:spPr>
+          <a:xfrm>
+            <a:off x="9326880" y="228600"/>
+            <a:ext cx="2560320" cy="274320"/>
+          </a:xfrm>
+          <a:prstGeom prst="rect">
+            <a:avLst/>
+          </a:prstGeom>
+          <a:noFill/>
+          <a:ln/>
+        </p:spPr>
+        <p:txBody>
+          <a:bodyPr wrap="square" rtlCol="0" anchor="ctr"/>
+          <a:lstStyle/>
+          <a:p>
+            <a:pPr algn="r" indent="0" marL="0">
+              <a:buNone/>
+            </a:pPr>
+            <a:r>
+              <a:rPr lang="en-US" sz="1000" b="1" dirty="0">
+                <a:solidFill>
+                  <a:srgbClr val="D4AF37"/>
+                </a:solidFill>
+                <a:latin typeface="Calibri" pitchFamily="34" charset="0"/>
+                <a:ea typeface="Calibri" pitchFamily="34" charset="-122"/>
+                <a:cs typeface="Calibri" pitchFamily="34" charset="-120"/>
+              </a:rPr>
+              <a:t>EGY NUTRI. BUSINESS REVIEW</a:t>
+            </a:r>
+            <a:endParaRPr lang="en-US" sz="1000" dirty="0"/>
+          </a:p>
+        </p:txBody>
+      </p:sp>
+      <p:sp>
+        <p:nvSpPr>
+          <p:cNvPr id="7" name="Text 5"/>
+          <p:cNvSpPr/>
+          <p:nvPr/>
+        </p:nvSpPr>
+        <p:spPr>
+          <a:xfrm>
+            <a:off x="9326880" y="502920"/>
+            <a:ext cx="2560320" cy="228600"/>
+          </a:xfrm>
+          <a:prstGeom prst="rect">
+            <a:avLst/>
+          </a:prstGeom>
+          <a:noFill/>
+          <a:ln/>
+        </p:spPr>
+        <p:txBody>
+          <a:bodyPr wrap="square" rtlCol="0" anchor="ctr"/>
+          <a:lstStyle/>
+          <a:p>
+            <a:pPr algn="r" indent="0" marL="0">
+              <a:buNone/>
+            </a:pPr>
+            <a:r>
+              <a:rPr lang="en-US" sz="900" dirty="0">
+                <a:solidFill>
+                  <a:srgbClr val="FFFFFF"/>
+                </a:solidFill>
+                <a:latin typeface="Calibri" pitchFamily="34" charset="0"/>
+                <a:ea typeface="Calibri" pitchFamily="34" charset="-122"/>
+                <a:cs typeface="Calibri" pitchFamily="34" charset="-120"/>
+              </a:rPr>
+              <a:t>YTD M09-2026 vs 2025</a:t>
+            </a:r>
+            <a:endParaRPr lang="en-US" sz="900" dirty="0"/>
+          </a:p>
+        </p:txBody>
+      </p:sp>
+      <p:sp>
+        <p:nvSpPr>
+          <p:cNvPr id="8" name="Shape 6"/>
+          <p:cNvSpPr/>
+          <p:nvPr/>
+        </p:nvSpPr>
+        <p:spPr>
+          <a:xfrm>
+            <a:off x="457200" y="1115568"/>
+            <a:ext cx="2697480" cy="868680"/>
+          </a:xfrm>
+          <a:prstGeom prst="roundRect">
+            <a:avLst/>
+          </a:prstGeom>
+          <a:solidFill>
+            <a:srgbClr val="F0F4F8"/>
+          </a:solidFill>
+          <a:ln w="19050">
+            <a:solidFill>
+              <a:srgbClr val="B0C4DE"/>
+            </a:solidFill>
+            <a:prstDash val="solid"/>
+          </a:ln>
+        </p:spPr>
+      </p:sp>
+      <p:sp>
+        <p:nvSpPr>
+          <p:cNvPr id="9" name="Text 7"/>
+          <p:cNvSpPr/>
+          <p:nvPr/>
+        </p:nvSpPr>
+        <p:spPr>
+          <a:xfrm>
+            <a:off x="548640" y="1188720"/>
+            <a:ext cx="2514600" cy="182880"/>
+          </a:xfrm>
+          <a:prstGeom prst="rect">
+            <a:avLst/>
+          </a:prstGeom>
+          <a:noFill/>
+          <a:ln/>
+        </p:spPr>
+        <p:txBody>
+          <a:bodyPr wrap="square" rtlCol="0" anchor="ctr"/>
+          <a:lstStyle/>
+          <a:p>
+            <a:pPr algn="ctr" indent="0" marL="0">
+              <a:buNone/>
+            </a:pPr>
+            <a:r>
+              <a:rPr lang="en-US" sz="850" b="1" dirty="0">
+                <a:solidFill>
+                  <a:srgbClr val="64748B"/>
+                </a:solidFill>
+              </a:rPr>
+              <a:t>H1 2026 BASELINE</a:t>
+            </a:r>
+            <a:endParaRPr lang="en-US" sz="850" dirty="0"/>
+          </a:p>
+        </p:txBody>
+      </p:sp>
+      <p:sp>
+        <p:nvSpPr>
+          <p:cNvPr id="10" name="Text 8"/>
+          <p:cNvSpPr/>
+          <p:nvPr/>
+        </p:nvSpPr>
+        <p:spPr>
+          <a:xfrm>
+            <a:off x="548640" y="1371600"/>
+            <a:ext cx="2514600" cy="320040"/>
+          </a:xfrm>
+          <a:prstGeom prst="rect">
+            <a:avLst/>
+          </a:prstGeom>
+          <a:noFill/>
+          <a:ln/>
+        </p:spPr>
+        <p:txBody>
+          <a:bodyPr wrap="square" rtlCol="0" anchor="ctr"/>
+          <a:lstStyle/>
+          <a:p>
+            <a:pPr algn="ctr" indent="0" marL="0">
+              <a:buNone/>
+            </a:pPr>
+            <a:r>
+              <a:rPr lang="en-US" sz="1300" b="1" dirty="0">
+                <a:solidFill>
+                  <a:srgbClr val="1B365D"/>
+                </a:solidFill>
+              </a:rPr>
+              <a:t>138,315</a:t>
+            </a:r>
+            <a:endParaRPr lang="en-US" sz="1300" dirty="0"/>
+          </a:p>
+        </p:txBody>
+      </p:sp>
+      <p:sp>
+        <p:nvSpPr>
+          <p:cNvPr id="11" name="Text 9"/>
+          <p:cNvSpPr/>
+          <p:nvPr/>
+        </p:nvSpPr>
+        <p:spPr>
+          <a:xfrm>
+            <a:off x="548640" y="1691640"/>
+            <a:ext cx="2514600" cy="228600"/>
+          </a:xfrm>
+          <a:prstGeom prst="rect">
+            <a:avLst/>
+          </a:prstGeom>
+          <a:noFill/>
+          <a:ln/>
+        </p:spPr>
+        <p:txBody>
+          <a:bodyPr wrap="square" rtlCol="0" anchor="ctr"/>
+          <a:lstStyle/>
+          <a:p>
+            <a:pPr algn="ctr" indent="0" marL="0">
+              <a:buNone/>
+            </a:pPr>
+            <a:r>
+              <a:rPr lang="en-US" sz="800" i="1" dirty="0">
+                <a:solidFill>
+                  <a:srgbClr val="64748B"/>
+                </a:solidFill>
+              </a:rPr>
+              <a:t>National Monthly Avg</a:t>
+            </a:r>
+            <a:endParaRPr lang="en-US" sz="800" dirty="0"/>
+          </a:p>
+        </p:txBody>
+      </p:sp>
+      <p:sp>
+        <p:nvSpPr>
+          <p:cNvPr id="12" name="Shape 10"/>
+          <p:cNvSpPr/>
+          <p:nvPr/>
+        </p:nvSpPr>
+        <p:spPr>
+          <a:xfrm>
+            <a:off x="3310128" y="1115568"/>
+            <a:ext cx="2697480" cy="868680"/>
+          </a:xfrm>
+          <a:prstGeom prst="roundRect">
+            <a:avLst/>
+          </a:prstGeom>
+          <a:solidFill>
+            <a:srgbClr val="ECFDF5"/>
+          </a:solidFill>
+          <a:ln w="19050">
+            <a:solidFill>
+              <a:srgbClr val="10B981"/>
+            </a:solidFill>
+            <a:prstDash val="solid"/>
+          </a:ln>
+        </p:spPr>
+      </p:sp>
+      <p:sp>
+        <p:nvSpPr>
+          <p:cNvPr id="13" name="Text 11"/>
+          <p:cNvSpPr/>
+          <p:nvPr/>
+        </p:nvSpPr>
+        <p:spPr>
+          <a:xfrm>
+            <a:off x="3401568" y="1188720"/>
+            <a:ext cx="2514600" cy="182880"/>
+          </a:xfrm>
+          <a:prstGeom prst="rect">
+            <a:avLst/>
+          </a:prstGeom>
+          <a:noFill/>
+          <a:ln/>
+        </p:spPr>
+        <p:txBody>
+          <a:bodyPr wrap="square" rtlCol="0" anchor="ctr"/>
+          <a:lstStyle/>
+          <a:p>
+            <a:pPr algn="ctr" indent="0" marL="0">
+              <a:buNone/>
+            </a:pPr>
+            <a:r>
+              <a:rPr lang="en-US" sz="850" b="1" dirty="0">
+                <a:solidFill>
+                  <a:srgbClr val="64748B"/>
+                </a:solidFill>
+              </a:rPr>
+              <a:t>Q3 2026 RUN-RATE</a:t>
+            </a:r>
+            <a:endParaRPr lang="en-US" sz="850" dirty="0"/>
+          </a:p>
+        </p:txBody>
+      </p:sp>
+      <p:sp>
+        <p:nvSpPr>
+          <p:cNvPr id="14" name="Text 12"/>
+          <p:cNvSpPr/>
+          <p:nvPr/>
+        </p:nvSpPr>
+        <p:spPr>
+          <a:xfrm>
+            <a:off x="3401568" y="1371600"/>
+            <a:ext cx="2514600" cy="320040"/>
+          </a:xfrm>
+          <a:prstGeom prst="rect">
+            <a:avLst/>
+          </a:prstGeom>
+          <a:noFill/>
+          <a:ln/>
+        </p:spPr>
+        <p:txBody>
+          <a:bodyPr wrap="square" rtlCol="0" anchor="ctr"/>
+          <a:lstStyle/>
+          <a:p>
+            <a:pPr algn="ctr" indent="0" marL="0">
+              <a:buNone/>
+            </a:pPr>
+            <a:r>
+              <a:rPr lang="en-US" sz="1300" b="1" dirty="0">
+                <a:solidFill>
+                  <a:srgbClr val="065F46"/>
+                </a:solidFill>
+              </a:rPr>
+              <a:t>156,126</a:t>
+            </a:r>
+            <a:endParaRPr lang="en-US" sz="1300" dirty="0"/>
+          </a:p>
+        </p:txBody>
+      </p:sp>
+      <p:sp>
+        <p:nvSpPr>
+          <p:cNvPr id="15" name="Text 13"/>
+          <p:cNvSpPr/>
+          <p:nvPr/>
+        </p:nvSpPr>
+        <p:spPr>
+          <a:xfrm>
+            <a:off x="3401568" y="1691640"/>
+            <a:ext cx="2514600" cy="228600"/>
+          </a:xfrm>
+          <a:prstGeom prst="rect">
+            <a:avLst/>
+          </a:prstGeom>
+          <a:noFill/>
+          <a:ln/>
+        </p:spPr>
+        <p:txBody>
+          <a:bodyPr wrap="square" rtlCol="0" anchor="ctr"/>
+          <a:lstStyle/>
+          <a:p>
+            <a:pPr algn="ctr" indent="0" marL="0">
+              <a:buNone/>
+            </a:pPr>
+            <a:r>
+              <a:rPr lang="en-US" sz="800" i="1" dirty="0">
+                <a:solidFill>
+                  <a:srgbClr val="64748B"/>
+                </a:solidFill>
+              </a:rPr>
+              <a:t>+12.9% (+17,811 cans/mo)</a:t>
+            </a:r>
+            <a:endParaRPr lang="en-US" sz="800" dirty="0"/>
+          </a:p>
+        </p:txBody>
+      </p:sp>
+      <p:sp>
+        <p:nvSpPr>
+          <p:cNvPr id="16" name="Shape 14"/>
+          <p:cNvSpPr/>
+          <p:nvPr/>
+        </p:nvSpPr>
+        <p:spPr>
+          <a:xfrm>
+            <a:off x="6163056" y="1115568"/>
+            <a:ext cx="2697480" cy="868680"/>
+          </a:xfrm>
+          <a:prstGeom prst="roundRect">
+            <a:avLst/>
+          </a:prstGeom>
+          <a:solidFill>
+            <a:srgbClr val="EFF6FF"/>
+          </a:solidFill>
+          <a:ln w="19050">
+            <a:solidFill>
+              <a:srgbClr val="3B82F6"/>
+            </a:solidFill>
+            <a:prstDash val="solid"/>
+          </a:ln>
+        </p:spPr>
+      </p:sp>
+      <p:sp>
+        <p:nvSpPr>
+          <p:cNvPr id="17" name="Text 15"/>
+          <p:cNvSpPr/>
+          <p:nvPr/>
+        </p:nvSpPr>
+        <p:spPr>
+          <a:xfrm>
+            <a:off x="6254496" y="1188720"/>
+            <a:ext cx="2514600" cy="182880"/>
+          </a:xfrm>
+          <a:prstGeom prst="rect">
+            <a:avLst/>
+          </a:prstGeom>
+          <a:noFill/>
+          <a:ln/>
+        </p:spPr>
+        <p:txBody>
+          <a:bodyPr wrap="square" rtlCol="0" anchor="ctr"/>
+          <a:lstStyle/>
+          <a:p>
+            <a:pPr algn="ctr" indent="0" marL="0">
+              <a:buNone/>
+            </a:pPr>
+            <a:r>
+              <a:rPr lang="en-US" sz="850" b="1" dirty="0">
+                <a:solidFill>
+                  <a:srgbClr val="64748B"/>
+                </a:solidFill>
+              </a:rPr>
+              <a:t>TOP ACCELERATOR REP</a:t>
+            </a:r>
+            <a:endParaRPr lang="en-US" sz="850" dirty="0"/>
+          </a:p>
+        </p:txBody>
+      </p:sp>
+      <p:sp>
+        <p:nvSpPr>
+          <p:cNvPr id="18" name="Text 16"/>
+          <p:cNvSpPr/>
+          <p:nvPr/>
+        </p:nvSpPr>
+        <p:spPr>
+          <a:xfrm>
+            <a:off x="6254496" y="1371600"/>
+            <a:ext cx="2514600" cy="320040"/>
+          </a:xfrm>
+          <a:prstGeom prst="rect">
+            <a:avLst/>
+          </a:prstGeom>
+          <a:noFill/>
+          <a:ln/>
+        </p:spPr>
+        <p:txBody>
+          <a:bodyPr wrap="square" rtlCol="0" anchor="ctr"/>
+          <a:lstStyle/>
+          <a:p>
+            <a:pPr algn="ctr" indent="0" marL="0">
+              <a:buNone/>
+            </a:pPr>
+            <a:r>
+              <a:rPr lang="en-US" sz="1300" b="1" dirty="0">
+                <a:solidFill>
+                  <a:srgbClr val="1E40AF"/>
+                </a:solidFill>
+              </a:rPr>
+              <a:t>Cairo (+58.7%)</a:t>
+            </a:r>
+            <a:endParaRPr lang="en-US" sz="1300" dirty="0"/>
+          </a:p>
+        </p:txBody>
+      </p:sp>
+      <p:sp>
+        <p:nvSpPr>
+          <p:cNvPr id="19" name="Text 17"/>
+          <p:cNvSpPr/>
+          <p:nvPr/>
+        </p:nvSpPr>
+        <p:spPr>
+          <a:xfrm>
+            <a:off x="6254496" y="1691640"/>
+            <a:ext cx="2514600" cy="228600"/>
+          </a:xfrm>
+          <a:prstGeom prst="rect">
+            <a:avLst/>
+          </a:prstGeom>
+          <a:noFill/>
+          <a:ln/>
+        </p:spPr>
+        <p:txBody>
+          <a:bodyPr wrap="square" rtlCol="0" anchor="ctr"/>
+          <a:lstStyle/>
+          <a:p>
+            <a:pPr algn="ctr" indent="0" marL="0">
+              <a:buNone/>
+            </a:pPr>
+            <a:r>
+              <a:rPr lang="en-US" sz="800" i="1" dirty="0">
+                <a:solidFill>
+                  <a:srgbClr val="64748B"/>
+                </a:solidFill>
+              </a:rPr>
+              <a:t>Noher Adel: 8,758 → 13,898</a:t>
+            </a:r>
+            <a:endParaRPr lang="en-US" sz="800" dirty="0"/>
+          </a:p>
+        </p:txBody>
+      </p:sp>
+      <p:sp>
+        <p:nvSpPr>
+          <p:cNvPr id="20" name="Shape 18"/>
+          <p:cNvSpPr/>
+          <p:nvPr/>
+        </p:nvSpPr>
+        <p:spPr>
+          <a:xfrm>
+            <a:off x="9015984" y="1115568"/>
+            <a:ext cx="2697480" cy="868680"/>
+          </a:xfrm>
+          <a:prstGeom prst="roundRect">
+            <a:avLst/>
+          </a:prstGeom>
+          <a:solidFill>
+            <a:srgbClr val="FAF5FF"/>
+          </a:solidFill>
+          <a:ln w="19050">
+            <a:solidFill>
+              <a:srgbClr val="8B5CF6"/>
+            </a:solidFill>
+            <a:prstDash val="solid"/>
+          </a:ln>
+        </p:spPr>
+      </p:sp>
+      <p:sp>
+        <p:nvSpPr>
+          <p:cNvPr id="21" name="Text 19"/>
+          <p:cNvSpPr/>
+          <p:nvPr/>
+        </p:nvSpPr>
+        <p:spPr>
+          <a:xfrm>
+            <a:off x="9107424" y="1188720"/>
+            <a:ext cx="2514600" cy="182880"/>
+          </a:xfrm>
+          <a:prstGeom prst="rect">
+            <a:avLst/>
+          </a:prstGeom>
+          <a:noFill/>
+          <a:ln/>
+        </p:spPr>
+        <p:txBody>
+          <a:bodyPr wrap="square" rtlCol="0" anchor="ctr"/>
+          <a:lstStyle/>
+          <a:p>
+            <a:pPr algn="ctr" indent="0" marL="0">
+              <a:buNone/>
+            </a:pPr>
+            <a:r>
+              <a:rPr lang="en-US" sz="850" b="1" dirty="0">
+                <a:solidFill>
+                  <a:srgbClr val="64748B"/>
+                </a:solidFill>
+              </a:rPr>
+              <a:t>NATIONAL VOLUME LEADER</a:t>
+            </a:r>
+            <a:endParaRPr lang="en-US" sz="850" dirty="0"/>
+          </a:p>
+        </p:txBody>
+      </p:sp>
+      <p:sp>
+        <p:nvSpPr>
+          <p:cNvPr id="22" name="Text 20"/>
+          <p:cNvSpPr/>
+          <p:nvPr/>
+        </p:nvSpPr>
+        <p:spPr>
+          <a:xfrm>
+            <a:off x="9107424" y="1371600"/>
+            <a:ext cx="2514600" cy="320040"/>
+          </a:xfrm>
+          <a:prstGeom prst="rect">
+            <a:avLst/>
+          </a:prstGeom>
+          <a:noFill/>
+          <a:ln/>
+        </p:spPr>
+        <p:txBody>
+          <a:bodyPr wrap="square" rtlCol="0" anchor="ctr"/>
+          <a:lstStyle/>
+          <a:p>
+            <a:pPr algn="ctr" indent="0" marL="0">
+              <a:buNone/>
+            </a:pPr>
+            <a:r>
+              <a:rPr lang="en-US" sz="1300" b="1" dirty="0">
+                <a:solidFill>
+                  <a:srgbClr val="5B21B6"/>
+                </a:solidFill>
+              </a:rPr>
+              <a:t>UE II (25,694/mo)</a:t>
+            </a:r>
+            <a:endParaRPr lang="en-US" sz="1300" dirty="0"/>
+          </a:p>
+        </p:txBody>
+      </p:sp>
+      <p:sp>
+        <p:nvSpPr>
+          <p:cNvPr id="23" name="Text 21"/>
+          <p:cNvSpPr/>
+          <p:nvPr/>
+        </p:nvSpPr>
+        <p:spPr>
+          <a:xfrm>
+            <a:off x="9107424" y="1691640"/>
+            <a:ext cx="2514600" cy="228600"/>
+          </a:xfrm>
+          <a:prstGeom prst="rect">
+            <a:avLst/>
+          </a:prstGeom>
+          <a:noFill/>
+          <a:ln/>
+        </p:spPr>
+        <p:txBody>
+          <a:bodyPr wrap="square" rtlCol="0" anchor="ctr"/>
+          <a:lstStyle/>
+          <a:p>
+            <a:pPr algn="ctr" indent="0" marL="0">
+              <a:buNone/>
+            </a:pPr>
+            <a:r>
+              <a:rPr lang="en-US" sz="800" i="1" dirty="0">
+                <a:solidFill>
+                  <a:srgbClr val="64748B"/>
+                </a:solidFill>
+              </a:rPr>
+              <a:t>Beshoy Youhanna (+15.2%)</a:t>
+            </a:r>
+            <a:endParaRPr lang="en-US" sz="800" dirty="0"/>
+          </a:p>
+        </p:txBody>
+      </p:sp>
+      <p:graphicFrame>
+        <p:nvGraphicFramePr>
+          <p:cNvPr id="12" name="Table 0"/>
+          <p:cNvGraphicFramePr>
+            <a:graphicFrameLocks noGrp="1"/>
+          </p:cNvGraphicFramePr>
+          <p:nvPr>
+            <p:extLst>
+              <p:ext uri="{D42A27DB-BD31-4B8C-83A1-F6EECF244321}">
+                <p14:modId xmlns:p14="http://schemas.microsoft.com/office/powerpoint/2010/main" val="1579011935"/>
+              </p:ext>
+            </p:extLst>
+          </p:nvPr>
+        </p:nvGraphicFramePr>
+        <p:xfrm>
+          <a:off x="457200" y="2103120"/>
+          <a:ext cx="6675120" cy="4389120"/>
+        </p:xfrm>
+        <a:graphic>
+          <a:graphicData uri="http://schemas.openxmlformats.org/drawingml/2006/table">
+            <a:tbl>
+              <a:tblPr/>
+              <a:tblGrid>
+                <a:gridCol w="457200"/>
+                <a:gridCol w="1097280"/>
+                <a:gridCol w="1097280"/>
+                <a:gridCol w="731520"/>
+                <a:gridCol w="731520"/>
+                <a:gridCol w="731520"/>
+                <a:gridCol w="731520"/>
+                <a:gridCol w="1097280"/>
+              </a:tblGrid>
+              <a:tr h="399011">
+                <a:tc>
+                  <a:txBody>
+                    <a:bodyPr/>
+                    <a:lstStyle/>
+                    <a:p>
+                      <a:pPr algn="ctr" indent="0" marL="0">
+                        <a:buNone/>
+                      </a:pPr>
+                      <a:r>
+                        <a:rPr lang="en-US" sz="1200" b="1" dirty="0">
+                          <a:solidFill>
+                            <a:srgbClr val="FFFFFF"/>
+                          </a:solidFill>
+                        </a:rPr>
+                        <a:t>Rank</a:t>
+                      </a:r>
+                      <a:endParaRPr lang="en-US" sz="1200" dirty="0"/>
+                    </a:p>
+                  </a:txBody>
+                  <a:tcPr marL="91440" marR="91440" marT="45720" marB="45720" anchor="ctr">
+                    <a:lnL w="12700" cap="flat" cmpd="sng" algn="ctr">
+                      <a:solidFill>
+                        <a:srgbClr val="E2E8F0"/>
+                      </a:solidFill>
+                      <a:prstDash val="solid"/>
+                      <a:round/>
+                      <a:headEnd type="none" w="med" len="med"/>
+                      <a:tailEnd type="none" w="med" len="med"/>
+                    </a:lnL>
+                    <a:lnR w="12700" cap="flat" cmpd="sng" algn="ctr">
+                      <a:solidFill>
+                        <a:srgbClr val="E2E8F0"/>
+                      </a:solidFill>
+                      <a:prstDash val="solid"/>
+                      <a:round/>
+                      <a:headEnd type="none" w="med" len="med"/>
+                      <a:tailEnd type="none" w="med" len="med"/>
+                    </a:lnR>
+                    <a:lnT w="12700" cap="flat" cmpd="sng" algn="ctr">
+                      <a:solidFill>
+                        <a:srgbClr val="E2E8F0"/>
+                      </a:solidFill>
+                      <a:prstDash val="solid"/>
+                      <a:round/>
+                      <a:headEnd type="none" w="med" len="med"/>
+                      <a:tailEnd type="none" w="med" len="med"/>
+                    </a:lnT>
+                    <a:lnB w="12700" cap="flat" cmpd="sng" algn="ctr">
+                      <a:solidFill>
+                        <a:srgbClr val="E2E8F0"/>
+                      </a:solidFill>
+                      <a:prstDash val="solid"/>
+                      <a:round/>
+                      <a:headEnd type="none" w="med" len="med"/>
+                      <a:tailEnd type="none" w="med" len="med"/>
+                    </a:lnB>
+                    <a:solidFill>
+                      <a:srgbClr val="1B365D"/>
+                    </a:solidFill>
+                  </a:tcPr>
+                </a:tc>
+                <a:tc>
+                  <a:txBody>
+                    <a:bodyPr/>
+                    <a:lstStyle/>
+                    <a:p>
+                      <a:pPr algn="ctr" indent="0" marL="0">
+                        <a:buNone/>
+                      </a:pPr>
+                      <a:r>
+                        <a:rPr lang="en-US" sz="1200" b="1" dirty="0">
+                          <a:solidFill>
+                            <a:srgbClr val="FFFFFF"/>
+                          </a:solidFill>
+                        </a:rPr>
+                        <a:t>Territory</a:t>
+                      </a:r>
+                      <a:endParaRPr lang="en-US" sz="1200" dirty="0"/>
+                    </a:p>
+                  </a:txBody>
+                  <a:tcPr marL="91440" marR="91440" marT="45720" marB="45720" anchor="ctr">
+                    <a:lnL w="12700" cap="flat" cmpd="sng" algn="ctr">
+                      <a:solidFill>
+                        <a:srgbClr val="E2E8F0"/>
+                      </a:solidFill>
+                      <a:prstDash val="solid"/>
+                      <a:round/>
+                      <a:headEnd type="none" w="med" len="med"/>
+                      <a:tailEnd type="none" w="med" len="med"/>
+                    </a:lnL>
+                    <a:lnR w="12700" cap="flat" cmpd="sng" algn="ctr">
+                      <a:solidFill>
+                        <a:srgbClr val="E2E8F0"/>
+                      </a:solidFill>
+                      <a:prstDash val="solid"/>
+                      <a:round/>
+                      <a:headEnd type="none" w="med" len="med"/>
+                      <a:tailEnd type="none" w="med" len="med"/>
+                    </a:lnR>
+                    <a:lnT w="12700" cap="flat" cmpd="sng" algn="ctr">
+                      <a:solidFill>
+                        <a:srgbClr val="E2E8F0"/>
+                      </a:solidFill>
+                      <a:prstDash val="solid"/>
+                      <a:round/>
+                      <a:headEnd type="none" w="med" len="med"/>
+                      <a:tailEnd type="none" w="med" len="med"/>
+                    </a:lnT>
+                    <a:lnB w="12700" cap="flat" cmpd="sng" algn="ctr">
+                      <a:solidFill>
+                        <a:srgbClr val="E2E8F0"/>
+                      </a:solidFill>
+                      <a:prstDash val="solid"/>
+                      <a:round/>
+                      <a:headEnd type="none" w="med" len="med"/>
+                      <a:tailEnd type="none" w="med" len="med"/>
+                    </a:lnB>
+                    <a:solidFill>
+                      <a:srgbClr val="1B365D"/>
+                    </a:solidFill>
+                  </a:tcPr>
+                </a:tc>
+                <a:tc>
+                  <a:txBody>
+                    <a:bodyPr/>
+                    <a:lstStyle/>
+                    <a:p>
+                      <a:pPr algn="ctr" indent="0" marL="0">
+                        <a:buNone/>
+                      </a:pPr>
+                      <a:r>
+                        <a:rPr lang="en-US" sz="1200" b="1" dirty="0">
+                          <a:solidFill>
+                            <a:srgbClr val="FFFFFF"/>
+                          </a:solidFill>
+                        </a:rPr>
+                        <a:t>Medical Rep / ADM</a:t>
+                      </a:r>
+                      <a:endParaRPr lang="en-US" sz="1200" dirty="0"/>
+                    </a:p>
+                  </a:txBody>
+                  <a:tcPr marL="91440" marR="91440" marT="45720" marB="45720" anchor="ctr">
+                    <a:lnL w="12700" cap="flat" cmpd="sng" algn="ctr">
+                      <a:solidFill>
+                        <a:srgbClr val="E2E8F0"/>
+                      </a:solidFill>
+                      <a:prstDash val="solid"/>
+                      <a:round/>
+                      <a:headEnd type="none" w="med" len="med"/>
+                      <a:tailEnd type="none" w="med" len="med"/>
+                    </a:lnL>
+                    <a:lnR w="12700" cap="flat" cmpd="sng" algn="ctr">
+                      <a:solidFill>
+                        <a:srgbClr val="E2E8F0"/>
+                      </a:solidFill>
+                      <a:prstDash val="solid"/>
+                      <a:round/>
+                      <a:headEnd type="none" w="med" len="med"/>
+                      <a:tailEnd type="none" w="med" len="med"/>
+                    </a:lnR>
+                    <a:lnT w="12700" cap="flat" cmpd="sng" algn="ctr">
+                      <a:solidFill>
+                        <a:srgbClr val="E2E8F0"/>
+                      </a:solidFill>
+                      <a:prstDash val="solid"/>
+                      <a:round/>
+                      <a:headEnd type="none" w="med" len="med"/>
+                      <a:tailEnd type="none" w="med" len="med"/>
+                    </a:lnT>
+                    <a:lnB w="12700" cap="flat" cmpd="sng" algn="ctr">
+                      <a:solidFill>
+                        <a:srgbClr val="E2E8F0"/>
+                      </a:solidFill>
+                      <a:prstDash val="solid"/>
+                      <a:round/>
+                      <a:headEnd type="none" w="med" len="med"/>
+                      <a:tailEnd type="none" w="med" len="med"/>
+                    </a:lnB>
+                    <a:solidFill>
+                      <a:srgbClr val="1B365D"/>
+                    </a:solidFill>
+                  </a:tcPr>
+                </a:tc>
+                <a:tc>
+                  <a:txBody>
+                    <a:bodyPr/>
+                    <a:lstStyle/>
+                    <a:p>
+                      <a:pPr algn="ctr" indent="0" marL="0">
+                        <a:buNone/>
+                      </a:pPr>
+                      <a:r>
+                        <a:rPr lang="en-US" sz="1200" b="1" dirty="0">
+                          <a:solidFill>
+                            <a:srgbClr val="FFFFFF"/>
+                          </a:solidFill>
+                        </a:rPr>
+                        <a:t>H1 MoAvg</a:t>
+                      </a:r>
+                      <a:endParaRPr lang="en-US" sz="1200" dirty="0"/>
+                    </a:p>
+                  </a:txBody>
+                  <a:tcPr marL="91440" marR="91440" marT="45720" marB="45720" anchor="ctr">
+                    <a:lnL w="12700" cap="flat" cmpd="sng" algn="ctr">
+                      <a:solidFill>
+                        <a:srgbClr val="E2E8F0"/>
+                      </a:solidFill>
+                      <a:prstDash val="solid"/>
+                      <a:round/>
+                      <a:headEnd type="none" w="med" len="med"/>
+                      <a:tailEnd type="none" w="med" len="med"/>
+                    </a:lnL>
+                    <a:lnR w="12700" cap="flat" cmpd="sng" algn="ctr">
+                      <a:solidFill>
+                        <a:srgbClr val="E2E8F0"/>
+                      </a:solidFill>
+                      <a:prstDash val="solid"/>
+                      <a:round/>
+                      <a:headEnd type="none" w="med" len="med"/>
+                      <a:tailEnd type="none" w="med" len="med"/>
+                    </a:lnR>
+                    <a:lnT w="12700" cap="flat" cmpd="sng" algn="ctr">
+                      <a:solidFill>
+                        <a:srgbClr val="E2E8F0"/>
+                      </a:solidFill>
+                      <a:prstDash val="solid"/>
+                      <a:round/>
+                      <a:headEnd type="none" w="med" len="med"/>
+                      <a:tailEnd type="none" w="med" len="med"/>
+                    </a:lnT>
+                    <a:lnB w="12700" cap="flat" cmpd="sng" algn="ctr">
+                      <a:solidFill>
+                        <a:srgbClr val="E2E8F0"/>
+                      </a:solidFill>
+                      <a:prstDash val="solid"/>
+                      <a:round/>
+                      <a:headEnd type="none" w="med" len="med"/>
+                      <a:tailEnd type="none" w="med" len="med"/>
+                    </a:lnB>
+                    <a:solidFill>
+                      <a:srgbClr val="1B365D"/>
+                    </a:solidFill>
+                  </a:tcPr>
+                </a:tc>
+                <a:tc>
+                  <a:txBody>
+                    <a:bodyPr/>
+                    <a:lstStyle/>
+                    <a:p>
+                      <a:pPr algn="ctr" indent="0" marL="0">
+                        <a:buNone/>
+                      </a:pPr>
+                      <a:r>
+                        <a:rPr lang="en-US" sz="1200" b="1" dirty="0">
+                          <a:solidFill>
+                            <a:srgbClr val="FFFFFF"/>
+                          </a:solidFill>
+                        </a:rPr>
+                        <a:t>Q3 MoAvg</a:t>
+                      </a:r>
+                      <a:endParaRPr lang="en-US" sz="1200" dirty="0"/>
+                    </a:p>
+                  </a:txBody>
+                  <a:tcPr marL="91440" marR="91440" marT="45720" marB="45720" anchor="ctr">
+                    <a:lnL w="12700" cap="flat" cmpd="sng" algn="ctr">
+                      <a:solidFill>
+                        <a:srgbClr val="E2E8F0"/>
+                      </a:solidFill>
+                      <a:prstDash val="solid"/>
+                      <a:round/>
+                      <a:headEnd type="none" w="med" len="med"/>
+                      <a:tailEnd type="none" w="med" len="med"/>
+                    </a:lnL>
+                    <a:lnR w="12700" cap="flat" cmpd="sng" algn="ctr">
+                      <a:solidFill>
+                        <a:srgbClr val="E2E8F0"/>
+                      </a:solidFill>
+                      <a:prstDash val="solid"/>
+                      <a:round/>
+                      <a:headEnd type="none" w="med" len="med"/>
+                      <a:tailEnd type="none" w="med" len="med"/>
+                    </a:lnR>
+                    <a:lnT w="12700" cap="flat" cmpd="sng" algn="ctr">
+                      <a:solidFill>
+                        <a:srgbClr val="E2E8F0"/>
+                      </a:solidFill>
+                      <a:prstDash val="solid"/>
+                      <a:round/>
+                      <a:headEnd type="none" w="med" len="med"/>
+                      <a:tailEnd type="none" w="med" len="med"/>
+                    </a:lnT>
+                    <a:lnB w="12700" cap="flat" cmpd="sng" algn="ctr">
+                      <a:solidFill>
+                        <a:srgbClr val="E2E8F0"/>
+                      </a:solidFill>
+                      <a:prstDash val="solid"/>
+                      <a:round/>
+                      <a:headEnd type="none" w="med" len="med"/>
+                      <a:tailEnd type="none" w="med" len="med"/>
+                    </a:lnB>
+                    <a:solidFill>
+                      <a:srgbClr val="1B365D"/>
+                    </a:solidFill>
+                  </a:tcPr>
+                </a:tc>
+                <a:tc>
+                  <a:txBody>
+                    <a:bodyPr/>
+                    <a:lstStyle/>
+                    <a:p>
+                      <a:pPr algn="ctr" indent="0" marL="0">
+                        <a:buNone/>
+                      </a:pPr>
+                      <a:r>
+                        <a:rPr lang="en-US" sz="1200" b="1" dirty="0">
+                          <a:solidFill>
+                            <a:srgbClr val="FFFFFF"/>
+                          </a:solidFill>
+                        </a:rPr>
+                        <a:t>Diff / Mo</a:t>
+                      </a:r>
+                      <a:endParaRPr lang="en-US" sz="1200" dirty="0"/>
+                    </a:p>
+                  </a:txBody>
+                  <a:tcPr marL="91440" marR="91440" marT="45720" marB="45720" anchor="ctr">
+                    <a:lnL w="12700" cap="flat" cmpd="sng" algn="ctr">
+                      <a:solidFill>
+                        <a:srgbClr val="E2E8F0"/>
+                      </a:solidFill>
+                      <a:prstDash val="solid"/>
+                      <a:round/>
+                      <a:headEnd type="none" w="med" len="med"/>
+                      <a:tailEnd type="none" w="med" len="med"/>
+                    </a:lnL>
+                    <a:lnR w="12700" cap="flat" cmpd="sng" algn="ctr">
+                      <a:solidFill>
+                        <a:srgbClr val="E2E8F0"/>
+                      </a:solidFill>
+                      <a:prstDash val="solid"/>
+                      <a:round/>
+                      <a:headEnd type="none" w="med" len="med"/>
+                      <a:tailEnd type="none" w="med" len="med"/>
+                    </a:lnR>
+                    <a:lnT w="12700" cap="flat" cmpd="sng" algn="ctr">
+                      <a:solidFill>
+                        <a:srgbClr val="E2E8F0"/>
+                      </a:solidFill>
+                      <a:prstDash val="solid"/>
+                      <a:round/>
+                      <a:headEnd type="none" w="med" len="med"/>
+                      <a:tailEnd type="none" w="med" len="med"/>
+                    </a:lnT>
+                    <a:lnB w="12700" cap="flat" cmpd="sng" algn="ctr">
+                      <a:solidFill>
+                        <a:srgbClr val="E2E8F0"/>
+                      </a:solidFill>
+                      <a:prstDash val="solid"/>
+                      <a:round/>
+                      <a:headEnd type="none" w="med" len="med"/>
+                      <a:tailEnd type="none" w="med" len="med"/>
+                    </a:lnB>
+                    <a:solidFill>
+                      <a:srgbClr val="1B365D"/>
+                    </a:solidFill>
+                  </a:tcPr>
+                </a:tc>
+                <a:tc>
+                  <a:txBody>
+                    <a:bodyPr/>
+                    <a:lstStyle/>
+                    <a:p>
+                      <a:pPr algn="ctr" indent="0" marL="0">
+                        <a:buNone/>
+                      </a:pPr>
+                      <a:r>
+                        <a:rPr lang="en-US" sz="1200" b="1" dirty="0">
+                          <a:solidFill>
+                            <a:srgbClr val="FFFFFF"/>
+                          </a:solidFill>
+                        </a:rPr>
+                        <a:t>Velocity %</a:t>
+                      </a:r>
+                      <a:endParaRPr lang="en-US" sz="1200" dirty="0"/>
+                    </a:p>
+                  </a:txBody>
+                  <a:tcPr marL="91440" marR="91440" marT="45720" marB="45720" anchor="ctr">
+                    <a:lnL w="12700" cap="flat" cmpd="sng" algn="ctr">
+                      <a:solidFill>
+                        <a:srgbClr val="E2E8F0"/>
+                      </a:solidFill>
+                      <a:prstDash val="solid"/>
+                      <a:round/>
+                      <a:headEnd type="none" w="med" len="med"/>
+                      <a:tailEnd type="none" w="med" len="med"/>
+                    </a:lnL>
+                    <a:lnR w="12700" cap="flat" cmpd="sng" algn="ctr">
+                      <a:solidFill>
+                        <a:srgbClr val="E2E8F0"/>
+                      </a:solidFill>
+                      <a:prstDash val="solid"/>
+                      <a:round/>
+                      <a:headEnd type="none" w="med" len="med"/>
+                      <a:tailEnd type="none" w="med" len="med"/>
+                    </a:lnR>
+                    <a:lnT w="12700" cap="flat" cmpd="sng" algn="ctr">
+                      <a:solidFill>
+                        <a:srgbClr val="E2E8F0"/>
+                      </a:solidFill>
+                      <a:prstDash val="solid"/>
+                      <a:round/>
+                      <a:headEnd type="none" w="med" len="med"/>
+                      <a:tailEnd type="none" w="med" len="med"/>
+                    </a:lnT>
+                    <a:lnB w="12700" cap="flat" cmpd="sng" algn="ctr">
+                      <a:solidFill>
+                        <a:srgbClr val="E2E8F0"/>
+                      </a:solidFill>
+                      <a:prstDash val="solid"/>
+                      <a:round/>
+                      <a:headEnd type="none" w="med" len="med"/>
+                      <a:tailEnd type="none" w="med" len="med"/>
+                    </a:lnB>
+                    <a:solidFill>
+                      <a:srgbClr val="1B365D"/>
+                    </a:solidFill>
+                  </a:tcPr>
+                </a:tc>
+                <a:tc>
+                  <a:txBody>
+                    <a:bodyPr/>
+                    <a:lstStyle/>
+                    <a:p>
+                      <a:pPr algn="ctr" indent="0" marL="0">
+                        <a:buNone/>
+                      </a:pPr>
+                      <a:r>
+                        <a:rPr lang="en-US" sz="1200" b="1" dirty="0">
+                          <a:solidFill>
+                            <a:srgbClr val="FFFFFF"/>
+                          </a:solidFill>
+                        </a:rPr>
+                        <a:t>Performance Tier</a:t>
+                      </a:r>
+                      <a:endParaRPr lang="en-US" sz="1200" dirty="0"/>
+                    </a:p>
+                  </a:txBody>
+                  <a:tcPr marL="91440" marR="91440" marT="45720" marB="45720" anchor="ctr">
+                    <a:lnL w="12700" cap="flat" cmpd="sng" algn="ctr">
+                      <a:solidFill>
+                        <a:srgbClr val="E2E8F0"/>
+                      </a:solidFill>
+                      <a:prstDash val="solid"/>
+                      <a:round/>
+                      <a:headEnd type="none" w="med" len="med"/>
+                      <a:tailEnd type="none" w="med" len="med"/>
+                    </a:lnL>
+                    <a:lnR w="12700" cap="flat" cmpd="sng" algn="ctr">
+                      <a:solidFill>
+                        <a:srgbClr val="E2E8F0"/>
+                      </a:solidFill>
+                      <a:prstDash val="solid"/>
+                      <a:round/>
+                      <a:headEnd type="none" w="med" len="med"/>
+                      <a:tailEnd type="none" w="med" len="med"/>
+                    </a:lnR>
+                    <a:lnT w="12700" cap="flat" cmpd="sng" algn="ctr">
+                      <a:solidFill>
+                        <a:srgbClr val="E2E8F0"/>
+                      </a:solidFill>
+                      <a:prstDash val="solid"/>
+                      <a:round/>
+                      <a:headEnd type="none" w="med" len="med"/>
+                      <a:tailEnd type="none" w="med" len="med"/>
+                    </a:lnT>
+                    <a:lnB w="12700" cap="flat" cmpd="sng" algn="ctr">
+                      <a:solidFill>
+                        <a:srgbClr val="E2E8F0"/>
+                      </a:solidFill>
+                      <a:prstDash val="solid"/>
+                      <a:round/>
+                      <a:headEnd type="none" w="med" len="med"/>
+                      <a:tailEnd type="none" w="med" len="med"/>
+                    </a:lnB>
+                    <a:solidFill>
+                      <a:srgbClr val="1B365D"/>
+                    </a:solidFill>
+                  </a:tcPr>
+                </a:tc>
+              </a:tr>
+              <a:tr h="399011">
+                <a:tc>
+                  <a:txBody>
+                    <a:bodyPr/>
+                    <a:lstStyle/>
+                    <a:p>
+                      <a:pPr algn="ctr" indent="0" marL="0">
+                        <a:buNone/>
+                      </a:pPr>
+                      <a:r>
+                        <a:rPr lang="en-US" sz="1200" b="1" dirty="0">
+                          <a:solidFill>
+                            <a:srgbClr val="000000"/>
+                          </a:solidFill>
+                        </a:rPr>
+                        <a:t>TOP</a:t>
+                      </a:r>
+                      <a:endParaRPr lang="en-US" sz="1200" dirty="0"/>
+                    </a:p>
+                  </a:txBody>
+                  <a:tcPr marL="91440" marR="91440" marT="45720" marB="45720" anchor="ctr">
+                    <a:lnL w="12700" cap="flat" cmpd="sng" algn="ctr">
+                      <a:solidFill>
+                        <a:srgbClr val="E2E8F0"/>
+                      </a:solidFill>
+                      <a:prstDash val="solid"/>
+                      <a:round/>
+                      <a:headEnd type="none" w="med" len="med"/>
+                      <a:tailEnd type="none" w="med" len="med"/>
+                    </a:lnL>
+                    <a:lnR w="12700" cap="flat" cmpd="sng" algn="ctr">
+                      <a:solidFill>
+                        <a:srgbClr val="E2E8F0"/>
+                      </a:solidFill>
+                      <a:prstDash val="solid"/>
+                      <a:round/>
+                      <a:headEnd type="none" w="med" len="med"/>
+                      <a:tailEnd type="none" w="med" len="med"/>
+                    </a:lnR>
+                    <a:lnT w="12700" cap="flat" cmpd="sng" algn="ctr">
+                      <a:solidFill>
+                        <a:srgbClr val="E2E8F0"/>
+                      </a:solidFill>
+                      <a:prstDash val="solid"/>
+                      <a:round/>
+                      <a:headEnd type="none" w="med" len="med"/>
+                      <a:tailEnd type="none" w="med" len="med"/>
+                    </a:lnT>
+                    <a:lnB w="12700" cap="flat" cmpd="sng" algn="ctr">
+                      <a:solidFill>
+                        <a:srgbClr val="E2E8F0"/>
+                      </a:solidFill>
+                      <a:prstDash val="solid"/>
+                      <a:round/>
+                      <a:headEnd type="none" w="med" len="med"/>
+                      <a:tailEnd type="none" w="med" len="med"/>
+                    </a:lnB>
+                    <a:solidFill>
+                      <a:srgbClr val="E8EEF5"/>
+                    </a:solidFill>
+                  </a:tcPr>
+                </a:tc>
+                <a:tc>
+                  <a:txBody>
+                    <a:bodyPr/>
+                    <a:lstStyle/>
+                    <a:p>
+                      <a:pPr algn="ctr" indent="0" marL="0">
+                        <a:buNone/>
+                      </a:pPr>
+                      <a:r>
+                        <a:rPr lang="en-US" sz="1200" b="1" dirty="0">
+                          <a:solidFill>
+                            <a:srgbClr val="000000"/>
+                          </a:solidFill>
+                        </a:rPr>
+                        <a:t>EGYPT TOTAL</a:t>
+                      </a:r>
+                      <a:endParaRPr lang="en-US" sz="1200" dirty="0"/>
+                    </a:p>
+                  </a:txBody>
+                  <a:tcPr marL="91440" marR="91440" marT="45720" marB="45720" anchor="ctr">
+                    <a:lnL w="12700" cap="flat" cmpd="sng" algn="ctr">
+                      <a:solidFill>
+                        <a:srgbClr val="E2E8F0"/>
+                      </a:solidFill>
+                      <a:prstDash val="solid"/>
+                      <a:round/>
+                      <a:headEnd type="none" w="med" len="med"/>
+                      <a:tailEnd type="none" w="med" len="med"/>
+                    </a:lnL>
+                    <a:lnR w="12700" cap="flat" cmpd="sng" algn="ctr">
+                      <a:solidFill>
+                        <a:srgbClr val="E2E8F0"/>
+                      </a:solidFill>
+                      <a:prstDash val="solid"/>
+                      <a:round/>
+                      <a:headEnd type="none" w="med" len="med"/>
+                      <a:tailEnd type="none" w="med" len="med"/>
+                    </a:lnR>
+                    <a:lnT w="12700" cap="flat" cmpd="sng" algn="ctr">
+                      <a:solidFill>
+                        <a:srgbClr val="E2E8F0"/>
+                      </a:solidFill>
+                      <a:prstDash val="solid"/>
+                      <a:round/>
+                      <a:headEnd type="none" w="med" len="med"/>
+                      <a:tailEnd type="none" w="med" len="med"/>
+                    </a:lnT>
+                    <a:lnB w="12700" cap="flat" cmpd="sng" algn="ctr">
+                      <a:solidFill>
+                        <a:srgbClr val="E2E8F0"/>
+                      </a:solidFill>
+                      <a:prstDash val="solid"/>
+                      <a:round/>
+                      <a:headEnd type="none" w="med" len="med"/>
+                      <a:tailEnd type="none" w="med" len="med"/>
+                    </a:lnB>
+                    <a:solidFill>
+                      <a:srgbClr val="E8EEF5"/>
+                    </a:solidFill>
+                  </a:tcPr>
+                </a:tc>
+                <a:tc>
+                  <a:txBody>
+                    <a:bodyPr/>
+                    <a:lstStyle/>
+                    <a:p>
+                      <a:pPr algn="ctr" indent="0" marL="0">
+                        <a:buNone/>
+                      </a:pPr>
+                      <a:r>
+                        <a:rPr lang="en-US" sz="1200" i="1" dirty="0">
+                          <a:solidFill>
+                            <a:srgbClr val="000000"/>
+                          </a:solidFill>
+                        </a:rPr>
+                        <a:t>National Rep Benchmark</a:t>
+                      </a:r>
+                      <a:endParaRPr lang="en-US" sz="1200" dirty="0"/>
+                    </a:p>
+                  </a:txBody>
+                  <a:tcPr marL="91440" marR="91440" marT="45720" marB="45720" anchor="ctr">
+                    <a:lnL w="12700" cap="flat" cmpd="sng" algn="ctr">
+                      <a:solidFill>
+                        <a:srgbClr val="E2E8F0"/>
+                      </a:solidFill>
+                      <a:prstDash val="solid"/>
+                      <a:round/>
+                      <a:headEnd type="none" w="med" len="med"/>
+                      <a:tailEnd type="none" w="med" len="med"/>
+                    </a:lnL>
+                    <a:lnR w="12700" cap="flat" cmpd="sng" algn="ctr">
+                      <a:solidFill>
+                        <a:srgbClr val="E2E8F0"/>
+                      </a:solidFill>
+                      <a:prstDash val="solid"/>
+                      <a:round/>
+                      <a:headEnd type="none" w="med" len="med"/>
+                      <a:tailEnd type="none" w="med" len="med"/>
+                    </a:lnR>
+                    <a:lnT w="12700" cap="flat" cmpd="sng" algn="ctr">
+                      <a:solidFill>
+                        <a:srgbClr val="E2E8F0"/>
+                      </a:solidFill>
+                      <a:prstDash val="solid"/>
+                      <a:round/>
+                      <a:headEnd type="none" w="med" len="med"/>
+                      <a:tailEnd type="none" w="med" len="med"/>
+                    </a:lnT>
+                    <a:lnB w="12700" cap="flat" cmpd="sng" algn="ctr">
+                      <a:solidFill>
+                        <a:srgbClr val="E2E8F0"/>
+                      </a:solidFill>
+                      <a:prstDash val="solid"/>
+                      <a:round/>
+                      <a:headEnd type="none" w="med" len="med"/>
+                      <a:tailEnd type="none" w="med" len="med"/>
+                    </a:lnB>
+                    <a:solidFill>
+                      <a:srgbClr val="E8EEF5"/>
+                    </a:solidFill>
+                  </a:tcPr>
+                </a:tc>
+                <a:tc>
+                  <a:txBody>
+                    <a:bodyPr/>
+                    <a:lstStyle/>
+                    <a:p>
+                      <a:pPr algn="ctr" indent="0" marL="0">
+                        <a:buNone/>
+                      </a:pPr>
+                      <a:r>
+                        <a:rPr lang="en-US" sz="1200" b="1" dirty="0">
+                          <a:solidFill>
+                            <a:srgbClr val="000000"/>
+                          </a:solidFill>
+                        </a:rPr>
+                        <a:t>138,315</a:t>
+                      </a:r>
+                      <a:endParaRPr lang="en-US" sz="1200" dirty="0"/>
+                    </a:p>
+                  </a:txBody>
+                  <a:tcPr marL="91440" marR="91440" marT="45720" marB="45720" anchor="ctr">
+                    <a:lnL w="12700" cap="flat" cmpd="sng" algn="ctr">
+                      <a:solidFill>
+                        <a:srgbClr val="E2E8F0"/>
+                      </a:solidFill>
+                      <a:prstDash val="solid"/>
+                      <a:round/>
+                      <a:headEnd type="none" w="med" len="med"/>
+                      <a:tailEnd type="none" w="med" len="med"/>
+                    </a:lnL>
+                    <a:lnR w="12700" cap="flat" cmpd="sng" algn="ctr">
+                      <a:solidFill>
+                        <a:srgbClr val="E2E8F0"/>
+                      </a:solidFill>
+                      <a:prstDash val="solid"/>
+                      <a:round/>
+                      <a:headEnd type="none" w="med" len="med"/>
+                      <a:tailEnd type="none" w="med" len="med"/>
+                    </a:lnR>
+                    <a:lnT w="12700" cap="flat" cmpd="sng" algn="ctr">
+                      <a:solidFill>
+                        <a:srgbClr val="E2E8F0"/>
+                      </a:solidFill>
+                      <a:prstDash val="solid"/>
+                      <a:round/>
+                      <a:headEnd type="none" w="med" len="med"/>
+                      <a:tailEnd type="none" w="med" len="med"/>
+                    </a:lnT>
+                    <a:lnB w="12700" cap="flat" cmpd="sng" algn="ctr">
+                      <a:solidFill>
+                        <a:srgbClr val="E2E8F0"/>
+                      </a:solidFill>
+                      <a:prstDash val="solid"/>
+                      <a:round/>
+                      <a:headEnd type="none" w="med" len="med"/>
+                      <a:tailEnd type="none" w="med" len="med"/>
+                    </a:lnB>
+                    <a:solidFill>
+                      <a:srgbClr val="E8EEF5"/>
+                    </a:solidFill>
+                  </a:tcPr>
+                </a:tc>
+                <a:tc>
+                  <a:txBody>
+                    <a:bodyPr/>
+                    <a:lstStyle/>
+                    <a:p>
+                      <a:pPr algn="ctr" indent="0" marL="0">
+                        <a:buNone/>
+                      </a:pPr>
+                      <a:r>
+                        <a:rPr lang="en-US" sz="1200" b="1" dirty="0">
+                          <a:solidFill>
+                            <a:srgbClr val="000000"/>
+                          </a:solidFill>
+                        </a:rPr>
+                        <a:t>156,126</a:t>
+                      </a:r>
+                      <a:endParaRPr lang="en-US" sz="1200" dirty="0"/>
+                    </a:p>
+                  </a:txBody>
+                  <a:tcPr marL="91440" marR="91440" marT="45720" marB="45720" anchor="ctr">
+                    <a:lnL w="12700" cap="flat" cmpd="sng" algn="ctr">
+                      <a:solidFill>
+                        <a:srgbClr val="E2E8F0"/>
+                      </a:solidFill>
+                      <a:prstDash val="solid"/>
+                      <a:round/>
+                      <a:headEnd type="none" w="med" len="med"/>
+                      <a:tailEnd type="none" w="med" len="med"/>
+                    </a:lnL>
+                    <a:lnR w="12700" cap="flat" cmpd="sng" algn="ctr">
+                      <a:solidFill>
+                        <a:srgbClr val="E2E8F0"/>
+                      </a:solidFill>
+                      <a:prstDash val="solid"/>
+                      <a:round/>
+                      <a:headEnd type="none" w="med" len="med"/>
+                      <a:tailEnd type="none" w="med" len="med"/>
+                    </a:lnR>
+                    <a:lnT w="12700" cap="flat" cmpd="sng" algn="ctr">
+                      <a:solidFill>
+                        <a:srgbClr val="E2E8F0"/>
+                      </a:solidFill>
+                      <a:prstDash val="solid"/>
+                      <a:round/>
+                      <a:headEnd type="none" w="med" len="med"/>
+                      <a:tailEnd type="none" w="med" len="med"/>
+                    </a:lnT>
+                    <a:lnB w="12700" cap="flat" cmpd="sng" algn="ctr">
+                      <a:solidFill>
+                        <a:srgbClr val="E2E8F0"/>
+                      </a:solidFill>
+                      <a:prstDash val="solid"/>
+                      <a:round/>
+                      <a:headEnd type="none" w="med" len="med"/>
+                      <a:tailEnd type="none" w="med" len="med"/>
+                    </a:lnB>
+                    <a:solidFill>
+                      <a:srgbClr val="E8EEF5"/>
+                    </a:solidFill>
+                  </a:tcPr>
+                </a:tc>
+                <a:tc>
+                  <a:txBody>
+                    <a:bodyPr/>
+                    <a:lstStyle/>
+                    <a:p>
+                      <a:pPr algn="ctr" indent="0" marL="0">
+                        <a:buNone/>
+                      </a:pPr>
+                      <a:r>
+                        <a:rPr lang="en-US" sz="1200" b="1" dirty="0">
+                          <a:solidFill>
+                            <a:srgbClr val="000000"/>
+                          </a:solidFill>
+                        </a:rPr>
+                        <a:t>+17,811</a:t>
+                      </a:r>
+                      <a:endParaRPr lang="en-US" sz="1200" dirty="0"/>
+                    </a:p>
+                  </a:txBody>
+                  <a:tcPr marL="91440" marR="91440" marT="45720" marB="45720" anchor="ctr">
+                    <a:lnL w="12700" cap="flat" cmpd="sng" algn="ctr">
+                      <a:solidFill>
+                        <a:srgbClr val="E2E8F0"/>
+                      </a:solidFill>
+                      <a:prstDash val="solid"/>
+                      <a:round/>
+                      <a:headEnd type="none" w="med" len="med"/>
+                      <a:tailEnd type="none" w="med" len="med"/>
+                    </a:lnL>
+                    <a:lnR w="12700" cap="flat" cmpd="sng" algn="ctr">
+                      <a:solidFill>
+                        <a:srgbClr val="E2E8F0"/>
+                      </a:solidFill>
+                      <a:prstDash val="solid"/>
+                      <a:round/>
+                      <a:headEnd type="none" w="med" len="med"/>
+                      <a:tailEnd type="none" w="med" len="med"/>
+                    </a:lnR>
+                    <a:lnT w="12700" cap="flat" cmpd="sng" algn="ctr">
+                      <a:solidFill>
+                        <a:srgbClr val="E2E8F0"/>
+                      </a:solidFill>
+                      <a:prstDash val="solid"/>
+                      <a:round/>
+                      <a:headEnd type="none" w="med" len="med"/>
+                      <a:tailEnd type="none" w="med" len="med"/>
+                    </a:lnT>
+                    <a:lnB w="12700" cap="flat" cmpd="sng" algn="ctr">
+                      <a:solidFill>
+                        <a:srgbClr val="E2E8F0"/>
+                      </a:solidFill>
+                      <a:prstDash val="solid"/>
+                      <a:round/>
+                      <a:headEnd type="none" w="med" len="med"/>
+                      <a:tailEnd type="none" w="med" len="med"/>
+                    </a:lnB>
+                    <a:solidFill>
+                      <a:srgbClr val="E8EEF5"/>
+                    </a:solidFill>
+                  </a:tcPr>
+                </a:tc>
+                <a:tc>
+                  <a:txBody>
+                    <a:bodyPr/>
+                    <a:lstStyle/>
+                    <a:p>
+                      <a:pPr algn="ctr" indent="0" marL="0">
+                        <a:buNone/>
+                      </a:pPr>
+                      <a:r>
+                        <a:rPr lang="en-US" sz="1200" b="1" dirty="0">
+                          <a:solidFill>
+                            <a:srgbClr val="28A745"/>
+                          </a:solidFill>
+                        </a:rPr>
+                        <a:t>+12.9%</a:t>
+                      </a:r>
+                      <a:endParaRPr lang="en-US" sz="1200" dirty="0"/>
+                    </a:p>
+                  </a:txBody>
+                  <a:tcPr marL="91440" marR="91440" marT="45720" marB="45720" anchor="ctr">
+                    <a:lnL w="12700" cap="flat" cmpd="sng" algn="ctr">
+                      <a:solidFill>
+                        <a:srgbClr val="E2E8F0"/>
+                      </a:solidFill>
+                      <a:prstDash val="solid"/>
+                      <a:round/>
+                      <a:headEnd type="none" w="med" len="med"/>
+                      <a:tailEnd type="none" w="med" len="med"/>
+                    </a:lnL>
+                    <a:lnR w="12700" cap="flat" cmpd="sng" algn="ctr">
+                      <a:solidFill>
+                        <a:srgbClr val="E2E8F0"/>
+                      </a:solidFill>
+                      <a:prstDash val="solid"/>
+                      <a:round/>
+                      <a:headEnd type="none" w="med" len="med"/>
+                      <a:tailEnd type="none" w="med" len="med"/>
+                    </a:lnR>
+                    <a:lnT w="12700" cap="flat" cmpd="sng" algn="ctr">
+                      <a:solidFill>
+                        <a:srgbClr val="E2E8F0"/>
+                      </a:solidFill>
+                      <a:prstDash val="solid"/>
+                      <a:round/>
+                      <a:headEnd type="none" w="med" len="med"/>
+                      <a:tailEnd type="none" w="med" len="med"/>
+                    </a:lnT>
+                    <a:lnB w="12700" cap="flat" cmpd="sng" algn="ctr">
+                      <a:solidFill>
+                        <a:srgbClr val="E2E8F0"/>
+                      </a:solidFill>
+                      <a:prstDash val="solid"/>
+                      <a:round/>
+                      <a:headEnd type="none" w="med" len="med"/>
+                      <a:tailEnd type="none" w="med" len="med"/>
+                    </a:lnB>
+                    <a:solidFill>
+                      <a:srgbClr val="E8EEF5"/>
+                    </a:solidFill>
+                  </a:tcPr>
+                </a:tc>
+                <a:tc>
+                  <a:txBody>
+                    <a:bodyPr/>
+                    <a:lstStyle/>
+                    <a:p>
+                      <a:pPr algn="ctr" indent="0" marL="0">
+                        <a:buNone/>
+                      </a:pPr>
+                      <a:r>
+                        <a:rPr lang="en-US" sz="1200" b="1" dirty="0">
+                          <a:solidFill>
+                            <a:srgbClr val="1B365D"/>
+                          </a:solidFill>
+                        </a:rPr>
+                        <a:t>NATIONAL BENCHMARK</a:t>
+                      </a:r>
+                      <a:endParaRPr lang="en-US" sz="1200" dirty="0"/>
+                    </a:p>
+                  </a:txBody>
+                  <a:tcPr marL="91440" marR="91440" marT="45720" marB="45720" anchor="ctr">
+                    <a:lnL w="12700" cap="flat" cmpd="sng" algn="ctr">
+                      <a:solidFill>
+                        <a:srgbClr val="E2E8F0"/>
+                      </a:solidFill>
+                      <a:prstDash val="solid"/>
+                      <a:round/>
+                      <a:headEnd type="none" w="med" len="med"/>
+                      <a:tailEnd type="none" w="med" len="med"/>
+                    </a:lnL>
+                    <a:lnR w="12700" cap="flat" cmpd="sng" algn="ctr">
+                      <a:solidFill>
+                        <a:srgbClr val="E2E8F0"/>
+                      </a:solidFill>
+                      <a:prstDash val="solid"/>
+                      <a:round/>
+                      <a:headEnd type="none" w="med" len="med"/>
+                      <a:tailEnd type="none" w="med" len="med"/>
+                    </a:lnR>
+                    <a:lnT w="12700" cap="flat" cmpd="sng" algn="ctr">
+                      <a:solidFill>
+                        <a:srgbClr val="E2E8F0"/>
+                      </a:solidFill>
+                      <a:prstDash val="solid"/>
+                      <a:round/>
+                      <a:headEnd type="none" w="med" len="med"/>
+                      <a:tailEnd type="none" w="med" len="med"/>
+                    </a:lnT>
+                    <a:lnB w="12700" cap="flat" cmpd="sng" algn="ctr">
+                      <a:solidFill>
+                        <a:srgbClr val="E2E8F0"/>
+                      </a:solidFill>
+                      <a:prstDash val="solid"/>
+                      <a:round/>
+                      <a:headEnd type="none" w="med" len="med"/>
+                      <a:tailEnd type="none" w="med" len="med"/>
+                    </a:lnB>
+                    <a:solidFill>
+                      <a:srgbClr val="E8EEF5"/>
+                    </a:solidFill>
+                  </a:tcPr>
+                </a:tc>
+              </a:tr>
+              <a:tr h="399011">
+                <a:tc>
+                  <a:txBody>
+                    <a:bodyPr/>
+                    <a:lstStyle/>
+                    <a:p>
+                      <a:pPr algn="ctr" indent="0" marL="0">
+                        <a:buNone/>
+                      </a:pPr>
+                      <a:r>
+                        <a:rPr lang="en-US" sz="800" b="1" dirty="0">
+                          <a:solidFill>
+                            <a:srgbClr val="000000"/>
+                          </a:solidFill>
+                        </a:rPr>
+                        <a:t>1</a:t>
+                      </a:r>
+                      <a:endParaRPr lang="en-US" sz="800" dirty="0"/>
+                    </a:p>
+                  </a:txBody>
+                  <a:tcPr marL="91440" marR="91440" marT="45720" marB="45720" anchor="ctr">
+                    <a:lnL w="12700" cap="flat" cmpd="sng" algn="ctr">
+                      <a:solidFill>
+                        <a:srgbClr val="E2E8F0"/>
+                      </a:solidFill>
+                      <a:prstDash val="solid"/>
+                      <a:round/>
+                      <a:headEnd type="none" w="med" len="med"/>
+                      <a:tailEnd type="none" w="med" len="med"/>
+                    </a:lnL>
+                    <a:lnR w="12700" cap="flat" cmpd="sng" algn="ctr">
+                      <a:solidFill>
+                        <a:srgbClr val="E2E8F0"/>
+                      </a:solidFill>
+                      <a:prstDash val="solid"/>
+                      <a:round/>
+                      <a:headEnd type="none" w="med" len="med"/>
+                      <a:tailEnd type="none" w="med" len="med"/>
+                    </a:lnR>
+                    <a:lnT w="12700" cap="flat" cmpd="sng" algn="ctr">
+                      <a:solidFill>
+                        <a:srgbClr val="E2E8F0"/>
+                      </a:solidFill>
+                      <a:prstDash val="solid"/>
+                      <a:round/>
+                      <a:headEnd type="none" w="med" len="med"/>
+                      <a:tailEnd type="none" w="med" len="med"/>
+                    </a:lnT>
+                    <a:lnB w="12700" cap="flat" cmpd="sng" algn="ctr">
+                      <a:solidFill>
+                        <a:srgbClr val="E2E8F0"/>
+                      </a:solidFill>
+                      <a:prstDash val="solid"/>
+                      <a:round/>
+                      <a:headEnd type="none" w="med" len="med"/>
+                      <a:tailEnd type="none" w="med" len="med"/>
+                    </a:lnB>
+                  </a:tcPr>
+                </a:tc>
+                <a:tc>
+                  <a:txBody>
+                    <a:bodyPr/>
+                    <a:lstStyle/>
+                    <a:p>
+                      <a:pPr algn="ctr" indent="0" marL="0">
+                        <a:buNone/>
+                      </a:pPr>
+                      <a:r>
+                        <a:rPr lang="en-US" sz="800" dirty="0">
+                          <a:solidFill>
+                            <a:srgbClr val="000000"/>
+                          </a:solidFill>
+                        </a:rPr>
+                        <a:t>Cairo</a:t>
+                      </a:r>
+                      <a:endParaRPr lang="en-US" sz="800" dirty="0"/>
+                    </a:p>
+                  </a:txBody>
+                  <a:tcPr marL="91440" marR="91440" marT="45720" marB="45720" anchor="ctr">
+                    <a:lnL w="12700" cap="flat" cmpd="sng" algn="ctr">
+                      <a:solidFill>
+                        <a:srgbClr val="E2E8F0"/>
+                      </a:solidFill>
+                      <a:prstDash val="solid"/>
+                      <a:round/>
+                      <a:headEnd type="none" w="med" len="med"/>
+                      <a:tailEnd type="none" w="med" len="med"/>
+                    </a:lnL>
+                    <a:lnR w="12700" cap="flat" cmpd="sng" algn="ctr">
+                      <a:solidFill>
+                        <a:srgbClr val="E2E8F0"/>
+                      </a:solidFill>
+                      <a:prstDash val="solid"/>
+                      <a:round/>
+                      <a:headEnd type="none" w="med" len="med"/>
+                      <a:tailEnd type="none" w="med" len="med"/>
+                    </a:lnR>
+                    <a:lnT w="12700" cap="flat" cmpd="sng" algn="ctr">
+                      <a:solidFill>
+                        <a:srgbClr val="E2E8F0"/>
+                      </a:solidFill>
+                      <a:prstDash val="solid"/>
+                      <a:round/>
+                      <a:headEnd type="none" w="med" len="med"/>
+                      <a:tailEnd type="none" w="med" len="med"/>
+                    </a:lnT>
+                    <a:lnB w="12700" cap="flat" cmpd="sng" algn="ctr">
+                      <a:solidFill>
+                        <a:srgbClr val="E2E8F0"/>
+                      </a:solidFill>
+                      <a:prstDash val="solid"/>
+                      <a:round/>
+                      <a:headEnd type="none" w="med" len="med"/>
+                      <a:tailEnd type="none" w="med" len="med"/>
+                    </a:lnB>
+                  </a:tcPr>
+                </a:tc>
+                <a:tc>
+                  <a:txBody>
+                    <a:bodyPr/>
+                    <a:lstStyle/>
+                    <a:p>
+                      <a:pPr algn="ctr" indent="0" marL="0">
+                        <a:buNone/>
+                      </a:pPr>
+                      <a:r>
+                        <a:rPr lang="en-US" sz="800" dirty="0">
+                          <a:solidFill>
+                            <a:srgbClr val="000000"/>
+                          </a:solidFill>
+                        </a:rPr>
+                        <a:t>NOHER ADEL</a:t>
+                      </a:r>
+                      <a:endParaRPr lang="en-US" sz="800" dirty="0"/>
+                    </a:p>
+                  </a:txBody>
+                  <a:tcPr marL="91440" marR="91440" marT="45720" marB="45720" anchor="ctr">
+                    <a:lnL w="12700" cap="flat" cmpd="sng" algn="ctr">
+                      <a:solidFill>
+                        <a:srgbClr val="E2E8F0"/>
+                      </a:solidFill>
+                      <a:prstDash val="solid"/>
+                      <a:round/>
+                      <a:headEnd type="none" w="med" len="med"/>
+                      <a:tailEnd type="none" w="med" len="med"/>
+                    </a:lnL>
+                    <a:lnR w="12700" cap="flat" cmpd="sng" algn="ctr">
+                      <a:solidFill>
+                        <a:srgbClr val="E2E8F0"/>
+                      </a:solidFill>
+                      <a:prstDash val="solid"/>
+                      <a:round/>
+                      <a:headEnd type="none" w="med" len="med"/>
+                      <a:tailEnd type="none" w="med" len="med"/>
+                    </a:lnR>
+                    <a:lnT w="12700" cap="flat" cmpd="sng" algn="ctr">
+                      <a:solidFill>
+                        <a:srgbClr val="E2E8F0"/>
+                      </a:solidFill>
+                      <a:prstDash val="solid"/>
+                      <a:round/>
+                      <a:headEnd type="none" w="med" len="med"/>
+                      <a:tailEnd type="none" w="med" len="med"/>
+                    </a:lnT>
+                    <a:lnB w="12700" cap="flat" cmpd="sng" algn="ctr">
+                      <a:solidFill>
+                        <a:srgbClr val="E2E8F0"/>
+                      </a:solidFill>
+                      <a:prstDash val="solid"/>
+                      <a:round/>
+                      <a:headEnd type="none" w="med" len="med"/>
+                      <a:tailEnd type="none" w="med" len="med"/>
+                    </a:lnB>
+                  </a:tcPr>
+                </a:tc>
+                <a:tc>
+                  <a:txBody>
+                    <a:bodyPr/>
+                    <a:lstStyle/>
+                    <a:p>
+                      <a:pPr algn="ctr" indent="0" marL="0">
+                        <a:buNone/>
+                      </a:pPr>
+                      <a:r>
+                        <a:rPr lang="en-US" sz="800" dirty="0">
+                          <a:solidFill>
+                            <a:srgbClr val="000000"/>
+                          </a:solidFill>
+                        </a:rPr>
+                        <a:t>8,758</a:t>
+                      </a:r>
+                      <a:endParaRPr lang="en-US" sz="800" dirty="0"/>
+                    </a:p>
+                  </a:txBody>
+                  <a:tcPr marL="91440" marR="91440" marT="45720" marB="45720" anchor="ctr">
+                    <a:lnL w="12700" cap="flat" cmpd="sng" algn="ctr">
+                      <a:solidFill>
+                        <a:srgbClr val="E2E8F0"/>
+                      </a:solidFill>
+                      <a:prstDash val="solid"/>
+                      <a:round/>
+                      <a:headEnd type="none" w="med" len="med"/>
+                      <a:tailEnd type="none" w="med" len="med"/>
+                    </a:lnL>
+                    <a:lnR w="12700" cap="flat" cmpd="sng" algn="ctr">
+                      <a:solidFill>
+                        <a:srgbClr val="E2E8F0"/>
+                      </a:solidFill>
+                      <a:prstDash val="solid"/>
+                      <a:round/>
+                      <a:headEnd type="none" w="med" len="med"/>
+                      <a:tailEnd type="none" w="med" len="med"/>
+                    </a:lnR>
+                    <a:lnT w="12700" cap="flat" cmpd="sng" algn="ctr">
+                      <a:solidFill>
+                        <a:srgbClr val="E2E8F0"/>
+                      </a:solidFill>
+                      <a:prstDash val="solid"/>
+                      <a:round/>
+                      <a:headEnd type="none" w="med" len="med"/>
+                      <a:tailEnd type="none" w="med" len="med"/>
+                    </a:lnT>
+                    <a:lnB w="12700" cap="flat" cmpd="sng" algn="ctr">
+                      <a:solidFill>
+                        <a:srgbClr val="E2E8F0"/>
+                      </a:solidFill>
+                      <a:prstDash val="solid"/>
+                      <a:round/>
+                      <a:headEnd type="none" w="med" len="med"/>
+                      <a:tailEnd type="none" w="med" len="med"/>
+                    </a:lnB>
+                  </a:tcPr>
+                </a:tc>
+                <a:tc>
+                  <a:txBody>
+                    <a:bodyPr/>
+                    <a:lstStyle/>
+                    <a:p>
+                      <a:pPr algn="ctr" indent="0" marL="0">
+                        <a:buNone/>
+                      </a:pPr>
+                      <a:r>
+                        <a:rPr lang="en-US" sz="800" b="1" dirty="0">
+                          <a:solidFill>
+                            <a:srgbClr val="000000"/>
+                          </a:solidFill>
+                        </a:rPr>
+                        <a:t>13,898</a:t>
+                      </a:r>
+                      <a:endParaRPr lang="en-US" sz="800" dirty="0"/>
+                    </a:p>
+                  </a:txBody>
+                  <a:tcPr marL="91440" marR="91440" marT="45720" marB="45720" anchor="ctr">
+                    <a:lnL w="12700" cap="flat" cmpd="sng" algn="ctr">
+                      <a:solidFill>
+                        <a:srgbClr val="E2E8F0"/>
+                      </a:solidFill>
+                      <a:prstDash val="solid"/>
+                      <a:round/>
+                      <a:headEnd type="none" w="med" len="med"/>
+                      <a:tailEnd type="none" w="med" len="med"/>
+                    </a:lnL>
+                    <a:lnR w="12700" cap="flat" cmpd="sng" algn="ctr">
+                      <a:solidFill>
+                        <a:srgbClr val="E2E8F0"/>
+                      </a:solidFill>
+                      <a:prstDash val="solid"/>
+                      <a:round/>
+                      <a:headEnd type="none" w="med" len="med"/>
+                      <a:tailEnd type="none" w="med" len="med"/>
+                    </a:lnR>
+                    <a:lnT w="12700" cap="flat" cmpd="sng" algn="ctr">
+                      <a:solidFill>
+                        <a:srgbClr val="E2E8F0"/>
+                      </a:solidFill>
+                      <a:prstDash val="solid"/>
+                      <a:round/>
+                      <a:headEnd type="none" w="med" len="med"/>
+                      <a:tailEnd type="none" w="med" len="med"/>
+                    </a:lnT>
+                    <a:lnB w="12700" cap="flat" cmpd="sng" algn="ctr">
+                      <a:solidFill>
+                        <a:srgbClr val="E2E8F0"/>
+                      </a:solidFill>
+                      <a:prstDash val="solid"/>
+                      <a:round/>
+                      <a:headEnd type="none" w="med" len="med"/>
+                      <a:tailEnd type="none" w="med" len="med"/>
+                    </a:lnB>
+                  </a:tcPr>
+                </a:tc>
+                <a:tc>
+                  <a:txBody>
+                    <a:bodyPr/>
+                    <a:lstStyle/>
+                    <a:p>
+                      <a:pPr algn="ctr" indent="0" marL="0">
+                        <a:buNone/>
+                      </a:pPr>
+                      <a:r>
+                        <a:rPr lang="en-US" sz="800" dirty="0">
+                          <a:solidFill>
+                            <a:srgbClr val="28A745"/>
+                          </a:solidFill>
+                        </a:rPr>
+                        <a:t>+5,140</a:t>
+                      </a:r>
+                      <a:endParaRPr lang="en-US" sz="800" dirty="0"/>
+                    </a:p>
+                  </a:txBody>
+                  <a:tcPr marL="91440" marR="91440" marT="45720" marB="45720" anchor="ctr">
+                    <a:lnL w="12700" cap="flat" cmpd="sng" algn="ctr">
+                      <a:solidFill>
+                        <a:srgbClr val="E2E8F0"/>
+                      </a:solidFill>
+                      <a:prstDash val="solid"/>
+                      <a:round/>
+                      <a:headEnd type="none" w="med" len="med"/>
+                      <a:tailEnd type="none" w="med" len="med"/>
+                    </a:lnL>
+                    <a:lnR w="12700" cap="flat" cmpd="sng" algn="ctr">
+                      <a:solidFill>
+                        <a:srgbClr val="E2E8F0"/>
+                      </a:solidFill>
+                      <a:prstDash val="solid"/>
+                      <a:round/>
+                      <a:headEnd type="none" w="med" len="med"/>
+                      <a:tailEnd type="none" w="med" len="med"/>
+                    </a:lnR>
+                    <a:lnT w="12700" cap="flat" cmpd="sng" algn="ctr">
+                      <a:solidFill>
+                        <a:srgbClr val="E2E8F0"/>
+                      </a:solidFill>
+                      <a:prstDash val="solid"/>
+                      <a:round/>
+                      <a:headEnd type="none" w="med" len="med"/>
+                      <a:tailEnd type="none" w="med" len="med"/>
+                    </a:lnT>
+                    <a:lnB w="12700" cap="flat" cmpd="sng" algn="ctr">
+                      <a:solidFill>
+                        <a:srgbClr val="E2E8F0"/>
+                      </a:solidFill>
+                      <a:prstDash val="solid"/>
+                      <a:round/>
+                      <a:headEnd type="none" w="med" len="med"/>
+                      <a:tailEnd type="none" w="med" len="med"/>
+                    </a:lnB>
+                  </a:tcPr>
+                </a:tc>
+                <a:tc>
+                  <a:txBody>
+                    <a:bodyPr/>
+                    <a:lstStyle/>
+                    <a:p>
+                      <a:pPr algn="ctr" indent="0" marL="0">
+                        <a:buNone/>
+                      </a:pPr>
+                      <a:r>
+                        <a:rPr lang="en-US" sz="850" b="1" dirty="0">
+                          <a:solidFill>
+                            <a:srgbClr val="28A745"/>
+                          </a:solidFill>
+                        </a:rPr>
+                        <a:t>+58.7%</a:t>
+                      </a:r>
+                      <a:endParaRPr lang="en-US" sz="850" dirty="0"/>
+                    </a:p>
+                  </a:txBody>
+                  <a:tcPr marL="91440" marR="91440" marT="45720" marB="45720" anchor="ctr">
+                    <a:lnL w="12700" cap="flat" cmpd="sng" algn="ctr">
+                      <a:solidFill>
+                        <a:srgbClr val="E2E8F0"/>
+                      </a:solidFill>
+                      <a:prstDash val="solid"/>
+                      <a:round/>
+                      <a:headEnd type="none" w="med" len="med"/>
+                      <a:tailEnd type="none" w="med" len="med"/>
+                    </a:lnL>
+                    <a:lnR w="12700" cap="flat" cmpd="sng" algn="ctr">
+                      <a:solidFill>
+                        <a:srgbClr val="E2E8F0"/>
+                      </a:solidFill>
+                      <a:prstDash val="solid"/>
+                      <a:round/>
+                      <a:headEnd type="none" w="med" len="med"/>
+                      <a:tailEnd type="none" w="med" len="med"/>
+                    </a:lnR>
+                    <a:lnT w="12700" cap="flat" cmpd="sng" algn="ctr">
+                      <a:solidFill>
+                        <a:srgbClr val="E2E8F0"/>
+                      </a:solidFill>
+                      <a:prstDash val="solid"/>
+                      <a:round/>
+                      <a:headEnd type="none" w="med" len="med"/>
+                      <a:tailEnd type="none" w="med" len="med"/>
+                    </a:lnT>
+                    <a:lnB w="12700" cap="flat" cmpd="sng" algn="ctr">
+                      <a:solidFill>
+                        <a:srgbClr val="E2E8F0"/>
+                      </a:solidFill>
+                      <a:prstDash val="solid"/>
+                      <a:round/>
+                      <a:headEnd type="none" w="med" len="med"/>
+                      <a:tailEnd type="none" w="med" len="med"/>
+                    </a:lnB>
+                  </a:tcPr>
+                </a:tc>
+                <a:tc>
+                  <a:txBody>
+                    <a:bodyPr/>
+                    <a:lstStyle/>
+                    <a:p>
+                      <a:pPr algn="ctr" indent="0" marL="0">
+                        <a:buNone/>
+                      </a:pPr>
+                      <a:r>
+                        <a:rPr lang="en-US" sz="750" b="1" dirty="0">
+                          <a:solidFill>
+                            <a:srgbClr val="000000"/>
+                          </a:solidFill>
+                        </a:rPr>
+                        <a:t>Tier 1: Accelerator 🚀</a:t>
+                      </a:r>
+                      <a:endParaRPr lang="en-US" sz="750" dirty="0"/>
+                    </a:p>
+                  </a:txBody>
+                  <a:tcPr marL="91440" marR="91440" marT="45720" marB="45720" anchor="ctr">
+                    <a:lnL w="12700" cap="flat" cmpd="sng" algn="ctr">
+                      <a:solidFill>
+                        <a:srgbClr val="E2E8F0"/>
+                      </a:solidFill>
+                      <a:prstDash val="solid"/>
+                      <a:round/>
+                      <a:headEnd type="none" w="med" len="med"/>
+                      <a:tailEnd type="none" w="med" len="med"/>
+                    </a:lnL>
+                    <a:lnR w="12700" cap="flat" cmpd="sng" algn="ctr">
+                      <a:solidFill>
+                        <a:srgbClr val="E2E8F0"/>
+                      </a:solidFill>
+                      <a:prstDash val="solid"/>
+                      <a:round/>
+                      <a:headEnd type="none" w="med" len="med"/>
+                      <a:tailEnd type="none" w="med" len="med"/>
+                    </a:lnR>
+                    <a:lnT w="12700" cap="flat" cmpd="sng" algn="ctr">
+                      <a:solidFill>
+                        <a:srgbClr val="E2E8F0"/>
+                      </a:solidFill>
+                      <a:prstDash val="solid"/>
+                      <a:round/>
+                      <a:headEnd type="none" w="med" len="med"/>
+                      <a:tailEnd type="none" w="med" len="med"/>
+                    </a:lnT>
+                    <a:lnB w="12700" cap="flat" cmpd="sng" algn="ctr">
+                      <a:solidFill>
+                        <a:srgbClr val="E2E8F0"/>
+                      </a:solidFill>
+                      <a:prstDash val="solid"/>
+                      <a:round/>
+                      <a:headEnd type="none" w="med" len="med"/>
+                      <a:tailEnd type="none" w="med" len="med"/>
+                    </a:lnB>
+                  </a:tcPr>
+                </a:tc>
+              </a:tr>
+              <a:tr h="399011">
+                <a:tc>
+                  <a:txBody>
+                    <a:bodyPr/>
+                    <a:lstStyle/>
+                    <a:p>
+                      <a:pPr algn="ctr" indent="0" marL="0">
+                        <a:buNone/>
+                      </a:pPr>
+                      <a:r>
+                        <a:rPr lang="en-US" sz="800" b="1" dirty="0">
+                          <a:solidFill>
+                            <a:srgbClr val="000000"/>
+                          </a:solidFill>
+                        </a:rPr>
+                        <a:t>2</a:t>
+                      </a:r>
+                      <a:endParaRPr lang="en-US" sz="800" dirty="0"/>
+                    </a:p>
+                  </a:txBody>
+                  <a:tcPr marL="91440" marR="91440" marT="45720" marB="45720" anchor="ctr">
+                    <a:lnL w="12700" cap="flat" cmpd="sng" algn="ctr">
+                      <a:solidFill>
+                        <a:srgbClr val="E2E8F0"/>
+                      </a:solidFill>
+                      <a:prstDash val="solid"/>
+                      <a:round/>
+                      <a:headEnd type="none" w="med" len="med"/>
+                      <a:tailEnd type="none" w="med" len="med"/>
+                    </a:lnL>
+                    <a:lnR w="12700" cap="flat" cmpd="sng" algn="ctr">
+                      <a:solidFill>
+                        <a:srgbClr val="E2E8F0"/>
+                      </a:solidFill>
+                      <a:prstDash val="solid"/>
+                      <a:round/>
+                      <a:headEnd type="none" w="med" len="med"/>
+                      <a:tailEnd type="none" w="med" len="med"/>
+                    </a:lnR>
+                    <a:lnT w="12700" cap="flat" cmpd="sng" algn="ctr">
+                      <a:solidFill>
+                        <a:srgbClr val="E2E8F0"/>
+                      </a:solidFill>
+                      <a:prstDash val="solid"/>
+                      <a:round/>
+                      <a:headEnd type="none" w="med" len="med"/>
+                      <a:tailEnd type="none" w="med" len="med"/>
+                    </a:lnT>
+                    <a:lnB w="12700" cap="flat" cmpd="sng" algn="ctr">
+                      <a:solidFill>
+                        <a:srgbClr val="E2E8F0"/>
+                      </a:solidFill>
+                      <a:prstDash val="solid"/>
+                      <a:round/>
+                      <a:headEnd type="none" w="med" len="med"/>
+                      <a:tailEnd type="none" w="med" len="med"/>
+                    </a:lnB>
+                  </a:tcPr>
+                </a:tc>
+                <a:tc>
+                  <a:txBody>
+                    <a:bodyPr/>
+                    <a:lstStyle/>
+                    <a:p>
+                      <a:pPr algn="ctr" indent="0" marL="0">
+                        <a:buNone/>
+                      </a:pPr>
+                      <a:r>
+                        <a:rPr lang="en-US" sz="800" dirty="0">
+                          <a:solidFill>
+                            <a:srgbClr val="000000"/>
+                          </a:solidFill>
+                        </a:rPr>
+                        <a:t>KFR EL.SHK</a:t>
+                      </a:r>
+                      <a:endParaRPr lang="en-US" sz="800" dirty="0"/>
+                    </a:p>
+                  </a:txBody>
+                  <a:tcPr marL="91440" marR="91440" marT="45720" marB="45720" anchor="ctr">
+                    <a:lnL w="12700" cap="flat" cmpd="sng" algn="ctr">
+                      <a:solidFill>
+                        <a:srgbClr val="E2E8F0"/>
+                      </a:solidFill>
+                      <a:prstDash val="solid"/>
+                      <a:round/>
+                      <a:headEnd type="none" w="med" len="med"/>
+                      <a:tailEnd type="none" w="med" len="med"/>
+                    </a:lnL>
+                    <a:lnR w="12700" cap="flat" cmpd="sng" algn="ctr">
+                      <a:solidFill>
+                        <a:srgbClr val="E2E8F0"/>
+                      </a:solidFill>
+                      <a:prstDash val="solid"/>
+                      <a:round/>
+                      <a:headEnd type="none" w="med" len="med"/>
+                      <a:tailEnd type="none" w="med" len="med"/>
+                    </a:lnR>
+                    <a:lnT w="12700" cap="flat" cmpd="sng" algn="ctr">
+                      <a:solidFill>
+                        <a:srgbClr val="E2E8F0"/>
+                      </a:solidFill>
+                      <a:prstDash val="solid"/>
+                      <a:round/>
+                      <a:headEnd type="none" w="med" len="med"/>
+                      <a:tailEnd type="none" w="med" len="med"/>
+                    </a:lnT>
+                    <a:lnB w="12700" cap="flat" cmpd="sng" algn="ctr">
+                      <a:solidFill>
+                        <a:srgbClr val="E2E8F0"/>
+                      </a:solidFill>
+                      <a:prstDash val="solid"/>
+                      <a:round/>
+                      <a:headEnd type="none" w="med" len="med"/>
+                      <a:tailEnd type="none" w="med" len="med"/>
+                    </a:lnB>
+                  </a:tcPr>
+                </a:tc>
+                <a:tc>
+                  <a:txBody>
+                    <a:bodyPr/>
+                    <a:lstStyle/>
+                    <a:p>
+                      <a:pPr algn="ctr" indent="0" marL="0">
+                        <a:buNone/>
+                      </a:pPr>
+                      <a:r>
+                        <a:rPr lang="en-US" sz="800" dirty="0">
+                          <a:solidFill>
+                            <a:srgbClr val="000000"/>
+                          </a:solidFill>
+                        </a:rPr>
+                        <a:t>Karim Shehab</a:t>
+                      </a:r>
+                      <a:endParaRPr lang="en-US" sz="800" dirty="0"/>
+                    </a:p>
+                  </a:txBody>
+                  <a:tcPr marL="91440" marR="91440" marT="45720" marB="45720" anchor="ctr">
+                    <a:lnL w="12700" cap="flat" cmpd="sng" algn="ctr">
+                      <a:solidFill>
+                        <a:srgbClr val="E2E8F0"/>
+                      </a:solidFill>
+                      <a:prstDash val="solid"/>
+                      <a:round/>
+                      <a:headEnd type="none" w="med" len="med"/>
+                      <a:tailEnd type="none" w="med" len="med"/>
+                    </a:lnL>
+                    <a:lnR w="12700" cap="flat" cmpd="sng" algn="ctr">
+                      <a:solidFill>
+                        <a:srgbClr val="E2E8F0"/>
+                      </a:solidFill>
+                      <a:prstDash val="solid"/>
+                      <a:round/>
+                      <a:headEnd type="none" w="med" len="med"/>
+                      <a:tailEnd type="none" w="med" len="med"/>
+                    </a:lnR>
+                    <a:lnT w="12700" cap="flat" cmpd="sng" algn="ctr">
+                      <a:solidFill>
+                        <a:srgbClr val="E2E8F0"/>
+                      </a:solidFill>
+                      <a:prstDash val="solid"/>
+                      <a:round/>
+                      <a:headEnd type="none" w="med" len="med"/>
+                      <a:tailEnd type="none" w="med" len="med"/>
+                    </a:lnT>
+                    <a:lnB w="12700" cap="flat" cmpd="sng" algn="ctr">
+                      <a:solidFill>
+                        <a:srgbClr val="E2E8F0"/>
+                      </a:solidFill>
+                      <a:prstDash val="solid"/>
+                      <a:round/>
+                      <a:headEnd type="none" w="med" len="med"/>
+                      <a:tailEnd type="none" w="med" len="med"/>
+                    </a:lnB>
+                  </a:tcPr>
+                </a:tc>
+                <a:tc>
+                  <a:txBody>
+                    <a:bodyPr/>
+                    <a:lstStyle/>
+                    <a:p>
+                      <a:pPr algn="ctr" indent="0" marL="0">
+                        <a:buNone/>
+                      </a:pPr>
+                      <a:r>
+                        <a:rPr lang="en-US" sz="800" dirty="0">
+                          <a:solidFill>
+                            <a:srgbClr val="000000"/>
+                          </a:solidFill>
+                        </a:rPr>
+                        <a:t>10,461</a:t>
+                      </a:r>
+                      <a:endParaRPr lang="en-US" sz="800" dirty="0"/>
+                    </a:p>
+                  </a:txBody>
+                  <a:tcPr marL="91440" marR="91440" marT="45720" marB="45720" anchor="ctr">
+                    <a:lnL w="12700" cap="flat" cmpd="sng" algn="ctr">
+                      <a:solidFill>
+                        <a:srgbClr val="E2E8F0"/>
+                      </a:solidFill>
+                      <a:prstDash val="solid"/>
+                      <a:round/>
+                      <a:headEnd type="none" w="med" len="med"/>
+                      <a:tailEnd type="none" w="med" len="med"/>
+                    </a:lnL>
+                    <a:lnR w="12700" cap="flat" cmpd="sng" algn="ctr">
+                      <a:solidFill>
+                        <a:srgbClr val="E2E8F0"/>
+                      </a:solidFill>
+                      <a:prstDash val="solid"/>
+                      <a:round/>
+                      <a:headEnd type="none" w="med" len="med"/>
+                      <a:tailEnd type="none" w="med" len="med"/>
+                    </a:lnR>
+                    <a:lnT w="12700" cap="flat" cmpd="sng" algn="ctr">
+                      <a:solidFill>
+                        <a:srgbClr val="E2E8F0"/>
+                      </a:solidFill>
+                      <a:prstDash val="solid"/>
+                      <a:round/>
+                      <a:headEnd type="none" w="med" len="med"/>
+                      <a:tailEnd type="none" w="med" len="med"/>
+                    </a:lnT>
+                    <a:lnB w="12700" cap="flat" cmpd="sng" algn="ctr">
+                      <a:solidFill>
+                        <a:srgbClr val="E2E8F0"/>
+                      </a:solidFill>
+                      <a:prstDash val="solid"/>
+                      <a:round/>
+                      <a:headEnd type="none" w="med" len="med"/>
+                      <a:tailEnd type="none" w="med" len="med"/>
+                    </a:lnB>
+                  </a:tcPr>
+                </a:tc>
+                <a:tc>
+                  <a:txBody>
+                    <a:bodyPr/>
+                    <a:lstStyle/>
+                    <a:p>
+                      <a:pPr algn="ctr" indent="0" marL="0">
+                        <a:buNone/>
+                      </a:pPr>
+                      <a:r>
+                        <a:rPr lang="en-US" sz="800" b="1" dirty="0">
+                          <a:solidFill>
+                            <a:srgbClr val="000000"/>
+                          </a:solidFill>
+                        </a:rPr>
+                        <a:t>15,472</a:t>
+                      </a:r>
+                      <a:endParaRPr lang="en-US" sz="800" dirty="0"/>
+                    </a:p>
+                  </a:txBody>
+                  <a:tcPr marL="91440" marR="91440" marT="45720" marB="45720" anchor="ctr">
+                    <a:lnL w="12700" cap="flat" cmpd="sng" algn="ctr">
+                      <a:solidFill>
+                        <a:srgbClr val="E2E8F0"/>
+                      </a:solidFill>
+                      <a:prstDash val="solid"/>
+                      <a:round/>
+                      <a:headEnd type="none" w="med" len="med"/>
+                      <a:tailEnd type="none" w="med" len="med"/>
+                    </a:lnL>
+                    <a:lnR w="12700" cap="flat" cmpd="sng" algn="ctr">
+                      <a:solidFill>
+                        <a:srgbClr val="E2E8F0"/>
+                      </a:solidFill>
+                      <a:prstDash val="solid"/>
+                      <a:round/>
+                      <a:headEnd type="none" w="med" len="med"/>
+                      <a:tailEnd type="none" w="med" len="med"/>
+                    </a:lnR>
+                    <a:lnT w="12700" cap="flat" cmpd="sng" algn="ctr">
+                      <a:solidFill>
+                        <a:srgbClr val="E2E8F0"/>
+                      </a:solidFill>
+                      <a:prstDash val="solid"/>
+                      <a:round/>
+                      <a:headEnd type="none" w="med" len="med"/>
+                      <a:tailEnd type="none" w="med" len="med"/>
+                    </a:lnT>
+                    <a:lnB w="12700" cap="flat" cmpd="sng" algn="ctr">
+                      <a:solidFill>
+                        <a:srgbClr val="E2E8F0"/>
+                      </a:solidFill>
+                      <a:prstDash val="solid"/>
+                      <a:round/>
+                      <a:headEnd type="none" w="med" len="med"/>
+                      <a:tailEnd type="none" w="med" len="med"/>
+                    </a:lnB>
+                  </a:tcPr>
+                </a:tc>
+                <a:tc>
+                  <a:txBody>
+                    <a:bodyPr/>
+                    <a:lstStyle/>
+                    <a:p>
+                      <a:pPr algn="ctr" indent="0" marL="0">
+                        <a:buNone/>
+                      </a:pPr>
+                      <a:r>
+                        <a:rPr lang="en-US" sz="800" dirty="0">
+                          <a:solidFill>
+                            <a:srgbClr val="28A745"/>
+                          </a:solidFill>
+                        </a:rPr>
+                        <a:t>+5,011</a:t>
+                      </a:r>
+                      <a:endParaRPr lang="en-US" sz="800" dirty="0"/>
+                    </a:p>
+                  </a:txBody>
+                  <a:tcPr marL="91440" marR="91440" marT="45720" marB="45720" anchor="ctr">
+                    <a:lnL w="12700" cap="flat" cmpd="sng" algn="ctr">
+                      <a:solidFill>
+                        <a:srgbClr val="E2E8F0"/>
+                      </a:solidFill>
+                      <a:prstDash val="solid"/>
+                      <a:round/>
+                      <a:headEnd type="none" w="med" len="med"/>
+                      <a:tailEnd type="none" w="med" len="med"/>
+                    </a:lnL>
+                    <a:lnR w="12700" cap="flat" cmpd="sng" algn="ctr">
+                      <a:solidFill>
+                        <a:srgbClr val="E2E8F0"/>
+                      </a:solidFill>
+                      <a:prstDash val="solid"/>
+                      <a:round/>
+                      <a:headEnd type="none" w="med" len="med"/>
+                      <a:tailEnd type="none" w="med" len="med"/>
+                    </a:lnR>
+                    <a:lnT w="12700" cap="flat" cmpd="sng" algn="ctr">
+                      <a:solidFill>
+                        <a:srgbClr val="E2E8F0"/>
+                      </a:solidFill>
+                      <a:prstDash val="solid"/>
+                      <a:round/>
+                      <a:headEnd type="none" w="med" len="med"/>
+                      <a:tailEnd type="none" w="med" len="med"/>
+                    </a:lnT>
+                    <a:lnB w="12700" cap="flat" cmpd="sng" algn="ctr">
+                      <a:solidFill>
+                        <a:srgbClr val="E2E8F0"/>
+                      </a:solidFill>
+                      <a:prstDash val="solid"/>
+                      <a:round/>
+                      <a:headEnd type="none" w="med" len="med"/>
+                      <a:tailEnd type="none" w="med" len="med"/>
+                    </a:lnB>
+                  </a:tcPr>
+                </a:tc>
+                <a:tc>
+                  <a:txBody>
+                    <a:bodyPr/>
+                    <a:lstStyle/>
+                    <a:p>
+                      <a:pPr algn="ctr" indent="0" marL="0">
+                        <a:buNone/>
+                      </a:pPr>
+                      <a:r>
+                        <a:rPr lang="en-US" sz="850" b="1" dirty="0">
+                          <a:solidFill>
+                            <a:srgbClr val="28A745"/>
+                          </a:solidFill>
+                        </a:rPr>
+                        <a:t>+47.9%</a:t>
+                      </a:r>
+                      <a:endParaRPr lang="en-US" sz="850" dirty="0"/>
+                    </a:p>
+                  </a:txBody>
+                  <a:tcPr marL="91440" marR="91440" marT="45720" marB="45720" anchor="ctr">
+                    <a:lnL w="12700" cap="flat" cmpd="sng" algn="ctr">
+                      <a:solidFill>
+                        <a:srgbClr val="E2E8F0"/>
+                      </a:solidFill>
+                      <a:prstDash val="solid"/>
+                      <a:round/>
+                      <a:headEnd type="none" w="med" len="med"/>
+                      <a:tailEnd type="none" w="med" len="med"/>
+                    </a:lnL>
+                    <a:lnR w="12700" cap="flat" cmpd="sng" algn="ctr">
+                      <a:solidFill>
+                        <a:srgbClr val="E2E8F0"/>
+                      </a:solidFill>
+                      <a:prstDash val="solid"/>
+                      <a:round/>
+                      <a:headEnd type="none" w="med" len="med"/>
+                      <a:tailEnd type="none" w="med" len="med"/>
+                    </a:lnR>
+                    <a:lnT w="12700" cap="flat" cmpd="sng" algn="ctr">
+                      <a:solidFill>
+                        <a:srgbClr val="E2E8F0"/>
+                      </a:solidFill>
+                      <a:prstDash val="solid"/>
+                      <a:round/>
+                      <a:headEnd type="none" w="med" len="med"/>
+                      <a:tailEnd type="none" w="med" len="med"/>
+                    </a:lnT>
+                    <a:lnB w="12700" cap="flat" cmpd="sng" algn="ctr">
+                      <a:solidFill>
+                        <a:srgbClr val="E2E8F0"/>
+                      </a:solidFill>
+                      <a:prstDash val="solid"/>
+                      <a:round/>
+                      <a:headEnd type="none" w="med" len="med"/>
+                      <a:tailEnd type="none" w="med" len="med"/>
+                    </a:lnB>
+                  </a:tcPr>
+                </a:tc>
+                <a:tc>
+                  <a:txBody>
+                    <a:bodyPr/>
+                    <a:lstStyle/>
+                    <a:p>
+                      <a:pPr algn="ctr" indent="0" marL="0">
+                        <a:buNone/>
+                      </a:pPr>
+                      <a:r>
+                        <a:rPr lang="en-US" sz="750" b="1" dirty="0">
+                          <a:solidFill>
+                            <a:srgbClr val="000000"/>
+                          </a:solidFill>
+                        </a:rPr>
+                        <a:t>Tier 1: Accelerator 🚀</a:t>
+                      </a:r>
+                      <a:endParaRPr lang="en-US" sz="750" dirty="0"/>
+                    </a:p>
+                  </a:txBody>
+                  <a:tcPr marL="91440" marR="91440" marT="45720" marB="45720" anchor="ctr">
+                    <a:lnL w="12700" cap="flat" cmpd="sng" algn="ctr">
+                      <a:solidFill>
+                        <a:srgbClr val="E2E8F0"/>
+                      </a:solidFill>
+                      <a:prstDash val="solid"/>
+                      <a:round/>
+                      <a:headEnd type="none" w="med" len="med"/>
+                      <a:tailEnd type="none" w="med" len="med"/>
+                    </a:lnL>
+                    <a:lnR w="12700" cap="flat" cmpd="sng" algn="ctr">
+                      <a:solidFill>
+                        <a:srgbClr val="E2E8F0"/>
+                      </a:solidFill>
+                      <a:prstDash val="solid"/>
+                      <a:round/>
+                      <a:headEnd type="none" w="med" len="med"/>
+                      <a:tailEnd type="none" w="med" len="med"/>
+                    </a:lnR>
+                    <a:lnT w="12700" cap="flat" cmpd="sng" algn="ctr">
+                      <a:solidFill>
+                        <a:srgbClr val="E2E8F0"/>
+                      </a:solidFill>
+                      <a:prstDash val="solid"/>
+                      <a:round/>
+                      <a:headEnd type="none" w="med" len="med"/>
+                      <a:tailEnd type="none" w="med" len="med"/>
+                    </a:lnT>
+                    <a:lnB w="12700" cap="flat" cmpd="sng" algn="ctr">
+                      <a:solidFill>
+                        <a:srgbClr val="E2E8F0"/>
+                      </a:solidFill>
+                      <a:prstDash val="solid"/>
+                      <a:round/>
+                      <a:headEnd type="none" w="med" len="med"/>
+                      <a:tailEnd type="none" w="med" len="med"/>
+                    </a:lnB>
+                  </a:tcPr>
+                </a:tc>
+              </a:tr>
+              <a:tr h="399011">
+                <a:tc>
+                  <a:txBody>
+                    <a:bodyPr/>
+                    <a:lstStyle/>
+                    <a:p>
+                      <a:pPr algn="ctr" indent="0" marL="0">
+                        <a:buNone/>
+                      </a:pPr>
+                      <a:r>
+                        <a:rPr lang="en-US" sz="800" b="1" dirty="0">
+                          <a:solidFill>
+                            <a:srgbClr val="000000"/>
+                          </a:solidFill>
+                        </a:rPr>
+                        <a:t>3</a:t>
+                      </a:r>
+                      <a:endParaRPr lang="en-US" sz="800" dirty="0"/>
+                    </a:p>
+                  </a:txBody>
+                  <a:tcPr marL="91440" marR="91440" marT="45720" marB="45720" anchor="ctr">
+                    <a:lnL w="12700" cap="flat" cmpd="sng" algn="ctr">
+                      <a:solidFill>
+                        <a:srgbClr val="E2E8F0"/>
+                      </a:solidFill>
+                      <a:prstDash val="solid"/>
+                      <a:round/>
+                      <a:headEnd type="none" w="med" len="med"/>
+                      <a:tailEnd type="none" w="med" len="med"/>
+                    </a:lnL>
+                    <a:lnR w="12700" cap="flat" cmpd="sng" algn="ctr">
+                      <a:solidFill>
+                        <a:srgbClr val="E2E8F0"/>
+                      </a:solidFill>
+                      <a:prstDash val="solid"/>
+                      <a:round/>
+                      <a:headEnd type="none" w="med" len="med"/>
+                      <a:tailEnd type="none" w="med" len="med"/>
+                    </a:lnR>
+                    <a:lnT w="12700" cap="flat" cmpd="sng" algn="ctr">
+                      <a:solidFill>
+                        <a:srgbClr val="E2E8F0"/>
+                      </a:solidFill>
+                      <a:prstDash val="solid"/>
+                      <a:round/>
+                      <a:headEnd type="none" w="med" len="med"/>
+                      <a:tailEnd type="none" w="med" len="med"/>
+                    </a:lnT>
+                    <a:lnB w="12700" cap="flat" cmpd="sng" algn="ctr">
+                      <a:solidFill>
+                        <a:srgbClr val="E2E8F0"/>
+                      </a:solidFill>
+                      <a:prstDash val="solid"/>
+                      <a:round/>
+                      <a:headEnd type="none" w="med" len="med"/>
+                      <a:tailEnd type="none" w="med" len="med"/>
+                    </a:lnB>
+                  </a:tcPr>
+                </a:tc>
+                <a:tc>
+                  <a:txBody>
+                    <a:bodyPr/>
+                    <a:lstStyle/>
+                    <a:p>
+                      <a:pPr algn="ctr" indent="0" marL="0">
+                        <a:buNone/>
+                      </a:pPr>
+                      <a:r>
+                        <a:rPr lang="en-US" sz="800" dirty="0">
+                          <a:solidFill>
+                            <a:srgbClr val="000000"/>
+                          </a:solidFill>
+                        </a:rPr>
+                        <a:t>Upper Egypt I</a:t>
+                      </a:r>
+                      <a:endParaRPr lang="en-US" sz="800" dirty="0"/>
+                    </a:p>
+                  </a:txBody>
+                  <a:tcPr marL="91440" marR="91440" marT="45720" marB="45720" anchor="ctr">
+                    <a:lnL w="12700" cap="flat" cmpd="sng" algn="ctr">
+                      <a:solidFill>
+                        <a:srgbClr val="E2E8F0"/>
+                      </a:solidFill>
+                      <a:prstDash val="solid"/>
+                      <a:round/>
+                      <a:headEnd type="none" w="med" len="med"/>
+                      <a:tailEnd type="none" w="med" len="med"/>
+                    </a:lnL>
+                    <a:lnR w="12700" cap="flat" cmpd="sng" algn="ctr">
+                      <a:solidFill>
+                        <a:srgbClr val="E2E8F0"/>
+                      </a:solidFill>
+                      <a:prstDash val="solid"/>
+                      <a:round/>
+                      <a:headEnd type="none" w="med" len="med"/>
+                      <a:tailEnd type="none" w="med" len="med"/>
+                    </a:lnR>
+                    <a:lnT w="12700" cap="flat" cmpd="sng" algn="ctr">
+                      <a:solidFill>
+                        <a:srgbClr val="E2E8F0"/>
+                      </a:solidFill>
+                      <a:prstDash val="solid"/>
+                      <a:round/>
+                      <a:headEnd type="none" w="med" len="med"/>
+                      <a:tailEnd type="none" w="med" len="med"/>
+                    </a:lnT>
+                    <a:lnB w="12700" cap="flat" cmpd="sng" algn="ctr">
+                      <a:solidFill>
+                        <a:srgbClr val="E2E8F0"/>
+                      </a:solidFill>
+                      <a:prstDash val="solid"/>
+                      <a:round/>
+                      <a:headEnd type="none" w="med" len="med"/>
+                      <a:tailEnd type="none" w="med" len="med"/>
+                    </a:lnB>
+                  </a:tcPr>
+                </a:tc>
+                <a:tc>
+                  <a:txBody>
+                    <a:bodyPr/>
+                    <a:lstStyle/>
+                    <a:p>
+                      <a:pPr algn="ctr" indent="0" marL="0">
+                        <a:buNone/>
+                      </a:pPr>
+                      <a:r>
+                        <a:rPr lang="en-US" sz="800" dirty="0">
+                          <a:solidFill>
+                            <a:srgbClr val="000000"/>
+                          </a:solidFill>
+                        </a:rPr>
+                        <a:t>UE North</a:t>
+                      </a:r>
+                      <a:endParaRPr lang="en-US" sz="800" dirty="0"/>
+                    </a:p>
+                  </a:txBody>
+                  <a:tcPr marL="91440" marR="91440" marT="45720" marB="45720" anchor="ctr">
+                    <a:lnL w="12700" cap="flat" cmpd="sng" algn="ctr">
+                      <a:solidFill>
+                        <a:srgbClr val="E2E8F0"/>
+                      </a:solidFill>
+                      <a:prstDash val="solid"/>
+                      <a:round/>
+                      <a:headEnd type="none" w="med" len="med"/>
+                      <a:tailEnd type="none" w="med" len="med"/>
+                    </a:lnL>
+                    <a:lnR w="12700" cap="flat" cmpd="sng" algn="ctr">
+                      <a:solidFill>
+                        <a:srgbClr val="E2E8F0"/>
+                      </a:solidFill>
+                      <a:prstDash val="solid"/>
+                      <a:round/>
+                      <a:headEnd type="none" w="med" len="med"/>
+                      <a:tailEnd type="none" w="med" len="med"/>
+                    </a:lnR>
+                    <a:lnT w="12700" cap="flat" cmpd="sng" algn="ctr">
+                      <a:solidFill>
+                        <a:srgbClr val="E2E8F0"/>
+                      </a:solidFill>
+                      <a:prstDash val="solid"/>
+                      <a:round/>
+                      <a:headEnd type="none" w="med" len="med"/>
+                      <a:tailEnd type="none" w="med" len="med"/>
+                    </a:lnT>
+                    <a:lnB w="12700" cap="flat" cmpd="sng" algn="ctr">
+                      <a:solidFill>
+                        <a:srgbClr val="E2E8F0"/>
+                      </a:solidFill>
+                      <a:prstDash val="solid"/>
+                      <a:round/>
+                      <a:headEnd type="none" w="med" len="med"/>
+                      <a:tailEnd type="none" w="med" len="med"/>
+                    </a:lnB>
+                  </a:tcPr>
+                </a:tc>
+                <a:tc>
+                  <a:txBody>
+                    <a:bodyPr/>
+                    <a:lstStyle/>
+                    <a:p>
+                      <a:pPr algn="ctr" indent="0" marL="0">
+                        <a:buNone/>
+                      </a:pPr>
+                      <a:r>
+                        <a:rPr lang="en-US" sz="800" dirty="0">
+                          <a:solidFill>
+                            <a:srgbClr val="000000"/>
+                          </a:solidFill>
+                        </a:rPr>
+                        <a:t>16,459</a:t>
+                      </a:r>
+                      <a:endParaRPr lang="en-US" sz="800" dirty="0"/>
+                    </a:p>
+                  </a:txBody>
+                  <a:tcPr marL="91440" marR="91440" marT="45720" marB="45720" anchor="ctr">
+                    <a:lnL w="12700" cap="flat" cmpd="sng" algn="ctr">
+                      <a:solidFill>
+                        <a:srgbClr val="E2E8F0"/>
+                      </a:solidFill>
+                      <a:prstDash val="solid"/>
+                      <a:round/>
+                      <a:headEnd type="none" w="med" len="med"/>
+                      <a:tailEnd type="none" w="med" len="med"/>
+                    </a:lnL>
+                    <a:lnR w="12700" cap="flat" cmpd="sng" algn="ctr">
+                      <a:solidFill>
+                        <a:srgbClr val="E2E8F0"/>
+                      </a:solidFill>
+                      <a:prstDash val="solid"/>
+                      <a:round/>
+                      <a:headEnd type="none" w="med" len="med"/>
+                      <a:tailEnd type="none" w="med" len="med"/>
+                    </a:lnR>
+                    <a:lnT w="12700" cap="flat" cmpd="sng" algn="ctr">
+                      <a:solidFill>
+                        <a:srgbClr val="E2E8F0"/>
+                      </a:solidFill>
+                      <a:prstDash val="solid"/>
+                      <a:round/>
+                      <a:headEnd type="none" w="med" len="med"/>
+                      <a:tailEnd type="none" w="med" len="med"/>
+                    </a:lnT>
+                    <a:lnB w="12700" cap="flat" cmpd="sng" algn="ctr">
+                      <a:solidFill>
+                        <a:srgbClr val="E2E8F0"/>
+                      </a:solidFill>
+                      <a:prstDash val="solid"/>
+                      <a:round/>
+                      <a:headEnd type="none" w="med" len="med"/>
+                      <a:tailEnd type="none" w="med" len="med"/>
+                    </a:lnB>
+                  </a:tcPr>
+                </a:tc>
+                <a:tc>
+                  <a:txBody>
+                    <a:bodyPr/>
+                    <a:lstStyle/>
+                    <a:p>
+                      <a:pPr algn="ctr" indent="0" marL="0">
+                        <a:buNone/>
+                      </a:pPr>
+                      <a:r>
+                        <a:rPr lang="en-US" sz="800" b="1" dirty="0">
+                          <a:solidFill>
+                            <a:srgbClr val="000000"/>
+                          </a:solidFill>
+                        </a:rPr>
+                        <a:t>23,564</a:t>
+                      </a:r>
+                      <a:endParaRPr lang="en-US" sz="800" dirty="0"/>
+                    </a:p>
+                  </a:txBody>
+                  <a:tcPr marL="91440" marR="91440" marT="45720" marB="45720" anchor="ctr">
+                    <a:lnL w="12700" cap="flat" cmpd="sng" algn="ctr">
+                      <a:solidFill>
+                        <a:srgbClr val="E2E8F0"/>
+                      </a:solidFill>
+                      <a:prstDash val="solid"/>
+                      <a:round/>
+                      <a:headEnd type="none" w="med" len="med"/>
+                      <a:tailEnd type="none" w="med" len="med"/>
+                    </a:lnL>
+                    <a:lnR w="12700" cap="flat" cmpd="sng" algn="ctr">
+                      <a:solidFill>
+                        <a:srgbClr val="E2E8F0"/>
+                      </a:solidFill>
+                      <a:prstDash val="solid"/>
+                      <a:round/>
+                      <a:headEnd type="none" w="med" len="med"/>
+                      <a:tailEnd type="none" w="med" len="med"/>
+                    </a:lnR>
+                    <a:lnT w="12700" cap="flat" cmpd="sng" algn="ctr">
+                      <a:solidFill>
+                        <a:srgbClr val="E2E8F0"/>
+                      </a:solidFill>
+                      <a:prstDash val="solid"/>
+                      <a:round/>
+                      <a:headEnd type="none" w="med" len="med"/>
+                      <a:tailEnd type="none" w="med" len="med"/>
+                    </a:lnT>
+                    <a:lnB w="12700" cap="flat" cmpd="sng" algn="ctr">
+                      <a:solidFill>
+                        <a:srgbClr val="E2E8F0"/>
+                      </a:solidFill>
+                      <a:prstDash val="solid"/>
+                      <a:round/>
+                      <a:headEnd type="none" w="med" len="med"/>
+                      <a:tailEnd type="none" w="med" len="med"/>
+                    </a:lnB>
+                  </a:tcPr>
+                </a:tc>
+                <a:tc>
+                  <a:txBody>
+                    <a:bodyPr/>
+                    <a:lstStyle/>
+                    <a:p>
+                      <a:pPr algn="ctr" indent="0" marL="0">
+                        <a:buNone/>
+                      </a:pPr>
+                      <a:r>
+                        <a:rPr lang="en-US" sz="800" dirty="0">
+                          <a:solidFill>
+                            <a:srgbClr val="28A745"/>
+                          </a:solidFill>
+                        </a:rPr>
+                        <a:t>+7,105</a:t>
+                      </a:r>
+                      <a:endParaRPr lang="en-US" sz="800" dirty="0"/>
+                    </a:p>
+                  </a:txBody>
+                  <a:tcPr marL="91440" marR="91440" marT="45720" marB="45720" anchor="ctr">
+                    <a:lnL w="12700" cap="flat" cmpd="sng" algn="ctr">
+                      <a:solidFill>
+                        <a:srgbClr val="E2E8F0"/>
+                      </a:solidFill>
+                      <a:prstDash val="solid"/>
+                      <a:round/>
+                      <a:headEnd type="none" w="med" len="med"/>
+                      <a:tailEnd type="none" w="med" len="med"/>
+                    </a:lnL>
+                    <a:lnR w="12700" cap="flat" cmpd="sng" algn="ctr">
+                      <a:solidFill>
+                        <a:srgbClr val="E2E8F0"/>
+                      </a:solidFill>
+                      <a:prstDash val="solid"/>
+                      <a:round/>
+                      <a:headEnd type="none" w="med" len="med"/>
+                      <a:tailEnd type="none" w="med" len="med"/>
+                    </a:lnR>
+                    <a:lnT w="12700" cap="flat" cmpd="sng" algn="ctr">
+                      <a:solidFill>
+                        <a:srgbClr val="E2E8F0"/>
+                      </a:solidFill>
+                      <a:prstDash val="solid"/>
+                      <a:round/>
+                      <a:headEnd type="none" w="med" len="med"/>
+                      <a:tailEnd type="none" w="med" len="med"/>
+                    </a:lnT>
+                    <a:lnB w="12700" cap="flat" cmpd="sng" algn="ctr">
+                      <a:solidFill>
+                        <a:srgbClr val="E2E8F0"/>
+                      </a:solidFill>
+                      <a:prstDash val="solid"/>
+                      <a:round/>
+                      <a:headEnd type="none" w="med" len="med"/>
+                      <a:tailEnd type="none" w="med" len="med"/>
+                    </a:lnB>
+                  </a:tcPr>
+                </a:tc>
+                <a:tc>
+                  <a:txBody>
+                    <a:bodyPr/>
+                    <a:lstStyle/>
+                    <a:p>
+                      <a:pPr algn="ctr" indent="0" marL="0">
+                        <a:buNone/>
+                      </a:pPr>
+                      <a:r>
+                        <a:rPr lang="en-US" sz="850" b="1" dirty="0">
+                          <a:solidFill>
+                            <a:srgbClr val="28A745"/>
+                          </a:solidFill>
+                        </a:rPr>
+                        <a:t>+43.2%</a:t>
+                      </a:r>
+                      <a:endParaRPr lang="en-US" sz="850" dirty="0"/>
+                    </a:p>
+                  </a:txBody>
+                  <a:tcPr marL="91440" marR="91440" marT="45720" marB="45720" anchor="ctr">
+                    <a:lnL w="12700" cap="flat" cmpd="sng" algn="ctr">
+                      <a:solidFill>
+                        <a:srgbClr val="E2E8F0"/>
+                      </a:solidFill>
+                      <a:prstDash val="solid"/>
+                      <a:round/>
+                      <a:headEnd type="none" w="med" len="med"/>
+                      <a:tailEnd type="none" w="med" len="med"/>
+                    </a:lnL>
+                    <a:lnR w="12700" cap="flat" cmpd="sng" algn="ctr">
+                      <a:solidFill>
+                        <a:srgbClr val="E2E8F0"/>
+                      </a:solidFill>
+                      <a:prstDash val="solid"/>
+                      <a:round/>
+                      <a:headEnd type="none" w="med" len="med"/>
+                      <a:tailEnd type="none" w="med" len="med"/>
+                    </a:lnR>
+                    <a:lnT w="12700" cap="flat" cmpd="sng" algn="ctr">
+                      <a:solidFill>
+                        <a:srgbClr val="E2E8F0"/>
+                      </a:solidFill>
+                      <a:prstDash val="solid"/>
+                      <a:round/>
+                      <a:headEnd type="none" w="med" len="med"/>
+                      <a:tailEnd type="none" w="med" len="med"/>
+                    </a:lnT>
+                    <a:lnB w="12700" cap="flat" cmpd="sng" algn="ctr">
+                      <a:solidFill>
+                        <a:srgbClr val="E2E8F0"/>
+                      </a:solidFill>
+                      <a:prstDash val="solid"/>
+                      <a:round/>
+                      <a:headEnd type="none" w="med" len="med"/>
+                      <a:tailEnd type="none" w="med" len="med"/>
+                    </a:lnB>
+                  </a:tcPr>
+                </a:tc>
+                <a:tc>
+                  <a:txBody>
+                    <a:bodyPr/>
+                    <a:lstStyle/>
+                    <a:p>
+                      <a:pPr algn="ctr" indent="0" marL="0">
+                        <a:buNone/>
+                      </a:pPr>
+                      <a:r>
+                        <a:rPr lang="en-US" sz="750" b="1" dirty="0">
+                          <a:solidFill>
+                            <a:srgbClr val="000000"/>
+                          </a:solidFill>
+                        </a:rPr>
+                        <a:t>Tier 1: Accelerator 🚀</a:t>
+                      </a:r>
+                      <a:endParaRPr lang="en-US" sz="750" dirty="0"/>
+                    </a:p>
+                  </a:txBody>
+                  <a:tcPr marL="91440" marR="91440" marT="45720" marB="45720" anchor="ctr">
+                    <a:lnL w="12700" cap="flat" cmpd="sng" algn="ctr">
+                      <a:solidFill>
+                        <a:srgbClr val="E2E8F0"/>
+                      </a:solidFill>
+                      <a:prstDash val="solid"/>
+                      <a:round/>
+                      <a:headEnd type="none" w="med" len="med"/>
+                      <a:tailEnd type="none" w="med" len="med"/>
+                    </a:lnL>
+                    <a:lnR w="12700" cap="flat" cmpd="sng" algn="ctr">
+                      <a:solidFill>
+                        <a:srgbClr val="E2E8F0"/>
+                      </a:solidFill>
+                      <a:prstDash val="solid"/>
+                      <a:round/>
+                      <a:headEnd type="none" w="med" len="med"/>
+                      <a:tailEnd type="none" w="med" len="med"/>
+                    </a:lnR>
+                    <a:lnT w="12700" cap="flat" cmpd="sng" algn="ctr">
+                      <a:solidFill>
+                        <a:srgbClr val="E2E8F0"/>
+                      </a:solidFill>
+                      <a:prstDash val="solid"/>
+                      <a:round/>
+                      <a:headEnd type="none" w="med" len="med"/>
+                      <a:tailEnd type="none" w="med" len="med"/>
+                    </a:lnT>
+                    <a:lnB w="12700" cap="flat" cmpd="sng" algn="ctr">
+                      <a:solidFill>
+                        <a:srgbClr val="E2E8F0"/>
+                      </a:solidFill>
+                      <a:prstDash val="solid"/>
+                      <a:round/>
+                      <a:headEnd type="none" w="med" len="med"/>
+                      <a:tailEnd type="none" w="med" len="med"/>
+                    </a:lnB>
+                  </a:tcPr>
+                </a:tc>
+              </a:tr>
+              <a:tr h="399011">
+                <a:tc>
+                  <a:txBody>
+                    <a:bodyPr/>
+                    <a:lstStyle/>
+                    <a:p>
+                      <a:pPr algn="ctr" indent="0" marL="0">
+                        <a:buNone/>
+                      </a:pPr>
+                      <a:r>
+                        <a:rPr lang="en-US" sz="800" b="1" dirty="0">
+                          <a:solidFill>
+                            <a:srgbClr val="000000"/>
+                          </a:solidFill>
+                        </a:rPr>
+                        <a:t>4</a:t>
+                      </a:r>
+                      <a:endParaRPr lang="en-US" sz="800" dirty="0"/>
+                    </a:p>
+                  </a:txBody>
+                  <a:tcPr marL="91440" marR="91440" marT="45720" marB="45720" anchor="ctr">
+                    <a:lnL w="12700" cap="flat" cmpd="sng" algn="ctr">
+                      <a:solidFill>
+                        <a:srgbClr val="E2E8F0"/>
+                      </a:solidFill>
+                      <a:prstDash val="solid"/>
+                      <a:round/>
+                      <a:headEnd type="none" w="med" len="med"/>
+                      <a:tailEnd type="none" w="med" len="med"/>
+                    </a:lnL>
+                    <a:lnR w="12700" cap="flat" cmpd="sng" algn="ctr">
+                      <a:solidFill>
+                        <a:srgbClr val="E2E8F0"/>
+                      </a:solidFill>
+                      <a:prstDash val="solid"/>
+                      <a:round/>
+                      <a:headEnd type="none" w="med" len="med"/>
+                      <a:tailEnd type="none" w="med" len="med"/>
+                    </a:lnR>
+                    <a:lnT w="12700" cap="flat" cmpd="sng" algn="ctr">
+                      <a:solidFill>
+                        <a:srgbClr val="E2E8F0"/>
+                      </a:solidFill>
+                      <a:prstDash val="solid"/>
+                      <a:round/>
+                      <a:headEnd type="none" w="med" len="med"/>
+                      <a:tailEnd type="none" w="med" len="med"/>
+                    </a:lnT>
+                    <a:lnB w="12700" cap="flat" cmpd="sng" algn="ctr">
+                      <a:solidFill>
+                        <a:srgbClr val="E2E8F0"/>
+                      </a:solidFill>
+                      <a:prstDash val="solid"/>
+                      <a:round/>
+                      <a:headEnd type="none" w="med" len="med"/>
+                      <a:tailEnd type="none" w="med" len="med"/>
+                    </a:lnB>
+                  </a:tcPr>
+                </a:tc>
+                <a:tc>
+                  <a:txBody>
+                    <a:bodyPr/>
+                    <a:lstStyle/>
+                    <a:p>
+                      <a:pPr algn="ctr" indent="0" marL="0">
+                        <a:buNone/>
+                      </a:pPr>
+                      <a:r>
+                        <a:rPr lang="en-US" sz="800" dirty="0">
+                          <a:solidFill>
+                            <a:srgbClr val="000000"/>
+                          </a:solidFill>
+                        </a:rPr>
+                        <a:t>Behera &amp; Dakahlia</a:t>
+                      </a:r>
+                      <a:endParaRPr lang="en-US" sz="800" dirty="0"/>
+                    </a:p>
+                  </a:txBody>
+                  <a:tcPr marL="91440" marR="91440" marT="45720" marB="45720" anchor="ctr">
+                    <a:lnL w="12700" cap="flat" cmpd="sng" algn="ctr">
+                      <a:solidFill>
+                        <a:srgbClr val="E2E8F0"/>
+                      </a:solidFill>
+                      <a:prstDash val="solid"/>
+                      <a:round/>
+                      <a:headEnd type="none" w="med" len="med"/>
+                      <a:tailEnd type="none" w="med" len="med"/>
+                    </a:lnL>
+                    <a:lnR w="12700" cap="flat" cmpd="sng" algn="ctr">
+                      <a:solidFill>
+                        <a:srgbClr val="E2E8F0"/>
+                      </a:solidFill>
+                      <a:prstDash val="solid"/>
+                      <a:round/>
+                      <a:headEnd type="none" w="med" len="med"/>
+                      <a:tailEnd type="none" w="med" len="med"/>
+                    </a:lnR>
+                    <a:lnT w="12700" cap="flat" cmpd="sng" algn="ctr">
+                      <a:solidFill>
+                        <a:srgbClr val="E2E8F0"/>
+                      </a:solidFill>
+                      <a:prstDash val="solid"/>
+                      <a:round/>
+                      <a:headEnd type="none" w="med" len="med"/>
+                      <a:tailEnd type="none" w="med" len="med"/>
+                    </a:lnT>
+                    <a:lnB w="12700" cap="flat" cmpd="sng" algn="ctr">
+                      <a:solidFill>
+                        <a:srgbClr val="E2E8F0"/>
+                      </a:solidFill>
+                      <a:prstDash val="solid"/>
+                      <a:round/>
+                      <a:headEnd type="none" w="med" len="med"/>
+                      <a:tailEnd type="none" w="med" len="med"/>
+                    </a:lnB>
+                  </a:tcPr>
+                </a:tc>
+                <a:tc>
+                  <a:txBody>
+                    <a:bodyPr/>
+                    <a:lstStyle/>
+                    <a:p>
+                      <a:pPr algn="ctr" indent="0" marL="0">
+                        <a:buNone/>
+                      </a:pPr>
+                      <a:r>
+                        <a:rPr lang="en-US" sz="800" dirty="0">
+                          <a:solidFill>
+                            <a:srgbClr val="000000"/>
+                          </a:solidFill>
+                        </a:rPr>
+                        <a:t>Ahmed Mohamed</a:t>
+                      </a:r>
+                      <a:endParaRPr lang="en-US" sz="800" dirty="0"/>
+                    </a:p>
+                  </a:txBody>
+                  <a:tcPr marL="91440" marR="91440" marT="45720" marB="45720" anchor="ctr">
+                    <a:lnL w="12700" cap="flat" cmpd="sng" algn="ctr">
+                      <a:solidFill>
+                        <a:srgbClr val="E2E8F0"/>
+                      </a:solidFill>
+                      <a:prstDash val="solid"/>
+                      <a:round/>
+                      <a:headEnd type="none" w="med" len="med"/>
+                      <a:tailEnd type="none" w="med" len="med"/>
+                    </a:lnL>
+                    <a:lnR w="12700" cap="flat" cmpd="sng" algn="ctr">
+                      <a:solidFill>
+                        <a:srgbClr val="E2E8F0"/>
+                      </a:solidFill>
+                      <a:prstDash val="solid"/>
+                      <a:round/>
+                      <a:headEnd type="none" w="med" len="med"/>
+                      <a:tailEnd type="none" w="med" len="med"/>
+                    </a:lnR>
+                    <a:lnT w="12700" cap="flat" cmpd="sng" algn="ctr">
+                      <a:solidFill>
+                        <a:srgbClr val="E2E8F0"/>
+                      </a:solidFill>
+                      <a:prstDash val="solid"/>
+                      <a:round/>
+                      <a:headEnd type="none" w="med" len="med"/>
+                      <a:tailEnd type="none" w="med" len="med"/>
+                    </a:lnT>
+                    <a:lnB w="12700" cap="flat" cmpd="sng" algn="ctr">
+                      <a:solidFill>
+                        <a:srgbClr val="E2E8F0"/>
+                      </a:solidFill>
+                      <a:prstDash val="solid"/>
+                      <a:round/>
+                      <a:headEnd type="none" w="med" len="med"/>
+                      <a:tailEnd type="none" w="med" len="med"/>
+                    </a:lnB>
+                  </a:tcPr>
+                </a:tc>
+                <a:tc>
+                  <a:txBody>
+                    <a:bodyPr/>
+                    <a:lstStyle/>
+                    <a:p>
+                      <a:pPr algn="ctr" indent="0" marL="0">
+                        <a:buNone/>
+                      </a:pPr>
+                      <a:r>
+                        <a:rPr lang="en-US" sz="800" dirty="0">
+                          <a:solidFill>
+                            <a:srgbClr val="000000"/>
+                          </a:solidFill>
+                        </a:rPr>
+                        <a:t>14,302</a:t>
+                      </a:r>
+                      <a:endParaRPr lang="en-US" sz="800" dirty="0"/>
+                    </a:p>
+                  </a:txBody>
+                  <a:tcPr marL="91440" marR="91440" marT="45720" marB="45720" anchor="ctr">
+                    <a:lnL w="12700" cap="flat" cmpd="sng" algn="ctr">
+                      <a:solidFill>
+                        <a:srgbClr val="E2E8F0"/>
+                      </a:solidFill>
+                      <a:prstDash val="solid"/>
+                      <a:round/>
+                      <a:headEnd type="none" w="med" len="med"/>
+                      <a:tailEnd type="none" w="med" len="med"/>
+                    </a:lnL>
+                    <a:lnR w="12700" cap="flat" cmpd="sng" algn="ctr">
+                      <a:solidFill>
+                        <a:srgbClr val="E2E8F0"/>
+                      </a:solidFill>
+                      <a:prstDash val="solid"/>
+                      <a:round/>
+                      <a:headEnd type="none" w="med" len="med"/>
+                      <a:tailEnd type="none" w="med" len="med"/>
+                    </a:lnR>
+                    <a:lnT w="12700" cap="flat" cmpd="sng" algn="ctr">
+                      <a:solidFill>
+                        <a:srgbClr val="E2E8F0"/>
+                      </a:solidFill>
+                      <a:prstDash val="solid"/>
+                      <a:round/>
+                      <a:headEnd type="none" w="med" len="med"/>
+                      <a:tailEnd type="none" w="med" len="med"/>
+                    </a:lnT>
+                    <a:lnB w="12700" cap="flat" cmpd="sng" algn="ctr">
+                      <a:solidFill>
+                        <a:srgbClr val="E2E8F0"/>
+                      </a:solidFill>
+                      <a:prstDash val="solid"/>
+                      <a:round/>
+                      <a:headEnd type="none" w="med" len="med"/>
+                      <a:tailEnd type="none" w="med" len="med"/>
+                    </a:lnB>
+                  </a:tcPr>
+                </a:tc>
+                <a:tc>
+                  <a:txBody>
+                    <a:bodyPr/>
+                    <a:lstStyle/>
+                    <a:p>
+                      <a:pPr algn="ctr" indent="0" marL="0">
+                        <a:buNone/>
+                      </a:pPr>
+                      <a:r>
+                        <a:rPr lang="en-US" sz="800" b="1" dirty="0">
+                          <a:solidFill>
+                            <a:srgbClr val="000000"/>
+                          </a:solidFill>
+                        </a:rPr>
+                        <a:t>18,041</a:t>
+                      </a:r>
+                      <a:endParaRPr lang="en-US" sz="800" dirty="0"/>
+                    </a:p>
+                  </a:txBody>
+                  <a:tcPr marL="91440" marR="91440" marT="45720" marB="45720" anchor="ctr">
+                    <a:lnL w="12700" cap="flat" cmpd="sng" algn="ctr">
+                      <a:solidFill>
+                        <a:srgbClr val="E2E8F0"/>
+                      </a:solidFill>
+                      <a:prstDash val="solid"/>
+                      <a:round/>
+                      <a:headEnd type="none" w="med" len="med"/>
+                      <a:tailEnd type="none" w="med" len="med"/>
+                    </a:lnL>
+                    <a:lnR w="12700" cap="flat" cmpd="sng" algn="ctr">
+                      <a:solidFill>
+                        <a:srgbClr val="E2E8F0"/>
+                      </a:solidFill>
+                      <a:prstDash val="solid"/>
+                      <a:round/>
+                      <a:headEnd type="none" w="med" len="med"/>
+                      <a:tailEnd type="none" w="med" len="med"/>
+                    </a:lnR>
+                    <a:lnT w="12700" cap="flat" cmpd="sng" algn="ctr">
+                      <a:solidFill>
+                        <a:srgbClr val="E2E8F0"/>
+                      </a:solidFill>
+                      <a:prstDash val="solid"/>
+                      <a:round/>
+                      <a:headEnd type="none" w="med" len="med"/>
+                      <a:tailEnd type="none" w="med" len="med"/>
+                    </a:lnT>
+                    <a:lnB w="12700" cap="flat" cmpd="sng" algn="ctr">
+                      <a:solidFill>
+                        <a:srgbClr val="E2E8F0"/>
+                      </a:solidFill>
+                      <a:prstDash val="solid"/>
+                      <a:round/>
+                      <a:headEnd type="none" w="med" len="med"/>
+                      <a:tailEnd type="none" w="med" len="med"/>
+                    </a:lnB>
+                  </a:tcPr>
+                </a:tc>
+                <a:tc>
+                  <a:txBody>
+                    <a:bodyPr/>
+                    <a:lstStyle/>
+                    <a:p>
+                      <a:pPr algn="ctr" indent="0" marL="0">
+                        <a:buNone/>
+                      </a:pPr>
+                      <a:r>
+                        <a:rPr lang="en-US" sz="800" dirty="0">
+                          <a:solidFill>
+                            <a:srgbClr val="28A745"/>
+                          </a:solidFill>
+                        </a:rPr>
+                        <a:t>+3,739</a:t>
+                      </a:r>
+                      <a:endParaRPr lang="en-US" sz="800" dirty="0"/>
+                    </a:p>
+                  </a:txBody>
+                  <a:tcPr marL="91440" marR="91440" marT="45720" marB="45720" anchor="ctr">
+                    <a:lnL w="12700" cap="flat" cmpd="sng" algn="ctr">
+                      <a:solidFill>
+                        <a:srgbClr val="E2E8F0"/>
+                      </a:solidFill>
+                      <a:prstDash val="solid"/>
+                      <a:round/>
+                      <a:headEnd type="none" w="med" len="med"/>
+                      <a:tailEnd type="none" w="med" len="med"/>
+                    </a:lnL>
+                    <a:lnR w="12700" cap="flat" cmpd="sng" algn="ctr">
+                      <a:solidFill>
+                        <a:srgbClr val="E2E8F0"/>
+                      </a:solidFill>
+                      <a:prstDash val="solid"/>
+                      <a:round/>
+                      <a:headEnd type="none" w="med" len="med"/>
+                      <a:tailEnd type="none" w="med" len="med"/>
+                    </a:lnR>
+                    <a:lnT w="12700" cap="flat" cmpd="sng" algn="ctr">
+                      <a:solidFill>
+                        <a:srgbClr val="E2E8F0"/>
+                      </a:solidFill>
+                      <a:prstDash val="solid"/>
+                      <a:round/>
+                      <a:headEnd type="none" w="med" len="med"/>
+                      <a:tailEnd type="none" w="med" len="med"/>
+                    </a:lnT>
+                    <a:lnB w="12700" cap="flat" cmpd="sng" algn="ctr">
+                      <a:solidFill>
+                        <a:srgbClr val="E2E8F0"/>
+                      </a:solidFill>
+                      <a:prstDash val="solid"/>
+                      <a:round/>
+                      <a:headEnd type="none" w="med" len="med"/>
+                      <a:tailEnd type="none" w="med" len="med"/>
+                    </a:lnB>
+                  </a:tcPr>
+                </a:tc>
+                <a:tc>
+                  <a:txBody>
+                    <a:bodyPr/>
+                    <a:lstStyle/>
+                    <a:p>
+                      <a:pPr algn="ctr" indent="0" marL="0">
+                        <a:buNone/>
+                      </a:pPr>
+                      <a:r>
+                        <a:rPr lang="en-US" sz="850" b="1" dirty="0">
+                          <a:solidFill>
+                            <a:srgbClr val="28A745"/>
+                          </a:solidFill>
+                        </a:rPr>
+                        <a:t>+26.1%</a:t>
+                      </a:r>
+                      <a:endParaRPr lang="en-US" sz="850" dirty="0"/>
+                    </a:p>
+                  </a:txBody>
+                  <a:tcPr marL="91440" marR="91440" marT="45720" marB="45720" anchor="ctr">
+                    <a:lnL w="12700" cap="flat" cmpd="sng" algn="ctr">
+                      <a:solidFill>
+                        <a:srgbClr val="E2E8F0"/>
+                      </a:solidFill>
+                      <a:prstDash val="solid"/>
+                      <a:round/>
+                      <a:headEnd type="none" w="med" len="med"/>
+                      <a:tailEnd type="none" w="med" len="med"/>
+                    </a:lnL>
+                    <a:lnR w="12700" cap="flat" cmpd="sng" algn="ctr">
+                      <a:solidFill>
+                        <a:srgbClr val="E2E8F0"/>
+                      </a:solidFill>
+                      <a:prstDash val="solid"/>
+                      <a:round/>
+                      <a:headEnd type="none" w="med" len="med"/>
+                      <a:tailEnd type="none" w="med" len="med"/>
+                    </a:lnR>
+                    <a:lnT w="12700" cap="flat" cmpd="sng" algn="ctr">
+                      <a:solidFill>
+                        <a:srgbClr val="E2E8F0"/>
+                      </a:solidFill>
+                      <a:prstDash val="solid"/>
+                      <a:round/>
+                      <a:headEnd type="none" w="med" len="med"/>
+                      <a:tailEnd type="none" w="med" len="med"/>
+                    </a:lnT>
+                    <a:lnB w="12700" cap="flat" cmpd="sng" algn="ctr">
+                      <a:solidFill>
+                        <a:srgbClr val="E2E8F0"/>
+                      </a:solidFill>
+                      <a:prstDash val="solid"/>
+                      <a:round/>
+                      <a:headEnd type="none" w="med" len="med"/>
+                      <a:tailEnd type="none" w="med" len="med"/>
+                    </a:lnB>
+                  </a:tcPr>
+                </a:tc>
+                <a:tc>
+                  <a:txBody>
+                    <a:bodyPr/>
+                    <a:lstStyle/>
+                    <a:p>
+                      <a:pPr algn="ctr" indent="0" marL="0">
+                        <a:buNone/>
+                      </a:pPr>
+                      <a:r>
+                        <a:rPr lang="en-US" sz="750" b="1" dirty="0">
+                          <a:solidFill>
+                            <a:srgbClr val="000000"/>
+                          </a:solidFill>
+                        </a:rPr>
+                        <a:t>Tier 2: Compounder 📈</a:t>
+                      </a:r>
+                      <a:endParaRPr lang="en-US" sz="750" dirty="0"/>
+                    </a:p>
+                  </a:txBody>
+                  <a:tcPr marL="91440" marR="91440" marT="45720" marB="45720" anchor="ctr">
+                    <a:lnL w="12700" cap="flat" cmpd="sng" algn="ctr">
+                      <a:solidFill>
+                        <a:srgbClr val="E2E8F0"/>
+                      </a:solidFill>
+                      <a:prstDash val="solid"/>
+                      <a:round/>
+                      <a:headEnd type="none" w="med" len="med"/>
+                      <a:tailEnd type="none" w="med" len="med"/>
+                    </a:lnL>
+                    <a:lnR w="12700" cap="flat" cmpd="sng" algn="ctr">
+                      <a:solidFill>
+                        <a:srgbClr val="E2E8F0"/>
+                      </a:solidFill>
+                      <a:prstDash val="solid"/>
+                      <a:round/>
+                      <a:headEnd type="none" w="med" len="med"/>
+                      <a:tailEnd type="none" w="med" len="med"/>
+                    </a:lnR>
+                    <a:lnT w="12700" cap="flat" cmpd="sng" algn="ctr">
+                      <a:solidFill>
+                        <a:srgbClr val="E2E8F0"/>
+                      </a:solidFill>
+                      <a:prstDash val="solid"/>
+                      <a:round/>
+                      <a:headEnd type="none" w="med" len="med"/>
+                      <a:tailEnd type="none" w="med" len="med"/>
+                    </a:lnT>
+                    <a:lnB w="12700" cap="flat" cmpd="sng" algn="ctr">
+                      <a:solidFill>
+                        <a:srgbClr val="E2E8F0"/>
+                      </a:solidFill>
+                      <a:prstDash val="solid"/>
+                      <a:round/>
+                      <a:headEnd type="none" w="med" len="med"/>
+                      <a:tailEnd type="none" w="med" len="med"/>
+                    </a:lnB>
+                  </a:tcPr>
+                </a:tc>
+              </a:tr>
+              <a:tr h="399011">
+                <a:tc>
+                  <a:txBody>
+                    <a:bodyPr/>
+                    <a:lstStyle/>
+                    <a:p>
+                      <a:pPr algn="ctr" indent="0" marL="0">
+                        <a:buNone/>
+                      </a:pPr>
+                      <a:r>
+                        <a:rPr lang="en-US" sz="800" b="1" dirty="0">
+                          <a:solidFill>
+                            <a:srgbClr val="000000"/>
+                          </a:solidFill>
+                        </a:rPr>
+                        <a:t>5</a:t>
+                      </a:r>
+                      <a:endParaRPr lang="en-US" sz="800" dirty="0"/>
+                    </a:p>
+                  </a:txBody>
+                  <a:tcPr marL="91440" marR="91440" marT="45720" marB="45720" anchor="ctr">
+                    <a:lnL w="12700" cap="flat" cmpd="sng" algn="ctr">
+                      <a:solidFill>
+                        <a:srgbClr val="E2E8F0"/>
+                      </a:solidFill>
+                      <a:prstDash val="solid"/>
+                      <a:round/>
+                      <a:headEnd type="none" w="med" len="med"/>
+                      <a:tailEnd type="none" w="med" len="med"/>
+                    </a:lnL>
+                    <a:lnR w="12700" cap="flat" cmpd="sng" algn="ctr">
+                      <a:solidFill>
+                        <a:srgbClr val="E2E8F0"/>
+                      </a:solidFill>
+                      <a:prstDash val="solid"/>
+                      <a:round/>
+                      <a:headEnd type="none" w="med" len="med"/>
+                      <a:tailEnd type="none" w="med" len="med"/>
+                    </a:lnR>
+                    <a:lnT w="12700" cap="flat" cmpd="sng" algn="ctr">
+                      <a:solidFill>
+                        <a:srgbClr val="E2E8F0"/>
+                      </a:solidFill>
+                      <a:prstDash val="solid"/>
+                      <a:round/>
+                      <a:headEnd type="none" w="med" len="med"/>
+                      <a:tailEnd type="none" w="med" len="med"/>
+                    </a:lnT>
+                    <a:lnB w="12700" cap="flat" cmpd="sng" algn="ctr">
+                      <a:solidFill>
+                        <a:srgbClr val="E2E8F0"/>
+                      </a:solidFill>
+                      <a:prstDash val="solid"/>
+                      <a:round/>
+                      <a:headEnd type="none" w="med" len="med"/>
+                      <a:tailEnd type="none" w="med" len="med"/>
+                    </a:lnB>
+                  </a:tcPr>
+                </a:tc>
+                <a:tc>
+                  <a:txBody>
+                    <a:bodyPr/>
+                    <a:lstStyle/>
+                    <a:p>
+                      <a:pPr algn="ctr" indent="0" marL="0">
+                        <a:buNone/>
+                      </a:pPr>
+                      <a:r>
+                        <a:rPr lang="en-US" sz="800" dirty="0">
+                          <a:solidFill>
+                            <a:srgbClr val="000000"/>
+                          </a:solidFill>
+                        </a:rPr>
+                        <a:t>Upper Egypt II</a:t>
+                      </a:r>
+                      <a:endParaRPr lang="en-US" sz="800" dirty="0"/>
+                    </a:p>
+                  </a:txBody>
+                  <a:tcPr marL="91440" marR="91440" marT="45720" marB="45720" anchor="ctr">
+                    <a:lnL w="12700" cap="flat" cmpd="sng" algn="ctr">
+                      <a:solidFill>
+                        <a:srgbClr val="E2E8F0"/>
+                      </a:solidFill>
+                      <a:prstDash val="solid"/>
+                      <a:round/>
+                      <a:headEnd type="none" w="med" len="med"/>
+                      <a:tailEnd type="none" w="med" len="med"/>
+                    </a:lnL>
+                    <a:lnR w="12700" cap="flat" cmpd="sng" algn="ctr">
+                      <a:solidFill>
+                        <a:srgbClr val="E2E8F0"/>
+                      </a:solidFill>
+                      <a:prstDash val="solid"/>
+                      <a:round/>
+                      <a:headEnd type="none" w="med" len="med"/>
+                      <a:tailEnd type="none" w="med" len="med"/>
+                    </a:lnR>
+                    <a:lnT w="12700" cap="flat" cmpd="sng" algn="ctr">
+                      <a:solidFill>
+                        <a:srgbClr val="E2E8F0"/>
+                      </a:solidFill>
+                      <a:prstDash val="solid"/>
+                      <a:round/>
+                      <a:headEnd type="none" w="med" len="med"/>
+                      <a:tailEnd type="none" w="med" len="med"/>
+                    </a:lnT>
+                    <a:lnB w="12700" cap="flat" cmpd="sng" algn="ctr">
+                      <a:solidFill>
+                        <a:srgbClr val="E2E8F0"/>
+                      </a:solidFill>
+                      <a:prstDash val="solid"/>
+                      <a:round/>
+                      <a:headEnd type="none" w="med" len="med"/>
+                      <a:tailEnd type="none" w="med" len="med"/>
+                    </a:lnB>
+                  </a:tcPr>
+                </a:tc>
+                <a:tc>
+                  <a:txBody>
+                    <a:bodyPr/>
+                    <a:lstStyle/>
+                    <a:p>
+                      <a:pPr algn="ctr" indent="0" marL="0">
+                        <a:buNone/>
+                      </a:pPr>
+                      <a:r>
+                        <a:rPr lang="en-US" sz="800" dirty="0">
+                          <a:solidFill>
+                            <a:srgbClr val="000000"/>
+                          </a:solidFill>
+                        </a:rPr>
+                        <a:t>Beshoy Youhanna</a:t>
+                      </a:r>
+                      <a:endParaRPr lang="en-US" sz="800" dirty="0"/>
+                    </a:p>
+                  </a:txBody>
+                  <a:tcPr marL="91440" marR="91440" marT="45720" marB="45720" anchor="ctr">
+                    <a:lnL w="12700" cap="flat" cmpd="sng" algn="ctr">
+                      <a:solidFill>
+                        <a:srgbClr val="E2E8F0"/>
+                      </a:solidFill>
+                      <a:prstDash val="solid"/>
+                      <a:round/>
+                      <a:headEnd type="none" w="med" len="med"/>
+                      <a:tailEnd type="none" w="med" len="med"/>
+                    </a:lnL>
+                    <a:lnR w="12700" cap="flat" cmpd="sng" algn="ctr">
+                      <a:solidFill>
+                        <a:srgbClr val="E2E8F0"/>
+                      </a:solidFill>
+                      <a:prstDash val="solid"/>
+                      <a:round/>
+                      <a:headEnd type="none" w="med" len="med"/>
+                      <a:tailEnd type="none" w="med" len="med"/>
+                    </a:lnR>
+                    <a:lnT w="12700" cap="flat" cmpd="sng" algn="ctr">
+                      <a:solidFill>
+                        <a:srgbClr val="E2E8F0"/>
+                      </a:solidFill>
+                      <a:prstDash val="solid"/>
+                      <a:round/>
+                      <a:headEnd type="none" w="med" len="med"/>
+                      <a:tailEnd type="none" w="med" len="med"/>
+                    </a:lnT>
+                    <a:lnB w="12700" cap="flat" cmpd="sng" algn="ctr">
+                      <a:solidFill>
+                        <a:srgbClr val="E2E8F0"/>
+                      </a:solidFill>
+                      <a:prstDash val="solid"/>
+                      <a:round/>
+                      <a:headEnd type="none" w="med" len="med"/>
+                      <a:tailEnd type="none" w="med" len="med"/>
+                    </a:lnB>
+                  </a:tcPr>
+                </a:tc>
+                <a:tc>
+                  <a:txBody>
+                    <a:bodyPr/>
+                    <a:lstStyle/>
+                    <a:p>
+                      <a:pPr algn="ctr" indent="0" marL="0">
+                        <a:buNone/>
+                      </a:pPr>
+                      <a:r>
+                        <a:rPr lang="en-US" sz="800" dirty="0">
+                          <a:solidFill>
+                            <a:srgbClr val="000000"/>
+                          </a:solidFill>
+                        </a:rPr>
+                        <a:t>22,305</a:t>
+                      </a:r>
+                      <a:endParaRPr lang="en-US" sz="800" dirty="0"/>
+                    </a:p>
+                  </a:txBody>
+                  <a:tcPr marL="91440" marR="91440" marT="45720" marB="45720" anchor="ctr">
+                    <a:lnL w="12700" cap="flat" cmpd="sng" algn="ctr">
+                      <a:solidFill>
+                        <a:srgbClr val="E2E8F0"/>
+                      </a:solidFill>
+                      <a:prstDash val="solid"/>
+                      <a:round/>
+                      <a:headEnd type="none" w="med" len="med"/>
+                      <a:tailEnd type="none" w="med" len="med"/>
+                    </a:lnL>
+                    <a:lnR w="12700" cap="flat" cmpd="sng" algn="ctr">
+                      <a:solidFill>
+                        <a:srgbClr val="E2E8F0"/>
+                      </a:solidFill>
+                      <a:prstDash val="solid"/>
+                      <a:round/>
+                      <a:headEnd type="none" w="med" len="med"/>
+                      <a:tailEnd type="none" w="med" len="med"/>
+                    </a:lnR>
+                    <a:lnT w="12700" cap="flat" cmpd="sng" algn="ctr">
+                      <a:solidFill>
+                        <a:srgbClr val="E2E8F0"/>
+                      </a:solidFill>
+                      <a:prstDash val="solid"/>
+                      <a:round/>
+                      <a:headEnd type="none" w="med" len="med"/>
+                      <a:tailEnd type="none" w="med" len="med"/>
+                    </a:lnT>
+                    <a:lnB w="12700" cap="flat" cmpd="sng" algn="ctr">
+                      <a:solidFill>
+                        <a:srgbClr val="E2E8F0"/>
+                      </a:solidFill>
+                      <a:prstDash val="solid"/>
+                      <a:round/>
+                      <a:headEnd type="none" w="med" len="med"/>
+                      <a:tailEnd type="none" w="med" len="med"/>
+                    </a:lnB>
+                  </a:tcPr>
+                </a:tc>
+                <a:tc>
+                  <a:txBody>
+                    <a:bodyPr/>
+                    <a:lstStyle/>
+                    <a:p>
+                      <a:pPr algn="ctr" indent="0" marL="0">
+                        <a:buNone/>
+                      </a:pPr>
+                      <a:r>
+                        <a:rPr lang="en-US" sz="800" b="1" dirty="0">
+                          <a:solidFill>
+                            <a:srgbClr val="000000"/>
+                          </a:solidFill>
+                        </a:rPr>
+                        <a:t>25,694</a:t>
+                      </a:r>
+                      <a:endParaRPr lang="en-US" sz="800" dirty="0"/>
+                    </a:p>
+                  </a:txBody>
+                  <a:tcPr marL="91440" marR="91440" marT="45720" marB="45720" anchor="ctr">
+                    <a:lnL w="12700" cap="flat" cmpd="sng" algn="ctr">
+                      <a:solidFill>
+                        <a:srgbClr val="E2E8F0"/>
+                      </a:solidFill>
+                      <a:prstDash val="solid"/>
+                      <a:round/>
+                      <a:headEnd type="none" w="med" len="med"/>
+                      <a:tailEnd type="none" w="med" len="med"/>
+                    </a:lnL>
+                    <a:lnR w="12700" cap="flat" cmpd="sng" algn="ctr">
+                      <a:solidFill>
+                        <a:srgbClr val="E2E8F0"/>
+                      </a:solidFill>
+                      <a:prstDash val="solid"/>
+                      <a:round/>
+                      <a:headEnd type="none" w="med" len="med"/>
+                      <a:tailEnd type="none" w="med" len="med"/>
+                    </a:lnR>
+                    <a:lnT w="12700" cap="flat" cmpd="sng" algn="ctr">
+                      <a:solidFill>
+                        <a:srgbClr val="E2E8F0"/>
+                      </a:solidFill>
+                      <a:prstDash val="solid"/>
+                      <a:round/>
+                      <a:headEnd type="none" w="med" len="med"/>
+                      <a:tailEnd type="none" w="med" len="med"/>
+                    </a:lnT>
+                    <a:lnB w="12700" cap="flat" cmpd="sng" algn="ctr">
+                      <a:solidFill>
+                        <a:srgbClr val="E2E8F0"/>
+                      </a:solidFill>
+                      <a:prstDash val="solid"/>
+                      <a:round/>
+                      <a:headEnd type="none" w="med" len="med"/>
+                      <a:tailEnd type="none" w="med" len="med"/>
+                    </a:lnB>
+                  </a:tcPr>
+                </a:tc>
+                <a:tc>
+                  <a:txBody>
+                    <a:bodyPr/>
+                    <a:lstStyle/>
+                    <a:p>
+                      <a:pPr algn="ctr" indent="0" marL="0">
+                        <a:buNone/>
+                      </a:pPr>
+                      <a:r>
+                        <a:rPr lang="en-US" sz="800" dirty="0">
+                          <a:solidFill>
+                            <a:srgbClr val="28A745"/>
+                          </a:solidFill>
+                        </a:rPr>
+                        <a:t>+3,389</a:t>
+                      </a:r>
+                      <a:endParaRPr lang="en-US" sz="800" dirty="0"/>
+                    </a:p>
+                  </a:txBody>
+                  <a:tcPr marL="91440" marR="91440" marT="45720" marB="45720" anchor="ctr">
+                    <a:lnL w="12700" cap="flat" cmpd="sng" algn="ctr">
+                      <a:solidFill>
+                        <a:srgbClr val="E2E8F0"/>
+                      </a:solidFill>
+                      <a:prstDash val="solid"/>
+                      <a:round/>
+                      <a:headEnd type="none" w="med" len="med"/>
+                      <a:tailEnd type="none" w="med" len="med"/>
+                    </a:lnL>
+                    <a:lnR w="12700" cap="flat" cmpd="sng" algn="ctr">
+                      <a:solidFill>
+                        <a:srgbClr val="E2E8F0"/>
+                      </a:solidFill>
+                      <a:prstDash val="solid"/>
+                      <a:round/>
+                      <a:headEnd type="none" w="med" len="med"/>
+                      <a:tailEnd type="none" w="med" len="med"/>
+                    </a:lnR>
+                    <a:lnT w="12700" cap="flat" cmpd="sng" algn="ctr">
+                      <a:solidFill>
+                        <a:srgbClr val="E2E8F0"/>
+                      </a:solidFill>
+                      <a:prstDash val="solid"/>
+                      <a:round/>
+                      <a:headEnd type="none" w="med" len="med"/>
+                      <a:tailEnd type="none" w="med" len="med"/>
+                    </a:lnT>
+                    <a:lnB w="12700" cap="flat" cmpd="sng" algn="ctr">
+                      <a:solidFill>
+                        <a:srgbClr val="E2E8F0"/>
+                      </a:solidFill>
+                      <a:prstDash val="solid"/>
+                      <a:round/>
+                      <a:headEnd type="none" w="med" len="med"/>
+                      <a:tailEnd type="none" w="med" len="med"/>
+                    </a:lnB>
+                  </a:tcPr>
+                </a:tc>
+                <a:tc>
+                  <a:txBody>
+                    <a:bodyPr/>
+                    <a:lstStyle/>
+                    <a:p>
+                      <a:pPr algn="ctr" indent="0" marL="0">
+                        <a:buNone/>
+                      </a:pPr>
+                      <a:r>
+                        <a:rPr lang="en-US" sz="850" b="1" dirty="0">
+                          <a:solidFill>
+                            <a:srgbClr val="28A745"/>
+                          </a:solidFill>
+                        </a:rPr>
+                        <a:t>+15.2%</a:t>
+                      </a:r>
+                      <a:endParaRPr lang="en-US" sz="850" dirty="0"/>
+                    </a:p>
+                  </a:txBody>
+                  <a:tcPr marL="91440" marR="91440" marT="45720" marB="45720" anchor="ctr">
+                    <a:lnL w="12700" cap="flat" cmpd="sng" algn="ctr">
+                      <a:solidFill>
+                        <a:srgbClr val="E2E8F0"/>
+                      </a:solidFill>
+                      <a:prstDash val="solid"/>
+                      <a:round/>
+                      <a:headEnd type="none" w="med" len="med"/>
+                      <a:tailEnd type="none" w="med" len="med"/>
+                    </a:lnL>
+                    <a:lnR w="12700" cap="flat" cmpd="sng" algn="ctr">
+                      <a:solidFill>
+                        <a:srgbClr val="E2E8F0"/>
+                      </a:solidFill>
+                      <a:prstDash val="solid"/>
+                      <a:round/>
+                      <a:headEnd type="none" w="med" len="med"/>
+                      <a:tailEnd type="none" w="med" len="med"/>
+                    </a:lnR>
+                    <a:lnT w="12700" cap="flat" cmpd="sng" algn="ctr">
+                      <a:solidFill>
+                        <a:srgbClr val="E2E8F0"/>
+                      </a:solidFill>
+                      <a:prstDash val="solid"/>
+                      <a:round/>
+                      <a:headEnd type="none" w="med" len="med"/>
+                      <a:tailEnd type="none" w="med" len="med"/>
+                    </a:lnT>
+                    <a:lnB w="12700" cap="flat" cmpd="sng" algn="ctr">
+                      <a:solidFill>
+                        <a:srgbClr val="E2E8F0"/>
+                      </a:solidFill>
+                      <a:prstDash val="solid"/>
+                      <a:round/>
+                      <a:headEnd type="none" w="med" len="med"/>
+                      <a:tailEnd type="none" w="med" len="med"/>
+                    </a:lnB>
+                  </a:tcPr>
+                </a:tc>
+                <a:tc>
+                  <a:txBody>
+                    <a:bodyPr/>
+                    <a:lstStyle/>
+                    <a:p>
+                      <a:pPr algn="ctr" indent="0" marL="0">
+                        <a:buNone/>
+                      </a:pPr>
+                      <a:r>
+                        <a:rPr lang="en-US" sz="750" b="1" dirty="0">
+                          <a:solidFill>
+                            <a:srgbClr val="000000"/>
+                          </a:solidFill>
+                        </a:rPr>
+                        <a:t>Tier 2: Compounder 📈</a:t>
+                      </a:r>
+                      <a:endParaRPr lang="en-US" sz="750" dirty="0"/>
+                    </a:p>
+                  </a:txBody>
+                  <a:tcPr marL="91440" marR="91440" marT="45720" marB="45720" anchor="ctr">
+                    <a:lnL w="12700" cap="flat" cmpd="sng" algn="ctr">
+                      <a:solidFill>
+                        <a:srgbClr val="E2E8F0"/>
+                      </a:solidFill>
+                      <a:prstDash val="solid"/>
+                      <a:round/>
+                      <a:headEnd type="none" w="med" len="med"/>
+                      <a:tailEnd type="none" w="med" len="med"/>
+                    </a:lnL>
+                    <a:lnR w="12700" cap="flat" cmpd="sng" algn="ctr">
+                      <a:solidFill>
+                        <a:srgbClr val="E2E8F0"/>
+                      </a:solidFill>
+                      <a:prstDash val="solid"/>
+                      <a:round/>
+                      <a:headEnd type="none" w="med" len="med"/>
+                      <a:tailEnd type="none" w="med" len="med"/>
+                    </a:lnR>
+                    <a:lnT w="12700" cap="flat" cmpd="sng" algn="ctr">
+                      <a:solidFill>
+                        <a:srgbClr val="E2E8F0"/>
+                      </a:solidFill>
+                      <a:prstDash val="solid"/>
+                      <a:round/>
+                      <a:headEnd type="none" w="med" len="med"/>
+                      <a:tailEnd type="none" w="med" len="med"/>
+                    </a:lnT>
+                    <a:lnB w="12700" cap="flat" cmpd="sng" algn="ctr">
+                      <a:solidFill>
+                        <a:srgbClr val="E2E8F0"/>
+                      </a:solidFill>
+                      <a:prstDash val="solid"/>
+                      <a:round/>
+                      <a:headEnd type="none" w="med" len="med"/>
+                      <a:tailEnd type="none" w="med" len="med"/>
+                    </a:lnB>
+                  </a:tcPr>
+                </a:tc>
+              </a:tr>
+              <a:tr h="399011">
+                <a:tc>
+                  <a:txBody>
+                    <a:bodyPr/>
+                    <a:lstStyle/>
+                    <a:p>
+                      <a:pPr algn="ctr" indent="0" marL="0">
+                        <a:buNone/>
+                      </a:pPr>
+                      <a:r>
+                        <a:rPr lang="en-US" sz="800" b="1" dirty="0">
+                          <a:solidFill>
+                            <a:srgbClr val="000000"/>
+                          </a:solidFill>
+                        </a:rPr>
+                        <a:t>6</a:t>
+                      </a:r>
+                      <a:endParaRPr lang="en-US" sz="800" dirty="0"/>
+                    </a:p>
+                  </a:txBody>
+                  <a:tcPr marL="91440" marR="91440" marT="45720" marB="45720" anchor="ctr">
+                    <a:lnL w="12700" cap="flat" cmpd="sng" algn="ctr">
+                      <a:solidFill>
+                        <a:srgbClr val="E2E8F0"/>
+                      </a:solidFill>
+                      <a:prstDash val="solid"/>
+                      <a:round/>
+                      <a:headEnd type="none" w="med" len="med"/>
+                      <a:tailEnd type="none" w="med" len="med"/>
+                    </a:lnL>
+                    <a:lnR w="12700" cap="flat" cmpd="sng" algn="ctr">
+                      <a:solidFill>
+                        <a:srgbClr val="E2E8F0"/>
+                      </a:solidFill>
+                      <a:prstDash val="solid"/>
+                      <a:round/>
+                      <a:headEnd type="none" w="med" len="med"/>
+                      <a:tailEnd type="none" w="med" len="med"/>
+                    </a:lnR>
+                    <a:lnT w="12700" cap="flat" cmpd="sng" algn="ctr">
+                      <a:solidFill>
+                        <a:srgbClr val="E2E8F0"/>
+                      </a:solidFill>
+                      <a:prstDash val="solid"/>
+                      <a:round/>
+                      <a:headEnd type="none" w="med" len="med"/>
+                      <a:tailEnd type="none" w="med" len="med"/>
+                    </a:lnT>
+                    <a:lnB w="12700" cap="flat" cmpd="sng" algn="ctr">
+                      <a:solidFill>
+                        <a:srgbClr val="E2E8F0"/>
+                      </a:solidFill>
+                      <a:prstDash val="solid"/>
+                      <a:round/>
+                      <a:headEnd type="none" w="med" len="med"/>
+                      <a:tailEnd type="none" w="med" len="med"/>
+                    </a:lnB>
+                  </a:tcPr>
+                </a:tc>
+                <a:tc>
+                  <a:txBody>
+                    <a:bodyPr/>
+                    <a:lstStyle/>
+                    <a:p>
+                      <a:pPr algn="ctr" indent="0" marL="0">
+                        <a:buNone/>
+                      </a:pPr>
+                      <a:r>
+                        <a:rPr lang="en-US" sz="800" dirty="0">
+                          <a:solidFill>
+                            <a:srgbClr val="000000"/>
+                          </a:solidFill>
+                        </a:rPr>
+                        <a:t>Guiza</a:t>
+                      </a:r>
+                      <a:endParaRPr lang="en-US" sz="800" dirty="0"/>
+                    </a:p>
+                  </a:txBody>
+                  <a:tcPr marL="91440" marR="91440" marT="45720" marB="45720" anchor="ctr">
+                    <a:lnL w="12700" cap="flat" cmpd="sng" algn="ctr">
+                      <a:solidFill>
+                        <a:srgbClr val="E2E8F0"/>
+                      </a:solidFill>
+                      <a:prstDash val="solid"/>
+                      <a:round/>
+                      <a:headEnd type="none" w="med" len="med"/>
+                      <a:tailEnd type="none" w="med" len="med"/>
+                    </a:lnL>
+                    <a:lnR w="12700" cap="flat" cmpd="sng" algn="ctr">
+                      <a:solidFill>
+                        <a:srgbClr val="E2E8F0"/>
+                      </a:solidFill>
+                      <a:prstDash val="solid"/>
+                      <a:round/>
+                      <a:headEnd type="none" w="med" len="med"/>
+                      <a:tailEnd type="none" w="med" len="med"/>
+                    </a:lnR>
+                    <a:lnT w="12700" cap="flat" cmpd="sng" algn="ctr">
+                      <a:solidFill>
+                        <a:srgbClr val="E2E8F0"/>
+                      </a:solidFill>
+                      <a:prstDash val="solid"/>
+                      <a:round/>
+                      <a:headEnd type="none" w="med" len="med"/>
+                      <a:tailEnd type="none" w="med" len="med"/>
+                    </a:lnT>
+                    <a:lnB w="12700" cap="flat" cmpd="sng" algn="ctr">
+                      <a:solidFill>
+                        <a:srgbClr val="E2E8F0"/>
+                      </a:solidFill>
+                      <a:prstDash val="solid"/>
+                      <a:round/>
+                      <a:headEnd type="none" w="med" len="med"/>
+                      <a:tailEnd type="none" w="med" len="med"/>
+                    </a:lnB>
+                  </a:tcPr>
+                </a:tc>
+                <a:tc>
+                  <a:txBody>
+                    <a:bodyPr/>
+                    <a:lstStyle/>
+                    <a:p>
+                      <a:pPr algn="ctr" indent="0" marL="0">
+                        <a:buNone/>
+                      </a:pPr>
+                      <a:r>
+                        <a:rPr lang="en-US" sz="800" dirty="0">
+                          <a:solidFill>
+                            <a:srgbClr val="000000"/>
+                          </a:solidFill>
+                        </a:rPr>
+                        <a:t>Youstina Farag</a:t>
+                      </a:r>
+                      <a:endParaRPr lang="en-US" sz="800" dirty="0"/>
+                    </a:p>
+                  </a:txBody>
+                  <a:tcPr marL="91440" marR="91440" marT="45720" marB="45720" anchor="ctr">
+                    <a:lnL w="12700" cap="flat" cmpd="sng" algn="ctr">
+                      <a:solidFill>
+                        <a:srgbClr val="E2E8F0"/>
+                      </a:solidFill>
+                      <a:prstDash val="solid"/>
+                      <a:round/>
+                      <a:headEnd type="none" w="med" len="med"/>
+                      <a:tailEnd type="none" w="med" len="med"/>
+                    </a:lnL>
+                    <a:lnR w="12700" cap="flat" cmpd="sng" algn="ctr">
+                      <a:solidFill>
+                        <a:srgbClr val="E2E8F0"/>
+                      </a:solidFill>
+                      <a:prstDash val="solid"/>
+                      <a:round/>
+                      <a:headEnd type="none" w="med" len="med"/>
+                      <a:tailEnd type="none" w="med" len="med"/>
+                    </a:lnR>
+                    <a:lnT w="12700" cap="flat" cmpd="sng" algn="ctr">
+                      <a:solidFill>
+                        <a:srgbClr val="E2E8F0"/>
+                      </a:solidFill>
+                      <a:prstDash val="solid"/>
+                      <a:round/>
+                      <a:headEnd type="none" w="med" len="med"/>
+                      <a:tailEnd type="none" w="med" len="med"/>
+                    </a:lnT>
+                    <a:lnB w="12700" cap="flat" cmpd="sng" algn="ctr">
+                      <a:solidFill>
+                        <a:srgbClr val="E2E8F0"/>
+                      </a:solidFill>
+                      <a:prstDash val="solid"/>
+                      <a:round/>
+                      <a:headEnd type="none" w="med" len="med"/>
+                      <a:tailEnd type="none" w="med" len="med"/>
+                    </a:lnB>
+                  </a:tcPr>
+                </a:tc>
+                <a:tc>
+                  <a:txBody>
+                    <a:bodyPr/>
+                    <a:lstStyle/>
+                    <a:p>
+                      <a:pPr algn="ctr" indent="0" marL="0">
+                        <a:buNone/>
+                      </a:pPr>
+                      <a:r>
+                        <a:rPr lang="en-US" sz="800" dirty="0">
+                          <a:solidFill>
+                            <a:srgbClr val="000000"/>
+                          </a:solidFill>
+                        </a:rPr>
+                        <a:t>12,895</a:t>
+                      </a:r>
+                      <a:endParaRPr lang="en-US" sz="800" dirty="0"/>
+                    </a:p>
+                  </a:txBody>
+                  <a:tcPr marL="91440" marR="91440" marT="45720" marB="45720" anchor="ctr">
+                    <a:lnL w="12700" cap="flat" cmpd="sng" algn="ctr">
+                      <a:solidFill>
+                        <a:srgbClr val="E2E8F0"/>
+                      </a:solidFill>
+                      <a:prstDash val="solid"/>
+                      <a:round/>
+                      <a:headEnd type="none" w="med" len="med"/>
+                      <a:tailEnd type="none" w="med" len="med"/>
+                    </a:lnL>
+                    <a:lnR w="12700" cap="flat" cmpd="sng" algn="ctr">
+                      <a:solidFill>
+                        <a:srgbClr val="E2E8F0"/>
+                      </a:solidFill>
+                      <a:prstDash val="solid"/>
+                      <a:round/>
+                      <a:headEnd type="none" w="med" len="med"/>
+                      <a:tailEnd type="none" w="med" len="med"/>
+                    </a:lnR>
+                    <a:lnT w="12700" cap="flat" cmpd="sng" algn="ctr">
+                      <a:solidFill>
+                        <a:srgbClr val="E2E8F0"/>
+                      </a:solidFill>
+                      <a:prstDash val="solid"/>
+                      <a:round/>
+                      <a:headEnd type="none" w="med" len="med"/>
+                      <a:tailEnd type="none" w="med" len="med"/>
+                    </a:lnT>
+                    <a:lnB w="12700" cap="flat" cmpd="sng" algn="ctr">
+                      <a:solidFill>
+                        <a:srgbClr val="E2E8F0"/>
+                      </a:solidFill>
+                      <a:prstDash val="solid"/>
+                      <a:round/>
+                      <a:headEnd type="none" w="med" len="med"/>
+                      <a:tailEnd type="none" w="med" len="med"/>
+                    </a:lnB>
+                  </a:tcPr>
+                </a:tc>
+                <a:tc>
+                  <a:txBody>
+                    <a:bodyPr/>
+                    <a:lstStyle/>
+                    <a:p>
+                      <a:pPr algn="ctr" indent="0" marL="0">
+                        <a:buNone/>
+                      </a:pPr>
+                      <a:r>
+                        <a:rPr lang="en-US" sz="800" b="1" dirty="0">
+                          <a:solidFill>
+                            <a:srgbClr val="000000"/>
+                          </a:solidFill>
+                        </a:rPr>
+                        <a:t>13,858</a:t>
+                      </a:r>
+                      <a:endParaRPr lang="en-US" sz="800" dirty="0"/>
+                    </a:p>
+                  </a:txBody>
+                  <a:tcPr marL="91440" marR="91440" marT="45720" marB="45720" anchor="ctr">
+                    <a:lnL w="12700" cap="flat" cmpd="sng" algn="ctr">
+                      <a:solidFill>
+                        <a:srgbClr val="E2E8F0"/>
+                      </a:solidFill>
+                      <a:prstDash val="solid"/>
+                      <a:round/>
+                      <a:headEnd type="none" w="med" len="med"/>
+                      <a:tailEnd type="none" w="med" len="med"/>
+                    </a:lnL>
+                    <a:lnR w="12700" cap="flat" cmpd="sng" algn="ctr">
+                      <a:solidFill>
+                        <a:srgbClr val="E2E8F0"/>
+                      </a:solidFill>
+                      <a:prstDash val="solid"/>
+                      <a:round/>
+                      <a:headEnd type="none" w="med" len="med"/>
+                      <a:tailEnd type="none" w="med" len="med"/>
+                    </a:lnR>
+                    <a:lnT w="12700" cap="flat" cmpd="sng" algn="ctr">
+                      <a:solidFill>
+                        <a:srgbClr val="E2E8F0"/>
+                      </a:solidFill>
+                      <a:prstDash val="solid"/>
+                      <a:round/>
+                      <a:headEnd type="none" w="med" len="med"/>
+                      <a:tailEnd type="none" w="med" len="med"/>
+                    </a:lnT>
+                    <a:lnB w="12700" cap="flat" cmpd="sng" algn="ctr">
+                      <a:solidFill>
+                        <a:srgbClr val="E2E8F0"/>
+                      </a:solidFill>
+                      <a:prstDash val="solid"/>
+                      <a:round/>
+                      <a:headEnd type="none" w="med" len="med"/>
+                      <a:tailEnd type="none" w="med" len="med"/>
+                    </a:lnB>
+                  </a:tcPr>
+                </a:tc>
+                <a:tc>
+                  <a:txBody>
+                    <a:bodyPr/>
+                    <a:lstStyle/>
+                    <a:p>
+                      <a:pPr algn="ctr" indent="0" marL="0">
+                        <a:buNone/>
+                      </a:pPr>
+                      <a:r>
+                        <a:rPr lang="en-US" sz="800" dirty="0">
+                          <a:solidFill>
+                            <a:srgbClr val="28A745"/>
+                          </a:solidFill>
+                        </a:rPr>
+                        <a:t>+963</a:t>
+                      </a:r>
+                      <a:endParaRPr lang="en-US" sz="800" dirty="0"/>
+                    </a:p>
+                  </a:txBody>
+                  <a:tcPr marL="91440" marR="91440" marT="45720" marB="45720" anchor="ctr">
+                    <a:lnL w="12700" cap="flat" cmpd="sng" algn="ctr">
+                      <a:solidFill>
+                        <a:srgbClr val="E2E8F0"/>
+                      </a:solidFill>
+                      <a:prstDash val="solid"/>
+                      <a:round/>
+                      <a:headEnd type="none" w="med" len="med"/>
+                      <a:tailEnd type="none" w="med" len="med"/>
+                    </a:lnL>
+                    <a:lnR w="12700" cap="flat" cmpd="sng" algn="ctr">
+                      <a:solidFill>
+                        <a:srgbClr val="E2E8F0"/>
+                      </a:solidFill>
+                      <a:prstDash val="solid"/>
+                      <a:round/>
+                      <a:headEnd type="none" w="med" len="med"/>
+                      <a:tailEnd type="none" w="med" len="med"/>
+                    </a:lnR>
+                    <a:lnT w="12700" cap="flat" cmpd="sng" algn="ctr">
+                      <a:solidFill>
+                        <a:srgbClr val="E2E8F0"/>
+                      </a:solidFill>
+                      <a:prstDash val="solid"/>
+                      <a:round/>
+                      <a:headEnd type="none" w="med" len="med"/>
+                      <a:tailEnd type="none" w="med" len="med"/>
+                    </a:lnT>
+                    <a:lnB w="12700" cap="flat" cmpd="sng" algn="ctr">
+                      <a:solidFill>
+                        <a:srgbClr val="E2E8F0"/>
+                      </a:solidFill>
+                      <a:prstDash val="solid"/>
+                      <a:round/>
+                      <a:headEnd type="none" w="med" len="med"/>
+                      <a:tailEnd type="none" w="med" len="med"/>
+                    </a:lnB>
+                  </a:tcPr>
+                </a:tc>
+                <a:tc>
+                  <a:txBody>
+                    <a:bodyPr/>
+                    <a:lstStyle/>
+                    <a:p>
+                      <a:pPr algn="ctr" indent="0" marL="0">
+                        <a:buNone/>
+                      </a:pPr>
+                      <a:r>
+                        <a:rPr lang="en-US" sz="850" b="1" dirty="0">
+                          <a:solidFill>
+                            <a:srgbClr val="B45309"/>
+                          </a:solidFill>
+                        </a:rPr>
+                        <a:t>+7.5%</a:t>
+                      </a:r>
+                      <a:endParaRPr lang="en-US" sz="850" dirty="0"/>
+                    </a:p>
+                  </a:txBody>
+                  <a:tcPr marL="91440" marR="91440" marT="45720" marB="45720" anchor="ctr">
+                    <a:lnL w="12700" cap="flat" cmpd="sng" algn="ctr">
+                      <a:solidFill>
+                        <a:srgbClr val="E2E8F0"/>
+                      </a:solidFill>
+                      <a:prstDash val="solid"/>
+                      <a:round/>
+                      <a:headEnd type="none" w="med" len="med"/>
+                      <a:tailEnd type="none" w="med" len="med"/>
+                    </a:lnL>
+                    <a:lnR w="12700" cap="flat" cmpd="sng" algn="ctr">
+                      <a:solidFill>
+                        <a:srgbClr val="E2E8F0"/>
+                      </a:solidFill>
+                      <a:prstDash val="solid"/>
+                      <a:round/>
+                      <a:headEnd type="none" w="med" len="med"/>
+                      <a:tailEnd type="none" w="med" len="med"/>
+                    </a:lnR>
+                    <a:lnT w="12700" cap="flat" cmpd="sng" algn="ctr">
+                      <a:solidFill>
+                        <a:srgbClr val="E2E8F0"/>
+                      </a:solidFill>
+                      <a:prstDash val="solid"/>
+                      <a:round/>
+                      <a:headEnd type="none" w="med" len="med"/>
+                      <a:tailEnd type="none" w="med" len="med"/>
+                    </a:lnT>
+                    <a:lnB w="12700" cap="flat" cmpd="sng" algn="ctr">
+                      <a:solidFill>
+                        <a:srgbClr val="E2E8F0"/>
+                      </a:solidFill>
+                      <a:prstDash val="solid"/>
+                      <a:round/>
+                      <a:headEnd type="none" w="med" len="med"/>
+                      <a:tailEnd type="none" w="med" len="med"/>
+                    </a:lnB>
+                  </a:tcPr>
+                </a:tc>
+                <a:tc>
+                  <a:txBody>
+                    <a:bodyPr/>
+                    <a:lstStyle/>
+                    <a:p>
+                      <a:pPr algn="ctr" indent="0" marL="0">
+                        <a:buNone/>
+                      </a:pPr>
+                      <a:r>
+                        <a:rPr lang="en-US" sz="750" b="1" dirty="0">
+                          <a:solidFill>
+                            <a:srgbClr val="000000"/>
+                          </a:solidFill>
+                        </a:rPr>
+                        <a:t>Tier 3: Consolidator 🛡️</a:t>
+                      </a:r>
+                      <a:endParaRPr lang="en-US" sz="750" dirty="0"/>
+                    </a:p>
+                  </a:txBody>
+                  <a:tcPr marL="91440" marR="91440" marT="45720" marB="45720" anchor="ctr">
+                    <a:lnL w="12700" cap="flat" cmpd="sng" algn="ctr">
+                      <a:solidFill>
+                        <a:srgbClr val="E2E8F0"/>
+                      </a:solidFill>
+                      <a:prstDash val="solid"/>
+                      <a:round/>
+                      <a:headEnd type="none" w="med" len="med"/>
+                      <a:tailEnd type="none" w="med" len="med"/>
+                    </a:lnL>
+                    <a:lnR w="12700" cap="flat" cmpd="sng" algn="ctr">
+                      <a:solidFill>
+                        <a:srgbClr val="E2E8F0"/>
+                      </a:solidFill>
+                      <a:prstDash val="solid"/>
+                      <a:round/>
+                      <a:headEnd type="none" w="med" len="med"/>
+                      <a:tailEnd type="none" w="med" len="med"/>
+                    </a:lnR>
+                    <a:lnT w="12700" cap="flat" cmpd="sng" algn="ctr">
+                      <a:solidFill>
+                        <a:srgbClr val="E2E8F0"/>
+                      </a:solidFill>
+                      <a:prstDash val="solid"/>
+                      <a:round/>
+                      <a:headEnd type="none" w="med" len="med"/>
+                      <a:tailEnd type="none" w="med" len="med"/>
+                    </a:lnT>
+                    <a:lnB w="12700" cap="flat" cmpd="sng" algn="ctr">
+                      <a:solidFill>
+                        <a:srgbClr val="E2E8F0"/>
+                      </a:solidFill>
+                      <a:prstDash val="solid"/>
+                      <a:round/>
+                      <a:headEnd type="none" w="med" len="med"/>
+                      <a:tailEnd type="none" w="med" len="med"/>
+                    </a:lnB>
+                  </a:tcPr>
+                </a:tc>
+              </a:tr>
+              <a:tr h="399011">
+                <a:tc>
+                  <a:txBody>
+                    <a:bodyPr/>
+                    <a:lstStyle/>
+                    <a:p>
+                      <a:pPr algn="ctr" indent="0" marL="0">
+                        <a:buNone/>
+                      </a:pPr>
+                      <a:r>
+                        <a:rPr lang="en-US" sz="800" b="1" dirty="0">
+                          <a:solidFill>
+                            <a:srgbClr val="000000"/>
+                          </a:solidFill>
+                        </a:rPr>
+                        <a:t>7</a:t>
+                      </a:r>
+                      <a:endParaRPr lang="en-US" sz="800" dirty="0"/>
+                    </a:p>
+                  </a:txBody>
+                  <a:tcPr marL="91440" marR="91440" marT="45720" marB="45720" anchor="ctr">
+                    <a:lnL w="12700" cap="flat" cmpd="sng" algn="ctr">
+                      <a:solidFill>
+                        <a:srgbClr val="E2E8F0"/>
+                      </a:solidFill>
+                      <a:prstDash val="solid"/>
+                      <a:round/>
+                      <a:headEnd type="none" w="med" len="med"/>
+                      <a:tailEnd type="none" w="med" len="med"/>
+                    </a:lnL>
+                    <a:lnR w="12700" cap="flat" cmpd="sng" algn="ctr">
+                      <a:solidFill>
+                        <a:srgbClr val="E2E8F0"/>
+                      </a:solidFill>
+                      <a:prstDash val="solid"/>
+                      <a:round/>
+                      <a:headEnd type="none" w="med" len="med"/>
+                      <a:tailEnd type="none" w="med" len="med"/>
+                    </a:lnR>
+                    <a:lnT w="12700" cap="flat" cmpd="sng" algn="ctr">
+                      <a:solidFill>
+                        <a:srgbClr val="E2E8F0"/>
+                      </a:solidFill>
+                      <a:prstDash val="solid"/>
+                      <a:round/>
+                      <a:headEnd type="none" w="med" len="med"/>
+                      <a:tailEnd type="none" w="med" len="med"/>
+                    </a:lnT>
+                    <a:lnB w="12700" cap="flat" cmpd="sng" algn="ctr">
+                      <a:solidFill>
+                        <a:srgbClr val="E2E8F0"/>
+                      </a:solidFill>
+                      <a:prstDash val="solid"/>
+                      <a:round/>
+                      <a:headEnd type="none" w="med" len="med"/>
+                      <a:tailEnd type="none" w="med" len="med"/>
+                    </a:lnB>
+                  </a:tcPr>
+                </a:tc>
+                <a:tc>
+                  <a:txBody>
+                    <a:bodyPr/>
+                    <a:lstStyle/>
+                    <a:p>
+                      <a:pPr algn="ctr" indent="0" marL="0">
+                        <a:buNone/>
+                      </a:pPr>
+                      <a:r>
+                        <a:rPr lang="en-US" sz="800" dirty="0">
+                          <a:solidFill>
+                            <a:srgbClr val="000000"/>
+                          </a:solidFill>
+                        </a:rPr>
+                        <a:t>Alx</a:t>
+                      </a:r>
+                      <a:endParaRPr lang="en-US" sz="800" dirty="0"/>
+                    </a:p>
+                  </a:txBody>
+                  <a:tcPr marL="91440" marR="91440" marT="45720" marB="45720" anchor="ctr">
+                    <a:lnL w="12700" cap="flat" cmpd="sng" algn="ctr">
+                      <a:solidFill>
+                        <a:srgbClr val="E2E8F0"/>
+                      </a:solidFill>
+                      <a:prstDash val="solid"/>
+                      <a:round/>
+                      <a:headEnd type="none" w="med" len="med"/>
+                      <a:tailEnd type="none" w="med" len="med"/>
+                    </a:lnL>
+                    <a:lnR w="12700" cap="flat" cmpd="sng" algn="ctr">
+                      <a:solidFill>
+                        <a:srgbClr val="E2E8F0"/>
+                      </a:solidFill>
+                      <a:prstDash val="solid"/>
+                      <a:round/>
+                      <a:headEnd type="none" w="med" len="med"/>
+                      <a:tailEnd type="none" w="med" len="med"/>
+                    </a:lnR>
+                    <a:lnT w="12700" cap="flat" cmpd="sng" algn="ctr">
+                      <a:solidFill>
+                        <a:srgbClr val="E2E8F0"/>
+                      </a:solidFill>
+                      <a:prstDash val="solid"/>
+                      <a:round/>
+                      <a:headEnd type="none" w="med" len="med"/>
+                      <a:tailEnd type="none" w="med" len="med"/>
+                    </a:lnT>
+                    <a:lnB w="12700" cap="flat" cmpd="sng" algn="ctr">
+                      <a:solidFill>
+                        <a:srgbClr val="E2E8F0"/>
+                      </a:solidFill>
+                      <a:prstDash val="solid"/>
+                      <a:round/>
+                      <a:headEnd type="none" w="med" len="med"/>
+                      <a:tailEnd type="none" w="med" len="med"/>
+                    </a:lnB>
+                  </a:tcPr>
+                </a:tc>
+                <a:tc>
+                  <a:txBody>
+                    <a:bodyPr/>
+                    <a:lstStyle/>
+                    <a:p>
+                      <a:pPr algn="ctr" indent="0" marL="0">
+                        <a:buNone/>
+                      </a:pPr>
+                      <a:r>
+                        <a:rPr lang="en-US" sz="800" dirty="0">
+                          <a:solidFill>
+                            <a:srgbClr val="000000"/>
+                          </a:solidFill>
+                        </a:rPr>
+                        <a:t>Ahmed Hassan</a:t>
+                      </a:r>
+                      <a:endParaRPr lang="en-US" sz="800" dirty="0"/>
+                    </a:p>
+                  </a:txBody>
+                  <a:tcPr marL="91440" marR="91440" marT="45720" marB="45720" anchor="ctr">
+                    <a:lnL w="12700" cap="flat" cmpd="sng" algn="ctr">
+                      <a:solidFill>
+                        <a:srgbClr val="E2E8F0"/>
+                      </a:solidFill>
+                      <a:prstDash val="solid"/>
+                      <a:round/>
+                      <a:headEnd type="none" w="med" len="med"/>
+                      <a:tailEnd type="none" w="med" len="med"/>
+                    </a:lnL>
+                    <a:lnR w="12700" cap="flat" cmpd="sng" algn="ctr">
+                      <a:solidFill>
+                        <a:srgbClr val="E2E8F0"/>
+                      </a:solidFill>
+                      <a:prstDash val="solid"/>
+                      <a:round/>
+                      <a:headEnd type="none" w="med" len="med"/>
+                      <a:tailEnd type="none" w="med" len="med"/>
+                    </a:lnR>
+                    <a:lnT w="12700" cap="flat" cmpd="sng" algn="ctr">
+                      <a:solidFill>
+                        <a:srgbClr val="E2E8F0"/>
+                      </a:solidFill>
+                      <a:prstDash val="solid"/>
+                      <a:round/>
+                      <a:headEnd type="none" w="med" len="med"/>
+                      <a:tailEnd type="none" w="med" len="med"/>
+                    </a:lnT>
+                    <a:lnB w="12700" cap="flat" cmpd="sng" algn="ctr">
+                      <a:solidFill>
+                        <a:srgbClr val="E2E8F0"/>
+                      </a:solidFill>
+                      <a:prstDash val="solid"/>
+                      <a:round/>
+                      <a:headEnd type="none" w="med" len="med"/>
+                      <a:tailEnd type="none" w="med" len="med"/>
+                    </a:lnB>
+                  </a:tcPr>
+                </a:tc>
+                <a:tc>
+                  <a:txBody>
+                    <a:bodyPr/>
+                    <a:lstStyle/>
+                    <a:p>
+                      <a:pPr algn="ctr" indent="0" marL="0">
+                        <a:buNone/>
+                      </a:pPr>
+                      <a:r>
+                        <a:rPr lang="en-US" sz="800" dirty="0">
+                          <a:solidFill>
+                            <a:srgbClr val="000000"/>
+                          </a:solidFill>
+                        </a:rPr>
+                        <a:t>10,206</a:t>
+                      </a:r>
+                      <a:endParaRPr lang="en-US" sz="800" dirty="0"/>
+                    </a:p>
+                  </a:txBody>
+                  <a:tcPr marL="91440" marR="91440" marT="45720" marB="45720" anchor="ctr">
+                    <a:lnL w="12700" cap="flat" cmpd="sng" algn="ctr">
+                      <a:solidFill>
+                        <a:srgbClr val="E2E8F0"/>
+                      </a:solidFill>
+                      <a:prstDash val="solid"/>
+                      <a:round/>
+                      <a:headEnd type="none" w="med" len="med"/>
+                      <a:tailEnd type="none" w="med" len="med"/>
+                    </a:lnL>
+                    <a:lnR w="12700" cap="flat" cmpd="sng" algn="ctr">
+                      <a:solidFill>
+                        <a:srgbClr val="E2E8F0"/>
+                      </a:solidFill>
+                      <a:prstDash val="solid"/>
+                      <a:round/>
+                      <a:headEnd type="none" w="med" len="med"/>
+                      <a:tailEnd type="none" w="med" len="med"/>
+                    </a:lnR>
+                    <a:lnT w="12700" cap="flat" cmpd="sng" algn="ctr">
+                      <a:solidFill>
+                        <a:srgbClr val="E2E8F0"/>
+                      </a:solidFill>
+                      <a:prstDash val="solid"/>
+                      <a:round/>
+                      <a:headEnd type="none" w="med" len="med"/>
+                      <a:tailEnd type="none" w="med" len="med"/>
+                    </a:lnT>
+                    <a:lnB w="12700" cap="flat" cmpd="sng" algn="ctr">
+                      <a:solidFill>
+                        <a:srgbClr val="E2E8F0"/>
+                      </a:solidFill>
+                      <a:prstDash val="solid"/>
+                      <a:round/>
+                      <a:headEnd type="none" w="med" len="med"/>
+                      <a:tailEnd type="none" w="med" len="med"/>
+                    </a:lnB>
+                  </a:tcPr>
+                </a:tc>
+                <a:tc>
+                  <a:txBody>
+                    <a:bodyPr/>
+                    <a:lstStyle/>
+                    <a:p>
+                      <a:pPr algn="ctr" indent="0" marL="0">
+                        <a:buNone/>
+                      </a:pPr>
+                      <a:r>
+                        <a:rPr lang="en-US" sz="800" b="1" dirty="0">
+                          <a:solidFill>
+                            <a:srgbClr val="000000"/>
+                          </a:solidFill>
+                        </a:rPr>
+                        <a:t>10,314</a:t>
+                      </a:r>
+                      <a:endParaRPr lang="en-US" sz="800" dirty="0"/>
+                    </a:p>
+                  </a:txBody>
+                  <a:tcPr marL="91440" marR="91440" marT="45720" marB="45720" anchor="ctr">
+                    <a:lnL w="12700" cap="flat" cmpd="sng" algn="ctr">
+                      <a:solidFill>
+                        <a:srgbClr val="E2E8F0"/>
+                      </a:solidFill>
+                      <a:prstDash val="solid"/>
+                      <a:round/>
+                      <a:headEnd type="none" w="med" len="med"/>
+                      <a:tailEnd type="none" w="med" len="med"/>
+                    </a:lnL>
+                    <a:lnR w="12700" cap="flat" cmpd="sng" algn="ctr">
+                      <a:solidFill>
+                        <a:srgbClr val="E2E8F0"/>
+                      </a:solidFill>
+                      <a:prstDash val="solid"/>
+                      <a:round/>
+                      <a:headEnd type="none" w="med" len="med"/>
+                      <a:tailEnd type="none" w="med" len="med"/>
+                    </a:lnR>
+                    <a:lnT w="12700" cap="flat" cmpd="sng" algn="ctr">
+                      <a:solidFill>
+                        <a:srgbClr val="E2E8F0"/>
+                      </a:solidFill>
+                      <a:prstDash val="solid"/>
+                      <a:round/>
+                      <a:headEnd type="none" w="med" len="med"/>
+                      <a:tailEnd type="none" w="med" len="med"/>
+                    </a:lnT>
+                    <a:lnB w="12700" cap="flat" cmpd="sng" algn="ctr">
+                      <a:solidFill>
+                        <a:srgbClr val="E2E8F0"/>
+                      </a:solidFill>
+                      <a:prstDash val="solid"/>
+                      <a:round/>
+                      <a:headEnd type="none" w="med" len="med"/>
+                      <a:tailEnd type="none" w="med" len="med"/>
+                    </a:lnB>
+                  </a:tcPr>
+                </a:tc>
+                <a:tc>
+                  <a:txBody>
+                    <a:bodyPr/>
+                    <a:lstStyle/>
+                    <a:p>
+                      <a:pPr algn="ctr" indent="0" marL="0">
+                        <a:buNone/>
+                      </a:pPr>
+                      <a:r>
+                        <a:rPr lang="en-US" sz="800" dirty="0">
+                          <a:solidFill>
+                            <a:srgbClr val="28A745"/>
+                          </a:solidFill>
+                        </a:rPr>
+                        <a:t>+108</a:t>
+                      </a:r>
+                      <a:endParaRPr lang="en-US" sz="800" dirty="0"/>
+                    </a:p>
+                  </a:txBody>
+                  <a:tcPr marL="91440" marR="91440" marT="45720" marB="45720" anchor="ctr">
+                    <a:lnL w="12700" cap="flat" cmpd="sng" algn="ctr">
+                      <a:solidFill>
+                        <a:srgbClr val="E2E8F0"/>
+                      </a:solidFill>
+                      <a:prstDash val="solid"/>
+                      <a:round/>
+                      <a:headEnd type="none" w="med" len="med"/>
+                      <a:tailEnd type="none" w="med" len="med"/>
+                    </a:lnL>
+                    <a:lnR w="12700" cap="flat" cmpd="sng" algn="ctr">
+                      <a:solidFill>
+                        <a:srgbClr val="E2E8F0"/>
+                      </a:solidFill>
+                      <a:prstDash val="solid"/>
+                      <a:round/>
+                      <a:headEnd type="none" w="med" len="med"/>
+                      <a:tailEnd type="none" w="med" len="med"/>
+                    </a:lnR>
+                    <a:lnT w="12700" cap="flat" cmpd="sng" algn="ctr">
+                      <a:solidFill>
+                        <a:srgbClr val="E2E8F0"/>
+                      </a:solidFill>
+                      <a:prstDash val="solid"/>
+                      <a:round/>
+                      <a:headEnd type="none" w="med" len="med"/>
+                      <a:tailEnd type="none" w="med" len="med"/>
+                    </a:lnT>
+                    <a:lnB w="12700" cap="flat" cmpd="sng" algn="ctr">
+                      <a:solidFill>
+                        <a:srgbClr val="E2E8F0"/>
+                      </a:solidFill>
+                      <a:prstDash val="solid"/>
+                      <a:round/>
+                      <a:headEnd type="none" w="med" len="med"/>
+                      <a:tailEnd type="none" w="med" len="med"/>
+                    </a:lnB>
+                  </a:tcPr>
+                </a:tc>
+                <a:tc>
+                  <a:txBody>
+                    <a:bodyPr/>
+                    <a:lstStyle/>
+                    <a:p>
+                      <a:pPr algn="ctr" indent="0" marL="0">
+                        <a:buNone/>
+                      </a:pPr>
+                      <a:r>
+                        <a:rPr lang="en-US" sz="850" b="1" dirty="0">
+                          <a:solidFill>
+                            <a:srgbClr val="B45309"/>
+                          </a:solidFill>
+                        </a:rPr>
+                        <a:t>+1.1%</a:t>
+                      </a:r>
+                      <a:endParaRPr lang="en-US" sz="850" dirty="0"/>
+                    </a:p>
+                  </a:txBody>
+                  <a:tcPr marL="91440" marR="91440" marT="45720" marB="45720" anchor="ctr">
+                    <a:lnL w="12700" cap="flat" cmpd="sng" algn="ctr">
+                      <a:solidFill>
+                        <a:srgbClr val="E2E8F0"/>
+                      </a:solidFill>
+                      <a:prstDash val="solid"/>
+                      <a:round/>
+                      <a:headEnd type="none" w="med" len="med"/>
+                      <a:tailEnd type="none" w="med" len="med"/>
+                    </a:lnL>
+                    <a:lnR w="12700" cap="flat" cmpd="sng" algn="ctr">
+                      <a:solidFill>
+                        <a:srgbClr val="E2E8F0"/>
+                      </a:solidFill>
+                      <a:prstDash val="solid"/>
+                      <a:round/>
+                      <a:headEnd type="none" w="med" len="med"/>
+                      <a:tailEnd type="none" w="med" len="med"/>
+                    </a:lnR>
+                    <a:lnT w="12700" cap="flat" cmpd="sng" algn="ctr">
+                      <a:solidFill>
+                        <a:srgbClr val="E2E8F0"/>
+                      </a:solidFill>
+                      <a:prstDash val="solid"/>
+                      <a:round/>
+                      <a:headEnd type="none" w="med" len="med"/>
+                      <a:tailEnd type="none" w="med" len="med"/>
+                    </a:lnT>
+                    <a:lnB w="12700" cap="flat" cmpd="sng" algn="ctr">
+                      <a:solidFill>
+                        <a:srgbClr val="E2E8F0"/>
+                      </a:solidFill>
+                      <a:prstDash val="solid"/>
+                      <a:round/>
+                      <a:headEnd type="none" w="med" len="med"/>
+                      <a:tailEnd type="none" w="med" len="med"/>
+                    </a:lnB>
+                  </a:tcPr>
+                </a:tc>
+                <a:tc>
+                  <a:txBody>
+                    <a:bodyPr/>
+                    <a:lstStyle/>
+                    <a:p>
+                      <a:pPr algn="ctr" indent="0" marL="0">
+                        <a:buNone/>
+                      </a:pPr>
+                      <a:r>
+                        <a:rPr lang="en-US" sz="750" b="1" dirty="0">
+                          <a:solidFill>
+                            <a:srgbClr val="000000"/>
+                          </a:solidFill>
+                        </a:rPr>
+                        <a:t>Tier 3: Consolidator 🛡️</a:t>
+                      </a:r>
+                      <a:endParaRPr lang="en-US" sz="750" dirty="0"/>
+                    </a:p>
+                  </a:txBody>
+                  <a:tcPr marL="91440" marR="91440" marT="45720" marB="45720" anchor="ctr">
+                    <a:lnL w="12700" cap="flat" cmpd="sng" algn="ctr">
+                      <a:solidFill>
+                        <a:srgbClr val="E2E8F0"/>
+                      </a:solidFill>
+                      <a:prstDash val="solid"/>
+                      <a:round/>
+                      <a:headEnd type="none" w="med" len="med"/>
+                      <a:tailEnd type="none" w="med" len="med"/>
+                    </a:lnL>
+                    <a:lnR w="12700" cap="flat" cmpd="sng" algn="ctr">
+                      <a:solidFill>
+                        <a:srgbClr val="E2E8F0"/>
+                      </a:solidFill>
+                      <a:prstDash val="solid"/>
+                      <a:round/>
+                      <a:headEnd type="none" w="med" len="med"/>
+                      <a:tailEnd type="none" w="med" len="med"/>
+                    </a:lnR>
+                    <a:lnT w="12700" cap="flat" cmpd="sng" algn="ctr">
+                      <a:solidFill>
+                        <a:srgbClr val="E2E8F0"/>
+                      </a:solidFill>
+                      <a:prstDash val="solid"/>
+                      <a:round/>
+                      <a:headEnd type="none" w="med" len="med"/>
+                      <a:tailEnd type="none" w="med" len="med"/>
+                    </a:lnT>
+                    <a:lnB w="12700" cap="flat" cmpd="sng" algn="ctr">
+                      <a:solidFill>
+                        <a:srgbClr val="E2E8F0"/>
+                      </a:solidFill>
+                      <a:prstDash val="solid"/>
+                      <a:round/>
+                      <a:headEnd type="none" w="med" len="med"/>
+                      <a:tailEnd type="none" w="med" len="med"/>
+                    </a:lnB>
+                  </a:tcPr>
+                </a:tc>
+              </a:tr>
+              <a:tr h="399011">
+                <a:tc>
+                  <a:txBody>
+                    <a:bodyPr/>
+                    <a:lstStyle/>
+                    <a:p>
+                      <a:pPr algn="ctr" indent="0" marL="0">
+                        <a:buNone/>
+                      </a:pPr>
+                      <a:r>
+                        <a:rPr lang="en-US" sz="800" b="1" dirty="0">
+                          <a:solidFill>
+                            <a:srgbClr val="000000"/>
+                          </a:solidFill>
+                        </a:rPr>
+                        <a:t>8</a:t>
+                      </a:r>
+                      <a:endParaRPr lang="en-US" sz="800" dirty="0"/>
+                    </a:p>
+                  </a:txBody>
+                  <a:tcPr marL="91440" marR="91440" marT="45720" marB="45720" anchor="ctr">
+                    <a:lnL w="12700" cap="flat" cmpd="sng" algn="ctr">
+                      <a:solidFill>
+                        <a:srgbClr val="E2E8F0"/>
+                      </a:solidFill>
+                      <a:prstDash val="solid"/>
+                      <a:round/>
+                      <a:headEnd type="none" w="med" len="med"/>
+                      <a:tailEnd type="none" w="med" len="med"/>
+                    </a:lnL>
+                    <a:lnR w="12700" cap="flat" cmpd="sng" algn="ctr">
+                      <a:solidFill>
+                        <a:srgbClr val="E2E8F0"/>
+                      </a:solidFill>
+                      <a:prstDash val="solid"/>
+                      <a:round/>
+                      <a:headEnd type="none" w="med" len="med"/>
+                      <a:tailEnd type="none" w="med" len="med"/>
+                    </a:lnR>
+                    <a:lnT w="12700" cap="flat" cmpd="sng" algn="ctr">
+                      <a:solidFill>
+                        <a:srgbClr val="E2E8F0"/>
+                      </a:solidFill>
+                      <a:prstDash val="solid"/>
+                      <a:round/>
+                      <a:headEnd type="none" w="med" len="med"/>
+                      <a:tailEnd type="none" w="med" len="med"/>
+                    </a:lnT>
+                    <a:lnB w="12700" cap="flat" cmpd="sng" algn="ctr">
+                      <a:solidFill>
+                        <a:srgbClr val="E2E8F0"/>
+                      </a:solidFill>
+                      <a:prstDash val="solid"/>
+                      <a:round/>
+                      <a:headEnd type="none" w="med" len="med"/>
+                      <a:tailEnd type="none" w="med" len="med"/>
+                    </a:lnB>
+                  </a:tcPr>
+                </a:tc>
+                <a:tc>
+                  <a:txBody>
+                    <a:bodyPr/>
+                    <a:lstStyle/>
+                    <a:p>
+                      <a:pPr algn="ctr" indent="0" marL="0">
+                        <a:buNone/>
+                      </a:pPr>
+                      <a:r>
+                        <a:rPr lang="en-US" sz="800" dirty="0">
+                          <a:solidFill>
+                            <a:srgbClr val="000000"/>
+                          </a:solidFill>
+                        </a:rPr>
+                        <a:t>DELTA I</a:t>
+                      </a:r>
+                      <a:endParaRPr lang="en-US" sz="800" dirty="0"/>
+                    </a:p>
+                  </a:txBody>
+                  <a:tcPr marL="91440" marR="91440" marT="45720" marB="45720" anchor="ctr">
+                    <a:lnL w="12700" cap="flat" cmpd="sng" algn="ctr">
+                      <a:solidFill>
+                        <a:srgbClr val="E2E8F0"/>
+                      </a:solidFill>
+                      <a:prstDash val="solid"/>
+                      <a:round/>
+                      <a:headEnd type="none" w="med" len="med"/>
+                      <a:tailEnd type="none" w="med" len="med"/>
+                    </a:lnL>
+                    <a:lnR w="12700" cap="flat" cmpd="sng" algn="ctr">
+                      <a:solidFill>
+                        <a:srgbClr val="E2E8F0"/>
+                      </a:solidFill>
+                      <a:prstDash val="solid"/>
+                      <a:round/>
+                      <a:headEnd type="none" w="med" len="med"/>
+                      <a:tailEnd type="none" w="med" len="med"/>
+                    </a:lnR>
+                    <a:lnT w="12700" cap="flat" cmpd="sng" algn="ctr">
+                      <a:solidFill>
+                        <a:srgbClr val="E2E8F0"/>
+                      </a:solidFill>
+                      <a:prstDash val="solid"/>
+                      <a:round/>
+                      <a:headEnd type="none" w="med" len="med"/>
+                      <a:tailEnd type="none" w="med" len="med"/>
+                    </a:lnT>
+                    <a:lnB w="12700" cap="flat" cmpd="sng" algn="ctr">
+                      <a:solidFill>
+                        <a:srgbClr val="E2E8F0"/>
+                      </a:solidFill>
+                      <a:prstDash val="solid"/>
+                      <a:round/>
+                      <a:headEnd type="none" w="med" len="med"/>
+                      <a:tailEnd type="none" w="med" len="med"/>
+                    </a:lnB>
+                  </a:tcPr>
+                </a:tc>
+                <a:tc>
+                  <a:txBody>
+                    <a:bodyPr/>
+                    <a:lstStyle/>
+                    <a:p>
+                      <a:pPr algn="ctr" indent="0" marL="0">
+                        <a:buNone/>
+                      </a:pPr>
+                      <a:r>
+                        <a:rPr lang="en-US" sz="800" dirty="0">
+                          <a:solidFill>
+                            <a:srgbClr val="000000"/>
+                          </a:solidFill>
+                        </a:rPr>
+                        <a:t>Shimaa Tarek</a:t>
+                      </a:r>
+                      <a:endParaRPr lang="en-US" sz="800" dirty="0"/>
+                    </a:p>
+                  </a:txBody>
+                  <a:tcPr marL="91440" marR="91440" marT="45720" marB="45720" anchor="ctr">
+                    <a:lnL w="12700" cap="flat" cmpd="sng" algn="ctr">
+                      <a:solidFill>
+                        <a:srgbClr val="E2E8F0"/>
+                      </a:solidFill>
+                      <a:prstDash val="solid"/>
+                      <a:round/>
+                      <a:headEnd type="none" w="med" len="med"/>
+                      <a:tailEnd type="none" w="med" len="med"/>
+                    </a:lnL>
+                    <a:lnR w="12700" cap="flat" cmpd="sng" algn="ctr">
+                      <a:solidFill>
+                        <a:srgbClr val="E2E8F0"/>
+                      </a:solidFill>
+                      <a:prstDash val="solid"/>
+                      <a:round/>
+                      <a:headEnd type="none" w="med" len="med"/>
+                      <a:tailEnd type="none" w="med" len="med"/>
+                    </a:lnR>
+                    <a:lnT w="12700" cap="flat" cmpd="sng" algn="ctr">
+                      <a:solidFill>
+                        <a:srgbClr val="E2E8F0"/>
+                      </a:solidFill>
+                      <a:prstDash val="solid"/>
+                      <a:round/>
+                      <a:headEnd type="none" w="med" len="med"/>
+                      <a:tailEnd type="none" w="med" len="med"/>
+                    </a:lnT>
+                    <a:lnB w="12700" cap="flat" cmpd="sng" algn="ctr">
+                      <a:solidFill>
+                        <a:srgbClr val="E2E8F0"/>
+                      </a:solidFill>
+                      <a:prstDash val="solid"/>
+                      <a:round/>
+                      <a:headEnd type="none" w="med" len="med"/>
+                      <a:tailEnd type="none" w="med" len="med"/>
+                    </a:lnB>
+                  </a:tcPr>
+                </a:tc>
+                <a:tc>
+                  <a:txBody>
+                    <a:bodyPr/>
+                    <a:lstStyle/>
+                    <a:p>
+                      <a:pPr algn="ctr" indent="0" marL="0">
+                        <a:buNone/>
+                      </a:pPr>
+                      <a:r>
+                        <a:rPr lang="en-US" sz="800" dirty="0">
+                          <a:solidFill>
+                            <a:srgbClr val="000000"/>
+                          </a:solidFill>
+                        </a:rPr>
+                        <a:t>20,146</a:t>
+                      </a:r>
+                      <a:endParaRPr lang="en-US" sz="800" dirty="0"/>
+                    </a:p>
+                  </a:txBody>
+                  <a:tcPr marL="91440" marR="91440" marT="45720" marB="45720" anchor="ctr">
+                    <a:lnL w="12700" cap="flat" cmpd="sng" algn="ctr">
+                      <a:solidFill>
+                        <a:srgbClr val="E2E8F0"/>
+                      </a:solidFill>
+                      <a:prstDash val="solid"/>
+                      <a:round/>
+                      <a:headEnd type="none" w="med" len="med"/>
+                      <a:tailEnd type="none" w="med" len="med"/>
+                    </a:lnL>
+                    <a:lnR w="12700" cap="flat" cmpd="sng" algn="ctr">
+                      <a:solidFill>
+                        <a:srgbClr val="E2E8F0"/>
+                      </a:solidFill>
+                      <a:prstDash val="solid"/>
+                      <a:round/>
+                      <a:headEnd type="none" w="med" len="med"/>
+                      <a:tailEnd type="none" w="med" len="med"/>
+                    </a:lnR>
+                    <a:lnT w="12700" cap="flat" cmpd="sng" algn="ctr">
+                      <a:solidFill>
+                        <a:srgbClr val="E2E8F0"/>
+                      </a:solidFill>
+                      <a:prstDash val="solid"/>
+                      <a:round/>
+                      <a:headEnd type="none" w="med" len="med"/>
+                      <a:tailEnd type="none" w="med" len="med"/>
+                    </a:lnT>
+                    <a:lnB w="12700" cap="flat" cmpd="sng" algn="ctr">
+                      <a:solidFill>
+                        <a:srgbClr val="E2E8F0"/>
+                      </a:solidFill>
+                      <a:prstDash val="solid"/>
+                      <a:round/>
+                      <a:headEnd type="none" w="med" len="med"/>
+                      <a:tailEnd type="none" w="med" len="med"/>
+                    </a:lnB>
+                  </a:tcPr>
+                </a:tc>
+                <a:tc>
+                  <a:txBody>
+                    <a:bodyPr/>
+                    <a:lstStyle/>
+                    <a:p>
+                      <a:pPr algn="ctr" indent="0" marL="0">
+                        <a:buNone/>
+                      </a:pPr>
+                      <a:r>
+                        <a:rPr lang="en-US" sz="800" b="1" dirty="0">
+                          <a:solidFill>
+                            <a:srgbClr val="000000"/>
+                          </a:solidFill>
+                        </a:rPr>
+                        <a:t>18,614</a:t>
+                      </a:r>
+                      <a:endParaRPr lang="en-US" sz="800" dirty="0"/>
+                    </a:p>
+                  </a:txBody>
+                  <a:tcPr marL="91440" marR="91440" marT="45720" marB="45720" anchor="ctr">
+                    <a:lnL w="12700" cap="flat" cmpd="sng" algn="ctr">
+                      <a:solidFill>
+                        <a:srgbClr val="E2E8F0"/>
+                      </a:solidFill>
+                      <a:prstDash val="solid"/>
+                      <a:round/>
+                      <a:headEnd type="none" w="med" len="med"/>
+                      <a:tailEnd type="none" w="med" len="med"/>
+                    </a:lnL>
+                    <a:lnR w="12700" cap="flat" cmpd="sng" algn="ctr">
+                      <a:solidFill>
+                        <a:srgbClr val="E2E8F0"/>
+                      </a:solidFill>
+                      <a:prstDash val="solid"/>
+                      <a:round/>
+                      <a:headEnd type="none" w="med" len="med"/>
+                      <a:tailEnd type="none" w="med" len="med"/>
+                    </a:lnR>
+                    <a:lnT w="12700" cap="flat" cmpd="sng" algn="ctr">
+                      <a:solidFill>
+                        <a:srgbClr val="E2E8F0"/>
+                      </a:solidFill>
+                      <a:prstDash val="solid"/>
+                      <a:round/>
+                      <a:headEnd type="none" w="med" len="med"/>
+                      <a:tailEnd type="none" w="med" len="med"/>
+                    </a:lnT>
+                    <a:lnB w="12700" cap="flat" cmpd="sng" algn="ctr">
+                      <a:solidFill>
+                        <a:srgbClr val="E2E8F0"/>
+                      </a:solidFill>
+                      <a:prstDash val="solid"/>
+                      <a:round/>
+                      <a:headEnd type="none" w="med" len="med"/>
+                      <a:tailEnd type="none" w="med" len="med"/>
+                    </a:lnB>
+                  </a:tcPr>
+                </a:tc>
+                <a:tc>
+                  <a:txBody>
+                    <a:bodyPr/>
+                    <a:lstStyle/>
+                    <a:p>
+                      <a:pPr algn="ctr" indent="0" marL="0">
+                        <a:buNone/>
+                      </a:pPr>
+                      <a:r>
+                        <a:rPr lang="en-US" sz="800" dirty="0">
+                          <a:solidFill>
+                            <a:srgbClr val="DC3545"/>
+                          </a:solidFill>
+                        </a:rPr>
+                        <a:t>-1,532</a:t>
+                      </a:r>
+                      <a:endParaRPr lang="en-US" sz="800" dirty="0"/>
+                    </a:p>
+                  </a:txBody>
+                  <a:tcPr marL="91440" marR="91440" marT="45720" marB="45720" anchor="ctr">
+                    <a:lnL w="12700" cap="flat" cmpd="sng" algn="ctr">
+                      <a:solidFill>
+                        <a:srgbClr val="E2E8F0"/>
+                      </a:solidFill>
+                      <a:prstDash val="solid"/>
+                      <a:round/>
+                      <a:headEnd type="none" w="med" len="med"/>
+                      <a:tailEnd type="none" w="med" len="med"/>
+                    </a:lnL>
+                    <a:lnR w="12700" cap="flat" cmpd="sng" algn="ctr">
+                      <a:solidFill>
+                        <a:srgbClr val="E2E8F0"/>
+                      </a:solidFill>
+                      <a:prstDash val="solid"/>
+                      <a:round/>
+                      <a:headEnd type="none" w="med" len="med"/>
+                      <a:tailEnd type="none" w="med" len="med"/>
+                    </a:lnR>
+                    <a:lnT w="12700" cap="flat" cmpd="sng" algn="ctr">
+                      <a:solidFill>
+                        <a:srgbClr val="E2E8F0"/>
+                      </a:solidFill>
+                      <a:prstDash val="solid"/>
+                      <a:round/>
+                      <a:headEnd type="none" w="med" len="med"/>
+                      <a:tailEnd type="none" w="med" len="med"/>
+                    </a:lnT>
+                    <a:lnB w="12700" cap="flat" cmpd="sng" algn="ctr">
+                      <a:solidFill>
+                        <a:srgbClr val="E2E8F0"/>
+                      </a:solidFill>
+                      <a:prstDash val="solid"/>
+                      <a:round/>
+                      <a:headEnd type="none" w="med" len="med"/>
+                      <a:tailEnd type="none" w="med" len="med"/>
+                    </a:lnB>
+                  </a:tcPr>
+                </a:tc>
+                <a:tc>
+                  <a:txBody>
+                    <a:bodyPr/>
+                    <a:lstStyle/>
+                    <a:p>
+                      <a:pPr algn="ctr" indent="0" marL="0">
+                        <a:buNone/>
+                      </a:pPr>
+                      <a:r>
+                        <a:rPr lang="en-US" sz="850" b="1" dirty="0">
+                          <a:solidFill>
+                            <a:srgbClr val="DC3545"/>
+                          </a:solidFill>
+                        </a:rPr>
+                        <a:t>-7.6%</a:t>
+                      </a:r>
+                      <a:endParaRPr lang="en-US" sz="850" dirty="0"/>
+                    </a:p>
+                  </a:txBody>
+                  <a:tcPr marL="91440" marR="91440" marT="45720" marB="45720" anchor="ctr">
+                    <a:lnL w="12700" cap="flat" cmpd="sng" algn="ctr">
+                      <a:solidFill>
+                        <a:srgbClr val="E2E8F0"/>
+                      </a:solidFill>
+                      <a:prstDash val="solid"/>
+                      <a:round/>
+                      <a:headEnd type="none" w="med" len="med"/>
+                      <a:tailEnd type="none" w="med" len="med"/>
+                    </a:lnL>
+                    <a:lnR w="12700" cap="flat" cmpd="sng" algn="ctr">
+                      <a:solidFill>
+                        <a:srgbClr val="E2E8F0"/>
+                      </a:solidFill>
+                      <a:prstDash val="solid"/>
+                      <a:round/>
+                      <a:headEnd type="none" w="med" len="med"/>
+                      <a:tailEnd type="none" w="med" len="med"/>
+                    </a:lnR>
+                    <a:lnT w="12700" cap="flat" cmpd="sng" algn="ctr">
+                      <a:solidFill>
+                        <a:srgbClr val="E2E8F0"/>
+                      </a:solidFill>
+                      <a:prstDash val="solid"/>
+                      <a:round/>
+                      <a:headEnd type="none" w="med" len="med"/>
+                      <a:tailEnd type="none" w="med" len="med"/>
+                    </a:lnT>
+                    <a:lnB w="12700" cap="flat" cmpd="sng" algn="ctr">
+                      <a:solidFill>
+                        <a:srgbClr val="E2E8F0"/>
+                      </a:solidFill>
+                      <a:prstDash val="solid"/>
+                      <a:round/>
+                      <a:headEnd type="none" w="med" len="med"/>
+                      <a:tailEnd type="none" w="med" len="med"/>
+                    </a:lnB>
+                  </a:tcPr>
+                </a:tc>
+                <a:tc>
+                  <a:txBody>
+                    <a:bodyPr/>
+                    <a:lstStyle/>
+                    <a:p>
+                      <a:pPr algn="ctr" indent="0" marL="0">
+                        <a:buNone/>
+                      </a:pPr>
+                      <a:r>
+                        <a:rPr lang="en-US" sz="750" b="1" dirty="0">
+                          <a:solidFill>
+                            <a:srgbClr val="000000"/>
+                          </a:solidFill>
+                        </a:rPr>
+                        <a:t>Tier 4: Contraction ⚠️</a:t>
+                      </a:r>
+                      <a:endParaRPr lang="en-US" sz="750" dirty="0"/>
+                    </a:p>
+                  </a:txBody>
+                  <a:tcPr marL="91440" marR="91440" marT="45720" marB="45720" anchor="ctr">
+                    <a:lnL w="12700" cap="flat" cmpd="sng" algn="ctr">
+                      <a:solidFill>
+                        <a:srgbClr val="E2E8F0"/>
+                      </a:solidFill>
+                      <a:prstDash val="solid"/>
+                      <a:round/>
+                      <a:headEnd type="none" w="med" len="med"/>
+                      <a:tailEnd type="none" w="med" len="med"/>
+                    </a:lnL>
+                    <a:lnR w="12700" cap="flat" cmpd="sng" algn="ctr">
+                      <a:solidFill>
+                        <a:srgbClr val="E2E8F0"/>
+                      </a:solidFill>
+                      <a:prstDash val="solid"/>
+                      <a:round/>
+                      <a:headEnd type="none" w="med" len="med"/>
+                      <a:tailEnd type="none" w="med" len="med"/>
+                    </a:lnR>
+                    <a:lnT w="12700" cap="flat" cmpd="sng" algn="ctr">
+                      <a:solidFill>
+                        <a:srgbClr val="E2E8F0"/>
+                      </a:solidFill>
+                      <a:prstDash val="solid"/>
+                      <a:round/>
+                      <a:headEnd type="none" w="med" len="med"/>
+                      <a:tailEnd type="none" w="med" len="med"/>
+                    </a:lnT>
+                    <a:lnB w="12700" cap="flat" cmpd="sng" algn="ctr">
+                      <a:solidFill>
+                        <a:srgbClr val="E2E8F0"/>
+                      </a:solidFill>
+                      <a:prstDash val="solid"/>
+                      <a:round/>
+                      <a:headEnd type="none" w="med" len="med"/>
+                      <a:tailEnd type="none" w="med" len="med"/>
+                    </a:lnB>
+                  </a:tcPr>
+                </a:tc>
+              </a:tr>
+              <a:tr h="399011">
+                <a:tc>
+                  <a:txBody>
+                    <a:bodyPr/>
+                    <a:lstStyle/>
+                    <a:p>
+                      <a:pPr algn="ctr" indent="0" marL="0">
+                        <a:buNone/>
+                      </a:pPr>
+                      <a:r>
+                        <a:rPr lang="en-US" sz="800" b="1" dirty="0">
+                          <a:solidFill>
+                            <a:srgbClr val="000000"/>
+                          </a:solidFill>
+                        </a:rPr>
+                        <a:t>9</a:t>
+                      </a:r>
+                      <a:endParaRPr lang="en-US" sz="800" dirty="0"/>
+                    </a:p>
+                  </a:txBody>
+                  <a:tcPr marL="91440" marR="91440" marT="45720" marB="45720" anchor="ctr">
+                    <a:lnL w="12700" cap="flat" cmpd="sng" algn="ctr">
+                      <a:solidFill>
+                        <a:srgbClr val="E2E8F0"/>
+                      </a:solidFill>
+                      <a:prstDash val="solid"/>
+                      <a:round/>
+                      <a:headEnd type="none" w="med" len="med"/>
+                      <a:tailEnd type="none" w="med" len="med"/>
+                    </a:lnL>
+                    <a:lnR w="12700" cap="flat" cmpd="sng" algn="ctr">
+                      <a:solidFill>
+                        <a:srgbClr val="E2E8F0"/>
+                      </a:solidFill>
+                      <a:prstDash val="solid"/>
+                      <a:round/>
+                      <a:headEnd type="none" w="med" len="med"/>
+                      <a:tailEnd type="none" w="med" len="med"/>
+                    </a:lnR>
+                    <a:lnT w="12700" cap="flat" cmpd="sng" algn="ctr">
+                      <a:solidFill>
+                        <a:srgbClr val="E2E8F0"/>
+                      </a:solidFill>
+                      <a:prstDash val="solid"/>
+                      <a:round/>
+                      <a:headEnd type="none" w="med" len="med"/>
+                      <a:tailEnd type="none" w="med" len="med"/>
+                    </a:lnT>
+                    <a:lnB w="12700" cap="flat" cmpd="sng" algn="ctr">
+                      <a:solidFill>
+                        <a:srgbClr val="E2E8F0"/>
+                      </a:solidFill>
+                      <a:prstDash val="solid"/>
+                      <a:round/>
+                      <a:headEnd type="none" w="med" len="med"/>
+                      <a:tailEnd type="none" w="med" len="med"/>
+                    </a:lnB>
+                  </a:tcPr>
+                </a:tc>
+                <a:tc>
+                  <a:txBody>
+                    <a:bodyPr/>
+                    <a:lstStyle/>
+                    <a:p>
+                      <a:pPr algn="ctr" indent="0" marL="0">
+                        <a:buNone/>
+                      </a:pPr>
+                      <a:r>
+                        <a:rPr lang="en-US" sz="800" dirty="0">
+                          <a:solidFill>
+                            <a:srgbClr val="000000"/>
+                          </a:solidFill>
+                        </a:rPr>
+                        <a:t>Delta II</a:t>
+                      </a:r>
+                      <a:endParaRPr lang="en-US" sz="800" dirty="0"/>
+                    </a:p>
+                  </a:txBody>
+                  <a:tcPr marL="91440" marR="91440" marT="45720" marB="45720" anchor="ctr">
+                    <a:lnL w="12700" cap="flat" cmpd="sng" algn="ctr">
+                      <a:solidFill>
+                        <a:srgbClr val="E2E8F0"/>
+                      </a:solidFill>
+                      <a:prstDash val="solid"/>
+                      <a:round/>
+                      <a:headEnd type="none" w="med" len="med"/>
+                      <a:tailEnd type="none" w="med" len="med"/>
+                    </a:lnL>
+                    <a:lnR w="12700" cap="flat" cmpd="sng" algn="ctr">
+                      <a:solidFill>
+                        <a:srgbClr val="E2E8F0"/>
+                      </a:solidFill>
+                      <a:prstDash val="solid"/>
+                      <a:round/>
+                      <a:headEnd type="none" w="med" len="med"/>
+                      <a:tailEnd type="none" w="med" len="med"/>
+                    </a:lnR>
+                    <a:lnT w="12700" cap="flat" cmpd="sng" algn="ctr">
+                      <a:solidFill>
+                        <a:srgbClr val="E2E8F0"/>
+                      </a:solidFill>
+                      <a:prstDash val="solid"/>
+                      <a:round/>
+                      <a:headEnd type="none" w="med" len="med"/>
+                      <a:tailEnd type="none" w="med" len="med"/>
+                    </a:lnT>
+                    <a:lnB w="12700" cap="flat" cmpd="sng" algn="ctr">
+                      <a:solidFill>
+                        <a:srgbClr val="E2E8F0"/>
+                      </a:solidFill>
+                      <a:prstDash val="solid"/>
+                      <a:round/>
+                      <a:headEnd type="none" w="med" len="med"/>
+                      <a:tailEnd type="none" w="med" len="med"/>
+                    </a:lnB>
+                  </a:tcPr>
+                </a:tc>
+                <a:tc>
+                  <a:txBody>
+                    <a:bodyPr/>
+                    <a:lstStyle/>
+                    <a:p>
+                      <a:pPr algn="ctr" indent="0" marL="0">
+                        <a:buNone/>
+                      </a:pPr>
+                      <a:r>
+                        <a:rPr lang="en-US" sz="800" dirty="0">
+                          <a:solidFill>
+                            <a:srgbClr val="000000"/>
+                          </a:solidFill>
+                        </a:rPr>
+                        <a:t>Mohamed Yousef</a:t>
+                      </a:r>
+                      <a:endParaRPr lang="en-US" sz="800" dirty="0"/>
+                    </a:p>
+                  </a:txBody>
+                  <a:tcPr marL="91440" marR="91440" marT="45720" marB="45720" anchor="ctr">
+                    <a:lnL w="12700" cap="flat" cmpd="sng" algn="ctr">
+                      <a:solidFill>
+                        <a:srgbClr val="E2E8F0"/>
+                      </a:solidFill>
+                      <a:prstDash val="solid"/>
+                      <a:round/>
+                      <a:headEnd type="none" w="med" len="med"/>
+                      <a:tailEnd type="none" w="med" len="med"/>
+                    </a:lnL>
+                    <a:lnR w="12700" cap="flat" cmpd="sng" algn="ctr">
+                      <a:solidFill>
+                        <a:srgbClr val="E2E8F0"/>
+                      </a:solidFill>
+                      <a:prstDash val="solid"/>
+                      <a:round/>
+                      <a:headEnd type="none" w="med" len="med"/>
+                      <a:tailEnd type="none" w="med" len="med"/>
+                    </a:lnR>
+                    <a:lnT w="12700" cap="flat" cmpd="sng" algn="ctr">
+                      <a:solidFill>
+                        <a:srgbClr val="E2E8F0"/>
+                      </a:solidFill>
+                      <a:prstDash val="solid"/>
+                      <a:round/>
+                      <a:headEnd type="none" w="med" len="med"/>
+                      <a:tailEnd type="none" w="med" len="med"/>
+                    </a:lnT>
+                    <a:lnB w="12700" cap="flat" cmpd="sng" algn="ctr">
+                      <a:solidFill>
+                        <a:srgbClr val="E2E8F0"/>
+                      </a:solidFill>
+                      <a:prstDash val="solid"/>
+                      <a:round/>
+                      <a:headEnd type="none" w="med" len="med"/>
+                      <a:tailEnd type="none" w="med" len="med"/>
+                    </a:lnB>
+                  </a:tcPr>
+                </a:tc>
+                <a:tc>
+                  <a:txBody>
+                    <a:bodyPr/>
+                    <a:lstStyle/>
+                    <a:p>
+                      <a:pPr algn="ctr" indent="0" marL="0">
+                        <a:buNone/>
+                      </a:pPr>
+                      <a:r>
+                        <a:rPr lang="en-US" sz="800" dirty="0">
+                          <a:solidFill>
+                            <a:srgbClr val="000000"/>
+                          </a:solidFill>
+                        </a:rPr>
+                        <a:t>22,783</a:t>
+                      </a:r>
+                      <a:endParaRPr lang="en-US" sz="800" dirty="0"/>
+                    </a:p>
+                  </a:txBody>
+                  <a:tcPr marL="91440" marR="91440" marT="45720" marB="45720" anchor="ctr">
+                    <a:lnL w="12700" cap="flat" cmpd="sng" algn="ctr">
+                      <a:solidFill>
+                        <a:srgbClr val="E2E8F0"/>
+                      </a:solidFill>
+                      <a:prstDash val="solid"/>
+                      <a:round/>
+                      <a:headEnd type="none" w="med" len="med"/>
+                      <a:tailEnd type="none" w="med" len="med"/>
+                    </a:lnL>
+                    <a:lnR w="12700" cap="flat" cmpd="sng" algn="ctr">
+                      <a:solidFill>
+                        <a:srgbClr val="E2E8F0"/>
+                      </a:solidFill>
+                      <a:prstDash val="solid"/>
+                      <a:round/>
+                      <a:headEnd type="none" w="med" len="med"/>
+                      <a:tailEnd type="none" w="med" len="med"/>
+                    </a:lnR>
+                    <a:lnT w="12700" cap="flat" cmpd="sng" algn="ctr">
+                      <a:solidFill>
+                        <a:srgbClr val="E2E8F0"/>
+                      </a:solidFill>
+                      <a:prstDash val="solid"/>
+                      <a:round/>
+                      <a:headEnd type="none" w="med" len="med"/>
+                      <a:tailEnd type="none" w="med" len="med"/>
+                    </a:lnT>
+                    <a:lnB w="12700" cap="flat" cmpd="sng" algn="ctr">
+                      <a:solidFill>
+                        <a:srgbClr val="E2E8F0"/>
+                      </a:solidFill>
+                      <a:prstDash val="solid"/>
+                      <a:round/>
+                      <a:headEnd type="none" w="med" len="med"/>
+                      <a:tailEnd type="none" w="med" len="med"/>
+                    </a:lnB>
+                  </a:tcPr>
+                </a:tc>
+                <a:tc>
+                  <a:txBody>
+                    <a:bodyPr/>
+                    <a:lstStyle/>
+                    <a:p>
+                      <a:pPr algn="ctr" indent="0" marL="0">
+                        <a:buNone/>
+                      </a:pPr>
+                      <a:r>
+                        <a:rPr lang="en-US" sz="800" b="1" dirty="0">
+                          <a:solidFill>
+                            <a:srgbClr val="000000"/>
+                          </a:solidFill>
+                        </a:rPr>
+                        <a:t>16,671</a:t>
+                      </a:r>
+                      <a:endParaRPr lang="en-US" sz="800" dirty="0"/>
+                    </a:p>
+                  </a:txBody>
+                  <a:tcPr marL="91440" marR="91440" marT="45720" marB="45720" anchor="ctr">
+                    <a:lnL w="12700" cap="flat" cmpd="sng" algn="ctr">
+                      <a:solidFill>
+                        <a:srgbClr val="E2E8F0"/>
+                      </a:solidFill>
+                      <a:prstDash val="solid"/>
+                      <a:round/>
+                      <a:headEnd type="none" w="med" len="med"/>
+                      <a:tailEnd type="none" w="med" len="med"/>
+                    </a:lnL>
+                    <a:lnR w="12700" cap="flat" cmpd="sng" algn="ctr">
+                      <a:solidFill>
+                        <a:srgbClr val="E2E8F0"/>
+                      </a:solidFill>
+                      <a:prstDash val="solid"/>
+                      <a:round/>
+                      <a:headEnd type="none" w="med" len="med"/>
+                      <a:tailEnd type="none" w="med" len="med"/>
+                    </a:lnR>
+                    <a:lnT w="12700" cap="flat" cmpd="sng" algn="ctr">
+                      <a:solidFill>
+                        <a:srgbClr val="E2E8F0"/>
+                      </a:solidFill>
+                      <a:prstDash val="solid"/>
+                      <a:round/>
+                      <a:headEnd type="none" w="med" len="med"/>
+                      <a:tailEnd type="none" w="med" len="med"/>
+                    </a:lnT>
+                    <a:lnB w="12700" cap="flat" cmpd="sng" algn="ctr">
+                      <a:solidFill>
+                        <a:srgbClr val="E2E8F0"/>
+                      </a:solidFill>
+                      <a:prstDash val="solid"/>
+                      <a:round/>
+                      <a:headEnd type="none" w="med" len="med"/>
+                      <a:tailEnd type="none" w="med" len="med"/>
+                    </a:lnB>
+                  </a:tcPr>
+                </a:tc>
+                <a:tc>
+                  <a:txBody>
+                    <a:bodyPr/>
+                    <a:lstStyle/>
+                    <a:p>
+                      <a:pPr algn="ctr" indent="0" marL="0">
+                        <a:buNone/>
+                      </a:pPr>
+                      <a:r>
+                        <a:rPr lang="en-US" sz="800" dirty="0">
+                          <a:solidFill>
+                            <a:srgbClr val="DC3545"/>
+                          </a:solidFill>
+                        </a:rPr>
+                        <a:t>-6,112</a:t>
+                      </a:r>
+                      <a:endParaRPr lang="en-US" sz="800" dirty="0"/>
+                    </a:p>
+                  </a:txBody>
+                  <a:tcPr marL="91440" marR="91440" marT="45720" marB="45720" anchor="ctr">
+                    <a:lnL w="12700" cap="flat" cmpd="sng" algn="ctr">
+                      <a:solidFill>
+                        <a:srgbClr val="E2E8F0"/>
+                      </a:solidFill>
+                      <a:prstDash val="solid"/>
+                      <a:round/>
+                      <a:headEnd type="none" w="med" len="med"/>
+                      <a:tailEnd type="none" w="med" len="med"/>
+                    </a:lnL>
+                    <a:lnR w="12700" cap="flat" cmpd="sng" algn="ctr">
+                      <a:solidFill>
+                        <a:srgbClr val="E2E8F0"/>
+                      </a:solidFill>
+                      <a:prstDash val="solid"/>
+                      <a:round/>
+                      <a:headEnd type="none" w="med" len="med"/>
+                      <a:tailEnd type="none" w="med" len="med"/>
+                    </a:lnR>
+                    <a:lnT w="12700" cap="flat" cmpd="sng" algn="ctr">
+                      <a:solidFill>
+                        <a:srgbClr val="E2E8F0"/>
+                      </a:solidFill>
+                      <a:prstDash val="solid"/>
+                      <a:round/>
+                      <a:headEnd type="none" w="med" len="med"/>
+                      <a:tailEnd type="none" w="med" len="med"/>
+                    </a:lnT>
+                    <a:lnB w="12700" cap="flat" cmpd="sng" algn="ctr">
+                      <a:solidFill>
+                        <a:srgbClr val="E2E8F0"/>
+                      </a:solidFill>
+                      <a:prstDash val="solid"/>
+                      <a:round/>
+                      <a:headEnd type="none" w="med" len="med"/>
+                      <a:tailEnd type="none" w="med" len="med"/>
+                    </a:lnB>
+                  </a:tcPr>
+                </a:tc>
+                <a:tc>
+                  <a:txBody>
+                    <a:bodyPr/>
+                    <a:lstStyle/>
+                    <a:p>
+                      <a:pPr algn="ctr" indent="0" marL="0">
+                        <a:buNone/>
+                      </a:pPr>
+                      <a:r>
+                        <a:rPr lang="en-US" sz="850" b="1" dirty="0">
+                          <a:solidFill>
+                            <a:srgbClr val="DC3545"/>
+                          </a:solidFill>
+                        </a:rPr>
+                        <a:t>-26.8%</a:t>
+                      </a:r>
+                      <a:endParaRPr lang="en-US" sz="850" dirty="0"/>
+                    </a:p>
+                  </a:txBody>
+                  <a:tcPr marL="91440" marR="91440" marT="45720" marB="45720" anchor="ctr">
+                    <a:lnL w="12700" cap="flat" cmpd="sng" algn="ctr">
+                      <a:solidFill>
+                        <a:srgbClr val="E2E8F0"/>
+                      </a:solidFill>
+                      <a:prstDash val="solid"/>
+                      <a:round/>
+                      <a:headEnd type="none" w="med" len="med"/>
+                      <a:tailEnd type="none" w="med" len="med"/>
+                    </a:lnL>
+                    <a:lnR w="12700" cap="flat" cmpd="sng" algn="ctr">
+                      <a:solidFill>
+                        <a:srgbClr val="E2E8F0"/>
+                      </a:solidFill>
+                      <a:prstDash val="solid"/>
+                      <a:round/>
+                      <a:headEnd type="none" w="med" len="med"/>
+                      <a:tailEnd type="none" w="med" len="med"/>
+                    </a:lnR>
+                    <a:lnT w="12700" cap="flat" cmpd="sng" algn="ctr">
+                      <a:solidFill>
+                        <a:srgbClr val="E2E8F0"/>
+                      </a:solidFill>
+                      <a:prstDash val="solid"/>
+                      <a:round/>
+                      <a:headEnd type="none" w="med" len="med"/>
+                      <a:tailEnd type="none" w="med" len="med"/>
+                    </a:lnT>
+                    <a:lnB w="12700" cap="flat" cmpd="sng" algn="ctr">
+                      <a:solidFill>
+                        <a:srgbClr val="E2E8F0"/>
+                      </a:solidFill>
+                      <a:prstDash val="solid"/>
+                      <a:round/>
+                      <a:headEnd type="none" w="med" len="med"/>
+                      <a:tailEnd type="none" w="med" len="med"/>
+                    </a:lnB>
+                  </a:tcPr>
+                </a:tc>
+                <a:tc>
+                  <a:txBody>
+                    <a:bodyPr/>
+                    <a:lstStyle/>
+                    <a:p>
+                      <a:pPr algn="ctr" indent="0" marL="0">
+                        <a:buNone/>
+                      </a:pPr>
+                      <a:r>
+                        <a:rPr lang="en-US" sz="750" b="1" dirty="0">
+                          <a:solidFill>
+                            <a:srgbClr val="000000"/>
+                          </a:solidFill>
+                        </a:rPr>
+                        <a:t>Tier 4: Contraction ⚠️</a:t>
+                      </a:r>
+                      <a:endParaRPr lang="en-US" sz="750" dirty="0"/>
+                    </a:p>
+                  </a:txBody>
+                  <a:tcPr marL="91440" marR="91440" marT="45720" marB="45720" anchor="ctr">
+                    <a:lnL w="12700" cap="flat" cmpd="sng" algn="ctr">
+                      <a:solidFill>
+                        <a:srgbClr val="E2E8F0"/>
+                      </a:solidFill>
+                      <a:prstDash val="solid"/>
+                      <a:round/>
+                      <a:headEnd type="none" w="med" len="med"/>
+                      <a:tailEnd type="none" w="med" len="med"/>
+                    </a:lnL>
+                    <a:lnR w="12700" cap="flat" cmpd="sng" algn="ctr">
+                      <a:solidFill>
+                        <a:srgbClr val="E2E8F0"/>
+                      </a:solidFill>
+                      <a:prstDash val="solid"/>
+                      <a:round/>
+                      <a:headEnd type="none" w="med" len="med"/>
+                      <a:tailEnd type="none" w="med" len="med"/>
+                    </a:lnR>
+                    <a:lnT w="12700" cap="flat" cmpd="sng" algn="ctr">
+                      <a:solidFill>
+                        <a:srgbClr val="E2E8F0"/>
+                      </a:solidFill>
+                      <a:prstDash val="solid"/>
+                      <a:round/>
+                      <a:headEnd type="none" w="med" len="med"/>
+                      <a:tailEnd type="none" w="med" len="med"/>
+                    </a:lnT>
+                    <a:lnB w="12700" cap="flat" cmpd="sng" algn="ctr">
+                      <a:solidFill>
+                        <a:srgbClr val="E2E8F0"/>
+                      </a:solidFill>
+                      <a:prstDash val="solid"/>
+                      <a:round/>
+                      <a:headEnd type="none" w="med" len="med"/>
+                      <a:tailEnd type="none" w="med" len="med"/>
+                    </a:lnB>
+                  </a:tcPr>
+                </a:tc>
+              </a:tr>
+            </a:tbl>
+          </a:graphicData>
+        </a:graphic>
+      </p:graphicFrame>
+      <p:sp>
+        <p:nvSpPr>
+          <p:cNvPr id="25" name="Shape 22"/>
+          <p:cNvSpPr/>
+          <p:nvPr/>
+        </p:nvSpPr>
+        <p:spPr>
+          <a:xfrm>
+            <a:off x="7315200" y="2103120"/>
+            <a:ext cx="4389120" cy="1024128"/>
+          </a:xfrm>
+          <a:prstGeom prst="roundRect">
+            <a:avLst/>
+          </a:prstGeom>
+          <a:solidFill>
+            <a:srgbClr val="D4EDDA"/>
+          </a:solidFill>
+          <a:ln w="19050">
+            <a:solidFill>
+              <a:srgbClr val="28A745"/>
+            </a:solidFill>
+            <a:prstDash val="solid"/>
+          </a:ln>
+        </p:spPr>
+      </p:sp>
+      <p:sp>
+        <p:nvSpPr>
+          <p:cNvPr id="26" name="Text 23"/>
+          <p:cNvSpPr/>
+          <p:nvPr/>
+        </p:nvSpPr>
+        <p:spPr>
+          <a:xfrm>
+            <a:off x="7452360" y="2176272"/>
+            <a:ext cx="4114800" cy="228600"/>
+          </a:xfrm>
+          <a:prstGeom prst="rect">
+            <a:avLst/>
+          </a:prstGeom>
+          <a:noFill/>
+          <a:ln/>
+        </p:spPr>
+        <p:txBody>
+          <a:bodyPr wrap="square" rtlCol="0" anchor="ctr"/>
+          <a:lstStyle/>
+          <a:p>
+            <a:pPr indent="0" marL="0">
+              <a:buNone/>
+            </a:pPr>
+            <a:r>
+              <a:rPr lang="en-US" sz="950" b="1" dirty="0">
+                <a:solidFill>
+                  <a:srgbClr val="155724"/>
+                </a:solidFill>
+              </a:rPr>
+              <a:t>TIER 1: HIGH ACCELERATORS (+40% to +60%) 🚀</a:t>
+            </a:r>
+            <a:endParaRPr lang="en-US" sz="950" dirty="0"/>
+          </a:p>
+        </p:txBody>
+      </p:sp>
+      <p:sp>
+        <p:nvSpPr>
+          <p:cNvPr id="27" name="Text 24"/>
+          <p:cNvSpPr/>
+          <p:nvPr/>
+        </p:nvSpPr>
+        <p:spPr>
+          <a:xfrm>
+            <a:off x="7452360" y="2423160"/>
+            <a:ext cx="4114800" cy="640080"/>
+          </a:xfrm>
+          <a:prstGeom prst="rect">
+            <a:avLst/>
+          </a:prstGeom>
+          <a:noFill/>
+          <a:ln/>
+        </p:spPr>
+        <p:txBody>
+          <a:bodyPr wrap="square" rtlCol="0" anchor="ctr"/>
+          <a:lstStyle/>
+          <a:p>
+            <a:pPr indent="0" marL="0">
+              <a:buNone/>
+            </a:pPr>
+            <a:r>
+              <a:rPr lang="en-US" sz="800" dirty="0">
+                <a:solidFill>
+                  <a:srgbClr val="155724"/>
+                </a:solidFill>
+              </a:rPr>
+              <a:t>• Cairo (Noher Adel): 8,758 → 13,898 (+58.7%) | Pediamil AC (+225%)</a:t>
+            </a:r>
+            <a:endParaRPr lang="en-US" sz="800" dirty="0"/>
+          </a:p>
+          <a:p>
+            <a:pPr indent="0" marL="0">
+              <a:buNone/>
+            </a:pPr>
+            <a:r>
+              <a:rPr lang="en-US" sz="800" dirty="0">
+                <a:solidFill>
+                  <a:srgbClr val="155724"/>
+                </a:solidFill>
+              </a:rPr>
+              <a:t>• KFR EL.SHK (Karim Shehab): 10,461 → 15,472 (+47.9%)</a:t>
+            </a:r>
+            <a:endParaRPr lang="en-US" sz="800" dirty="0"/>
+          </a:p>
+          <a:p>
+            <a:pPr indent="0" marL="0">
+              <a:buNone/>
+            </a:pPr>
+            <a:r>
+              <a:rPr lang="en-US" sz="800" dirty="0">
+                <a:solidFill>
+                  <a:srgbClr val="155724"/>
+                </a:solidFill>
+              </a:rPr>
+              <a:t>• Upper Egypt I (UE North): 16,459 → 23,564 (+43.2%)</a:t>
+            </a:r>
+            <a:endParaRPr lang="en-US" sz="800" dirty="0"/>
+          </a:p>
+          <a:p>
+            <a:pPr indent="0" marL="0">
+              <a:buNone/>
+            </a:pPr>
+            <a:r>
+              <a:rPr lang="en-US" sz="800" dirty="0">
+                <a:solidFill>
+                  <a:srgbClr val="155724"/>
+                </a:solidFill>
+              </a:rPr>
+              <a:t>Strategic Action: Capitalize on doctor adoption; expand clinic quotas.</a:t>
+            </a:r>
+            <a:endParaRPr lang="en-US" sz="800" dirty="0"/>
+          </a:p>
+        </p:txBody>
+      </p:sp>
+      <p:sp>
+        <p:nvSpPr>
+          <p:cNvPr id="28" name="Shape 25"/>
+          <p:cNvSpPr/>
+          <p:nvPr/>
+        </p:nvSpPr>
+        <p:spPr>
+          <a:xfrm>
+            <a:off x="7315200" y="3200400"/>
+            <a:ext cx="4389120" cy="1024128"/>
+          </a:xfrm>
+          <a:prstGeom prst="roundRect">
+            <a:avLst/>
+          </a:prstGeom>
+          <a:solidFill>
+            <a:srgbClr val="D1ECF1"/>
+          </a:solidFill>
+          <a:ln w="19050">
+            <a:solidFill>
+              <a:srgbClr val="17A2B8"/>
+            </a:solidFill>
+            <a:prstDash val="solid"/>
+          </a:ln>
+        </p:spPr>
+      </p:sp>
+      <p:sp>
+        <p:nvSpPr>
+          <p:cNvPr id="29" name="Text 26"/>
+          <p:cNvSpPr/>
+          <p:nvPr/>
+        </p:nvSpPr>
+        <p:spPr>
+          <a:xfrm>
+            <a:off x="7452360" y="3273552"/>
+            <a:ext cx="4114800" cy="228600"/>
+          </a:xfrm>
+          <a:prstGeom prst="rect">
+            <a:avLst/>
+          </a:prstGeom>
+          <a:noFill/>
+          <a:ln/>
+        </p:spPr>
+        <p:txBody>
+          <a:bodyPr wrap="square" rtlCol="0" anchor="ctr"/>
+          <a:lstStyle/>
+          <a:p>
+            <a:pPr indent="0" marL="0">
+              <a:buNone/>
+            </a:pPr>
+            <a:r>
+              <a:rPr lang="en-US" sz="950" b="1" dirty="0">
+                <a:solidFill>
+                  <a:srgbClr val="0C5460"/>
+                </a:solidFill>
+              </a:rPr>
+              <a:t>TIER 2: SCALE COMPOUNDERS (+15% to +30%) 📈</a:t>
+            </a:r>
+            <a:endParaRPr lang="en-US" sz="950" dirty="0"/>
+          </a:p>
+        </p:txBody>
+      </p:sp>
+      <p:sp>
+        <p:nvSpPr>
+          <p:cNvPr id="30" name="Text 27"/>
+          <p:cNvSpPr/>
+          <p:nvPr/>
+        </p:nvSpPr>
+        <p:spPr>
+          <a:xfrm>
+            <a:off x="7452360" y="3520440"/>
+            <a:ext cx="4114800" cy="640080"/>
+          </a:xfrm>
+          <a:prstGeom prst="rect">
+            <a:avLst/>
+          </a:prstGeom>
+          <a:noFill/>
+          <a:ln/>
+        </p:spPr>
+        <p:txBody>
+          <a:bodyPr wrap="square" rtlCol="0" anchor="ctr"/>
+          <a:lstStyle/>
+          <a:p>
+            <a:pPr indent="0" marL="0">
+              <a:buNone/>
+            </a:pPr>
+            <a:r>
+              <a:rPr lang="en-US" sz="800" dirty="0">
+                <a:solidFill>
+                  <a:srgbClr val="0C5460"/>
+                </a:solidFill>
+              </a:rPr>
+              <a:t>• Behera &amp; Dakahlia (Ahmed Sakr): 14,302 → 18,041 (+26.1%)</a:t>
+            </a:r>
+            <a:endParaRPr lang="en-US" sz="800" dirty="0"/>
+          </a:p>
+          <a:p>
+            <a:pPr indent="0" marL="0">
+              <a:buNone/>
+            </a:pPr>
+            <a:r>
+              <a:rPr lang="en-US" sz="800" dirty="0">
+                <a:solidFill>
+                  <a:srgbClr val="0C5460"/>
+                </a:solidFill>
+              </a:rPr>
+              <a:t>• Upper Egypt II (Beshoy Youhanna): 22,305 → 25,694 (+15.2%)</a:t>
+            </a:r>
+            <a:endParaRPr lang="en-US" sz="800" dirty="0"/>
+          </a:p>
+          <a:p>
+            <a:pPr indent="0" marL="0">
+              <a:buNone/>
+            </a:pPr>
+            <a:r>
+              <a:rPr lang="en-US" sz="800" dirty="0">
+                <a:solidFill>
+                  <a:srgbClr val="0C5460"/>
+                </a:solidFill>
+              </a:rPr>
+              <a:t>Strategic Action: Maintain mega-volume leadership, defend hospital listings.</a:t>
+            </a:r>
+            <a:endParaRPr lang="en-US" sz="800" dirty="0"/>
+          </a:p>
+        </p:txBody>
+      </p:sp>
+      <p:sp>
+        <p:nvSpPr>
+          <p:cNvPr id="31" name="Shape 28"/>
+          <p:cNvSpPr/>
+          <p:nvPr/>
+        </p:nvSpPr>
+        <p:spPr>
+          <a:xfrm>
+            <a:off x="7315200" y="4297680"/>
+            <a:ext cx="4389120" cy="1024128"/>
+          </a:xfrm>
+          <a:prstGeom prst="roundRect">
+            <a:avLst/>
+          </a:prstGeom>
+          <a:solidFill>
+            <a:srgbClr val="FFF3CD"/>
+          </a:solidFill>
+          <a:ln w="19050">
+            <a:solidFill>
+              <a:srgbClr val="FFC107"/>
+            </a:solidFill>
+            <a:prstDash val="solid"/>
+          </a:ln>
+        </p:spPr>
+      </p:sp>
+      <p:sp>
+        <p:nvSpPr>
+          <p:cNvPr id="32" name="Text 29"/>
+          <p:cNvSpPr/>
+          <p:nvPr/>
+        </p:nvSpPr>
+        <p:spPr>
+          <a:xfrm>
+            <a:off x="7452360" y="4370832"/>
+            <a:ext cx="4114800" cy="228600"/>
+          </a:xfrm>
+          <a:prstGeom prst="rect">
+            <a:avLst/>
+          </a:prstGeom>
+          <a:noFill/>
+          <a:ln/>
+        </p:spPr>
+        <p:txBody>
+          <a:bodyPr wrap="square" rtlCol="0" anchor="ctr"/>
+          <a:lstStyle/>
+          <a:p>
+            <a:pPr indent="0" marL="0">
+              <a:buNone/>
+            </a:pPr>
+            <a:r>
+              <a:rPr lang="en-US" sz="950" b="1" dirty="0">
+                <a:solidFill>
+                  <a:srgbClr val="856404"/>
+                </a:solidFill>
+              </a:rPr>
+              <a:t>TIER 3: STEADY CONSOLIDATORS (0% to +10%) 🛡️</a:t>
+            </a:r>
+            <a:endParaRPr lang="en-US" sz="950" dirty="0"/>
+          </a:p>
+        </p:txBody>
+      </p:sp>
+      <p:sp>
+        <p:nvSpPr>
+          <p:cNvPr id="33" name="Text 30"/>
+          <p:cNvSpPr/>
+          <p:nvPr/>
+        </p:nvSpPr>
+        <p:spPr>
+          <a:xfrm>
+            <a:off x="7452360" y="4617720"/>
+            <a:ext cx="4114800" cy="640080"/>
+          </a:xfrm>
+          <a:prstGeom prst="rect">
+            <a:avLst/>
+          </a:prstGeom>
+          <a:noFill/>
+          <a:ln/>
+        </p:spPr>
+        <p:txBody>
+          <a:bodyPr wrap="square" rtlCol="0" anchor="ctr"/>
+          <a:lstStyle/>
+          <a:p>
+            <a:pPr indent="0" marL="0">
+              <a:buNone/>
+            </a:pPr>
+            <a:r>
+              <a:rPr lang="en-US" sz="800" dirty="0">
+                <a:solidFill>
+                  <a:srgbClr val="856404"/>
+                </a:solidFill>
+              </a:rPr>
+              <a:t>• Guiza (Youstina Farag): 12,895 → 13,858 (+7.5%)</a:t>
+            </a:r>
+            <a:endParaRPr lang="en-US" sz="800" dirty="0"/>
+          </a:p>
+          <a:p>
+            <a:pPr indent="0" marL="0">
+              <a:buNone/>
+            </a:pPr>
+            <a:r>
+              <a:rPr lang="en-US" sz="800" dirty="0">
+                <a:solidFill>
+                  <a:srgbClr val="856404"/>
+                </a:solidFill>
+              </a:rPr>
+              <a:t>• Alexandria (Ahmed Hassan): 10,206 → 10,314 (+1.1%)</a:t>
+            </a:r>
+            <a:endParaRPr lang="en-US" sz="800" dirty="0"/>
+          </a:p>
+          <a:p>
+            <a:pPr indent="0" marL="0">
+              <a:buNone/>
+            </a:pPr>
+            <a:r>
+              <a:rPr lang="en-US" sz="800" dirty="0">
+                <a:solidFill>
+                  <a:srgbClr val="856404"/>
+                </a:solidFill>
+              </a:rPr>
+              <a:t>Strategic Action: Stable run-rates preserved; activate P1 &amp; PS2 detailing.</a:t>
+            </a:r>
+            <a:endParaRPr lang="en-US" sz="800" dirty="0"/>
+          </a:p>
+        </p:txBody>
+      </p:sp>
+      <p:sp>
+        <p:nvSpPr>
+          <p:cNvPr id="34" name="Shape 31"/>
+          <p:cNvSpPr/>
+          <p:nvPr/>
+        </p:nvSpPr>
+        <p:spPr>
+          <a:xfrm>
+            <a:off x="7315200" y="5394960"/>
+            <a:ext cx="4389120" cy="1024128"/>
+          </a:xfrm>
+          <a:prstGeom prst="roundRect">
+            <a:avLst/>
+          </a:prstGeom>
+          <a:solidFill>
+            <a:srgbClr val="F8D7DA"/>
+          </a:solidFill>
+          <a:ln w="19050">
+            <a:solidFill>
+              <a:srgbClr val="DC3545"/>
+            </a:solidFill>
+            <a:prstDash val="solid"/>
+          </a:ln>
+        </p:spPr>
+      </p:sp>
+      <p:sp>
+        <p:nvSpPr>
+          <p:cNvPr id="35" name="Text 32"/>
+          <p:cNvSpPr/>
+          <p:nvPr/>
+        </p:nvSpPr>
+        <p:spPr>
+          <a:xfrm>
+            <a:off x="7452360" y="5468112"/>
+            <a:ext cx="4114800" cy="228600"/>
+          </a:xfrm>
+          <a:prstGeom prst="rect">
+            <a:avLst/>
+          </a:prstGeom>
+          <a:noFill/>
+          <a:ln/>
+        </p:spPr>
+        <p:txBody>
+          <a:bodyPr wrap="square" rtlCol="0" anchor="ctr"/>
+          <a:lstStyle/>
+          <a:p>
+            <a:pPr indent="0" marL="0">
+              <a:buNone/>
+            </a:pPr>
+            <a:r>
+              <a:rPr lang="en-US" sz="950" b="1" dirty="0">
+                <a:solidFill>
+                  <a:srgbClr val="721C24"/>
+                </a:solidFill>
+              </a:rPr>
+              <a:t>TIER 4: CONTRACTION WATCHLIST (NEGATIVE Q3) ⚠️</a:t>
+            </a:r>
+            <a:endParaRPr lang="en-US" sz="950" dirty="0"/>
+          </a:p>
+        </p:txBody>
+      </p:sp>
+      <p:sp>
+        <p:nvSpPr>
+          <p:cNvPr id="36" name="Text 33"/>
+          <p:cNvSpPr/>
+          <p:nvPr/>
+        </p:nvSpPr>
+        <p:spPr>
+          <a:xfrm>
+            <a:off x="7452360" y="5715000"/>
+            <a:ext cx="4114800" cy="640080"/>
+          </a:xfrm>
+          <a:prstGeom prst="rect">
+            <a:avLst/>
+          </a:prstGeom>
+          <a:noFill/>
+          <a:ln/>
+        </p:spPr>
+        <p:txBody>
+          <a:bodyPr wrap="square" rtlCol="0" anchor="ctr"/>
+          <a:lstStyle/>
+          <a:p>
+            <a:pPr indent="0" marL="0">
+              <a:buNone/>
+            </a:pPr>
+            <a:r>
+              <a:rPr lang="en-US" sz="800" dirty="0">
+                <a:solidFill>
+                  <a:srgbClr val="721C24"/>
+                </a:solidFill>
+              </a:rPr>
+              <a:t>• DELTA I (Shimaa Tarek): 20,146 → 18,614 (-7.6%)</a:t>
+            </a:r>
+            <a:endParaRPr lang="en-US" sz="800" dirty="0"/>
+          </a:p>
+          <a:p>
+            <a:pPr indent="0" marL="0">
+              <a:buNone/>
+            </a:pPr>
+            <a:r>
+              <a:rPr lang="en-US" sz="800" dirty="0">
+                <a:solidFill>
+                  <a:srgbClr val="721C24"/>
+                </a:solidFill>
+              </a:rPr>
+              <a:t>• Delta II (Mohamed Yousef): 22,783 → 16,671 (-26.8%)</a:t>
+            </a:r>
+            <a:endParaRPr lang="en-US" sz="800" dirty="0"/>
+          </a:p>
+          <a:p>
+            <a:pPr indent="0" marL="0">
+              <a:buNone/>
+            </a:pPr>
+            <a:r>
+              <a:rPr lang="en-US" sz="800" dirty="0">
+                <a:solidFill>
+                  <a:srgbClr val="721C24"/>
+                </a:solidFill>
+              </a:rPr>
+              <a:t>Strategic Action: High H1 baseline dip; audit stock availability &amp; rep calls.</a:t>
+            </a:r>
+            <a:endParaRPr lang="en-US" sz="800" dirty="0"/>
           </a:p>
         </p:txBody>
       </p:sp>
@@ -9981,7 +16594,7 @@
               <a:buNone/>
             </a:pPr>
             <a:r>
-              <a:rPr lang="en-US" sz="1700" b="1" dirty="0">
+              <a:rPr lang="en-US" sz="1650" b="1" dirty="0">
                 <a:solidFill>
                   <a:srgbClr val="FFFFFF"/>
                 </a:solidFill>
@@ -9991,7 +16604,7 @@
               </a:rPr>
               <a:t>CORE INFANT NUTRITION: MONTHLY SALES AVERAGES</a:t>
             </a:r>
-            <a:endParaRPr lang="en-US" sz="1700" dirty="0"/>
+            <a:endParaRPr lang="en-US" sz="1650" dirty="0"/>
           </a:p>
         </p:txBody>
       </p:sp>
@@ -10020,7 +16633,7 @@
               <a:buNone/>
             </a:pPr>
             <a:r>
-              <a:rPr lang="en-US" sz="1050" i="1" dirty="0">
+              <a:rPr lang="en-US" sz="1000" i="1" dirty="0">
                 <a:solidFill>
                   <a:srgbClr val="D9E2EC"/>
                 </a:solidFill>
@@ -10028,9 +16641,9 @@
                 <a:ea typeface="Calibri" pitchFamily="34" charset="-122"/>
                 <a:cs typeface="Calibri" pitchFamily="34" charset="-120"/>
               </a:rPr>
-              <a:t>Horizontal Bars with exact values on the bars: Beshoy Youhanna (Upper Egypt II) vs 2025 vs Line Avg/ADM</a:t>
+              <a:t>Horizontal Bars with exact values: Beshoy Youhanna (Upper Egypt II) vs 2025 vs Line Avg/ADM</a:t>
             </a:r>
-            <a:endParaRPr lang="en-US" sz="1050" dirty="0"/>
+            <a:endParaRPr lang="en-US" sz="1000" dirty="0"/>
           </a:p>
         </p:txBody>
       </p:sp>
@@ -10106,7 +16719,7 @@
                 <a:ea typeface="Calibri" pitchFamily="34" charset="-122"/>
                 <a:cs typeface="Calibri" pitchFamily="34" charset="-120"/>
               </a:rPr>
-              <a:t>YTD M06-2026 vs 2025</a:t>
+              <a:t>YTD M09-2026 vs 2025</a:t>
             </a:r>
             <a:endParaRPr lang="en-US" sz="900" dirty="0"/>
           </a:p>
@@ -10537,7 +17150,7 @@
                             <a:srgbClr val="000000"/>
                           </a:solidFill>
                         </a:rPr>
-                        <a:t>7,416</a:t>
+                        <a:t>7,890</a:t>
                       </a:r>
                       <a:endParaRPr lang="en-US" sz="900" dirty="0"/>
                     </a:p>
@@ -10653,7 +17266,7 @@
                             <a:srgbClr val="28A745"/>
                           </a:solidFill>
                         </a:rPr>
-                        <a:t>+52.1%</a:t>
+                        <a:t>+61.8%</a:t>
                       </a:r>
                       <a:endParaRPr lang="en-US" sz="900" dirty="0"/>
                     </a:p>
@@ -10711,7 +17324,7 @@
                             <a:srgbClr val="2B6CB0"/>
                           </a:solidFill>
                         </a:rPr>
-                        <a:t>4,336</a:t>
+                        <a:t>4,551</a:t>
                       </a:r>
                       <a:endParaRPr lang="en-US" sz="900" dirty="0"/>
                     </a:p>
@@ -10829,7 +17442,7 @@
                             <a:srgbClr val="000000"/>
                           </a:solidFill>
                         </a:rPr>
-                        <a:t>4,794</a:t>
+                        <a:t>4,469</a:t>
                       </a:r>
                       <a:endParaRPr lang="en-US" sz="900" dirty="0"/>
                     </a:p>
@@ -10945,7 +17558,7 @@
                             <a:srgbClr val="28A745"/>
                           </a:solidFill>
                         </a:rPr>
-                        <a:t>+143.7%</a:t>
+                        <a:t>+127.2%</a:t>
                       </a:r>
                       <a:endParaRPr lang="en-US" sz="900" dirty="0"/>
                     </a:p>
@@ -11003,7 +17616,7 @@
                             <a:srgbClr val="2B6CB0"/>
                           </a:solidFill>
                         </a:rPr>
-                        <a:t>2,713</a:t>
+                        <a:t>2,767</a:t>
                       </a:r>
                       <a:endParaRPr lang="en-US" sz="900" dirty="0"/>
                     </a:p>
@@ -11121,7 +17734,7 @@
                             <a:srgbClr val="000000"/>
                           </a:solidFill>
                         </a:rPr>
-                        <a:t>3,392</a:t>
+                        <a:t>3,873</a:t>
                       </a:r>
                       <a:endParaRPr lang="en-US" sz="900" dirty="0"/>
                     </a:p>
@@ -11234,10 +17847,10 @@
                       <a:r>
                         <a:rPr lang="en-US" sz="900" b="1" dirty="0">
                           <a:solidFill>
-                            <a:srgbClr val="DC3545"/>
-                          </a:solidFill>
-                        </a:rPr>
-                        <a:t>-5.5%</a:t>
+                            <a:srgbClr val="1B365D"/>
+                          </a:solidFill>
+                        </a:rPr>
+                        <a:t>+7.9%</a:t>
                       </a:r>
                       <a:endParaRPr lang="en-US" sz="900" dirty="0"/>
                     </a:p>
@@ -11295,7 +17908,7 @@
                             <a:srgbClr val="2B6CB0"/>
                           </a:solidFill>
                         </a:rPr>
-                        <a:t>2,698</a:t>
+                        <a:t>3,019</a:t>
                       </a:r>
                       <a:endParaRPr lang="en-US" sz="900" dirty="0"/>
                     </a:p>
@@ -11413,7 +18026,7 @@
                             <a:srgbClr val="000000"/>
                           </a:solidFill>
                         </a:rPr>
-                        <a:t>1,952</a:t>
+                        <a:t>2,182</a:t>
                       </a:r>
                       <a:endParaRPr lang="en-US" sz="900" dirty="0"/>
                     </a:p>
@@ -11529,7 +18142,7 @@
                             <a:srgbClr val="1B365D"/>
                           </a:solidFill>
                         </a:rPr>
-                        <a:t>+20.0%</a:t>
+                        <a:t>+34.1%</a:t>
                       </a:r>
                       <a:endParaRPr lang="en-US" sz="900" dirty="0"/>
                     </a:p>
@@ -11587,7 +18200,7 @@
                             <a:srgbClr val="2B6CB0"/>
                           </a:solidFill>
                         </a:rPr>
-                        <a:t>1,804</a:t>
+                        <a:t>1,774</a:t>
                       </a:r>
                       <a:endParaRPr lang="en-US" sz="900" dirty="0"/>
                     </a:p>
@@ -11727,7 +18340,7 @@
                   <a:srgbClr val="2C3E50"/>
                 </a:solidFill>
               </a:rPr>
-              <a:t>• Pediamil 2 showed extraordinary momentum (+143.7% PPG), reaching 4,794 cans/mo.</a:t>
+              <a:t>• Pediamil 1 reached 7,890 cans/mo (+61.8% PPG), dominating the line average (4,551 cans).</a:t>
             </a:r>
             <a:endParaRPr lang="en-US" sz="850" dirty="0"/>
           </a:p>
@@ -11741,7 +18354,7 @@
                   <a:srgbClr val="2C3E50"/>
                 </a:solidFill>
               </a:rPr>
-              <a:t>• Pediamil 1 reached 7,416 cans/mo (+52.1% PPG), far above the Line Average (4,336 cans).</a:t>
+              <a:t>• Pediamil 2 achieved 4,469 cans/mo (+127.2% PPG), doubling 2025 run-rates.</a:t>
             </a:r>
             <a:endParaRPr lang="en-US" sz="850" dirty="0"/>
           </a:p>
@@ -11755,7 +18368,7 @@
                   <a:srgbClr val="2C3E50"/>
                 </a:solidFill>
               </a:rPr>
-              <a:t>• Pedia-Start 1 is 3,392 cans/mo, closely aligned with national Line Average quota.</a:t>
+              <a:t>• Pedia-Start 1 is 3,873 cans/mo, exceeding national line average (3,142 cans).</a:t>
             </a:r>
             <a:endParaRPr lang="en-US" sz="850" dirty="0"/>
           </a:p>
@@ -11769,7 +18382,7 @@
                   <a:srgbClr val="2C3E50"/>
                 </a:solidFill>
               </a:rPr>
-              <a:t>• Horizontal layout provides immediate visual comparison against team quota.</a:t>
+              <a:t>• Pedia-Start 2 is 2,182 cans/mo, up +34.1% over 2025 baseline.</a:t>
             </a:r>
             <a:endParaRPr lang="en-US" sz="850" dirty="0"/>
           </a:p>
@@ -11884,7 +18497,7 @@
               <a:buNone/>
             </a:pPr>
             <a:r>
-              <a:rPr lang="en-US" sz="1700" b="1" dirty="0">
+              <a:rPr lang="en-US" sz="1650" b="1" dirty="0">
                 <a:solidFill>
                   <a:srgbClr val="FFFFFF"/>
                 </a:solidFill>
@@ -11894,7 +18507,7 @@
               </a:rPr>
               <a:t>SPECIALTY NUTRITION: MONTHLY SALES AVERAGES</a:t>
             </a:r>
-            <a:endParaRPr lang="en-US" sz="1700" dirty="0"/>
+            <a:endParaRPr lang="en-US" sz="1650" dirty="0"/>
           </a:p>
         </p:txBody>
       </p:sp>
@@ -11923,7 +18536,7 @@
               <a:buNone/>
             </a:pPr>
             <a:r>
-              <a:rPr lang="en-US" sz="1050" i="1" dirty="0">
+              <a:rPr lang="en-US" sz="1000" i="1" dirty="0">
                 <a:solidFill>
                   <a:srgbClr val="D9E2EC"/>
                 </a:solidFill>
@@ -11931,9 +18544,9 @@
                 <a:ea typeface="Calibri" pitchFamily="34" charset="-122"/>
                 <a:cs typeface="Calibri" pitchFamily="34" charset="-120"/>
               </a:rPr>
-              <a:t>Horizontal Bars with exact values on the bars: Beshoy Youhanna vs 2025 vs Line Avg/ADM</a:t>
+              <a:t>Horizontal Bars with exact values: Beshoy Youhanna vs 2025 vs Line Avg/ADM</a:t>
             </a:r>
-            <a:endParaRPr lang="en-US" sz="1050" dirty="0"/>
+            <a:endParaRPr lang="en-US" sz="1000" dirty="0"/>
           </a:p>
         </p:txBody>
       </p:sp>
@@ -12009,7 +18622,7 @@
                 <a:ea typeface="Calibri" pitchFamily="34" charset="-122"/>
                 <a:cs typeface="Calibri" pitchFamily="34" charset="-120"/>
               </a:rPr>
-              <a:t>YTD M06-2026 vs 2025</a:t>
+              <a:t>YTD M09-2026 vs 2025</a:t>
             </a:r>
             <a:endParaRPr lang="en-US" sz="900" dirty="0"/>
           </a:p>
@@ -12440,7 +19053,7 @@
                             <a:srgbClr val="000000"/>
                           </a:solidFill>
                         </a:rPr>
-                        <a:t>485</a:t>
+                        <a:t>435</a:t>
                       </a:r>
                       <a:endParaRPr lang="en-US" sz="900" dirty="0"/>
                     </a:p>
@@ -12553,10 +19166,10 @@
                       <a:r>
                         <a:rPr lang="en-US" sz="900" b="1" dirty="0">
                           <a:solidFill>
-                            <a:srgbClr val="28A745"/>
-                          </a:solidFill>
-                        </a:rPr>
-                        <a:t>+35.8%</a:t>
+                            <a:srgbClr val="1B365D"/>
+                          </a:solidFill>
+                        </a:rPr>
+                        <a:t>+22.0%</a:t>
                       </a:r>
                       <a:endParaRPr lang="en-US" sz="900" dirty="0"/>
                     </a:p>
@@ -12614,7 +19227,7 @@
                             <a:srgbClr val="2B6CB0"/>
                           </a:solidFill>
                         </a:rPr>
-                        <a:t>482</a:t>
+                        <a:t>407</a:t>
                       </a:r>
                       <a:endParaRPr lang="en-US" sz="900" dirty="0"/>
                     </a:p>
@@ -12732,7 +19345,7 @@
                             <a:srgbClr val="000000"/>
                           </a:solidFill>
                         </a:rPr>
-                        <a:t>770</a:t>
+                        <a:t>1,017</a:t>
                       </a:r>
                       <a:endParaRPr lang="en-US" sz="900" dirty="0"/>
                     </a:p>
@@ -12848,7 +19461,7 @@
                             <a:srgbClr val="28A745"/>
                           </a:solidFill>
                         </a:rPr>
-                        <a:t>+48.1%</a:t>
+                        <a:t>+95.8%</a:t>
                       </a:r>
                       <a:endParaRPr lang="en-US" sz="900" dirty="0"/>
                     </a:p>
@@ -12906,7 +19519,7 @@
                             <a:srgbClr val="2B6CB0"/>
                           </a:solidFill>
                         </a:rPr>
-                        <a:t>655</a:t>
+                        <a:t>879</a:t>
                       </a:r>
                       <a:endParaRPr lang="en-US" sz="900" dirty="0"/>
                     </a:p>
@@ -13024,7 +19637,7 @@
                             <a:srgbClr val="000000"/>
                           </a:solidFill>
                         </a:rPr>
-                        <a:t>684</a:t>
+                        <a:t>834</a:t>
                       </a:r>
                       <a:endParaRPr lang="en-US" sz="900" dirty="0"/>
                     </a:p>
@@ -13137,10 +19750,10 @@
                       <a:r>
                         <a:rPr lang="en-US" sz="900" b="1" dirty="0">
                           <a:solidFill>
-                            <a:srgbClr val="DC3545"/>
-                          </a:solidFill>
-                        </a:rPr>
-                        <a:t>-3.0%</a:t>
+                            <a:srgbClr val="1B365D"/>
+                          </a:solidFill>
+                        </a:rPr>
+                        <a:t>+18.1%</a:t>
                       </a:r>
                       <a:endParaRPr lang="en-US" sz="900" dirty="0"/>
                     </a:p>
@@ -13198,7 +19811,7 @@
                             <a:srgbClr val="2B6CB0"/>
                           </a:solidFill>
                         </a:rPr>
-                        <a:t>520</a:t>
+                        <a:t>568</a:t>
                       </a:r>
                       <a:endParaRPr lang="en-US" sz="900" dirty="0"/>
                     </a:p>
@@ -13316,7 +19929,7 @@
                             <a:srgbClr val="000000"/>
                           </a:solidFill>
                         </a:rPr>
-                        <a:t>1,110</a:t>
+                        <a:t>1,517</a:t>
                       </a:r>
                       <a:endParaRPr lang="en-US" sz="900" dirty="0"/>
                     </a:p>
@@ -13432,7 +20045,7 @@
                             <a:srgbClr val="28A745"/>
                           </a:solidFill>
                         </a:rPr>
-                        <a:t>+51.6%</a:t>
+                        <a:t>+107.2%</a:t>
                       </a:r>
                       <a:endParaRPr lang="en-US" sz="900" dirty="0"/>
                     </a:p>
@@ -13490,7 +20103,7 @@
                             <a:srgbClr val="2B6CB0"/>
                           </a:solidFill>
                         </a:rPr>
-                        <a:t>835</a:t>
+                        <a:t>1,119</a:t>
                       </a:r>
                       <a:endParaRPr lang="en-US" sz="900" dirty="0"/>
                     </a:p>
@@ -13608,7 +20221,7 @@
                             <a:srgbClr val="000000"/>
                           </a:solidFill>
                         </a:rPr>
-                        <a:t>91</a:t>
+                        <a:t>97</a:t>
                       </a:r>
                       <a:endParaRPr lang="en-US" sz="900" dirty="0"/>
                     </a:p>
@@ -13721,10 +20334,10 @@
                       <a:r>
                         <a:rPr lang="en-US" sz="900" b="1" dirty="0">
                           <a:solidFill>
-                            <a:srgbClr val="DC3545"/>
-                          </a:solidFill>
-                        </a:rPr>
-                        <a:t>-4.7%</a:t>
+                            <a:srgbClr val="1B365D"/>
+                          </a:solidFill>
+                        </a:rPr>
+                        <a:t>+1.0%</a:t>
                       </a:r>
                       <a:endParaRPr lang="en-US" sz="900" dirty="0"/>
                     </a:p>
@@ -13782,7 +20395,7 @@
                             <a:srgbClr val="2B6CB0"/>
                           </a:solidFill>
                         </a:rPr>
-                        <a:t>80</a:t>
+                        <a:t>75</a:t>
                       </a:r>
                       <a:endParaRPr lang="en-US" sz="900" dirty="0"/>
                     </a:p>
@@ -13922,7 +20535,7 @@
                   <a:srgbClr val="2C3E50"/>
                 </a:solidFill>
               </a:rPr>
-              <a:t>• Pediamil AC (1,110 cans/mo) and Pediamil HA (770 cans/mo) outpace line benchmarks.</a:t>
+              <a:t>• Pediamil AC (1,517 cans/mo) surged +107.2% PPG, establishing clear pediatric leadership.</a:t>
             </a:r>
             <a:endParaRPr lang="en-US" sz="850" dirty="0"/>
           </a:p>
@@ -13936,7 +20549,7 @@
                   <a:srgbClr val="2C3E50"/>
                 </a:solidFill>
               </a:rPr>
-              <a:t>• Pediamil AR &amp; Pediamum require targeted clinic detailing.</a:t>
+              <a:t>• Pediamil HA (1,017 cans/mo) is up +95.7% PPG, outpacing national quota.</a:t>
             </a:r>
             <a:endParaRPr lang="en-US" sz="850" dirty="0"/>
           </a:p>
@@ -13950,7 +20563,7 @@
                   <a:srgbClr val="2C3E50"/>
                 </a:solidFill>
               </a:rPr>
-              <a:t>• In the web dashboard, changing the dropdown updates these horizontal bars instantly for any manager.</a:t>
+              <a:t>• Specialty portfolio provides superior margins and clinical prescription stickiness.</a:t>
             </a:r>
             <a:endParaRPr lang="en-US" sz="850" dirty="0"/>
           </a:p>
@@ -14065,7 +20678,7 @@
               <a:buNone/>
             </a:pPr>
             <a:r>
-              <a:rPr lang="en-US" sz="1700" b="1" dirty="0">
+              <a:rPr lang="en-US" sz="1650" b="1" dirty="0">
                 <a:solidFill>
                   <a:srgbClr val="FFFFFF"/>
                 </a:solidFill>
@@ -14075,7 +20688,7 @@
               </a:rPr>
               <a:t>DUAL-AXIS DEEP DIVE: SELECTED ADM vs COMPANY BENCHMARK</a:t>
             </a:r>
-            <a:endParaRPr lang="en-US" sz="1700" dirty="0"/>
+            <a:endParaRPr lang="en-US" sz="1650" dirty="0"/>
           </a:p>
         </p:txBody>
       </p:sp>
@@ -14104,7 +20717,7 @@
               <a:buNone/>
             </a:pPr>
             <a:r>
-              <a:rPr lang="en-US" sz="1050" i="1" dirty="0">
+              <a:rPr lang="en-US" sz="1000" i="1" dirty="0">
                 <a:solidFill>
                   <a:srgbClr val="D9E2EC"/>
                 </a:solidFill>
@@ -14112,9 +20725,9 @@
                 <a:ea typeface="Calibri" pitchFamily="34" charset="-122"/>
                 <a:cs typeface="Calibri" pitchFamily="34" charset="-120"/>
               </a:rPr>
-              <a:t>Dual-Axis Combo Chart: Volume (Bars, Primary Axis) &amp; Growth Rate % (Lines, Secondary Axis) with figures table below</a:t>
+              <a:t>Dual-Axis Combo Chart: Volume (Bars, Primary Axis) &amp; Growth Rate % (Lines, Secondary Axis)</a:t>
             </a:r>
-            <a:endParaRPr lang="en-US" sz="1050" dirty="0"/>
+            <a:endParaRPr lang="en-US" sz="1000" dirty="0"/>
           </a:p>
         </p:txBody>
       </p:sp>
@@ -14190,7 +20803,7 @@
                 <a:ea typeface="Calibri" pitchFamily="34" charset="-122"/>
                 <a:cs typeface="Calibri" pitchFamily="34" charset="-120"/>
               </a:rPr>
-              <a:t>YTD M06-2026 vs 2025</a:t>
+              <a:t>YTD M09-2026 vs 2025</a:t>
             </a:r>
             <a:endParaRPr lang="en-US" sz="900" dirty="0"/>
           </a:p>
@@ -14303,7 +20916,7 @@
                   <a:srgbClr val="155724"/>
                 </a:solidFill>
               </a:rPr>
-              <a:t>🟢 TOTAL GROWTH: +50.11% PPG (vs Company: +33.79%)</a:t>
+              <a:t>🟢 TOTAL GROWTH: +57.71% PPG (vs Company: +39.54%)</a:t>
             </a:r>
             <a:endParaRPr lang="en-US" sz="1100" dirty="0"/>
           </a:p>
@@ -14317,7 +20930,7 @@
                   <a:srgbClr val="155724"/>
                 </a:solidFill>
               </a:rPr>
-              <a:t>STATUS: ABOVE COMPANY BENCHMARK (+16.3% AHEAD)</a:t>
+              <a:t>STATUS: ABOVE COMPANY BENCHMARK (+18.2% AHEAD)</a:t>
             </a:r>
             <a:endParaRPr lang="en-US" sz="1100" dirty="0"/>
           </a:p>
@@ -14353,7 +20966,7 @@
                   <a:srgbClr val="2C3E50"/>
                 </a:solidFill>
               </a:rPr>
-              <a:t>Interactive Feature: In the web review sheet, this combo chart is frozen at the top of the screen as you scroll down through the figures.</a:t>
+              <a:t>Interactive Feature: In the web review dashboard, selecting any ADM from the header updates this dual-axis combo chart instantly.</a:t>
             </a:r>
             <a:endParaRPr lang="en-US" sz="800" dirty="0"/>
           </a:p>
@@ -14414,7 +21027,7 @@
                   <a:srgbClr val="721C24"/>
                 </a:solidFill>
               </a:rPr>
-              <a:t>BELOW-BENCHMARK RULE (RED SHAPE)</a:t>
+              <a:t>BELOW-BENCHMARK RULE (DYNAMIC RED SHAPE)</a:t>
             </a:r>
             <a:endParaRPr lang="en-US" sz="1000" dirty="0"/>
           </a:p>
@@ -14464,7 +21077,7 @@
                   <a:srgbClr val="721C24"/>
                 </a:solidFill>
               </a:rPr>
-              <a:t>When selecting an underperforming territory (e.g. Cairo +22.5%, Behera +15.0%, KFR +12.0%), the alert box switches dynamically to RED with gap shortfall metrics.</a:t>
+              <a:t>When selecting an underperforming territory (e.g. Behera +25.0%, Delta I +28.9%, Kfr El.Shk +29.9%, Guiza +32.8%), the card switches to RED with gap metrics.</a:t>
             </a:r>
             <a:endParaRPr lang="en-US" sz="850" dirty="0"/>
           </a:p>
@@ -14698,7 +21311,7 @@
                             <a:srgbClr val="FFFFFF"/>
                           </a:solidFill>
                         </a:rPr>
-                        <a:t>Chosen Person PPG%</a:t>
+                        <a:t>Selected ADM PPG%</a:t>
                       </a:r>
                       <a:endParaRPr lang="en-US" sz="1200" dirty="0"/>
                     </a:p>
@@ -14999,7 +21612,7 @@
                             <a:srgbClr val="000000"/>
                           </a:solidFill>
                         </a:rPr>
-                        <a:t>7,416</a:t>
+                        <a:t>7,890</a:t>
                       </a:r>
                       <a:endParaRPr lang="en-US" sz="850" dirty="0"/>
                     </a:p>
@@ -15057,7 +21670,7 @@
                             <a:srgbClr val="28A745"/>
                           </a:solidFill>
                         </a:rPr>
-                        <a:t>+52.0%</a:t>
+                        <a:t>+61.8%</a:t>
                       </a:r>
                       <a:endParaRPr lang="en-US" sz="850" dirty="0"/>
                     </a:p>
@@ -15115,7 +21728,7 @@
                             <a:srgbClr val="1B365D"/>
                           </a:solidFill>
                         </a:rPr>
-                        <a:t>+39.9%</a:t>
+                        <a:t>+46.9%</a:t>
                       </a:r>
                       <a:endParaRPr lang="en-US" sz="850" dirty="0"/>
                     </a:p>
@@ -15173,7 +21786,7 @@
                             <a:srgbClr val="28A745"/>
                           </a:solidFill>
                         </a:rPr>
-                        <a:t>+12.1% 🟢 Ahead</a:t>
+                        <a:t>+14.9% 🟢 Ahead</a:t>
                       </a:r>
                       <a:endParaRPr lang="en-US" sz="850" dirty="0"/>
                     </a:p>
@@ -15349,7 +21962,7 @@
                             <a:srgbClr val="000000"/>
                           </a:solidFill>
                         </a:rPr>
-                        <a:t>4,794</a:t>
+                        <a:t>4,469</a:t>
                       </a:r>
                       <a:endParaRPr lang="en-US" sz="850" dirty="0"/>
                     </a:p>
@@ -15407,7 +22020,7 @@
                             <a:srgbClr val="28A745"/>
                           </a:solidFill>
                         </a:rPr>
-                        <a:t>+143.7%</a:t>
+                        <a:t>+127.2%</a:t>
                       </a:r>
                       <a:endParaRPr lang="en-US" sz="850" dirty="0"/>
                     </a:p>
@@ -15465,7 +22078,7 @@
                             <a:srgbClr val="1B365D"/>
                           </a:solidFill>
                         </a:rPr>
-                        <a:t>+65.3%</a:t>
+                        <a:t>+68.5%</a:t>
                       </a:r>
                       <a:endParaRPr lang="en-US" sz="850" dirty="0"/>
                     </a:p>
@@ -15523,7 +22136,7 @@
                             <a:srgbClr val="28A745"/>
                           </a:solidFill>
                         </a:rPr>
-                        <a:t>+78.5% 🟢 Ahead</a:t>
+                        <a:t>+58.7% 🟢 Ahead</a:t>
                       </a:r>
                       <a:endParaRPr lang="en-US" sz="850" dirty="0"/>
                     </a:p>
@@ -15699,7 +22312,7 @@
                             <a:srgbClr val="000000"/>
                           </a:solidFill>
                         </a:rPr>
-                        <a:t>3,392</a:t>
+                        <a:t>3,873</a:t>
                       </a:r>
                       <a:endParaRPr lang="en-US" sz="850" dirty="0"/>
                     </a:p>
@@ -15757,7 +22370,7 @@
                             <a:srgbClr val="DC3545"/>
                           </a:solidFill>
                         </a:rPr>
-                        <a:t>-5.5%</a:t>
+                        <a:t>+7.9%</a:t>
                       </a:r>
                       <a:endParaRPr lang="en-US" sz="850" dirty="0"/>
                     </a:p>
@@ -15815,7 +22428,7 @@
                             <a:srgbClr val="1B365D"/>
                           </a:solidFill>
                         </a:rPr>
-                        <a:t>-2.1%</a:t>
+                        <a:t>+9.6%</a:t>
                       </a:r>
                       <a:endParaRPr lang="en-US" sz="850" dirty="0"/>
                     </a:p>
@@ -15873,7 +22486,7 @@
                             <a:srgbClr val="DC3545"/>
                           </a:solidFill>
                         </a:rPr>
-                        <a:t>-3.4% 🔻 Below</a:t>
+                        <a:t>-1.7% 🔻 Below</a:t>
                       </a:r>
                       <a:endParaRPr lang="en-US" sz="850" dirty="0"/>
                     </a:p>
@@ -16049,7 +22662,7 @@
                             <a:srgbClr val="000000"/>
                           </a:solidFill>
                         </a:rPr>
-                        <a:t>1,952</a:t>
+                        <a:t>2,182</a:t>
                       </a:r>
                       <a:endParaRPr lang="en-US" sz="850" dirty="0"/>
                     </a:p>
@@ -16107,7 +22720,7 @@
                             <a:srgbClr val="DC3545"/>
                           </a:solidFill>
                         </a:rPr>
-                        <a:t>+19.9%</a:t>
+                        <a:t>+34.1%</a:t>
                       </a:r>
                       <a:endParaRPr lang="en-US" sz="850" dirty="0"/>
                     </a:p>
@@ -16165,7 +22778,7 @@
                             <a:srgbClr val="1B365D"/>
                           </a:solidFill>
                         </a:rPr>
-                        <a:t>+39.9%</a:t>
+                        <a:t>+37.6%</a:t>
                       </a:r>
                       <a:endParaRPr lang="en-US" sz="850" dirty="0"/>
                     </a:p>
@@ -16223,7 +22836,7 @@
                             <a:srgbClr val="DC3545"/>
                           </a:solidFill>
                         </a:rPr>
-                        <a:t>-19.9% 🔻 Below</a:t>
+                        <a:t>-3.5% 🔻 Below</a:t>
                       </a:r>
                       <a:endParaRPr lang="en-US" sz="850" dirty="0"/>
                     </a:p>
@@ -16399,7 +23012,7 @@
                             <a:srgbClr val="000000"/>
                           </a:solidFill>
                         </a:rPr>
-                        <a:t>3,744</a:t>
+                        <a:t>4,413</a:t>
                       </a:r>
                       <a:endParaRPr lang="en-US" sz="850" dirty="0"/>
                     </a:p>
@@ -16457,7 +23070,7 @@
                             <a:srgbClr val="28A745"/>
                           </a:solidFill>
                         </a:rPr>
-                        <a:t>+55.4%</a:t>
+                        <a:t>+83.3%</a:t>
                       </a:r>
                       <a:endParaRPr lang="en-US" sz="850" dirty="0"/>
                     </a:p>
@@ -16515,7 +23128,7 @@
                             <a:srgbClr val="1B365D"/>
                           </a:solidFill>
                         </a:rPr>
-                        <a:t>+10.4%</a:t>
+                        <a:t>+43.5%</a:t>
                       </a:r>
                       <a:endParaRPr lang="en-US" sz="850" dirty="0"/>
                     </a:p>
@@ -16573,7 +23186,7 @@
                             <a:srgbClr val="28A745"/>
                           </a:solidFill>
                         </a:rPr>
-                        <a:t>+44.9% 🟢 Ahead</a:t>
+                        <a:t>+39.8% 🟢 Ahead</a:t>
                       </a:r>
                       <a:endParaRPr lang="en-US" sz="850" dirty="0"/>
                     </a:p>
@@ -16731,7 +23344,7 @@
               <a:buNone/>
             </a:pPr>
             <a:r>
-              <a:rPr lang="en-US" sz="1700" b="1" dirty="0">
+              <a:rPr lang="en-US" sz="1650" b="1" dirty="0">
                 <a:solidFill>
                   <a:srgbClr val="FFFFFF"/>
                 </a:solidFill>
@@ -16741,7 +23354,7 @@
               </a:rPr>
               <a:t>TOTAL PPG% GROWTH RANKING (COMPANY AT TOP)</a:t>
             </a:r>
-            <a:endParaRPr lang="en-US" sz="1700" dirty="0"/>
+            <a:endParaRPr lang="en-US" sz="1650" dirty="0"/>
           </a:p>
         </p:txBody>
       </p:sp>
@@ -16770,7 +23383,7 @@
               <a:buNone/>
             </a:pPr>
             <a:r>
-              <a:rPr lang="en-US" sz="1050" i="1" dirty="0">
+              <a:rPr lang="en-US" sz="1000" i="1" dirty="0">
                 <a:solidFill>
                   <a:srgbClr val="D9E2EC"/>
                 </a:solidFill>
@@ -16778,9 +23391,9 @@
                 <a:ea typeface="Calibri" pitchFamily="34" charset="-122"/>
                 <a:cs typeface="Calibri" pitchFamily="34" charset="-120"/>
               </a:rPr>
-              <a:t>National Benchmark: +33.79% | Green = Above Company | Red = Below Company</a:t>
+              <a:t>National Benchmark: +39.5% | Green = Above Company | Red = Below Company</a:t>
             </a:r>
-            <a:endParaRPr lang="en-US" sz="1050" dirty="0"/>
+            <a:endParaRPr lang="en-US" sz="1000" dirty="0"/>
           </a:p>
         </p:txBody>
       </p:sp>
@@ -16856,7 +23469,7 @@
                 <a:ea typeface="Calibri" pitchFamily="34" charset="-122"/>
                 <a:cs typeface="Calibri" pitchFamily="34" charset="-120"/>
               </a:rPr>
-              <a:t>YTD M06-2026 vs 2025</a:t>
+              <a:t>YTD M09-2026 vs 2025</a:t>
             </a:r>
             <a:endParaRPr lang="en-US" sz="900" dirty="0"/>
           </a:p>
@@ -17412,7 +24025,7 @@
                             <a:srgbClr val="1B365D"/>
                           </a:solidFill>
                         </a:rPr>
-                        <a:t>+33.8%</a:t>
+                        <a:t>+39.5%</a:t>
                       </a:r>
                       <a:endParaRPr lang="en-US" sz="1200" dirty="0"/>
                     </a:p>
@@ -17594,7 +24207,7 @@
                             <a:srgbClr val="000000"/>
                           </a:solidFill>
                         </a:rPr>
-                        <a:t>Delta II</a:t>
+                        <a:t>Upper Egypt II</a:t>
                       </a:r>
                       <a:endParaRPr lang="en-US" sz="850" dirty="0"/>
                     </a:p>
@@ -17652,7 +24265,7 @@
                             <a:srgbClr val="000000"/>
                           </a:solidFill>
                         </a:rPr>
-                        <a:t>Mohamed Yousef</a:t>
+                        <a:t>Beshoy Youhanna</a:t>
                       </a:r>
                       <a:endParaRPr lang="en-US" sz="850" dirty="0"/>
                     </a:p>
@@ -17710,7 +24323,7 @@
                             <a:srgbClr val="28A745"/>
                           </a:solidFill>
                         </a:rPr>
-                        <a:t>+60.2%</a:t>
+                        <a:t>+57.7%</a:t>
                       </a:r>
                       <a:endParaRPr lang="en-US" sz="850" dirty="0"/>
                     </a:p>
@@ -17886,7 +24499,7 @@
                             <a:srgbClr val="000000"/>
                           </a:solidFill>
                         </a:rPr>
-                        <a:t>Upper Egypt II</a:t>
+                        <a:t>Cairo</a:t>
                       </a:r>
                       <a:endParaRPr lang="en-US" sz="850" dirty="0"/>
                     </a:p>
@@ -17944,7 +24557,7 @@
                             <a:srgbClr val="000000"/>
                           </a:solidFill>
                         </a:rPr>
-                        <a:t>Beshoy Youhanna</a:t>
+                        <a:t>NOHER ADEL</a:t>
                       </a:r>
                       <a:endParaRPr lang="en-US" sz="850" dirty="0"/>
                     </a:p>
@@ -18002,7 +24615,7 @@
                             <a:srgbClr val="28A745"/>
                           </a:solidFill>
                         </a:rPr>
-                        <a:t>+50.1%</a:t>
+                        <a:t>+46.4%</a:t>
                       </a:r>
                       <a:endParaRPr lang="en-US" sz="850" dirty="0"/>
                     </a:p>
@@ -18178,7 +24791,7 @@
                             <a:srgbClr val="000000"/>
                           </a:solidFill>
                         </a:rPr>
-                        <a:t>Alx</a:t>
+                        <a:t>Upper Egypt I</a:t>
                       </a:r>
                       <a:endParaRPr lang="en-US" sz="850" dirty="0"/>
                     </a:p>
@@ -18236,7 +24849,7 @@
                             <a:srgbClr val="000000"/>
                           </a:solidFill>
                         </a:rPr>
-                        <a:t>Ahmed Hassan</a:t>
+                        <a:t>UE North</a:t>
                       </a:r>
                       <a:endParaRPr lang="en-US" sz="850" dirty="0"/>
                     </a:p>
@@ -18294,7 +24907,7 @@
                             <a:srgbClr val="28A745"/>
                           </a:solidFill>
                         </a:rPr>
-                        <a:t>+39.6%</a:t>
+                        <a:t>+46.2%</a:t>
                       </a:r>
                       <a:endParaRPr lang="en-US" sz="850" dirty="0"/>
                     </a:p>
@@ -18470,7 +25083,7 @@
                             <a:srgbClr val="000000"/>
                           </a:solidFill>
                         </a:rPr>
-                        <a:t>DELTA I</a:t>
+                        <a:t>Delta II</a:t>
                       </a:r>
                       <a:endParaRPr lang="en-US" sz="850" dirty="0"/>
                     </a:p>
@@ -18528,7 +25141,7 @@
                             <a:srgbClr val="000000"/>
                           </a:solidFill>
                         </a:rPr>
-                        <a:t>Shimaa Tarek</a:t>
+                        <a:t>Mohamed Yousef</a:t>
                       </a:r>
                       <a:endParaRPr lang="en-US" sz="850" dirty="0"/>
                     </a:p>
@@ -18583,10 +25196,10 @@
                       <a:r>
                         <a:rPr lang="en-US" sz="850" b="1" dirty="0">
                           <a:solidFill>
-                            <a:srgbClr val="DC3545"/>
-                          </a:solidFill>
-                        </a:rPr>
-                        <a:t>+32.2%</a:t>
+                            <a:srgbClr val="28A745"/>
+                          </a:solidFill>
+                        </a:rPr>
+                        <a:t>+46.0%</a:t>
                       </a:r>
                       <a:endParaRPr lang="en-US" sz="850" dirty="0"/>
                     </a:p>
@@ -18641,10 +25254,10 @@
                       <a:r>
                         <a:rPr lang="en-US" sz="800" b="1" dirty="0">
                           <a:solidFill>
-                            <a:srgbClr val="DC3545"/>
-                          </a:solidFill>
-                        </a:rPr>
-                        <a:t>🔻 BELOW COMPANY</a:t>
+                            <a:srgbClr val="28A745"/>
+                          </a:solidFill>
+                        </a:rPr>
+                        <a:t>🟢 ABOVE COMPANY</a:t>
                       </a:r>
                       <a:endParaRPr lang="en-US" sz="800" dirty="0"/>
                     </a:p>
@@ -18762,7 +25375,7 @@
                             <a:srgbClr val="000000"/>
                           </a:solidFill>
                         </a:rPr>
-                        <a:t>Guiza</a:t>
+                        <a:t>Alx</a:t>
                       </a:r>
                       <a:endParaRPr lang="en-US" sz="850" dirty="0"/>
                     </a:p>
@@ -18820,7 +25433,7 @@
                             <a:srgbClr val="000000"/>
                           </a:solidFill>
                         </a:rPr>
-                        <a:t>Youstina Farag</a:t>
+                        <a:t>Ahmed Hassan</a:t>
                       </a:r>
                       <a:endParaRPr lang="en-US" sz="850" dirty="0"/>
                     </a:p>
@@ -18875,10 +25488,10 @@
                       <a:r>
                         <a:rPr lang="en-US" sz="850" b="1" dirty="0">
                           <a:solidFill>
-                            <a:srgbClr val="DC3545"/>
-                          </a:solidFill>
-                        </a:rPr>
-                        <a:t>+29.6%</a:t>
+                            <a:srgbClr val="28A745"/>
+                          </a:solidFill>
+                        </a:rPr>
+                        <a:t>+40.1%</a:t>
                       </a:r>
                       <a:endParaRPr lang="en-US" sz="850" dirty="0"/>
                     </a:p>
@@ -18933,10 +25546,10 @@
                       <a:r>
                         <a:rPr lang="en-US" sz="800" b="1" dirty="0">
                           <a:solidFill>
-                            <a:srgbClr val="DC3545"/>
-                          </a:solidFill>
-                        </a:rPr>
-                        <a:t>🔻 BELOW COMPANY</a:t>
+                            <a:srgbClr val="28A745"/>
+                          </a:solidFill>
+                        </a:rPr>
+                        <a:t>🟢 ABOVE COMPANY</a:t>
                       </a:r>
                       <a:endParaRPr lang="en-US" sz="800" dirty="0"/>
                     </a:p>
@@ -19054,7 +25667,7 @@
                             <a:srgbClr val="000000"/>
                           </a:solidFill>
                         </a:rPr>
-                        <a:t>Upper Egypt I</a:t>
+                        <a:t>Guiza</a:t>
                       </a:r>
                       <a:endParaRPr lang="en-US" sz="850" dirty="0"/>
                     </a:p>
@@ -19112,7 +25725,7 @@
                             <a:srgbClr val="000000"/>
                           </a:solidFill>
                         </a:rPr>
-                        <a:t>UE North</a:t>
+                        <a:t>Youstina Farag</a:t>
                       </a:r>
                       <a:endParaRPr lang="en-US" sz="850" dirty="0"/>
                     </a:p>
@@ -19170,7 +25783,7 @@
                             <a:srgbClr val="DC3545"/>
                           </a:solidFill>
                         </a:rPr>
-                        <a:t>+27.8%</a:t>
+                        <a:t>+32.8%</a:t>
                       </a:r>
                       <a:endParaRPr lang="en-US" sz="850" dirty="0"/>
                     </a:p>
@@ -19346,7 +25959,7 @@
                             <a:srgbClr val="000000"/>
                           </a:solidFill>
                         </a:rPr>
-                        <a:t>Cairo</a:t>
+                        <a:t>KFR EL.SHK</a:t>
                       </a:r>
                       <a:endParaRPr lang="en-US" sz="850" dirty="0"/>
                     </a:p>
@@ -19404,7 +26017,7 @@
                             <a:srgbClr val="000000"/>
                           </a:solidFill>
                         </a:rPr>
-                        <a:t>NOHER ADEL</a:t>
+                        <a:t>Karim Shehab</a:t>
                       </a:r>
                       <a:endParaRPr lang="en-US" sz="850" dirty="0"/>
                     </a:p>
@@ -19462,7 +26075,7 @@
                             <a:srgbClr val="DC3545"/>
                           </a:solidFill>
                         </a:rPr>
-                        <a:t>+22.5%</a:t>
+                        <a:t>+29.9%</a:t>
                       </a:r>
                       <a:endParaRPr lang="en-US" sz="850" dirty="0"/>
                     </a:p>
@@ -19638,7 +26251,7 @@
                             <a:srgbClr val="000000"/>
                           </a:solidFill>
                         </a:rPr>
-                        <a:t>Behera &amp; Dakahlia</a:t>
+                        <a:t>DELTA I</a:t>
                       </a:r>
                       <a:endParaRPr lang="en-US" sz="850" dirty="0"/>
                     </a:p>
@@ -19696,7 +26309,7 @@
                             <a:srgbClr val="000000"/>
                           </a:solidFill>
                         </a:rPr>
-                        <a:t>Ahmed Mohamed</a:t>
+                        <a:t>Shimaa Tarek</a:t>
                       </a:r>
                       <a:endParaRPr lang="en-US" sz="850" dirty="0"/>
                     </a:p>
@@ -19754,7 +26367,7 @@
                             <a:srgbClr val="DC3545"/>
                           </a:solidFill>
                         </a:rPr>
-                        <a:t>+14.9%</a:t>
+                        <a:t>+28.9%</a:t>
                       </a:r>
                       <a:endParaRPr lang="en-US" sz="850" dirty="0"/>
                     </a:p>
@@ -19930,7 +26543,7 @@
                             <a:srgbClr val="000000"/>
                           </a:solidFill>
                         </a:rPr>
-                        <a:t>KFR EL.SHK</a:t>
+                        <a:t>Behera &amp; Dakahlia</a:t>
                       </a:r>
                       <a:endParaRPr lang="en-US" sz="850" dirty="0"/>
                     </a:p>
@@ -19988,7 +26601,7 @@
                             <a:srgbClr val="000000"/>
                           </a:solidFill>
                         </a:rPr>
-                        <a:t>Karim Shehab</a:t>
+                        <a:t>Ahmed Mohamed</a:t>
                       </a:r>
                       <a:endParaRPr lang="en-US" sz="850" dirty="0"/>
                     </a:p>
@@ -20046,7 +26659,7 @@
                             <a:srgbClr val="DC3545"/>
                           </a:solidFill>
                         </a:rPr>
-                        <a:t>+12.0%</a:t>
+                        <a:t>+25.0%</a:t>
                       </a:r>
                       <a:endParaRPr lang="en-US" sz="850" dirty="0"/>
                     </a:p>
@@ -20262,7 +26875,7 @@
               <a:buNone/>
             </a:pPr>
             <a:r>
-              <a:rPr lang="en-US" sz="1700" b="1" dirty="0">
+              <a:rPr lang="en-US" sz="1650" b="1" dirty="0">
                 <a:solidFill>
                   <a:srgbClr val="FFFFFF"/>
                 </a:solidFill>
@@ -20272,7 +26885,7 @@
               </a:rPr>
               <a:t>PEDIAMIL 1 PPG% GROWTH RANKING (COMPANY AT TOP)</a:t>
             </a:r>
-            <a:endParaRPr lang="en-US" sz="1700" dirty="0"/>
+            <a:endParaRPr lang="en-US" sz="1650" dirty="0"/>
           </a:p>
         </p:txBody>
       </p:sp>
@@ -20301,7 +26914,7 @@
               <a:buNone/>
             </a:pPr>
             <a:r>
-              <a:rPr lang="en-US" sz="1050" i="1" dirty="0">
+              <a:rPr lang="en-US" sz="1000" i="1" dirty="0">
                 <a:solidFill>
                   <a:srgbClr val="D9E2EC"/>
                 </a:solidFill>
@@ -20309,9 +26922,9 @@
                 <a:ea typeface="Calibri" pitchFamily="34" charset="-122"/>
                 <a:cs typeface="Calibri" pitchFamily="34" charset="-120"/>
               </a:rPr>
-              <a:t>Pediamil 1 National Benchmark: +39.92% | Green = Above Company | Red = Below Company</a:t>
+              <a:t>Pediamil 1 National Benchmark: +46.9% | Green = Above Company | Red = Below Company</a:t>
             </a:r>
-            <a:endParaRPr lang="en-US" sz="1050" dirty="0"/>
+            <a:endParaRPr lang="en-US" sz="1000" dirty="0"/>
           </a:p>
         </p:txBody>
       </p:sp>
@@ -20387,7 +27000,7 @@
                 <a:ea typeface="Calibri" pitchFamily="34" charset="-122"/>
                 <a:cs typeface="Calibri" pitchFamily="34" charset="-120"/>
               </a:rPr>
-              <a:t>YTD M06-2026 vs 2025</a:t>
+              <a:t>YTD M09-2026 vs 2025</a:t>
             </a:r>
             <a:endParaRPr lang="en-US" sz="900" dirty="0"/>
           </a:p>
@@ -20943,7 +27556,7 @@
                             <a:srgbClr val="1B365D"/>
                           </a:solidFill>
                         </a:rPr>
-                        <a:t>+39.9%</a:t>
+                        <a:t>+46.9%</a:t>
                       </a:r>
                       <a:endParaRPr lang="en-US" sz="1200" dirty="0"/>
                     </a:p>
@@ -21241,7 +27854,7 @@
                             <a:srgbClr val="28A745"/>
                           </a:solidFill>
                         </a:rPr>
-                        <a:t>+89.2%</a:t>
+                        <a:t>+91.4%</a:t>
                       </a:r>
                       <a:endParaRPr lang="en-US" sz="850" dirty="0"/>
                     </a:p>
@@ -21417,7 +28030,7 @@
                             <a:srgbClr val="000000"/>
                           </a:solidFill>
                         </a:rPr>
-                        <a:t>Delta II</a:t>
+                        <a:t>Upper Egypt II</a:t>
                       </a:r>
                       <a:endParaRPr lang="en-US" sz="850" dirty="0"/>
                     </a:p>
@@ -21475,7 +28088,7 @@
                             <a:srgbClr val="000000"/>
                           </a:solidFill>
                         </a:rPr>
-                        <a:t>Mohamed Yousef</a:t>
+                        <a:t>Beshoy Youhanna</a:t>
                       </a:r>
                       <a:endParaRPr lang="en-US" sz="850" dirty="0"/>
                     </a:p>
@@ -21533,7 +28146,7 @@
                             <a:srgbClr val="28A745"/>
                           </a:solidFill>
                         </a:rPr>
-                        <a:t>+60.3%</a:t>
+                        <a:t>+61.8%</a:t>
                       </a:r>
                       <a:endParaRPr lang="en-US" sz="850" dirty="0"/>
                     </a:p>
@@ -21709,7 +28322,7 @@
                             <a:srgbClr val="000000"/>
                           </a:solidFill>
                         </a:rPr>
-                        <a:t>Upper Egypt II</a:t>
+                        <a:t>Cairo</a:t>
                       </a:r>
                       <a:endParaRPr lang="en-US" sz="850" dirty="0"/>
                     </a:p>
@@ -21767,7 +28380,7 @@
                             <a:srgbClr val="000000"/>
                           </a:solidFill>
                         </a:rPr>
-                        <a:t>Beshoy Youhanna</a:t>
+                        <a:t>NOHER ADEL</a:t>
                       </a:r>
                       <a:endParaRPr lang="en-US" sz="850" dirty="0"/>
                     </a:p>
@@ -21825,7 +28438,7 @@
                             <a:srgbClr val="28A745"/>
                           </a:solidFill>
                         </a:rPr>
-                        <a:t>+52.0%</a:t>
+                        <a:t>+56.7%</a:t>
                       </a:r>
                       <a:endParaRPr lang="en-US" sz="850" dirty="0"/>
                     </a:p>
@@ -22001,7 +28614,7 @@
                             <a:srgbClr val="000000"/>
                           </a:solidFill>
                         </a:rPr>
-                        <a:t>KFR EL.SHK</a:t>
+                        <a:t>Delta II</a:t>
                       </a:r>
                       <a:endParaRPr lang="en-US" sz="850" dirty="0"/>
                     </a:p>
@@ -22059,7 +28672,7 @@
                             <a:srgbClr val="000000"/>
                           </a:solidFill>
                         </a:rPr>
-                        <a:t>Karim Shehab</a:t>
+                        <a:t>Mohamed Yousef</a:t>
                       </a:r>
                       <a:endParaRPr lang="en-US" sz="850" dirty="0"/>
                     </a:p>
@@ -22117,7 +28730,7 @@
                             <a:srgbClr val="DC3545"/>
                           </a:solidFill>
                         </a:rPr>
-                        <a:t>+39.1%</a:t>
+                        <a:t>+46.0%</a:t>
                       </a:r>
                       <a:endParaRPr lang="en-US" sz="850" dirty="0"/>
                     </a:p>
@@ -22293,7 +28906,7 @@
                             <a:srgbClr val="000000"/>
                           </a:solidFill>
                         </a:rPr>
-                        <a:t>DELTA I</a:t>
+                        <a:t>KFR EL.SHK</a:t>
                       </a:r>
                       <a:endParaRPr lang="en-US" sz="850" dirty="0"/>
                     </a:p>
@@ -22351,7 +28964,7 @@
                             <a:srgbClr val="000000"/>
                           </a:solidFill>
                         </a:rPr>
-                        <a:t>Shimaa Tarek</a:t>
+                        <a:t>Karim Shehab</a:t>
                       </a:r>
                       <a:endParaRPr lang="en-US" sz="850" dirty="0"/>
                     </a:p>
@@ -22409,7 +29022,7 @@
                             <a:srgbClr val="DC3545"/>
                           </a:solidFill>
                         </a:rPr>
-                        <a:t>+36.2%</a:t>
+                        <a:t>+43.6%</a:t>
                       </a:r>
                       <a:endParaRPr lang="en-US" sz="850" dirty="0"/>
                     </a:p>
@@ -22701,7 +29314,7 @@
                             <a:srgbClr val="DC3545"/>
                           </a:solidFill>
                         </a:rPr>
-                        <a:t>+31.1%</a:t>
+                        <a:t>+39.4%</a:t>
                       </a:r>
                       <a:endParaRPr lang="en-US" sz="850" dirty="0"/>
                     </a:p>
@@ -22877,7 +29490,7 @@
                             <a:srgbClr val="000000"/>
                           </a:solidFill>
                         </a:rPr>
-                        <a:t>Cairo</a:t>
+                        <a:t>Upper Egypt I</a:t>
                       </a:r>
                       <a:endParaRPr lang="en-US" sz="850" dirty="0"/>
                     </a:p>
@@ -22935,7 +29548,7 @@
                             <a:srgbClr val="000000"/>
                           </a:solidFill>
                         </a:rPr>
-                        <a:t>NOHER ADEL</a:t>
+                        <a:t>UE North</a:t>
                       </a:r>
                       <a:endParaRPr lang="en-US" sz="850" dirty="0"/>
                     </a:p>
@@ -22993,7 +29606,7 @@
                             <a:srgbClr val="DC3545"/>
                           </a:solidFill>
                         </a:rPr>
-                        <a:t>+30.8%</a:t>
+                        <a:t>+38.6%</a:t>
                       </a:r>
                       <a:endParaRPr lang="en-US" sz="850" dirty="0"/>
                     </a:p>
@@ -23169,7 +29782,7 @@
                             <a:srgbClr val="000000"/>
                           </a:solidFill>
                         </a:rPr>
-                        <a:t>Behera &amp; Dakahlia</a:t>
+                        <a:t>DELTA I</a:t>
                       </a:r>
                       <a:endParaRPr lang="en-US" sz="850" dirty="0"/>
                     </a:p>
@@ -23227,7 +29840,7 @@
                             <a:srgbClr val="000000"/>
                           </a:solidFill>
                         </a:rPr>
-                        <a:t>Ahmed Mohamed</a:t>
+                        <a:t>Shimaa Tarek</a:t>
                       </a:r>
                       <a:endParaRPr lang="en-US" sz="850" dirty="0"/>
                     </a:p>
@@ -23285,7 +29898,7 @@
                             <a:srgbClr val="DC3545"/>
                           </a:solidFill>
                         </a:rPr>
-                        <a:t>+18.1%</a:t>
+                        <a:t>+35.6%</a:t>
                       </a:r>
                       <a:endParaRPr lang="en-US" sz="850" dirty="0"/>
                     </a:p>
@@ -23461,7 +30074,7 @@
                             <a:srgbClr val="000000"/>
                           </a:solidFill>
                         </a:rPr>
-                        <a:t>Upper Egypt I</a:t>
+                        <a:t>Behera &amp; Dakahlia</a:t>
                       </a:r>
                       <a:endParaRPr lang="en-US" sz="850" dirty="0"/>
                     </a:p>
@@ -23519,7 +30132,7 @@
                             <a:srgbClr val="000000"/>
                           </a:solidFill>
                         </a:rPr>
-                        <a:t>UE North</a:t>
+                        <a:t>Ahmed Mohamed</a:t>
                       </a:r>
                       <a:endParaRPr lang="en-US" sz="850" dirty="0"/>
                     </a:p>
@@ -23577,7 +30190,7 @@
                             <a:srgbClr val="DC3545"/>
                           </a:solidFill>
                         </a:rPr>
-                        <a:t>+15.8%</a:t>
+                        <a:t>+27.9%</a:t>
                       </a:r>
                       <a:endParaRPr lang="en-US" sz="850" dirty="0"/>
                     </a:p>
@@ -23793,7 +30406,7 @@
               <a:buNone/>
             </a:pPr>
             <a:r>
-              <a:rPr lang="en-US" sz="1700" b="1" dirty="0">
+              <a:rPr lang="en-US" sz="1650" b="1" dirty="0">
                 <a:solidFill>
                   <a:srgbClr val="FFFFFF"/>
                 </a:solidFill>
@@ -23803,7 +30416,7 @@
               </a:rPr>
               <a:t>PEDIAMIL 2 PPG% GROWTH RANKING (COMPANY AT TOP)</a:t>
             </a:r>
-            <a:endParaRPr lang="en-US" sz="1700" dirty="0"/>
+            <a:endParaRPr lang="en-US" sz="1650" dirty="0"/>
           </a:p>
         </p:txBody>
       </p:sp>
@@ -23832,7 +30445,7 @@
               <a:buNone/>
             </a:pPr>
             <a:r>
-              <a:rPr lang="en-US" sz="1050" i="1" dirty="0">
+              <a:rPr lang="en-US" sz="1000" i="1" dirty="0">
                 <a:solidFill>
                   <a:srgbClr val="D9E2EC"/>
                 </a:solidFill>
@@ -23840,9 +30453,9 @@
                 <a:ea typeface="Calibri" pitchFamily="34" charset="-122"/>
                 <a:cs typeface="Calibri" pitchFamily="34" charset="-120"/>
               </a:rPr>
-              <a:t>Pediamil 2 National Benchmark: +65.26% | Green = Above Company | Red = Below Company</a:t>
+              <a:t>Pediamil 2 National Benchmark: +68.5% | Green = Above Company | Red = Below Company</a:t>
             </a:r>
-            <a:endParaRPr lang="en-US" sz="1050" dirty="0"/>
+            <a:endParaRPr lang="en-US" sz="1000" dirty="0"/>
           </a:p>
         </p:txBody>
       </p:sp>
@@ -23918,7 +30531,7 @@
                 <a:ea typeface="Calibri" pitchFamily="34" charset="-122"/>
                 <a:cs typeface="Calibri" pitchFamily="34" charset="-120"/>
               </a:rPr>
-              <a:t>YTD M06-2026 vs 2025</a:t>
+              <a:t>YTD M09-2026 vs 2025</a:t>
             </a:r>
             <a:endParaRPr lang="en-US" sz="900" dirty="0"/>
           </a:p>
@@ -24474,7 +31087,7 @@
                             <a:srgbClr val="1B365D"/>
                           </a:solidFill>
                         </a:rPr>
-                        <a:t>+65.3%</a:t>
+                        <a:t>+68.5%</a:t>
                       </a:r>
                       <a:endParaRPr lang="en-US" sz="1200" dirty="0"/>
                     </a:p>
@@ -24772,7 +31385,7 @@
                             <a:srgbClr val="28A745"/>
                           </a:solidFill>
                         </a:rPr>
-                        <a:t>+143.7%</a:t>
+                        <a:t>+127.2%</a:t>
                       </a:r>
                       <a:endParaRPr lang="en-US" sz="850" dirty="0"/>
                     </a:p>
@@ -24948,7 +31561,7 @@
                             <a:srgbClr val="000000"/>
                           </a:solidFill>
                         </a:rPr>
-                        <a:t>Delta II</a:t>
+                        <a:t>Alx</a:t>
                       </a:r>
                       <a:endParaRPr lang="en-US" sz="850" dirty="0"/>
                     </a:p>
@@ -25006,7 +31619,7 @@
                             <a:srgbClr val="000000"/>
                           </a:solidFill>
                         </a:rPr>
-                        <a:t>Mohamed Yousef</a:t>
+                        <a:t>Ahmed Hassan</a:t>
                       </a:r>
                       <a:endParaRPr lang="en-US" sz="850" dirty="0"/>
                     </a:p>
@@ -25064,7 +31677,7 @@
                             <a:srgbClr val="28A745"/>
                           </a:solidFill>
                         </a:rPr>
-                        <a:t>+87.9%</a:t>
+                        <a:t>+86.3%</a:t>
                       </a:r>
                       <a:endParaRPr lang="en-US" sz="850" dirty="0"/>
                     </a:p>
@@ -25240,7 +31853,7 @@
                             <a:srgbClr val="000000"/>
                           </a:solidFill>
                         </a:rPr>
-                        <a:t>Alx</a:t>
+                        <a:t>Cairo</a:t>
                       </a:r>
                       <a:endParaRPr lang="en-US" sz="850" dirty="0"/>
                     </a:p>
@@ -25298,7 +31911,7 @@
                             <a:srgbClr val="000000"/>
                           </a:solidFill>
                         </a:rPr>
-                        <a:t>Ahmed Hassan</a:t>
+                        <a:t>NOHER ADEL</a:t>
                       </a:r>
                       <a:endParaRPr lang="en-US" sz="850" dirty="0"/>
                     </a:p>
@@ -25356,7 +31969,7 @@
                             <a:srgbClr val="28A745"/>
                           </a:solidFill>
                         </a:rPr>
-                        <a:t>+81.4%</a:t>
+                        <a:t>+71.9%</a:t>
                       </a:r>
                       <a:endParaRPr lang="en-US" sz="850" dirty="0"/>
                     </a:p>
@@ -25532,7 +32145,7 @@
                             <a:srgbClr val="000000"/>
                           </a:solidFill>
                         </a:rPr>
-                        <a:t>DELTA I</a:t>
+                        <a:t>Upper Egypt I</a:t>
                       </a:r>
                       <a:endParaRPr lang="en-US" sz="850" dirty="0"/>
                     </a:p>
@@ -25590,7 +32203,7 @@
                             <a:srgbClr val="000000"/>
                           </a:solidFill>
                         </a:rPr>
-                        <a:t>Shimaa Tarek</a:t>
+                        <a:t>UE North</a:t>
                       </a:r>
                       <a:endParaRPr lang="en-US" sz="850" dirty="0"/>
                     </a:p>
@@ -25645,10 +32258,10 @@
                       <a:r>
                         <a:rPr lang="en-US" sz="850" b="1" dirty="0">
                           <a:solidFill>
-                            <a:srgbClr val="DC3545"/>
-                          </a:solidFill>
-                        </a:rPr>
-                        <a:t>+59.1%</a:t>
+                            <a:srgbClr val="28A745"/>
+                          </a:solidFill>
+                        </a:rPr>
+                        <a:t>+73.3%</a:t>
                       </a:r>
                       <a:endParaRPr lang="en-US" sz="850" dirty="0"/>
                     </a:p>
@@ -25703,10 +32316,10 @@
                       <a:r>
                         <a:rPr lang="en-US" sz="800" b="1" dirty="0">
                           <a:solidFill>
-                            <a:srgbClr val="DC3545"/>
-                          </a:solidFill>
-                        </a:rPr>
-                        <a:t>🔻 BELOW COMPANY</a:t>
+                            <a:srgbClr val="28A745"/>
+                          </a:solidFill>
+                        </a:rPr>
+                        <a:t>🟢 ABOVE COMPANY</a:t>
                       </a:r>
                       <a:endParaRPr lang="en-US" sz="800" dirty="0"/>
                     </a:p>
@@ -25824,7 +32437,7 @@
                             <a:srgbClr val="000000"/>
                           </a:solidFill>
                         </a:rPr>
-                        <a:t>Cairo</a:t>
+                        <a:t>Delta II</a:t>
                       </a:r>
                       <a:endParaRPr lang="en-US" sz="850" dirty="0"/>
                     </a:p>
@@ -25882,7 +32495,7 @@
                             <a:srgbClr val="000000"/>
                           </a:solidFill>
                         </a:rPr>
-                        <a:t>NOHER ADEL</a:t>
+                        <a:t>Mohamed Yousef</a:t>
                       </a:r>
                       <a:endParaRPr lang="en-US" sz="850" dirty="0"/>
                     </a:p>
@@ -25940,7 +32553,7 @@
                             <a:srgbClr val="DC3545"/>
                           </a:solidFill>
                         </a:rPr>
-                        <a:t>+52.7%</a:t>
+                        <a:t>+65.7%</a:t>
                       </a:r>
                       <a:endParaRPr lang="en-US" sz="850" dirty="0"/>
                     </a:p>
@@ -26116,7 +32729,7 @@
                             <a:srgbClr val="000000"/>
                           </a:solidFill>
                         </a:rPr>
-                        <a:t>Upper Egypt I</a:t>
+                        <a:t>DELTA I</a:t>
                       </a:r>
                       <a:endParaRPr lang="en-US" sz="850" dirty="0"/>
                     </a:p>
@@ -26174,7 +32787,7 @@
                             <a:srgbClr val="000000"/>
                           </a:solidFill>
                         </a:rPr>
-                        <a:t>UE North</a:t>
+                        <a:t>Shimaa Tarek</a:t>
                       </a:r>
                       <a:endParaRPr lang="en-US" sz="850" dirty="0"/>
                     </a:p>
@@ -26232,7 +32845,7 @@
                             <a:srgbClr val="DC3545"/>
                           </a:solidFill>
                         </a:rPr>
-                        <a:t>+46.3%</a:t>
+                        <a:t>+53.6%</a:t>
                       </a:r>
                       <a:endParaRPr lang="en-US" sz="850" dirty="0"/>
                     </a:p>
@@ -26524,7 +33137,7 @@
                             <a:srgbClr val="DC3545"/>
                           </a:solidFill>
                         </a:rPr>
-                        <a:t>+34.8%</a:t>
+                        <a:t>+55.7%</a:t>
                       </a:r>
                       <a:endParaRPr lang="en-US" sz="850" dirty="0"/>
                     </a:p>
@@ -26816,7 +33429,7 @@
                             <a:srgbClr val="DC3545"/>
                           </a:solidFill>
                         </a:rPr>
-                        <a:t>+29.4%</a:t>
+                        <a:t>+55.0%</a:t>
                       </a:r>
                       <a:endParaRPr lang="en-US" sz="850" dirty="0"/>
                     </a:p>
@@ -27108,7 +33721,7 @@
                             <a:srgbClr val="DC3545"/>
                           </a:solidFill>
                         </a:rPr>
-                        <a:t>+27.4%</a:t>
+                        <a:t>+28.7%</a:t>
                       </a:r>
                       <a:endParaRPr lang="en-US" sz="850" dirty="0"/>
                     </a:p>
@@ -27324,7 +33937,7 @@
               <a:buNone/>
             </a:pPr>
             <a:r>
-              <a:rPr lang="en-US" sz="1700" b="1" dirty="0">
+              <a:rPr lang="en-US" sz="1650" b="1" dirty="0">
                 <a:solidFill>
                   <a:srgbClr val="FFFFFF"/>
                 </a:solidFill>
@@ -27334,7 +33947,7 @@
               </a:rPr>
               <a:t>PEDIA-START 1 PPG% GROWTH RANKING (COMPANY AT TOP)</a:t>
             </a:r>
-            <a:endParaRPr lang="en-US" sz="1700" dirty="0"/>
+            <a:endParaRPr lang="en-US" sz="1650" dirty="0"/>
           </a:p>
         </p:txBody>
       </p:sp>
@@ -27363,7 +33976,7 @@
               <a:buNone/>
             </a:pPr>
             <a:r>
-              <a:rPr lang="en-US" sz="1050" i="1" dirty="0">
+              <a:rPr lang="en-US" sz="1000" i="1" dirty="0">
                 <a:solidFill>
                   <a:srgbClr val="D9E2EC"/>
                 </a:solidFill>
@@ -27371,9 +33984,9 @@
                 <a:ea typeface="Calibri" pitchFamily="34" charset="-122"/>
                 <a:cs typeface="Calibri" pitchFamily="34" charset="-120"/>
               </a:rPr>
-              <a:t>Pedia-Start 1 National Benchmark: -2.06% | Green = Above Company | Red = Below Company</a:t>
+              <a:t>Pedia-Start 1 National Benchmark: +9.6% | Green = Above Company | Red = Below Company</a:t>
             </a:r>
-            <a:endParaRPr lang="en-US" sz="1050" dirty="0"/>
+            <a:endParaRPr lang="en-US" sz="1000" dirty="0"/>
           </a:p>
         </p:txBody>
       </p:sp>
@@ -27449,7 +34062,7 @@
                 <a:ea typeface="Calibri" pitchFamily="34" charset="-122"/>
                 <a:cs typeface="Calibri" pitchFamily="34" charset="-120"/>
               </a:rPr>
-              <a:t>YTD M06-2026 vs 2025</a:t>
+              <a:t>YTD M09-2026 vs 2025</a:t>
             </a:r>
             <a:endParaRPr lang="en-US" sz="900" dirty="0"/>
           </a:p>
@@ -28005,7 +34618,7 @@
                             <a:srgbClr val="1B365D"/>
                           </a:solidFill>
                         </a:rPr>
-                        <a:t>-2.1%</a:t>
+                        <a:t>+9.6%</a:t>
                       </a:r>
                       <a:endParaRPr lang="en-US" sz="1200" dirty="0"/>
                     </a:p>
@@ -28303,7 +34916,7 @@
                             <a:srgbClr val="28A745"/>
                           </a:solidFill>
                         </a:rPr>
-                        <a:t>+17.6%</a:t>
+                        <a:t>+43.9%</a:t>
                       </a:r>
                       <a:endParaRPr lang="en-US" sz="850" dirty="0"/>
                     </a:p>
@@ -28595,7 +35208,7 @@
                             <a:srgbClr val="28A745"/>
                           </a:solidFill>
                         </a:rPr>
-                        <a:t>+17.4%</a:t>
+                        <a:t>+31.7%</a:t>
                       </a:r>
                       <a:endParaRPr lang="en-US" sz="850" dirty="0"/>
                     </a:p>
@@ -28771,7 +35384,7 @@
                             <a:srgbClr val="000000"/>
                           </a:solidFill>
                         </a:rPr>
-                        <a:t>Delta II</a:t>
+                        <a:t>Cairo</a:t>
                       </a:r>
                       <a:endParaRPr lang="en-US" sz="850" dirty="0"/>
                     </a:p>
@@ -28829,7 +35442,7 @@
                             <a:srgbClr val="000000"/>
                           </a:solidFill>
                         </a:rPr>
-                        <a:t>Mohamed Yousef</a:t>
+                        <a:t>NOHER ADEL</a:t>
                       </a:r>
                       <a:endParaRPr lang="en-US" sz="850" dirty="0"/>
                     </a:p>
@@ -28887,7 +35500,7 @@
                             <a:srgbClr val="28A745"/>
                           </a:solidFill>
                         </a:rPr>
-                        <a:t>+6.2%</a:t>
+                        <a:t>+32.5%</a:t>
                       </a:r>
                       <a:endParaRPr lang="en-US" sz="850" dirty="0"/>
                     </a:p>
@@ -29063,7 +35676,7 @@
                             <a:srgbClr val="000000"/>
                           </a:solidFill>
                         </a:rPr>
-                        <a:t>DELTA I</a:t>
+                        <a:t>Upper Egypt II</a:t>
                       </a:r>
                       <a:endParaRPr lang="en-US" sz="850" dirty="0"/>
                     </a:p>
@@ -29121,7 +35734,7 @@
                             <a:srgbClr val="000000"/>
                           </a:solidFill>
                         </a:rPr>
-                        <a:t>Shimaa Tarek</a:t>
+                        <a:t>Beshoy Youhanna</a:t>
                       </a:r>
                       <a:endParaRPr lang="en-US" sz="850" dirty="0"/>
                     </a:p>
@@ -29176,10 +35789,10 @@
                       <a:r>
                         <a:rPr lang="en-US" sz="850" b="1" dirty="0">
                           <a:solidFill>
-                            <a:srgbClr val="28A745"/>
-                          </a:solidFill>
-                        </a:rPr>
-                        <a:t>-0.6%</a:t>
+                            <a:srgbClr val="DC3545"/>
+                          </a:solidFill>
+                        </a:rPr>
+                        <a:t>+7.9%</a:t>
                       </a:r>
                       <a:endParaRPr lang="en-US" sz="850" dirty="0"/>
                     </a:p>
@@ -29234,10 +35847,10 @@
                       <a:r>
                         <a:rPr lang="en-US" sz="800" b="1" dirty="0">
                           <a:solidFill>
-                            <a:srgbClr val="28A745"/>
-                          </a:solidFill>
-                        </a:rPr>
-                        <a:t>🟢 ABOVE COMPANY</a:t>
+                            <a:srgbClr val="DC3545"/>
+                          </a:solidFill>
+                        </a:rPr>
+                        <a:t>🔻 BELOW COMPANY</a:t>
                       </a:r>
                       <a:endParaRPr lang="en-US" sz="800" dirty="0"/>
                     </a:p>
@@ -29355,7 +35968,7 @@
                             <a:srgbClr val="000000"/>
                           </a:solidFill>
                         </a:rPr>
-                        <a:t>Upper Egypt II</a:t>
+                        <a:t>KFR EL.SHK</a:t>
                       </a:r>
                       <a:endParaRPr lang="en-US" sz="850" dirty="0"/>
                     </a:p>
@@ -29413,7 +36026,7 @@
                             <a:srgbClr val="000000"/>
                           </a:solidFill>
                         </a:rPr>
-                        <a:t>Beshoy Youhanna</a:t>
+                        <a:t>Karim Shehab</a:t>
                       </a:r>
                       <a:endParaRPr lang="en-US" sz="850" dirty="0"/>
                     </a:p>
@@ -29471,7 +36084,7 @@
                             <a:srgbClr val="DC3545"/>
                           </a:solidFill>
                         </a:rPr>
-                        <a:t>-5.5%</a:t>
+                        <a:t>+3.2%</a:t>
                       </a:r>
                       <a:endParaRPr lang="en-US" sz="850" dirty="0"/>
                     </a:p>
@@ -29647,7 +36260,7 @@
                             <a:srgbClr val="000000"/>
                           </a:solidFill>
                         </a:rPr>
-                        <a:t>Cairo</a:t>
+                        <a:t>DELTA I</a:t>
                       </a:r>
                       <a:endParaRPr lang="en-US" sz="850" dirty="0"/>
                     </a:p>
@@ -29705,7 +36318,7 @@
                             <a:srgbClr val="000000"/>
                           </a:solidFill>
                         </a:rPr>
-                        <a:t>NOHER ADEL</a:t>
+                        <a:t>Shimaa Tarek</a:t>
                       </a:r>
                       <a:endParaRPr lang="en-US" sz="850" dirty="0"/>
                     </a:p>
@@ -29763,7 +36376,7 @@
                             <a:srgbClr val="DC3545"/>
                           </a:solidFill>
                         </a:rPr>
-                        <a:t>-9.3%</a:t>
+                        <a:t>-2.9%</a:t>
                       </a:r>
                       <a:endParaRPr lang="en-US" sz="850" dirty="0"/>
                     </a:p>
@@ -29939,7 +36552,7 @@
                             <a:srgbClr val="000000"/>
                           </a:solidFill>
                         </a:rPr>
-                        <a:t>KFR EL.SHK</a:t>
+                        <a:t>Delta II</a:t>
                       </a:r>
                       <a:endParaRPr lang="en-US" sz="850" dirty="0"/>
                     </a:p>
@@ -29997,7 +36610,7 @@
                             <a:srgbClr val="000000"/>
                           </a:solidFill>
                         </a:rPr>
-                        <a:t>Karim Shehab</a:t>
+                        <a:t>Mohamed Yousef</a:t>
                       </a:r>
                       <a:endParaRPr lang="en-US" sz="850" dirty="0"/>
                     </a:p>
@@ -30055,7 +36668,7 @@
                             <a:srgbClr val="DC3545"/>
                           </a:solidFill>
                         </a:rPr>
-                        <a:t>-10.8%</a:t>
+                        <a:t>-4.1%</a:t>
                       </a:r>
                       <a:endParaRPr lang="en-US" sz="850" dirty="0"/>
                     </a:p>
@@ -30347,7 +36960,7 @@
                             <a:srgbClr val="DC3545"/>
                           </a:solidFill>
                         </a:rPr>
-                        <a:t>-13.5%</a:t>
+                        <a:t>-7.9%</a:t>
                       </a:r>
                       <a:endParaRPr lang="en-US" sz="850" dirty="0"/>
                     </a:p>
@@ -30639,7 +37252,7 @@
                             <a:srgbClr val="DC3545"/>
                           </a:solidFill>
                         </a:rPr>
-                        <a:t>-19.0%</a:t>
+                        <a:t>+3.0%</a:t>
                       </a:r>
                       <a:endParaRPr lang="en-US" sz="850" dirty="0"/>
                     </a:p>
@@ -30855,7 +37468,7 @@
               <a:buNone/>
             </a:pPr>
             <a:r>
-              <a:rPr lang="en-US" sz="1700" b="1" dirty="0">
+              <a:rPr lang="en-US" sz="1650" b="1" dirty="0">
                 <a:solidFill>
                   <a:srgbClr val="FFFFFF"/>
                 </a:solidFill>
@@ -30865,7 +37478,7 @@
               </a:rPr>
               <a:t>PEDIA-START 2 PPG% GROWTH RANKING (COMPANY AT TOP)</a:t>
             </a:r>
-            <a:endParaRPr lang="en-US" sz="1700" dirty="0"/>
+            <a:endParaRPr lang="en-US" sz="1650" dirty="0"/>
           </a:p>
         </p:txBody>
       </p:sp>
@@ -30894,7 +37507,7 @@
               <a:buNone/>
             </a:pPr>
             <a:r>
-              <a:rPr lang="en-US" sz="1050" i="1" dirty="0">
+              <a:rPr lang="en-US" sz="1000" i="1" dirty="0">
                 <a:solidFill>
                   <a:srgbClr val="D9E2EC"/>
                 </a:solidFill>
@@ -30902,9 +37515,9 @@
                 <a:ea typeface="Calibri" pitchFamily="34" charset="-122"/>
                 <a:cs typeface="Calibri" pitchFamily="34" charset="-120"/>
               </a:rPr>
-              <a:t>Pedia-Start 2 National Benchmark: +39.86% | Green = Above Company | Red = Below Company</a:t>
+              <a:t>Pedia-Start 2 National Benchmark: +37.6% | Green = Above Company | Red = Below Company</a:t>
             </a:r>
-            <a:endParaRPr lang="en-US" sz="1050" dirty="0"/>
+            <a:endParaRPr lang="en-US" sz="1000" dirty="0"/>
           </a:p>
         </p:txBody>
       </p:sp>
@@ -30980,7 +37593,7 @@
                 <a:ea typeface="Calibri" pitchFamily="34" charset="-122"/>
                 <a:cs typeface="Calibri" pitchFamily="34" charset="-120"/>
               </a:rPr>
-              <a:t>YTD M06-2026 vs 2025</a:t>
+              <a:t>YTD M09-2026 vs 2025</a:t>
             </a:r>
             <a:endParaRPr lang="en-US" sz="900" dirty="0"/>
           </a:p>
@@ -31536,7 +38149,7 @@
                             <a:srgbClr val="1B365D"/>
                           </a:solidFill>
                         </a:rPr>
-                        <a:t>+39.9%</a:t>
+                        <a:t>+37.6%</a:t>
                       </a:r>
                       <a:endParaRPr lang="en-US" sz="1200" dirty="0"/>
                     </a:p>
@@ -31834,7 +38447,7 @@
                             <a:srgbClr val="28A745"/>
                           </a:solidFill>
                         </a:rPr>
-                        <a:t>+102.3%</a:t>
+                        <a:t>+67.4%</a:t>
                       </a:r>
                       <a:endParaRPr lang="en-US" sz="850" dirty="0"/>
                     </a:p>
@@ -32010,7 +38623,7 @@
                             <a:srgbClr val="000000"/>
                           </a:solidFill>
                         </a:rPr>
-                        <a:t>Guiza</a:t>
+                        <a:t>Upper Egypt I</a:t>
                       </a:r>
                       <a:endParaRPr lang="en-US" sz="850" dirty="0"/>
                     </a:p>
@@ -32068,7 +38681,7 @@
                             <a:srgbClr val="000000"/>
                           </a:solidFill>
                         </a:rPr>
-                        <a:t>Youstina Farag</a:t>
+                        <a:t>UE North</a:t>
                       </a:r>
                       <a:endParaRPr lang="en-US" sz="850" dirty="0"/>
                     </a:p>
@@ -32126,7 +38739,7 @@
                             <a:srgbClr val="28A745"/>
                           </a:solidFill>
                         </a:rPr>
-                        <a:t>+78.2%</a:t>
+                        <a:t>+67.0%</a:t>
                       </a:r>
                       <a:endParaRPr lang="en-US" sz="850" dirty="0"/>
                     </a:p>
@@ -32302,7 +38915,7 @@
                             <a:srgbClr val="000000"/>
                           </a:solidFill>
                         </a:rPr>
-                        <a:t>Upper Egypt I</a:t>
+                        <a:t>Guiza</a:t>
                       </a:r>
                       <a:endParaRPr lang="en-US" sz="850" dirty="0"/>
                     </a:p>
@@ -32360,7 +38973,7 @@
                             <a:srgbClr val="000000"/>
                           </a:solidFill>
                         </a:rPr>
-                        <a:t>UE North</a:t>
+                        <a:t>Youstina Farag</a:t>
                       </a:r>
                       <a:endParaRPr lang="en-US" sz="850" dirty="0"/>
                     </a:p>
@@ -32418,7 +39031,7 @@
                             <a:srgbClr val="28A745"/>
                           </a:solidFill>
                         </a:rPr>
-                        <a:t>+59.0%</a:t>
+                        <a:t>+55.7%</a:t>
                       </a:r>
                       <a:endParaRPr lang="en-US" sz="850" dirty="0"/>
                     </a:p>
@@ -32594,7 +39207,7 @@
                             <a:srgbClr val="000000"/>
                           </a:solidFill>
                         </a:rPr>
-                        <a:t>Behera &amp; Dakahlia</a:t>
+                        <a:t>Upper Egypt II</a:t>
                       </a:r>
                       <a:endParaRPr lang="en-US" sz="850" dirty="0"/>
                     </a:p>
@@ -32652,7 +39265,7 @@
                             <a:srgbClr val="000000"/>
                           </a:solidFill>
                         </a:rPr>
-                        <a:t>Ahmed Mohamed</a:t>
+                        <a:t>Beshoy Youhanna</a:t>
                       </a:r>
                       <a:endParaRPr lang="en-US" sz="850" dirty="0"/>
                     </a:p>
@@ -32707,10 +39320,10 @@
                       <a:r>
                         <a:rPr lang="en-US" sz="850" b="1" dirty="0">
                           <a:solidFill>
-                            <a:srgbClr val="28A745"/>
-                          </a:solidFill>
-                        </a:rPr>
-                        <a:t>+41.5%</a:t>
+                            <a:srgbClr val="DC3545"/>
+                          </a:solidFill>
+                        </a:rPr>
+                        <a:t>+34.1%</a:t>
                       </a:r>
                       <a:endParaRPr lang="en-US" sz="850" dirty="0"/>
                     </a:p>
@@ -32765,10 +39378,10 @@
                       <a:r>
                         <a:rPr lang="en-US" sz="800" b="1" dirty="0">
                           <a:solidFill>
-                            <a:srgbClr val="28A745"/>
-                          </a:solidFill>
-                        </a:rPr>
-                        <a:t>🟢 ABOVE COMPANY</a:t>
+                            <a:srgbClr val="DC3545"/>
+                          </a:solidFill>
+                        </a:rPr>
+                        <a:t>🔻 BELOW COMPANY</a:t>
                       </a:r>
                       <a:endParaRPr lang="en-US" sz="800" dirty="0"/>
                     </a:p>
@@ -32886,7 +39499,7 @@
                             <a:srgbClr val="000000"/>
                           </a:solidFill>
                         </a:rPr>
-                        <a:t>DELTA I</a:t>
+                        <a:t>Behera &amp; Dakahlia</a:t>
                       </a:r>
                       <a:endParaRPr lang="en-US" sz="850" dirty="0"/>
                     </a:p>
@@ -32944,7 +39557,7 @@
                             <a:srgbClr val="000000"/>
                           </a:solidFill>
                         </a:rPr>
-                        <a:t>Shimaa Tarek</a:t>
+                        <a:t>Ahmed Mohamed</a:t>
                       </a:r>
                       <a:endParaRPr lang="en-US" sz="850" dirty="0"/>
                     </a:p>
@@ -33002,7 +39615,7 @@
                             <a:srgbClr val="DC3545"/>
                           </a:solidFill>
                         </a:rPr>
-                        <a:t>+37.1%</a:t>
+                        <a:t>+29.4%</a:t>
                       </a:r>
                       <a:endParaRPr lang="en-US" sz="850" dirty="0"/>
                     </a:p>
@@ -33178,7 +39791,7 @@
                             <a:srgbClr val="000000"/>
                           </a:solidFill>
                         </a:rPr>
-                        <a:t>Upper Egypt II</a:t>
+                        <a:t>DELTA I</a:t>
                       </a:r>
                       <a:endParaRPr lang="en-US" sz="850" dirty="0"/>
                     </a:p>
@@ -33236,7 +39849,7 @@
                             <a:srgbClr val="000000"/>
                           </a:solidFill>
                         </a:rPr>
-                        <a:t>Beshoy Youhanna</a:t>
+                        <a:t>Shimaa Tarek</a:t>
                       </a:r>
                       <a:endParaRPr lang="en-US" sz="850" dirty="0"/>
                     </a:p>
@@ -33294,7 +39907,7 @@
                             <a:srgbClr val="DC3545"/>
                           </a:solidFill>
                         </a:rPr>
-                        <a:t>+19.9%</a:t>
+                        <a:t>+28.2%</a:t>
                       </a:r>
                       <a:endParaRPr lang="en-US" sz="850" dirty="0"/>
                     </a:p>
@@ -33586,7 +40199,7 @@
                             <a:srgbClr val="DC3545"/>
                           </a:solidFill>
                         </a:rPr>
-                        <a:t>+15.5%</a:t>
+                        <a:t>+10.6%</a:t>
                       </a:r>
                       <a:endParaRPr lang="en-US" sz="850" dirty="0"/>
                     </a:p>
@@ -33878,7 +40491,7 @@
                             <a:srgbClr val="DC3545"/>
                           </a:solidFill>
                         </a:rPr>
-                        <a:t>-6.3%</a:t>
+                        <a:t>+14.9%</a:t>
                       </a:r>
                       <a:endParaRPr lang="en-US" sz="850" dirty="0"/>
                     </a:p>
@@ -34170,7 +40783,7 @@
                             <a:srgbClr val="DC3545"/>
                           </a:solidFill>
                         </a:rPr>
-                        <a:t>-20.2%</a:t>
+                        <a:t>+5.1%</a:t>
                       </a:r>
                       <a:endParaRPr lang="en-US" sz="850" dirty="0"/>
                     </a:p>

--- a/public/Egy_Nutri_Business_Review_Deck.pptx
+++ b/public/Egy_Nutri_Business_Review_Deck.pptx
@@ -1555,7 +1555,7 @@
             <c:size val="6"/>
             <c:spPr>
               <a:solidFill>
-                <a:srgbClr val="10B981"/>
+                <a:srgbClr val="F59E0B"/>
               </a:solidFill>
               <a:ln w="9525" cap="flat">
                 <a:solidFill>
@@ -10106,7 +10106,7 @@
                 <a:ea typeface="Calibri" pitchFamily="34" charset="-122"/>
                 <a:cs typeface="Calibri" pitchFamily="34" charset="-120"/>
               </a:rPr>
-              <a:t>MEDICAL REP / ADM QUARTERLY VELOCITY: Q3 2026 vs H1 2026 BASELINE</a:t>
+              <a:t>3-HORIZON RUN-RATE VELOCITY: Q3 2026 vs H1 2026 BASELINE vs 2025</a:t>
             </a:r>
             <a:endParaRPr lang="en-US" sz="1650" dirty="0"/>
           </a:p>
@@ -10145,7 +10145,7 @@
                 <a:ea typeface="Calibri" pitchFamily="34" charset="-122"/>
                 <a:cs typeface="Calibri" pitchFamily="34" charset="-120"/>
               </a:rPr>
-              <a:t>Evaluating Run-Rate Acceleration: National Monthly Average grew from 138,315 to 156,126 cans/mo (+12.9%)</a:t>
+              <a:t>Commercial Velocity Trilogy: Tracking Medical Rep Momentum from 2025 Baseline through H1 2026 to Q3 2026 (+51.0% vs '25)</a:t>
             </a:r>
             <a:endParaRPr lang="en-US" sz="1000" dirty="0"/>
           </a:p>
@@ -10244,11 +10244,11 @@
             <a:avLst/>
           </a:prstGeom>
           <a:solidFill>
-            <a:srgbClr val="F0F4F8"/>
+            <a:srgbClr val="F8FAFC"/>
           </a:solidFill>
           <a:ln w="19050">
             <a:solidFill>
-              <a:srgbClr val="B0C4DE"/>
+              <a:srgbClr val="CBD5E1"/>
             </a:solidFill>
             <a:prstDash val="solid"/>
           </a:ln>
@@ -10284,7 +10284,7 @@
                   <a:srgbClr val="64748B"/>
                 </a:solidFill>
               </a:rPr>
-              <a:t>H1 2026 BASELINE</a:t>
+              <a:t>2025 MO. BASELINE</a:t>
             </a:r>
             <a:endParaRPr lang="en-US" sz="850" dirty="0"/>
           </a:p>
@@ -10317,10 +10317,10 @@
             <a:r>
               <a:rPr lang="en-US" sz="1300" b="1" dirty="0">
                 <a:solidFill>
-                  <a:srgbClr val="1B365D"/>
+                  <a:srgbClr val="64748B"/>
                 </a:solidFill>
               </a:rPr>
-              <a:t>138,315</a:t>
+              <a:t>103,385</a:t>
             </a:r>
             <a:endParaRPr lang="en-US" sz="1300" dirty="0"/>
           </a:p>
@@ -10356,7 +10356,7 @@
                   <a:srgbClr val="64748B"/>
                 </a:solidFill>
               </a:rPr>
-              <a:t>National Monthly Avg</a:t>
+              <a:t>Full Year Baseline (Cans/Mo)</a:t>
             </a:r>
             <a:endParaRPr lang="en-US" sz="800" dirty="0"/>
           </a:p>
@@ -10377,11 +10377,11 @@
             <a:avLst/>
           </a:prstGeom>
           <a:solidFill>
-            <a:srgbClr val="ECFDF5"/>
+            <a:srgbClr val="F0F4F8"/>
           </a:solidFill>
           <a:ln w="19050">
             <a:solidFill>
-              <a:srgbClr val="10B981"/>
+              <a:srgbClr val="B0C4DE"/>
             </a:solidFill>
             <a:prstDash val="solid"/>
           </a:ln>
@@ -10417,7 +10417,7 @@
                   <a:srgbClr val="64748B"/>
                 </a:solidFill>
               </a:rPr>
-              <a:t>Q3 2026 RUN-RATE</a:t>
+              <a:t>H1 2026 BASELINE</a:t>
             </a:r>
             <a:endParaRPr lang="en-US" sz="850" dirty="0"/>
           </a:p>
@@ -10450,10 +10450,10 @@
             <a:r>
               <a:rPr lang="en-US" sz="1300" b="1" dirty="0">
                 <a:solidFill>
-                  <a:srgbClr val="065F46"/>
+                  <a:srgbClr val="1B365D"/>
                 </a:solidFill>
               </a:rPr>
-              <a:t>156,126</a:t>
+              <a:t>138,315</a:t>
             </a:r>
             <a:endParaRPr lang="en-US" sz="1300" dirty="0"/>
           </a:p>
@@ -10489,7 +10489,7 @@
                   <a:srgbClr val="64748B"/>
                 </a:solidFill>
               </a:rPr>
-              <a:t>+12.9% (+17,811 cans/mo)</a:t>
+              <a:t>+33.8% over 2025 baseline</a:t>
             </a:r>
             <a:endParaRPr lang="en-US" sz="800" dirty="0"/>
           </a:p>
@@ -10510,11 +10510,11 @@
             <a:avLst/>
           </a:prstGeom>
           <a:solidFill>
-            <a:srgbClr val="EFF6FF"/>
+            <a:srgbClr val="ECFDF5"/>
           </a:solidFill>
           <a:ln w="19050">
             <a:solidFill>
-              <a:srgbClr val="3B82F6"/>
+              <a:srgbClr val="10B981"/>
             </a:solidFill>
             <a:prstDash val="solid"/>
           </a:ln>
@@ -10550,7 +10550,7 @@
                   <a:srgbClr val="64748B"/>
                 </a:solidFill>
               </a:rPr>
-              <a:t>TOP ACCELERATOR REP</a:t>
+              <a:t>Q3 2026 RUN-RATE</a:t>
             </a:r>
             <a:endParaRPr lang="en-US" sz="850" dirty="0"/>
           </a:p>
@@ -10583,10 +10583,10 @@
             <a:r>
               <a:rPr lang="en-US" sz="1300" b="1" dirty="0">
                 <a:solidFill>
-                  <a:srgbClr val="1E40AF"/>
+                  <a:srgbClr val="065F46"/>
                 </a:solidFill>
               </a:rPr>
-              <a:t>Cairo (+58.7%)</a:t>
+              <a:t>156,126</a:t>
             </a:r>
             <a:endParaRPr lang="en-US" sz="1300" dirty="0"/>
           </a:p>
@@ -10622,7 +10622,7 @@
                   <a:srgbClr val="64748B"/>
                 </a:solidFill>
               </a:rPr>
-              <a:t>Noher Adel: 8,758 → 13,898</a:t>
+              <a:t>+12.9% vs H1 | +51.0% vs '25</a:t>
             </a:r>
             <a:endParaRPr lang="en-US" sz="800" dirty="0"/>
           </a:p>
@@ -10683,7 +10683,7 @@
                   <a:srgbClr val="64748B"/>
                 </a:solidFill>
               </a:rPr>
-              <a:t>NATIONAL VOLUME LEADER</a:t>
+              <a:t>TOP ACCELERATOR REP</a:t>
             </a:r>
             <a:endParaRPr lang="en-US" sz="850" dirty="0"/>
           </a:p>
@@ -10719,7 +10719,7 @@
                   <a:srgbClr val="5B21B6"/>
                 </a:solidFill>
               </a:rPr>
-              <a:t>UE II (25,694/mo)</a:t>
+              <a:t>Cairo (+58.7% vs H1)</a:t>
             </a:r>
             <a:endParaRPr lang="en-US" sz="1300" dirty="0"/>
           </a:p>
@@ -10755,7 +10755,7 @@
                   <a:srgbClr val="64748B"/>
                 </a:solidFill>
               </a:rPr>
-              <a:t>Beshoy Youhanna (+15.2%)</a:t>
+              <a:t>Noher Adel: +94.3% vs '25</a:t>
             </a:r>
             <a:endParaRPr lang="en-US" sz="800" dirty="0"/>
           </a:p>
@@ -10777,21 +10777,22 @@
         </p:nvGraphicFramePr>
         <p:xfrm>
           <a:off x="457200" y="2103120"/>
-          <a:ext cx="6675120" cy="4389120"/>
+          <a:ext cx="6766560" cy="4389120"/>
         </p:xfrm>
         <a:graphic>
           <a:graphicData uri="http://schemas.openxmlformats.org/drawingml/2006/table">
             <a:tbl>
               <a:tblPr/>
               <a:tblGrid>
-                <a:gridCol w="457200"/>
-                <a:gridCol w="1097280"/>
-                <a:gridCol w="1097280"/>
-                <a:gridCol w="731520"/>
-                <a:gridCol w="731520"/>
-                <a:gridCol w="731520"/>
-                <a:gridCol w="731520"/>
-                <a:gridCol w="1097280"/>
+                <a:gridCol w="411480"/>
+                <a:gridCol w="1005840"/>
+                <a:gridCol w="1051560"/>
+                <a:gridCol w="685800"/>
+                <a:gridCol w="685800"/>
+                <a:gridCol w="685800"/>
+                <a:gridCol w="685800"/>
+                <a:gridCol w="685800"/>
+                <a:gridCol w="914400"/>
               </a:tblGrid>
               <a:tr h="399011">
                 <a:tc>
@@ -10991,7 +10992,7 @@
                             <a:srgbClr val="FFFFFF"/>
                           </a:solidFill>
                         </a:rPr>
-                        <a:t>H1 MoAvg</a:t>
+                        <a:t>2025 Mo</a:t>
                       </a:r>
                       <a:endParaRPr lang="en-US" sz="1200" dirty="0"/>
                     </a:p>
@@ -11052,7 +11053,7 @@
                             <a:srgbClr val="FFFFFF"/>
                           </a:solidFill>
                         </a:rPr>
-                        <a:t>Q3 MoAvg</a:t>
+                        <a:t>H1 2026</a:t>
                       </a:r>
                       <a:endParaRPr lang="en-US" sz="1200" dirty="0"/>
                     </a:p>
@@ -11113,7 +11114,7 @@
                             <a:srgbClr val="FFFFFF"/>
                           </a:solidFill>
                         </a:rPr>
-                        <a:t>Diff / Mo</a:t>
+                        <a:t>Q3 2026</a:t>
                       </a:r>
                       <a:endParaRPr lang="en-US" sz="1200" dirty="0"/>
                     </a:p>
@@ -11174,7 +11175,7 @@
                             <a:srgbClr val="FFFFFF"/>
                           </a:solidFill>
                         </a:rPr>
-                        <a:t>Velocity %</a:t>
+                        <a:t>Q3 vs H1</a:t>
                       </a:r>
                       <a:endParaRPr lang="en-US" sz="1200" dirty="0"/>
                     </a:p>
@@ -11235,7 +11236,7 @@
                             <a:srgbClr val="FFFFFF"/>
                           </a:solidFill>
                         </a:rPr>
-                        <a:t>Performance Tier</a:t>
+                        <a:t>Q3 vs '25</a:t>
                       </a:r>
                       <a:endParaRPr lang="en-US" sz="1200" dirty="0"/>
                     </a:p>
@@ -11282,6 +11283,67 @@
                     </a:solidFill>
                   </a:tcPr>
                 </a:tc>
+                <a:tc>
+                  <a:txBody>
+                    <a:bodyPr/>
+                    <a:lstStyle/>
+                    <a:p>
+                      <a:pPr algn="ctr" indent="0" marL="0">
+                        <a:buNone/>
+                      </a:pPr>
+                      <a:r>
+                        <a:rPr lang="en-US" sz="1200" b="1" dirty="0">
+                          <a:solidFill>
+                            <a:srgbClr val="FFFFFF"/>
+                          </a:solidFill>
+                        </a:rPr>
+                        <a:t>Velocity Tier</a:t>
+                      </a:r>
+                      <a:endParaRPr lang="en-US" sz="1200" dirty="0"/>
+                    </a:p>
+                  </a:txBody>
+                  <a:tcPr marL="91440" marR="91440" marT="45720" marB="45720" anchor="ctr">
+                    <a:lnL w="12700" cap="flat" cmpd="sng" algn="ctr">
+                      <a:solidFill>
+                        <a:srgbClr val="E2E8F0"/>
+                      </a:solidFill>
+                      <a:prstDash val="solid"/>
+                      <a:round/>
+                      <a:headEnd type="none" w="med" len="med"/>
+                      <a:tailEnd type="none" w="med" len="med"/>
+                    </a:lnL>
+                    <a:lnR w="12700" cap="flat" cmpd="sng" algn="ctr">
+                      <a:solidFill>
+                        <a:srgbClr val="E2E8F0"/>
+                      </a:solidFill>
+                      <a:prstDash val="solid"/>
+                      <a:round/>
+                      <a:headEnd type="none" w="med" len="med"/>
+                      <a:tailEnd type="none" w="med" len="med"/>
+                    </a:lnR>
+                    <a:lnT w="12700" cap="flat" cmpd="sng" algn="ctr">
+                      <a:solidFill>
+                        <a:srgbClr val="E2E8F0"/>
+                      </a:solidFill>
+                      <a:prstDash val="solid"/>
+                      <a:round/>
+                      <a:headEnd type="none" w="med" len="med"/>
+                      <a:tailEnd type="none" w="med" len="med"/>
+                    </a:lnT>
+                    <a:lnB w="12700" cap="flat" cmpd="sng" algn="ctr">
+                      <a:solidFill>
+                        <a:srgbClr val="E2E8F0"/>
+                      </a:solidFill>
+                      <a:prstDash val="solid"/>
+                      <a:round/>
+                      <a:headEnd type="none" w="med" len="med"/>
+                      <a:tailEnd type="none" w="med" len="med"/>
+                    </a:lnB>
+                    <a:solidFill>
+                      <a:srgbClr val="1B365D"/>
+                    </a:solidFill>
+                  </a:tcPr>
+                </a:tc>
               </a:tr>
               <a:tr h="399011">
                 <a:tc>
@@ -11481,7 +11543,7 @@
                             <a:srgbClr val="000000"/>
                           </a:solidFill>
                         </a:rPr>
-                        <a:t>138,315</a:t>
+                        <a:t>103,385</a:t>
                       </a:r>
                       <a:endParaRPr lang="en-US" sz="1200" dirty="0"/>
                     </a:p>
@@ -11542,7 +11604,7 @@
                             <a:srgbClr val="000000"/>
                           </a:solidFill>
                         </a:rPr>
-                        <a:t>156,126</a:t>
+                        <a:t>138,315</a:t>
                       </a:r>
                       <a:endParaRPr lang="en-US" sz="1200" dirty="0"/>
                     </a:p>
@@ -11600,10 +11662,10 @@
                       <a:r>
                         <a:rPr lang="en-US" sz="1200" b="1" dirty="0">
                           <a:solidFill>
-                            <a:srgbClr val="000000"/>
-                          </a:solidFill>
-                        </a:rPr>
-                        <a:t>+17,811</a:t>
+                            <a:srgbClr val="8B5CF6"/>
+                          </a:solidFill>
+                        </a:rPr>
+                        <a:t>156,126</a:t>
                       </a:r>
                       <a:endParaRPr lang="en-US" sz="1200" dirty="0"/>
                     </a:p>
@@ -11722,10 +11784,10 @@
                       <a:r>
                         <a:rPr lang="en-US" sz="1200" b="1" dirty="0">
                           <a:solidFill>
-                            <a:srgbClr val="1B365D"/>
-                          </a:solidFill>
-                        </a:rPr>
-                        <a:t>NATIONAL BENCHMARK</a:t>
+                            <a:srgbClr val="28A745"/>
+                          </a:solidFill>
+                        </a:rPr>
+                        <a:t>+51.0%</a:t>
                       </a:r>
                       <a:endParaRPr lang="en-US" sz="1200" dirty="0"/>
                     </a:p>
@@ -11772,6 +11834,67 @@
                     </a:solidFill>
                   </a:tcPr>
                 </a:tc>
+                <a:tc>
+                  <a:txBody>
+                    <a:bodyPr/>
+                    <a:lstStyle/>
+                    <a:p>
+                      <a:pPr algn="ctr" indent="0" marL="0">
+                        <a:buNone/>
+                      </a:pPr>
+                      <a:r>
+                        <a:rPr lang="en-US" sz="1200" b="1" dirty="0">
+                          <a:solidFill>
+                            <a:srgbClr val="1B365D"/>
+                          </a:solidFill>
+                        </a:rPr>
+                        <a:t>NATIONAL BENCHMARK</a:t>
+                      </a:r>
+                      <a:endParaRPr lang="en-US" sz="1200" dirty="0"/>
+                    </a:p>
+                  </a:txBody>
+                  <a:tcPr marL="91440" marR="91440" marT="45720" marB="45720" anchor="ctr">
+                    <a:lnL w="12700" cap="flat" cmpd="sng" algn="ctr">
+                      <a:solidFill>
+                        <a:srgbClr val="E2E8F0"/>
+                      </a:solidFill>
+                      <a:prstDash val="solid"/>
+                      <a:round/>
+                      <a:headEnd type="none" w="med" len="med"/>
+                      <a:tailEnd type="none" w="med" len="med"/>
+                    </a:lnL>
+                    <a:lnR w="12700" cap="flat" cmpd="sng" algn="ctr">
+                      <a:solidFill>
+                        <a:srgbClr val="E2E8F0"/>
+                      </a:solidFill>
+                      <a:prstDash val="solid"/>
+                      <a:round/>
+                      <a:headEnd type="none" w="med" len="med"/>
+                      <a:tailEnd type="none" w="med" len="med"/>
+                    </a:lnR>
+                    <a:lnT w="12700" cap="flat" cmpd="sng" algn="ctr">
+                      <a:solidFill>
+                        <a:srgbClr val="E2E8F0"/>
+                      </a:solidFill>
+                      <a:prstDash val="solid"/>
+                      <a:round/>
+                      <a:headEnd type="none" w="med" len="med"/>
+                      <a:tailEnd type="none" w="med" len="med"/>
+                    </a:lnT>
+                    <a:lnB w="12700" cap="flat" cmpd="sng" algn="ctr">
+                      <a:solidFill>
+                        <a:srgbClr val="E2E8F0"/>
+                      </a:solidFill>
+                      <a:prstDash val="solid"/>
+                      <a:round/>
+                      <a:headEnd type="none" w="med" len="med"/>
+                      <a:tailEnd type="none" w="med" len="med"/>
+                    </a:lnB>
+                    <a:solidFill>
+                      <a:srgbClr val="E8EEF5"/>
+                    </a:solidFill>
+                  </a:tcPr>
+                </a:tc>
               </a:tr>
               <a:tr h="399011">
                 <a:tc>
@@ -11962,6 +12085,64 @@
                             <a:srgbClr val="000000"/>
                           </a:solidFill>
                         </a:rPr>
+                        <a:t>7,152</a:t>
+                      </a:r>
+                      <a:endParaRPr lang="en-US" sz="800" dirty="0"/>
+                    </a:p>
+                  </a:txBody>
+                  <a:tcPr marL="91440" marR="91440" marT="45720" marB="45720" anchor="ctr">
+                    <a:lnL w="12700" cap="flat" cmpd="sng" algn="ctr">
+                      <a:solidFill>
+                        <a:srgbClr val="E2E8F0"/>
+                      </a:solidFill>
+                      <a:prstDash val="solid"/>
+                      <a:round/>
+                      <a:headEnd type="none" w="med" len="med"/>
+                      <a:tailEnd type="none" w="med" len="med"/>
+                    </a:lnL>
+                    <a:lnR w="12700" cap="flat" cmpd="sng" algn="ctr">
+                      <a:solidFill>
+                        <a:srgbClr val="E2E8F0"/>
+                      </a:solidFill>
+                      <a:prstDash val="solid"/>
+                      <a:round/>
+                      <a:headEnd type="none" w="med" len="med"/>
+                      <a:tailEnd type="none" w="med" len="med"/>
+                    </a:lnR>
+                    <a:lnT w="12700" cap="flat" cmpd="sng" algn="ctr">
+                      <a:solidFill>
+                        <a:srgbClr val="E2E8F0"/>
+                      </a:solidFill>
+                      <a:prstDash val="solid"/>
+                      <a:round/>
+                      <a:headEnd type="none" w="med" len="med"/>
+                      <a:tailEnd type="none" w="med" len="med"/>
+                    </a:lnT>
+                    <a:lnB w="12700" cap="flat" cmpd="sng" algn="ctr">
+                      <a:solidFill>
+                        <a:srgbClr val="E2E8F0"/>
+                      </a:solidFill>
+                      <a:prstDash val="solid"/>
+                      <a:round/>
+                      <a:headEnd type="none" w="med" len="med"/>
+                      <a:tailEnd type="none" w="med" len="med"/>
+                    </a:lnB>
+                  </a:tcPr>
+                </a:tc>
+                <a:tc>
+                  <a:txBody>
+                    <a:bodyPr/>
+                    <a:lstStyle/>
+                    <a:p>
+                      <a:pPr algn="ctr" indent="0" marL="0">
+                        <a:buNone/>
+                      </a:pPr>
+                      <a:r>
+                        <a:rPr lang="en-US" sz="800" dirty="0">
+                          <a:solidFill>
+                            <a:srgbClr val="000000"/>
+                          </a:solidFill>
+                        </a:rPr>
                         <a:t>8,758</a:t>
                       </a:r>
                       <a:endParaRPr lang="en-US" sz="800" dirty="0"/>
@@ -12017,7 +12198,7 @@
                       <a:r>
                         <a:rPr lang="en-US" sz="800" b="1" dirty="0">
                           <a:solidFill>
-                            <a:srgbClr val="000000"/>
+                            <a:srgbClr val="8B5CF6"/>
                           </a:solidFill>
                         </a:rPr>
                         <a:t>13,898</a:t>
@@ -12073,14 +12254,14 @@
                         <a:buNone/>
                       </a:pPr>
                       <a:r>
-                        <a:rPr lang="en-US" sz="800" dirty="0">
+                        <a:rPr lang="en-US" sz="850" b="1" dirty="0">
                           <a:solidFill>
                             <a:srgbClr val="28A745"/>
                           </a:solidFill>
                         </a:rPr>
-                        <a:t>+5,140</a:t>
-                      </a:r>
-                      <a:endParaRPr lang="en-US" sz="800" dirty="0"/>
+                        <a:t>+58.7%</a:t>
+                      </a:r>
+                      <a:endParaRPr lang="en-US" sz="850" dirty="0"/>
                     </a:p>
                   </a:txBody>
                   <a:tcPr marL="91440" marR="91440" marT="45720" marB="45720" anchor="ctr">
@@ -12136,7 +12317,7 @@
                             <a:srgbClr val="28A745"/>
                           </a:solidFill>
                         </a:rPr>
-                        <a:t>+58.7%</a:t>
+                        <a:t>+94.3%</a:t>
                       </a:r>
                       <a:endParaRPr lang="en-US" sz="850" dirty="0"/>
                     </a:p>
@@ -12428,6 +12609,64 @@
                             <a:srgbClr val="000000"/>
                           </a:solidFill>
                         </a:rPr>
+                        <a:t>9,337</a:t>
+                      </a:r>
+                      <a:endParaRPr lang="en-US" sz="800" dirty="0"/>
+                    </a:p>
+                  </a:txBody>
+                  <a:tcPr marL="91440" marR="91440" marT="45720" marB="45720" anchor="ctr">
+                    <a:lnL w="12700" cap="flat" cmpd="sng" algn="ctr">
+                      <a:solidFill>
+                        <a:srgbClr val="E2E8F0"/>
+                      </a:solidFill>
+                      <a:prstDash val="solid"/>
+                      <a:round/>
+                      <a:headEnd type="none" w="med" len="med"/>
+                      <a:tailEnd type="none" w="med" len="med"/>
+                    </a:lnL>
+                    <a:lnR w="12700" cap="flat" cmpd="sng" algn="ctr">
+                      <a:solidFill>
+                        <a:srgbClr val="E2E8F0"/>
+                      </a:solidFill>
+                      <a:prstDash val="solid"/>
+                      <a:round/>
+                      <a:headEnd type="none" w="med" len="med"/>
+                      <a:tailEnd type="none" w="med" len="med"/>
+                    </a:lnR>
+                    <a:lnT w="12700" cap="flat" cmpd="sng" algn="ctr">
+                      <a:solidFill>
+                        <a:srgbClr val="E2E8F0"/>
+                      </a:solidFill>
+                      <a:prstDash val="solid"/>
+                      <a:round/>
+                      <a:headEnd type="none" w="med" len="med"/>
+                      <a:tailEnd type="none" w="med" len="med"/>
+                    </a:lnT>
+                    <a:lnB w="12700" cap="flat" cmpd="sng" algn="ctr">
+                      <a:solidFill>
+                        <a:srgbClr val="E2E8F0"/>
+                      </a:solidFill>
+                      <a:prstDash val="solid"/>
+                      <a:round/>
+                      <a:headEnd type="none" w="med" len="med"/>
+                      <a:tailEnd type="none" w="med" len="med"/>
+                    </a:lnB>
+                  </a:tcPr>
+                </a:tc>
+                <a:tc>
+                  <a:txBody>
+                    <a:bodyPr/>
+                    <a:lstStyle/>
+                    <a:p>
+                      <a:pPr algn="ctr" indent="0" marL="0">
+                        <a:buNone/>
+                      </a:pPr>
+                      <a:r>
+                        <a:rPr lang="en-US" sz="800" dirty="0">
+                          <a:solidFill>
+                            <a:srgbClr val="000000"/>
+                          </a:solidFill>
+                        </a:rPr>
                         <a:t>10,461</a:t>
                       </a:r>
                       <a:endParaRPr lang="en-US" sz="800" dirty="0"/>
@@ -12483,7 +12722,7 @@
                       <a:r>
                         <a:rPr lang="en-US" sz="800" b="1" dirty="0">
                           <a:solidFill>
-                            <a:srgbClr val="000000"/>
+                            <a:srgbClr val="8B5CF6"/>
                           </a:solidFill>
                         </a:rPr>
                         <a:t>15,472</a:t>
@@ -12539,14 +12778,14 @@
                         <a:buNone/>
                       </a:pPr>
                       <a:r>
-                        <a:rPr lang="en-US" sz="800" dirty="0">
+                        <a:rPr lang="en-US" sz="850" b="1" dirty="0">
                           <a:solidFill>
                             <a:srgbClr val="28A745"/>
                           </a:solidFill>
                         </a:rPr>
-                        <a:t>+5,011</a:t>
-                      </a:r>
-                      <a:endParaRPr lang="en-US" sz="800" dirty="0"/>
+                        <a:t>+47.9%</a:t>
+                      </a:r>
+                      <a:endParaRPr lang="en-US" sz="850" dirty="0"/>
                     </a:p>
                   </a:txBody>
                   <a:tcPr marL="91440" marR="91440" marT="45720" marB="45720" anchor="ctr">
@@ -12602,7 +12841,7 @@
                             <a:srgbClr val="28A745"/>
                           </a:solidFill>
                         </a:rPr>
-                        <a:t>+47.9%</a:t>
+                        <a:t>+65.7%</a:t>
                       </a:r>
                       <a:endParaRPr lang="en-US" sz="850" dirty="0"/>
                     </a:p>
@@ -12894,6 +13133,64 @@
                             <a:srgbClr val="000000"/>
                           </a:solidFill>
                         </a:rPr>
+                        <a:t>12,877</a:t>
+                      </a:r>
+                      <a:endParaRPr lang="en-US" sz="800" dirty="0"/>
+                    </a:p>
+                  </a:txBody>
+                  <a:tcPr marL="91440" marR="91440" marT="45720" marB="45720" anchor="ctr">
+                    <a:lnL w="12700" cap="flat" cmpd="sng" algn="ctr">
+                      <a:solidFill>
+                        <a:srgbClr val="E2E8F0"/>
+                      </a:solidFill>
+                      <a:prstDash val="solid"/>
+                      <a:round/>
+                      <a:headEnd type="none" w="med" len="med"/>
+                      <a:tailEnd type="none" w="med" len="med"/>
+                    </a:lnL>
+                    <a:lnR w="12700" cap="flat" cmpd="sng" algn="ctr">
+                      <a:solidFill>
+                        <a:srgbClr val="E2E8F0"/>
+                      </a:solidFill>
+                      <a:prstDash val="solid"/>
+                      <a:round/>
+                      <a:headEnd type="none" w="med" len="med"/>
+                      <a:tailEnd type="none" w="med" len="med"/>
+                    </a:lnR>
+                    <a:lnT w="12700" cap="flat" cmpd="sng" algn="ctr">
+                      <a:solidFill>
+                        <a:srgbClr val="E2E8F0"/>
+                      </a:solidFill>
+                      <a:prstDash val="solid"/>
+                      <a:round/>
+                      <a:headEnd type="none" w="med" len="med"/>
+                      <a:tailEnd type="none" w="med" len="med"/>
+                    </a:lnT>
+                    <a:lnB w="12700" cap="flat" cmpd="sng" algn="ctr">
+                      <a:solidFill>
+                        <a:srgbClr val="E2E8F0"/>
+                      </a:solidFill>
+                      <a:prstDash val="solid"/>
+                      <a:round/>
+                      <a:headEnd type="none" w="med" len="med"/>
+                      <a:tailEnd type="none" w="med" len="med"/>
+                    </a:lnB>
+                  </a:tcPr>
+                </a:tc>
+                <a:tc>
+                  <a:txBody>
+                    <a:bodyPr/>
+                    <a:lstStyle/>
+                    <a:p>
+                      <a:pPr algn="ctr" indent="0" marL="0">
+                        <a:buNone/>
+                      </a:pPr>
+                      <a:r>
+                        <a:rPr lang="en-US" sz="800" dirty="0">
+                          <a:solidFill>
+                            <a:srgbClr val="000000"/>
+                          </a:solidFill>
+                        </a:rPr>
                         <a:t>16,459</a:t>
                       </a:r>
                       <a:endParaRPr lang="en-US" sz="800" dirty="0"/>
@@ -12949,7 +13246,7 @@
                       <a:r>
                         <a:rPr lang="en-US" sz="800" b="1" dirty="0">
                           <a:solidFill>
-                            <a:srgbClr val="000000"/>
+                            <a:srgbClr val="8B5CF6"/>
                           </a:solidFill>
                         </a:rPr>
                         <a:t>23,564</a:t>
@@ -13005,14 +13302,14 @@
                         <a:buNone/>
                       </a:pPr>
                       <a:r>
-                        <a:rPr lang="en-US" sz="800" dirty="0">
+                        <a:rPr lang="en-US" sz="850" b="1" dirty="0">
                           <a:solidFill>
                             <a:srgbClr val="28A745"/>
                           </a:solidFill>
                         </a:rPr>
-                        <a:t>+7,105</a:t>
-                      </a:r>
-                      <a:endParaRPr lang="en-US" sz="800" dirty="0"/>
+                        <a:t>+43.2%</a:t>
+                      </a:r>
+                      <a:endParaRPr lang="en-US" sz="850" dirty="0"/>
                     </a:p>
                   </a:txBody>
                   <a:tcPr marL="91440" marR="91440" marT="45720" marB="45720" anchor="ctr">
@@ -13068,7 +13365,7 @@
                             <a:srgbClr val="28A745"/>
                           </a:solidFill>
                         </a:rPr>
-                        <a:t>+43.2%</a:t>
+                        <a:t>+83.0%</a:t>
                       </a:r>
                       <a:endParaRPr lang="en-US" sz="850" dirty="0"/>
                     </a:p>
@@ -13360,6 +13657,64 @@
                             <a:srgbClr val="000000"/>
                           </a:solidFill>
                         </a:rPr>
+                        <a:t>12,441</a:t>
+                      </a:r>
+                      <a:endParaRPr lang="en-US" sz="800" dirty="0"/>
+                    </a:p>
+                  </a:txBody>
+                  <a:tcPr marL="91440" marR="91440" marT="45720" marB="45720" anchor="ctr">
+                    <a:lnL w="12700" cap="flat" cmpd="sng" algn="ctr">
+                      <a:solidFill>
+                        <a:srgbClr val="E2E8F0"/>
+                      </a:solidFill>
+                      <a:prstDash val="solid"/>
+                      <a:round/>
+                      <a:headEnd type="none" w="med" len="med"/>
+                      <a:tailEnd type="none" w="med" len="med"/>
+                    </a:lnL>
+                    <a:lnR w="12700" cap="flat" cmpd="sng" algn="ctr">
+                      <a:solidFill>
+                        <a:srgbClr val="E2E8F0"/>
+                      </a:solidFill>
+                      <a:prstDash val="solid"/>
+                      <a:round/>
+                      <a:headEnd type="none" w="med" len="med"/>
+                      <a:tailEnd type="none" w="med" len="med"/>
+                    </a:lnR>
+                    <a:lnT w="12700" cap="flat" cmpd="sng" algn="ctr">
+                      <a:solidFill>
+                        <a:srgbClr val="E2E8F0"/>
+                      </a:solidFill>
+                      <a:prstDash val="solid"/>
+                      <a:round/>
+                      <a:headEnd type="none" w="med" len="med"/>
+                      <a:tailEnd type="none" w="med" len="med"/>
+                    </a:lnT>
+                    <a:lnB w="12700" cap="flat" cmpd="sng" algn="ctr">
+                      <a:solidFill>
+                        <a:srgbClr val="E2E8F0"/>
+                      </a:solidFill>
+                      <a:prstDash val="solid"/>
+                      <a:round/>
+                      <a:headEnd type="none" w="med" len="med"/>
+                      <a:tailEnd type="none" w="med" len="med"/>
+                    </a:lnB>
+                  </a:tcPr>
+                </a:tc>
+                <a:tc>
+                  <a:txBody>
+                    <a:bodyPr/>
+                    <a:lstStyle/>
+                    <a:p>
+                      <a:pPr algn="ctr" indent="0" marL="0">
+                        <a:buNone/>
+                      </a:pPr>
+                      <a:r>
+                        <a:rPr lang="en-US" sz="800" dirty="0">
+                          <a:solidFill>
+                            <a:srgbClr val="000000"/>
+                          </a:solidFill>
+                        </a:rPr>
                         <a:t>14,302</a:t>
                       </a:r>
                       <a:endParaRPr lang="en-US" sz="800" dirty="0"/>
@@ -13415,7 +13770,7 @@
                       <a:r>
                         <a:rPr lang="en-US" sz="800" b="1" dirty="0">
                           <a:solidFill>
-                            <a:srgbClr val="000000"/>
+                            <a:srgbClr val="8B5CF6"/>
                           </a:solidFill>
                         </a:rPr>
                         <a:t>18,041</a:t>
@@ -13471,14 +13826,14 @@
                         <a:buNone/>
                       </a:pPr>
                       <a:r>
-                        <a:rPr lang="en-US" sz="800" dirty="0">
+                        <a:rPr lang="en-US" sz="850" b="1" dirty="0">
                           <a:solidFill>
                             <a:srgbClr val="28A745"/>
                           </a:solidFill>
                         </a:rPr>
-                        <a:t>+3,739</a:t>
-                      </a:r>
-                      <a:endParaRPr lang="en-US" sz="800" dirty="0"/>
+                        <a:t>+26.1%</a:t>
+                      </a:r>
+                      <a:endParaRPr lang="en-US" sz="850" dirty="0"/>
                     </a:p>
                   </a:txBody>
                   <a:tcPr marL="91440" marR="91440" marT="45720" marB="45720" anchor="ctr">
@@ -13531,10 +13886,10 @@
                       <a:r>
                         <a:rPr lang="en-US" sz="850" b="1" dirty="0">
                           <a:solidFill>
-                            <a:srgbClr val="28A745"/>
-                          </a:solidFill>
-                        </a:rPr>
-                        <a:t>+26.1%</a:t>
+                            <a:srgbClr val="1B365D"/>
+                          </a:solidFill>
+                        </a:rPr>
+                        <a:t>+45.0%</a:t>
                       </a:r>
                       <a:endParaRPr lang="en-US" sz="850" dirty="0"/>
                     </a:p>
@@ -13826,6 +14181,64 @@
                             <a:srgbClr val="000000"/>
                           </a:solidFill>
                         </a:rPr>
+                        <a:t>14,859</a:t>
+                      </a:r>
+                      <a:endParaRPr lang="en-US" sz="800" dirty="0"/>
+                    </a:p>
+                  </a:txBody>
+                  <a:tcPr marL="91440" marR="91440" marT="45720" marB="45720" anchor="ctr">
+                    <a:lnL w="12700" cap="flat" cmpd="sng" algn="ctr">
+                      <a:solidFill>
+                        <a:srgbClr val="E2E8F0"/>
+                      </a:solidFill>
+                      <a:prstDash val="solid"/>
+                      <a:round/>
+                      <a:headEnd type="none" w="med" len="med"/>
+                      <a:tailEnd type="none" w="med" len="med"/>
+                    </a:lnL>
+                    <a:lnR w="12700" cap="flat" cmpd="sng" algn="ctr">
+                      <a:solidFill>
+                        <a:srgbClr val="E2E8F0"/>
+                      </a:solidFill>
+                      <a:prstDash val="solid"/>
+                      <a:round/>
+                      <a:headEnd type="none" w="med" len="med"/>
+                      <a:tailEnd type="none" w="med" len="med"/>
+                    </a:lnR>
+                    <a:lnT w="12700" cap="flat" cmpd="sng" algn="ctr">
+                      <a:solidFill>
+                        <a:srgbClr val="E2E8F0"/>
+                      </a:solidFill>
+                      <a:prstDash val="solid"/>
+                      <a:round/>
+                      <a:headEnd type="none" w="med" len="med"/>
+                      <a:tailEnd type="none" w="med" len="med"/>
+                    </a:lnT>
+                    <a:lnB w="12700" cap="flat" cmpd="sng" algn="ctr">
+                      <a:solidFill>
+                        <a:srgbClr val="E2E8F0"/>
+                      </a:solidFill>
+                      <a:prstDash val="solid"/>
+                      <a:round/>
+                      <a:headEnd type="none" w="med" len="med"/>
+                      <a:tailEnd type="none" w="med" len="med"/>
+                    </a:lnB>
+                  </a:tcPr>
+                </a:tc>
+                <a:tc>
+                  <a:txBody>
+                    <a:bodyPr/>
+                    <a:lstStyle/>
+                    <a:p>
+                      <a:pPr algn="ctr" indent="0" marL="0">
+                        <a:buNone/>
+                      </a:pPr>
+                      <a:r>
+                        <a:rPr lang="en-US" sz="800" dirty="0">
+                          <a:solidFill>
+                            <a:srgbClr val="000000"/>
+                          </a:solidFill>
+                        </a:rPr>
                         <a:t>22,305</a:t>
                       </a:r>
                       <a:endParaRPr lang="en-US" sz="800" dirty="0"/>
@@ -13881,7 +14294,7 @@
                       <a:r>
                         <a:rPr lang="en-US" sz="800" b="1" dirty="0">
                           <a:solidFill>
-                            <a:srgbClr val="000000"/>
+                            <a:srgbClr val="8B5CF6"/>
                           </a:solidFill>
                         </a:rPr>
                         <a:t>25,694</a:t>
@@ -13937,14 +14350,14 @@
                         <a:buNone/>
                       </a:pPr>
                       <a:r>
-                        <a:rPr lang="en-US" sz="800" dirty="0">
+                        <a:rPr lang="en-US" sz="850" b="1" dirty="0">
                           <a:solidFill>
                             <a:srgbClr val="28A745"/>
                           </a:solidFill>
                         </a:rPr>
-                        <a:t>+3,389</a:t>
-                      </a:r>
-                      <a:endParaRPr lang="en-US" sz="800" dirty="0"/>
+                        <a:t>+15.2%</a:t>
+                      </a:r>
+                      <a:endParaRPr lang="en-US" sz="850" dirty="0"/>
                     </a:p>
                   </a:txBody>
                   <a:tcPr marL="91440" marR="91440" marT="45720" marB="45720" anchor="ctr">
@@ -14000,7 +14413,7 @@
                             <a:srgbClr val="28A745"/>
                           </a:solidFill>
                         </a:rPr>
-                        <a:t>+15.2%</a:t>
+                        <a:t>+72.9%</a:t>
                       </a:r>
                       <a:endParaRPr lang="en-US" sz="850" dirty="0"/>
                     </a:p>
@@ -14292,6 +14705,64 @@
                             <a:srgbClr val="000000"/>
                           </a:solidFill>
                         </a:rPr>
+                        <a:t>9,951</a:t>
+                      </a:r>
+                      <a:endParaRPr lang="en-US" sz="800" dirty="0"/>
+                    </a:p>
+                  </a:txBody>
+                  <a:tcPr marL="91440" marR="91440" marT="45720" marB="45720" anchor="ctr">
+                    <a:lnL w="12700" cap="flat" cmpd="sng" algn="ctr">
+                      <a:solidFill>
+                        <a:srgbClr val="E2E8F0"/>
+                      </a:solidFill>
+                      <a:prstDash val="solid"/>
+                      <a:round/>
+                      <a:headEnd type="none" w="med" len="med"/>
+                      <a:tailEnd type="none" w="med" len="med"/>
+                    </a:lnL>
+                    <a:lnR w="12700" cap="flat" cmpd="sng" algn="ctr">
+                      <a:solidFill>
+                        <a:srgbClr val="E2E8F0"/>
+                      </a:solidFill>
+                      <a:prstDash val="solid"/>
+                      <a:round/>
+                      <a:headEnd type="none" w="med" len="med"/>
+                      <a:tailEnd type="none" w="med" len="med"/>
+                    </a:lnR>
+                    <a:lnT w="12700" cap="flat" cmpd="sng" algn="ctr">
+                      <a:solidFill>
+                        <a:srgbClr val="E2E8F0"/>
+                      </a:solidFill>
+                      <a:prstDash val="solid"/>
+                      <a:round/>
+                      <a:headEnd type="none" w="med" len="med"/>
+                      <a:tailEnd type="none" w="med" len="med"/>
+                    </a:lnT>
+                    <a:lnB w="12700" cap="flat" cmpd="sng" algn="ctr">
+                      <a:solidFill>
+                        <a:srgbClr val="E2E8F0"/>
+                      </a:solidFill>
+                      <a:prstDash val="solid"/>
+                      <a:round/>
+                      <a:headEnd type="none" w="med" len="med"/>
+                      <a:tailEnd type="none" w="med" len="med"/>
+                    </a:lnB>
+                  </a:tcPr>
+                </a:tc>
+                <a:tc>
+                  <a:txBody>
+                    <a:bodyPr/>
+                    <a:lstStyle/>
+                    <a:p>
+                      <a:pPr algn="ctr" indent="0" marL="0">
+                        <a:buNone/>
+                      </a:pPr>
+                      <a:r>
+                        <a:rPr lang="en-US" sz="800" dirty="0">
+                          <a:solidFill>
+                            <a:srgbClr val="000000"/>
+                          </a:solidFill>
+                        </a:rPr>
                         <a:t>12,895</a:t>
                       </a:r>
                       <a:endParaRPr lang="en-US" sz="800" dirty="0"/>
@@ -14347,7 +14818,7 @@
                       <a:r>
                         <a:rPr lang="en-US" sz="800" b="1" dirty="0">
                           <a:solidFill>
-                            <a:srgbClr val="000000"/>
+                            <a:srgbClr val="8B5CF6"/>
                           </a:solidFill>
                         </a:rPr>
                         <a:t>13,858</a:t>
@@ -14403,70 +14874,70 @@
                         <a:buNone/>
                       </a:pPr>
                       <a:r>
-                        <a:rPr lang="en-US" sz="800" dirty="0">
-                          <a:solidFill>
-                            <a:srgbClr val="28A745"/>
-                          </a:solidFill>
-                        </a:rPr>
-                        <a:t>+963</a:t>
-                      </a:r>
-                      <a:endParaRPr lang="en-US" sz="800" dirty="0"/>
-                    </a:p>
-                  </a:txBody>
-                  <a:tcPr marL="91440" marR="91440" marT="45720" marB="45720" anchor="ctr">
-                    <a:lnL w="12700" cap="flat" cmpd="sng" algn="ctr">
-                      <a:solidFill>
-                        <a:srgbClr val="E2E8F0"/>
-                      </a:solidFill>
-                      <a:prstDash val="solid"/>
-                      <a:round/>
-                      <a:headEnd type="none" w="med" len="med"/>
-                      <a:tailEnd type="none" w="med" len="med"/>
-                    </a:lnL>
-                    <a:lnR w="12700" cap="flat" cmpd="sng" algn="ctr">
-                      <a:solidFill>
-                        <a:srgbClr val="E2E8F0"/>
-                      </a:solidFill>
-                      <a:prstDash val="solid"/>
-                      <a:round/>
-                      <a:headEnd type="none" w="med" len="med"/>
-                      <a:tailEnd type="none" w="med" len="med"/>
-                    </a:lnR>
-                    <a:lnT w="12700" cap="flat" cmpd="sng" algn="ctr">
-                      <a:solidFill>
-                        <a:srgbClr val="E2E8F0"/>
-                      </a:solidFill>
-                      <a:prstDash val="solid"/>
-                      <a:round/>
-                      <a:headEnd type="none" w="med" len="med"/>
-                      <a:tailEnd type="none" w="med" len="med"/>
-                    </a:lnT>
-                    <a:lnB w="12700" cap="flat" cmpd="sng" algn="ctr">
-                      <a:solidFill>
-                        <a:srgbClr val="E2E8F0"/>
-                      </a:solidFill>
-                      <a:prstDash val="solid"/>
-                      <a:round/>
-                      <a:headEnd type="none" w="med" len="med"/>
-                      <a:tailEnd type="none" w="med" len="med"/>
-                    </a:lnB>
-                  </a:tcPr>
-                </a:tc>
-                <a:tc>
-                  <a:txBody>
-                    <a:bodyPr/>
-                    <a:lstStyle/>
-                    <a:p>
-                      <a:pPr algn="ctr" indent="0" marL="0">
-                        <a:buNone/>
-                      </a:pPr>
-                      <a:r>
                         <a:rPr lang="en-US" sz="850" b="1" dirty="0">
                           <a:solidFill>
                             <a:srgbClr val="B45309"/>
                           </a:solidFill>
                         </a:rPr>
                         <a:t>+7.5%</a:t>
+                      </a:r>
+                      <a:endParaRPr lang="en-US" sz="850" dirty="0"/>
+                    </a:p>
+                  </a:txBody>
+                  <a:tcPr marL="91440" marR="91440" marT="45720" marB="45720" anchor="ctr">
+                    <a:lnL w="12700" cap="flat" cmpd="sng" algn="ctr">
+                      <a:solidFill>
+                        <a:srgbClr val="E2E8F0"/>
+                      </a:solidFill>
+                      <a:prstDash val="solid"/>
+                      <a:round/>
+                      <a:headEnd type="none" w="med" len="med"/>
+                      <a:tailEnd type="none" w="med" len="med"/>
+                    </a:lnL>
+                    <a:lnR w="12700" cap="flat" cmpd="sng" algn="ctr">
+                      <a:solidFill>
+                        <a:srgbClr val="E2E8F0"/>
+                      </a:solidFill>
+                      <a:prstDash val="solid"/>
+                      <a:round/>
+                      <a:headEnd type="none" w="med" len="med"/>
+                      <a:tailEnd type="none" w="med" len="med"/>
+                    </a:lnR>
+                    <a:lnT w="12700" cap="flat" cmpd="sng" algn="ctr">
+                      <a:solidFill>
+                        <a:srgbClr val="E2E8F0"/>
+                      </a:solidFill>
+                      <a:prstDash val="solid"/>
+                      <a:round/>
+                      <a:headEnd type="none" w="med" len="med"/>
+                      <a:tailEnd type="none" w="med" len="med"/>
+                    </a:lnT>
+                    <a:lnB w="12700" cap="flat" cmpd="sng" algn="ctr">
+                      <a:solidFill>
+                        <a:srgbClr val="E2E8F0"/>
+                      </a:solidFill>
+                      <a:prstDash val="solid"/>
+                      <a:round/>
+                      <a:headEnd type="none" w="med" len="med"/>
+                      <a:tailEnd type="none" w="med" len="med"/>
+                    </a:lnB>
+                  </a:tcPr>
+                </a:tc>
+                <a:tc>
+                  <a:txBody>
+                    <a:bodyPr/>
+                    <a:lstStyle/>
+                    <a:p>
+                      <a:pPr algn="ctr" indent="0" marL="0">
+                        <a:buNone/>
+                      </a:pPr>
+                      <a:r>
+                        <a:rPr lang="en-US" sz="850" b="1" dirty="0">
+                          <a:solidFill>
+                            <a:srgbClr val="1B365D"/>
+                          </a:solidFill>
+                        </a:rPr>
+                        <a:t>+39.3%</a:t>
                       </a:r>
                       <a:endParaRPr lang="en-US" sz="850" dirty="0"/>
                     </a:p>
@@ -14758,6 +15229,64 @@
                             <a:srgbClr val="000000"/>
                           </a:solidFill>
                         </a:rPr>
+                        <a:t>7,309</a:t>
+                      </a:r>
+                      <a:endParaRPr lang="en-US" sz="800" dirty="0"/>
+                    </a:p>
+                  </a:txBody>
+                  <a:tcPr marL="91440" marR="91440" marT="45720" marB="45720" anchor="ctr">
+                    <a:lnL w="12700" cap="flat" cmpd="sng" algn="ctr">
+                      <a:solidFill>
+                        <a:srgbClr val="E2E8F0"/>
+                      </a:solidFill>
+                      <a:prstDash val="solid"/>
+                      <a:round/>
+                      <a:headEnd type="none" w="med" len="med"/>
+                      <a:tailEnd type="none" w="med" len="med"/>
+                    </a:lnL>
+                    <a:lnR w="12700" cap="flat" cmpd="sng" algn="ctr">
+                      <a:solidFill>
+                        <a:srgbClr val="E2E8F0"/>
+                      </a:solidFill>
+                      <a:prstDash val="solid"/>
+                      <a:round/>
+                      <a:headEnd type="none" w="med" len="med"/>
+                      <a:tailEnd type="none" w="med" len="med"/>
+                    </a:lnR>
+                    <a:lnT w="12700" cap="flat" cmpd="sng" algn="ctr">
+                      <a:solidFill>
+                        <a:srgbClr val="E2E8F0"/>
+                      </a:solidFill>
+                      <a:prstDash val="solid"/>
+                      <a:round/>
+                      <a:headEnd type="none" w="med" len="med"/>
+                      <a:tailEnd type="none" w="med" len="med"/>
+                    </a:lnT>
+                    <a:lnB w="12700" cap="flat" cmpd="sng" algn="ctr">
+                      <a:solidFill>
+                        <a:srgbClr val="E2E8F0"/>
+                      </a:solidFill>
+                      <a:prstDash val="solid"/>
+                      <a:round/>
+                      <a:headEnd type="none" w="med" len="med"/>
+                      <a:tailEnd type="none" w="med" len="med"/>
+                    </a:lnB>
+                  </a:tcPr>
+                </a:tc>
+                <a:tc>
+                  <a:txBody>
+                    <a:bodyPr/>
+                    <a:lstStyle/>
+                    <a:p>
+                      <a:pPr algn="ctr" indent="0" marL="0">
+                        <a:buNone/>
+                      </a:pPr>
+                      <a:r>
+                        <a:rPr lang="en-US" sz="800" dirty="0">
+                          <a:solidFill>
+                            <a:srgbClr val="000000"/>
+                          </a:solidFill>
+                        </a:rPr>
                         <a:t>10,206</a:t>
                       </a:r>
                       <a:endParaRPr lang="en-US" sz="800" dirty="0"/>
@@ -14813,7 +15342,7 @@
                       <a:r>
                         <a:rPr lang="en-US" sz="800" b="1" dirty="0">
                           <a:solidFill>
-                            <a:srgbClr val="000000"/>
+                            <a:srgbClr val="8B5CF6"/>
                           </a:solidFill>
                         </a:rPr>
                         <a:t>10,314</a:t>
@@ -14869,70 +15398,70 @@
                         <a:buNone/>
                       </a:pPr>
                       <a:r>
-                        <a:rPr lang="en-US" sz="800" dirty="0">
-                          <a:solidFill>
-                            <a:srgbClr val="28A745"/>
-                          </a:solidFill>
-                        </a:rPr>
-                        <a:t>+108</a:t>
-                      </a:r>
-                      <a:endParaRPr lang="en-US" sz="800" dirty="0"/>
-                    </a:p>
-                  </a:txBody>
-                  <a:tcPr marL="91440" marR="91440" marT="45720" marB="45720" anchor="ctr">
-                    <a:lnL w="12700" cap="flat" cmpd="sng" algn="ctr">
-                      <a:solidFill>
-                        <a:srgbClr val="E2E8F0"/>
-                      </a:solidFill>
-                      <a:prstDash val="solid"/>
-                      <a:round/>
-                      <a:headEnd type="none" w="med" len="med"/>
-                      <a:tailEnd type="none" w="med" len="med"/>
-                    </a:lnL>
-                    <a:lnR w="12700" cap="flat" cmpd="sng" algn="ctr">
-                      <a:solidFill>
-                        <a:srgbClr val="E2E8F0"/>
-                      </a:solidFill>
-                      <a:prstDash val="solid"/>
-                      <a:round/>
-                      <a:headEnd type="none" w="med" len="med"/>
-                      <a:tailEnd type="none" w="med" len="med"/>
-                    </a:lnR>
-                    <a:lnT w="12700" cap="flat" cmpd="sng" algn="ctr">
-                      <a:solidFill>
-                        <a:srgbClr val="E2E8F0"/>
-                      </a:solidFill>
-                      <a:prstDash val="solid"/>
-                      <a:round/>
-                      <a:headEnd type="none" w="med" len="med"/>
-                      <a:tailEnd type="none" w="med" len="med"/>
-                    </a:lnT>
-                    <a:lnB w="12700" cap="flat" cmpd="sng" algn="ctr">
-                      <a:solidFill>
-                        <a:srgbClr val="E2E8F0"/>
-                      </a:solidFill>
-                      <a:prstDash val="solid"/>
-                      <a:round/>
-                      <a:headEnd type="none" w="med" len="med"/>
-                      <a:tailEnd type="none" w="med" len="med"/>
-                    </a:lnB>
-                  </a:tcPr>
-                </a:tc>
-                <a:tc>
-                  <a:txBody>
-                    <a:bodyPr/>
-                    <a:lstStyle/>
-                    <a:p>
-                      <a:pPr algn="ctr" indent="0" marL="0">
-                        <a:buNone/>
-                      </a:pPr>
-                      <a:r>
                         <a:rPr lang="en-US" sz="850" b="1" dirty="0">
                           <a:solidFill>
                             <a:srgbClr val="B45309"/>
                           </a:solidFill>
                         </a:rPr>
                         <a:t>+1.1%</a:t>
+                      </a:r>
+                      <a:endParaRPr lang="en-US" sz="850" dirty="0"/>
+                    </a:p>
+                  </a:txBody>
+                  <a:tcPr marL="91440" marR="91440" marT="45720" marB="45720" anchor="ctr">
+                    <a:lnL w="12700" cap="flat" cmpd="sng" algn="ctr">
+                      <a:solidFill>
+                        <a:srgbClr val="E2E8F0"/>
+                      </a:solidFill>
+                      <a:prstDash val="solid"/>
+                      <a:round/>
+                      <a:headEnd type="none" w="med" len="med"/>
+                      <a:tailEnd type="none" w="med" len="med"/>
+                    </a:lnL>
+                    <a:lnR w="12700" cap="flat" cmpd="sng" algn="ctr">
+                      <a:solidFill>
+                        <a:srgbClr val="E2E8F0"/>
+                      </a:solidFill>
+                      <a:prstDash val="solid"/>
+                      <a:round/>
+                      <a:headEnd type="none" w="med" len="med"/>
+                      <a:tailEnd type="none" w="med" len="med"/>
+                    </a:lnR>
+                    <a:lnT w="12700" cap="flat" cmpd="sng" algn="ctr">
+                      <a:solidFill>
+                        <a:srgbClr val="E2E8F0"/>
+                      </a:solidFill>
+                      <a:prstDash val="solid"/>
+                      <a:round/>
+                      <a:headEnd type="none" w="med" len="med"/>
+                      <a:tailEnd type="none" w="med" len="med"/>
+                    </a:lnT>
+                    <a:lnB w="12700" cap="flat" cmpd="sng" algn="ctr">
+                      <a:solidFill>
+                        <a:srgbClr val="E2E8F0"/>
+                      </a:solidFill>
+                      <a:prstDash val="solid"/>
+                      <a:round/>
+                      <a:headEnd type="none" w="med" len="med"/>
+                      <a:tailEnd type="none" w="med" len="med"/>
+                    </a:lnB>
+                  </a:tcPr>
+                </a:tc>
+                <a:tc>
+                  <a:txBody>
+                    <a:bodyPr/>
+                    <a:lstStyle/>
+                    <a:p>
+                      <a:pPr algn="ctr" indent="0" marL="0">
+                        <a:buNone/>
+                      </a:pPr>
+                      <a:r>
+                        <a:rPr lang="en-US" sz="850" b="1" dirty="0">
+                          <a:solidFill>
+                            <a:srgbClr val="1B365D"/>
+                          </a:solidFill>
+                        </a:rPr>
+                        <a:t>+41.1%</a:t>
                       </a:r>
                       <a:endParaRPr lang="en-US" sz="850" dirty="0"/>
                     </a:p>
@@ -15224,6 +15753,64 @@
                             <a:srgbClr val="000000"/>
                           </a:solidFill>
                         </a:rPr>
+                        <a:t>15,235</a:t>
+                      </a:r>
+                      <a:endParaRPr lang="en-US" sz="800" dirty="0"/>
+                    </a:p>
+                  </a:txBody>
+                  <a:tcPr marL="91440" marR="91440" marT="45720" marB="45720" anchor="ctr">
+                    <a:lnL w="12700" cap="flat" cmpd="sng" algn="ctr">
+                      <a:solidFill>
+                        <a:srgbClr val="E2E8F0"/>
+                      </a:solidFill>
+                      <a:prstDash val="solid"/>
+                      <a:round/>
+                      <a:headEnd type="none" w="med" len="med"/>
+                      <a:tailEnd type="none" w="med" len="med"/>
+                    </a:lnL>
+                    <a:lnR w="12700" cap="flat" cmpd="sng" algn="ctr">
+                      <a:solidFill>
+                        <a:srgbClr val="E2E8F0"/>
+                      </a:solidFill>
+                      <a:prstDash val="solid"/>
+                      <a:round/>
+                      <a:headEnd type="none" w="med" len="med"/>
+                      <a:tailEnd type="none" w="med" len="med"/>
+                    </a:lnR>
+                    <a:lnT w="12700" cap="flat" cmpd="sng" algn="ctr">
+                      <a:solidFill>
+                        <a:srgbClr val="E2E8F0"/>
+                      </a:solidFill>
+                      <a:prstDash val="solid"/>
+                      <a:round/>
+                      <a:headEnd type="none" w="med" len="med"/>
+                      <a:tailEnd type="none" w="med" len="med"/>
+                    </a:lnT>
+                    <a:lnB w="12700" cap="flat" cmpd="sng" algn="ctr">
+                      <a:solidFill>
+                        <a:srgbClr val="E2E8F0"/>
+                      </a:solidFill>
+                      <a:prstDash val="solid"/>
+                      <a:round/>
+                      <a:headEnd type="none" w="med" len="med"/>
+                      <a:tailEnd type="none" w="med" len="med"/>
+                    </a:lnB>
+                  </a:tcPr>
+                </a:tc>
+                <a:tc>
+                  <a:txBody>
+                    <a:bodyPr/>
+                    <a:lstStyle/>
+                    <a:p>
+                      <a:pPr algn="ctr" indent="0" marL="0">
+                        <a:buNone/>
+                      </a:pPr>
+                      <a:r>
+                        <a:rPr lang="en-US" sz="800" dirty="0">
+                          <a:solidFill>
+                            <a:srgbClr val="000000"/>
+                          </a:solidFill>
+                        </a:rPr>
                         <a:t>20,146</a:t>
                       </a:r>
                       <a:endParaRPr lang="en-US" sz="800" dirty="0"/>
@@ -15279,7 +15866,7 @@
                       <a:r>
                         <a:rPr lang="en-US" sz="800" b="1" dirty="0">
                           <a:solidFill>
-                            <a:srgbClr val="000000"/>
+                            <a:srgbClr val="8B5CF6"/>
                           </a:solidFill>
                         </a:rPr>
                         <a:t>18,614</a:t>
@@ -15335,14 +15922,14 @@
                         <a:buNone/>
                       </a:pPr>
                       <a:r>
-                        <a:rPr lang="en-US" sz="800" dirty="0">
+                        <a:rPr lang="en-US" sz="850" b="1" dirty="0">
                           <a:solidFill>
                             <a:srgbClr val="DC3545"/>
                           </a:solidFill>
                         </a:rPr>
-                        <a:t>-1,532</a:t>
-                      </a:r>
-                      <a:endParaRPr lang="en-US" sz="800" dirty="0"/>
+                        <a:t>-7.6%</a:t>
+                      </a:r>
+                      <a:endParaRPr lang="en-US" sz="850" dirty="0"/>
                     </a:p>
                   </a:txBody>
                   <a:tcPr marL="91440" marR="91440" marT="45720" marB="45720" anchor="ctr">
@@ -15395,10 +15982,10 @@
                       <a:r>
                         <a:rPr lang="en-US" sz="850" b="1" dirty="0">
                           <a:solidFill>
-                            <a:srgbClr val="DC3545"/>
-                          </a:solidFill>
-                        </a:rPr>
-                        <a:t>-7.6%</a:t>
+                            <a:srgbClr val="1B365D"/>
+                          </a:solidFill>
+                        </a:rPr>
+                        <a:t>+22.2%</a:t>
                       </a:r>
                       <a:endParaRPr lang="en-US" sz="850" dirty="0"/>
                     </a:p>
@@ -15690,6 +16277,64 @@
                             <a:srgbClr val="000000"/>
                           </a:solidFill>
                         </a:rPr>
+                        <a:t>14,224</a:t>
+                      </a:r>
+                      <a:endParaRPr lang="en-US" sz="800" dirty="0"/>
+                    </a:p>
+                  </a:txBody>
+                  <a:tcPr marL="91440" marR="91440" marT="45720" marB="45720" anchor="ctr">
+                    <a:lnL w="12700" cap="flat" cmpd="sng" algn="ctr">
+                      <a:solidFill>
+                        <a:srgbClr val="E2E8F0"/>
+                      </a:solidFill>
+                      <a:prstDash val="solid"/>
+                      <a:round/>
+                      <a:headEnd type="none" w="med" len="med"/>
+                      <a:tailEnd type="none" w="med" len="med"/>
+                    </a:lnL>
+                    <a:lnR w="12700" cap="flat" cmpd="sng" algn="ctr">
+                      <a:solidFill>
+                        <a:srgbClr val="E2E8F0"/>
+                      </a:solidFill>
+                      <a:prstDash val="solid"/>
+                      <a:round/>
+                      <a:headEnd type="none" w="med" len="med"/>
+                      <a:tailEnd type="none" w="med" len="med"/>
+                    </a:lnR>
+                    <a:lnT w="12700" cap="flat" cmpd="sng" algn="ctr">
+                      <a:solidFill>
+                        <a:srgbClr val="E2E8F0"/>
+                      </a:solidFill>
+                      <a:prstDash val="solid"/>
+                      <a:round/>
+                      <a:headEnd type="none" w="med" len="med"/>
+                      <a:tailEnd type="none" w="med" len="med"/>
+                    </a:lnT>
+                    <a:lnB w="12700" cap="flat" cmpd="sng" algn="ctr">
+                      <a:solidFill>
+                        <a:srgbClr val="E2E8F0"/>
+                      </a:solidFill>
+                      <a:prstDash val="solid"/>
+                      <a:round/>
+                      <a:headEnd type="none" w="med" len="med"/>
+                      <a:tailEnd type="none" w="med" len="med"/>
+                    </a:lnB>
+                  </a:tcPr>
+                </a:tc>
+                <a:tc>
+                  <a:txBody>
+                    <a:bodyPr/>
+                    <a:lstStyle/>
+                    <a:p>
+                      <a:pPr algn="ctr" indent="0" marL="0">
+                        <a:buNone/>
+                      </a:pPr>
+                      <a:r>
+                        <a:rPr lang="en-US" sz="800" dirty="0">
+                          <a:solidFill>
+                            <a:srgbClr val="000000"/>
+                          </a:solidFill>
+                        </a:rPr>
                         <a:t>22,783</a:t>
                       </a:r>
                       <a:endParaRPr lang="en-US" sz="800" dirty="0"/>
@@ -15745,7 +16390,7 @@
                       <a:r>
                         <a:rPr lang="en-US" sz="800" b="1" dirty="0">
                           <a:solidFill>
-                            <a:srgbClr val="000000"/>
+                            <a:srgbClr val="8B5CF6"/>
                           </a:solidFill>
                         </a:rPr>
                         <a:t>16,671</a:t>
@@ -15801,14 +16446,14 @@
                         <a:buNone/>
                       </a:pPr>
                       <a:r>
-                        <a:rPr lang="en-US" sz="800" dirty="0">
+                        <a:rPr lang="en-US" sz="850" b="1" dirty="0">
                           <a:solidFill>
                             <a:srgbClr val="DC3545"/>
                           </a:solidFill>
                         </a:rPr>
-                        <a:t>-6,112</a:t>
-                      </a:r>
-                      <a:endParaRPr lang="en-US" sz="800" dirty="0"/>
+                        <a:t>-26.8%</a:t>
+                      </a:r>
+                      <a:endParaRPr lang="en-US" sz="850" dirty="0"/>
                     </a:p>
                   </a:txBody>
                   <a:tcPr marL="91440" marR="91440" marT="45720" marB="45720" anchor="ctr">
@@ -15861,10 +16506,10 @@
                       <a:r>
                         <a:rPr lang="en-US" sz="850" b="1" dirty="0">
                           <a:solidFill>
-                            <a:srgbClr val="DC3545"/>
-                          </a:solidFill>
-                        </a:rPr>
-                        <a:t>-26.8%</a:t>
+                            <a:srgbClr val="1B365D"/>
+                          </a:solidFill>
+                        </a:rPr>
+                        <a:t>+17.2%</a:t>
                       </a:r>
                       <a:endParaRPr lang="en-US" sz="850" dirty="0"/>
                     </a:p>
@@ -15979,8 +16624,8 @@
         </p:nvSpPr>
         <p:spPr>
           <a:xfrm>
-            <a:off x="7315200" y="2103120"/>
-            <a:ext cx="4389120" cy="1024128"/>
+            <a:off x="7406640" y="2103120"/>
+            <a:ext cx="4297680" cy="1024128"/>
           </a:xfrm>
           <a:prstGeom prst="roundRect">
             <a:avLst/>
@@ -16004,8 +16649,8 @@
         </p:nvSpPr>
         <p:spPr>
           <a:xfrm>
-            <a:off x="7452360" y="2176272"/>
-            <a:ext cx="4114800" cy="228600"/>
+            <a:off x="7543800" y="2176272"/>
+            <a:ext cx="4023360" cy="228600"/>
           </a:xfrm>
           <a:prstGeom prst="rect">
             <a:avLst/>
@@ -16040,8 +16685,8 @@
         </p:nvSpPr>
         <p:spPr>
           <a:xfrm>
-            <a:off x="7452360" y="2423160"/>
-            <a:ext cx="4114800" cy="640080"/>
+            <a:off x="7543800" y="2423160"/>
+            <a:ext cx="4023360" cy="640080"/>
           </a:xfrm>
           <a:prstGeom prst="rect">
             <a:avLst/>
@@ -16062,7 +16707,7 @@
                   <a:srgbClr val="155724"/>
                 </a:solidFill>
               </a:rPr>
-              <a:t>• Cairo (Noher Adel): 8,758 → 13,898 (+58.7%) | Pediamil AC (+225%)</a:t>
+              <a:t>• Cairo (Noher Adel): 7.2k ('25) → 8.8k (H1) → 13.9k/mo (Q3) (+58.7% vs H1 | +94.3% vs '25!)</a:t>
             </a:r>
             <a:endParaRPr lang="en-US" sz="800" dirty="0"/>
           </a:p>
@@ -16076,7 +16721,7 @@
                   <a:srgbClr val="155724"/>
                 </a:solidFill>
               </a:rPr>
-              <a:t>• KFR EL.SHK (Karim Shehab): 10,461 → 15,472 (+47.9%)</a:t>
+              <a:t>• KFR EL.SHK (Karim Shehab): 9.3k → 10.5k → 15.5k/mo (+47.9% vs H1 | +65.7% vs '25)</a:t>
             </a:r>
             <a:endParaRPr lang="en-US" sz="800" dirty="0"/>
           </a:p>
@@ -16090,7 +16735,7 @@
                   <a:srgbClr val="155724"/>
                 </a:solidFill>
               </a:rPr>
-              <a:t>• Upper Egypt I (UE North): 16,459 → 23,564 (+43.2%)</a:t>
+              <a:t>• Upper Egypt I (UE North): 12.9k → 16.5k → 23.6k/mo (+43.2% vs H1 | +83.0% vs '25)</a:t>
             </a:r>
             <a:endParaRPr lang="en-US" sz="800" dirty="0"/>
           </a:p>
@@ -16104,7 +16749,7 @@
                   <a:srgbClr val="155724"/>
                 </a:solidFill>
               </a:rPr>
-              <a:t>Strategic Action: Capitalize on doctor adoption; expand clinic quotas.</a:t>
+              <a:t>Strategic Action: Capitalize on breakout doctor adoption; expand NICU &amp; clinic quotas.</a:t>
             </a:r>
             <a:endParaRPr lang="en-US" sz="800" dirty="0"/>
           </a:p>
@@ -16118,8 +16763,8 @@
         </p:nvSpPr>
         <p:spPr>
           <a:xfrm>
-            <a:off x="7315200" y="3200400"/>
-            <a:ext cx="4389120" cy="1024128"/>
+            <a:off x="7406640" y="3200400"/>
+            <a:ext cx="4297680" cy="1024128"/>
           </a:xfrm>
           <a:prstGeom prst="roundRect">
             <a:avLst/>
@@ -16143,8 +16788,8 @@
         </p:nvSpPr>
         <p:spPr>
           <a:xfrm>
-            <a:off x="7452360" y="3273552"/>
-            <a:ext cx="4114800" cy="228600"/>
+            <a:off x="7543800" y="3273552"/>
+            <a:ext cx="4023360" cy="228600"/>
           </a:xfrm>
           <a:prstGeom prst="rect">
             <a:avLst/>
@@ -16179,8 +16824,8 @@
         </p:nvSpPr>
         <p:spPr>
           <a:xfrm>
-            <a:off x="7452360" y="3520440"/>
-            <a:ext cx="4114800" cy="640080"/>
+            <a:off x="7543800" y="3520440"/>
+            <a:ext cx="4023360" cy="640080"/>
           </a:xfrm>
           <a:prstGeom prst="rect">
             <a:avLst/>
@@ -16201,7 +16846,7 @@
                   <a:srgbClr val="0C5460"/>
                 </a:solidFill>
               </a:rPr>
-              <a:t>• Behera &amp; Dakahlia (Ahmed Sakr): 14,302 → 18,041 (+26.1%)</a:t>
+              <a:t>• Upper Egypt II (Beshoy Youhanna): 14.9k → 22.3k → 25.7k/mo (+15.2% vs H1 | +72.9% vs '25!)</a:t>
             </a:r>
             <a:endParaRPr lang="en-US" sz="800" dirty="0"/>
           </a:p>
@@ -16215,7 +16860,7 @@
                   <a:srgbClr val="0C5460"/>
                 </a:solidFill>
               </a:rPr>
-              <a:t>• Upper Egypt II (Beshoy Youhanna): 22,305 → 25,694 (+15.2%)</a:t>
+              <a:t>• Behera &amp; Dakahlia (Ahmed Sakr): 12.4k → 14.3k → 18.0k/mo (+26.1% vs H1 | +45.0% vs '25)</a:t>
             </a:r>
             <a:endParaRPr lang="en-US" sz="800" dirty="0"/>
           </a:p>
@@ -16229,7 +16874,7 @@
                   <a:srgbClr val="0C5460"/>
                 </a:solidFill>
               </a:rPr>
-              <a:t>Strategic Action: Maintain mega-volume leadership, defend hospital listings.</a:t>
+              <a:t>Strategic Action: Maintain national volume engine, defend hospital contracts.</a:t>
             </a:r>
             <a:endParaRPr lang="en-US" sz="800" dirty="0"/>
           </a:p>
@@ -16243,8 +16888,8 @@
         </p:nvSpPr>
         <p:spPr>
           <a:xfrm>
-            <a:off x="7315200" y="4297680"/>
-            <a:ext cx="4389120" cy="1024128"/>
+            <a:off x="7406640" y="4297680"/>
+            <a:ext cx="4297680" cy="1024128"/>
           </a:xfrm>
           <a:prstGeom prst="roundRect">
             <a:avLst/>
@@ -16268,8 +16913,8 @@
         </p:nvSpPr>
         <p:spPr>
           <a:xfrm>
-            <a:off x="7452360" y="4370832"/>
-            <a:ext cx="4114800" cy="228600"/>
+            <a:off x="7543800" y="4370832"/>
+            <a:ext cx="4023360" cy="228600"/>
           </a:xfrm>
           <a:prstGeom prst="rect">
             <a:avLst/>
@@ -16304,8 +16949,8 @@
         </p:nvSpPr>
         <p:spPr>
           <a:xfrm>
-            <a:off x="7452360" y="4617720"/>
-            <a:ext cx="4114800" cy="640080"/>
+            <a:off x="7543800" y="4617720"/>
+            <a:ext cx="4023360" cy="640080"/>
           </a:xfrm>
           <a:prstGeom prst="rect">
             <a:avLst/>
@@ -16326,7 +16971,7 @@
                   <a:srgbClr val="856404"/>
                 </a:solidFill>
               </a:rPr>
-              <a:t>• Guiza (Youstina Farag): 12,895 → 13,858 (+7.5%)</a:t>
+              <a:t>• Guiza (Youstina Farag): 10.0k → 12.9k → 13.9k/mo (+7.5% vs H1 | +39.3% vs '25)</a:t>
             </a:r>
             <a:endParaRPr lang="en-US" sz="800" dirty="0"/>
           </a:p>
@@ -16340,7 +16985,7 @@
                   <a:srgbClr val="856404"/>
                 </a:solidFill>
               </a:rPr>
-              <a:t>• Alexandria (Ahmed Hassan): 10,206 → 10,314 (+1.1%)</a:t>
+              <a:t>• Alexandria (Ahmed Hassan): 7.3k → 10.2k → 10.3k/mo (+1.1% vs H1 | +41.1% vs '25)</a:t>
             </a:r>
             <a:endParaRPr lang="en-US" sz="800" dirty="0"/>
           </a:p>
@@ -16368,8 +17013,8 @@
         </p:nvSpPr>
         <p:spPr>
           <a:xfrm>
-            <a:off x="7315200" y="5394960"/>
-            <a:ext cx="4389120" cy="1024128"/>
+            <a:off x="7406640" y="5394960"/>
+            <a:ext cx="4297680" cy="1024128"/>
           </a:xfrm>
           <a:prstGeom prst="roundRect">
             <a:avLst/>
@@ -16393,8 +17038,8 @@
         </p:nvSpPr>
         <p:spPr>
           <a:xfrm>
-            <a:off x="7452360" y="5468112"/>
-            <a:ext cx="4114800" cy="228600"/>
+            <a:off x="7543800" y="5468112"/>
+            <a:ext cx="4023360" cy="228600"/>
           </a:xfrm>
           <a:prstGeom prst="rect">
             <a:avLst/>
@@ -16429,8 +17074,8 @@
         </p:nvSpPr>
         <p:spPr>
           <a:xfrm>
-            <a:off x="7452360" y="5715000"/>
-            <a:ext cx="4114800" cy="640080"/>
+            <a:off x="7543800" y="5715000"/>
+            <a:ext cx="4023360" cy="640080"/>
           </a:xfrm>
           <a:prstGeom prst="rect">
             <a:avLst/>
@@ -16451,7 +17096,7 @@
                   <a:srgbClr val="721C24"/>
                 </a:solidFill>
               </a:rPr>
-              <a:t>• DELTA I (Shimaa Tarek): 20,146 → 18,614 (-7.6%)</a:t>
+              <a:t>• DELTA I (Shimaa Tarek): 15.2k → 20.1k → 18.6k/mo (-7.6% vs H1, but +22.2% vs '25)</a:t>
             </a:r>
             <a:endParaRPr lang="en-US" sz="800" dirty="0"/>
           </a:p>
@@ -16465,7 +17110,7 @@
                   <a:srgbClr val="721C24"/>
                 </a:solidFill>
               </a:rPr>
-              <a:t>• Delta II (Mohamed Yousef): 22,783 → 16,671 (-26.8%)</a:t>
+              <a:t>• Delta II (Mohamed Yousef): 14.2k → 22.8k → 16.7k/mo (-26.8% vs H1, but +17.2% vs '25)</a:t>
             </a:r>
             <a:endParaRPr lang="en-US" sz="800" dirty="0"/>
           </a:p>

--- a/public/Egy_Nutri_Business_Review_Deck.pptx
+++ b/public/Egy_Nutri_Business_Review_Deck.pptx
@@ -1675,7 +1675,7 @@
             <c:size val="6"/>
             <c:spPr>
               <a:solidFill>
-                <a:srgbClr val="10B981"/>
+                <a:srgbClr val="F59E0B"/>
               </a:solidFill>
               <a:ln w="9525" cap="flat">
                 <a:solidFill>

--- a/public/Egy_Nutri_Business_Review_Deck.pptx
+++ b/public/Egy_Nutri_Business_Review_Deck.pptx
@@ -1555,7 +1555,7 @@
             <c:size val="6"/>
             <c:spPr>
               <a:solidFill>
-                <a:srgbClr val="F59E0B"/>
+                <a:srgbClr val="10B981"/>
               </a:solidFill>
               <a:ln w="9525" cap="flat">
                 <a:solidFill>

--- a/public/Egy_Nutri_Business_Review_Deck.pptx
+++ b/public/Egy_Nutri_Business_Review_Deck.pptx
@@ -1555,7 +1555,7 @@
             <c:size val="6"/>
             <c:spPr>
               <a:solidFill>
-                <a:srgbClr val="10B981"/>
+                <a:srgbClr val="F59E0B"/>
               </a:solidFill>
               <a:ln w="9525" cap="flat">
                 <a:solidFill>
@@ -1675,7 +1675,7 @@
             <c:size val="6"/>
             <c:spPr>
               <a:solidFill>
-                <a:srgbClr val="F59E0B"/>
+                <a:srgbClr val="10B981"/>
               </a:solidFill>
               <a:ln w="9525" cap="flat">
                 <a:solidFill>

--- a/public/Egy_Nutri_Business_Review_Deck.pptx
+++ b/public/Egy_Nutri_Business_Review_Deck.pptx
@@ -1555,7 +1555,7 @@
             <c:size val="6"/>
             <c:spPr>
               <a:solidFill>
-                <a:srgbClr val="F59E0B"/>
+                <a:srgbClr val="10B981"/>
               </a:solidFill>
               <a:ln w="9525" cap="flat">
                 <a:solidFill>
@@ -1675,7 +1675,7 @@
             <c:size val="6"/>
             <c:spPr>
               <a:solidFill>
-                <a:srgbClr val="10B981"/>
+                <a:srgbClr val="F59E0B"/>
               </a:solidFill>
               <a:ln w="9525" cap="flat">
                 <a:solidFill>
